--- a/docs/project-log/RIoTPresentation.pptx
+++ b/docs/project-log/RIoTPresentation.pptx
@@ -6,10 +6,10 @@
     <p:sldMasterId id="2147483741" r:id="rId2"/>
   </p:sldMasterIdLst>
   <p:notesMasterIdLst>
-    <p:notesMasterId r:id="rId31"/>
+    <p:notesMasterId r:id="rId30"/>
   </p:notesMasterIdLst>
   <p:handoutMasterIdLst>
-    <p:handoutMasterId r:id="rId32"/>
+    <p:handoutMasterId r:id="rId31"/>
   </p:handoutMasterIdLst>
   <p:sldIdLst>
     <p:sldId id="288" r:id="rId3"/>
@@ -26,20 +26,19 @@
     <p:sldId id="308" r:id="rId14"/>
     <p:sldId id="302" r:id="rId15"/>
     <p:sldId id="295" r:id="rId16"/>
-    <p:sldId id="297" r:id="rId17"/>
-    <p:sldId id="296" r:id="rId18"/>
-    <p:sldId id="258" r:id="rId19"/>
-    <p:sldId id="294" r:id="rId20"/>
-    <p:sldId id="283" r:id="rId21"/>
-    <p:sldId id="256" r:id="rId22"/>
-    <p:sldId id="284" r:id="rId23"/>
-    <p:sldId id="285" r:id="rId24"/>
-    <p:sldId id="286" r:id="rId25"/>
-    <p:sldId id="289" r:id="rId26"/>
-    <p:sldId id="290" r:id="rId27"/>
-    <p:sldId id="291" r:id="rId28"/>
-    <p:sldId id="292" r:id="rId29"/>
-    <p:sldId id="293" r:id="rId30"/>
+    <p:sldId id="296" r:id="rId17"/>
+    <p:sldId id="309" r:id="rId18"/>
+    <p:sldId id="315" r:id="rId19"/>
+    <p:sldId id="314" r:id="rId20"/>
+    <p:sldId id="316" r:id="rId21"/>
+    <p:sldId id="313" r:id="rId22"/>
+    <p:sldId id="312" r:id="rId23"/>
+    <p:sldId id="317" r:id="rId24"/>
+    <p:sldId id="318" r:id="rId25"/>
+    <p:sldId id="319" r:id="rId26"/>
+    <p:sldId id="320" r:id="rId27"/>
+    <p:sldId id="310" r:id="rId28"/>
+    <p:sldId id="311" r:id="rId29"/>
   </p:sldIdLst>
   <p:sldSz cx="12192000" cy="6858000"/>
   <p:notesSz cx="6858000" cy="9144000"/>
@@ -251,7 +250,7 @@
           <a:p>
             <a:fld id="{65B67984-F0B9-4D31-A8F6-8AF021B9C2EF}" type="datetimeFigureOut">
               <a:rPr lang="en-US" smtClean="0"/>
-              <a:t>3/23/2026</a:t>
+              <a:t>3/24/2026</a:t>
             </a:fld>
             <a:endParaRPr lang="en-US"/>
           </a:p>
@@ -429,7 +428,7 @@
           <a:p>
             <a:fld id="{885960CC-0992-4111-87D3-C02B03B2EA6C}" type="datetimeFigureOut">
               <a:rPr lang="en-US" smtClean="0"/>
-              <a:t>3/23/2026</a:t>
+              <a:t>3/24/2026</a:t>
             </a:fld>
             <a:endParaRPr lang="en-US"/>
           </a:p>
@@ -801,6 +800,1819 @@
 </p:notes>
 </file>
 
+<file path=ppt/notesSlides/notesSlide10.xml><?xml version="1.0" encoding="utf-8"?>
+<p:notes xmlns:a="http://schemas.openxmlformats.org/drawingml/2006/main" xmlns:r="http://schemas.openxmlformats.org/officeDocument/2006/relationships" xmlns:p="http://schemas.openxmlformats.org/presentationml/2006/main">
+  <p:cSld>
+    <p:spTree>
+      <p:nvGrpSpPr>
+        <p:cNvPr id="1" name=""/>
+        <p:cNvGrpSpPr/>
+        <p:nvPr/>
+      </p:nvGrpSpPr>
+      <p:grpSpPr>
+        <a:xfrm>
+          <a:off x="0" y="0"/>
+          <a:ext cx="0" cy="0"/>
+          <a:chOff x="0" y="0"/>
+          <a:chExt cx="0" cy="0"/>
+        </a:xfrm>
+      </p:grpSpPr>
+      <p:sp>
+        <p:nvSpPr>
+          <p:cNvPr id="2" name="Slide Image Placeholder 1"/>
+          <p:cNvSpPr>
+            <a:spLocks noGrp="1" noRot="1" noChangeAspect="1"/>
+          </p:cNvSpPr>
+          <p:nvPr>
+            <p:ph type="sldImg"/>
+          </p:nvPr>
+        </p:nvSpPr>
+        <p:spPr/>
+      </p:sp>
+      <p:sp>
+        <p:nvSpPr>
+          <p:cNvPr id="3" name="Notes Placeholder 2"/>
+          <p:cNvSpPr>
+            <a:spLocks noGrp="1"/>
+          </p:cNvSpPr>
+          <p:nvPr>
+            <p:ph type="body" idx="1"/>
+          </p:nvPr>
+        </p:nvSpPr>
+        <p:spPr/>
+        <p:txBody>
+          <a:bodyPr/>
+          <a:lstStyle/>
+          <a:p>
+            <a:pPr marL="171450" indent="-171450">
+              <a:buFontTx/>
+              <a:buChar char="-"/>
+            </a:pPr>
+            <a:r>
+              <a:rPr lang="de-DE" dirty="0"/>
+              <a:t>frontend:</a:t>
+            </a:r>
+          </a:p>
+          <a:p>
+            <a:pPr marL="628650" lvl="1" indent="-171450">
+              <a:buFontTx/>
+              <a:buChar char="-"/>
+            </a:pPr>
+            <a:r>
+              <a:rPr lang="de-DE" dirty="0" err="1"/>
+              <a:t>Vsccode</a:t>
+            </a:r>
+            <a:r>
+              <a:rPr lang="de-DE" dirty="0"/>
+              <a:t> ext</a:t>
+            </a:r>
+          </a:p>
+          <a:p>
+            <a:pPr marL="628650" lvl="1" indent="-171450">
+              <a:buFontTx/>
+              <a:buChar char="-"/>
+            </a:pPr>
+            <a:r>
+              <a:rPr lang="de-DE" dirty="0" err="1"/>
+              <a:t>Commadlines</a:t>
+            </a:r>
+            <a:endParaRPr lang="de-DE" dirty="0"/>
+          </a:p>
+          <a:p>
+            <a:pPr marL="171450" lvl="0" indent="-171450">
+              <a:buFontTx/>
+              <a:buChar char="-"/>
+            </a:pPr>
+            <a:endParaRPr lang="de-DE" dirty="0"/>
+          </a:p>
+          <a:p>
+            <a:pPr marL="171450" lvl="0" indent="-171450">
+              <a:buFontTx/>
+              <a:buChar char="-"/>
+            </a:pPr>
+            <a:r>
+              <a:rPr lang="de-DE" dirty="0"/>
+              <a:t>backend:</a:t>
+            </a:r>
+          </a:p>
+          <a:p>
+            <a:pPr marL="628650" lvl="1" indent="-171450">
+              <a:buFontTx/>
+              <a:buChar char="-"/>
+            </a:pPr>
+            <a:r>
+              <a:rPr lang="de-DE" dirty="0"/>
+              <a:t>code-server</a:t>
+            </a:r>
+          </a:p>
+          <a:p>
+            <a:pPr marL="628650" lvl="1" indent="-171450">
+              <a:buFontTx/>
+              <a:buChar char="-"/>
+            </a:pPr>
+            <a:r>
+              <a:rPr lang="de-DE" dirty="0" err="1"/>
+              <a:t>nutzer</a:t>
+            </a:r>
+            <a:r>
+              <a:rPr lang="de-DE" dirty="0"/>
+              <a:t> input in cli</a:t>
+            </a:r>
+          </a:p>
+          <a:p>
+            <a:pPr marL="628650" lvl="1" indent="-171450">
+              <a:buFontTx/>
+              <a:buChar char="-"/>
+            </a:pPr>
+            <a:r>
+              <a:rPr lang="de-DE" dirty="0"/>
+              <a:t>viele CLIs – eine </a:t>
+            </a:r>
+            <a:r>
+              <a:rPr lang="de-DE" dirty="0" err="1"/>
+              <a:t>extension</a:t>
+            </a:r>
+            <a:r>
+              <a:rPr lang="de-DE" dirty="0"/>
+              <a:t> -&gt; </a:t>
+            </a:r>
+            <a:r>
+              <a:rPr lang="de-DE" dirty="0" err="1"/>
+              <a:t>relay</a:t>
+            </a:r>
+            <a:r>
+              <a:rPr lang="de-DE" dirty="0"/>
+              <a:t> (EINE CONNECTION, zentraler host)</a:t>
+            </a:r>
+          </a:p>
+          <a:p>
+            <a:pPr marL="628650" lvl="1" indent="-171450">
+              <a:buFontTx/>
+              <a:buChar char="-"/>
+            </a:pPr>
+            <a:r>
+              <a:rPr lang="de-DE" dirty="0"/>
+              <a:t>erlaubt </a:t>
+            </a:r>
+            <a:r>
+              <a:rPr lang="de-DE" dirty="0" err="1"/>
+              <a:t>buttons</a:t>
+            </a:r>
+            <a:r>
+              <a:rPr lang="de-DE" dirty="0"/>
+              <a:t> -&gt; </a:t>
+            </a:r>
+            <a:r>
+              <a:rPr lang="de-DE" dirty="0" err="1"/>
+              <a:t>command</a:t>
+            </a:r>
+            <a:r>
+              <a:rPr lang="de-DE" dirty="0"/>
+              <a:t> </a:t>
+            </a:r>
+            <a:r>
+              <a:rPr lang="de-DE" dirty="0" err="1"/>
+              <a:t>shortcut</a:t>
+            </a:r>
+            <a:r>
+              <a:rPr lang="de-DE" dirty="0"/>
+              <a:t> -&gt; </a:t>
+            </a:r>
+            <a:r>
+              <a:rPr lang="de-DE" dirty="0" err="1"/>
+              <a:t>command</a:t>
+            </a:r>
+            <a:r>
+              <a:rPr lang="de-DE" dirty="0"/>
+              <a:t> sichtbar</a:t>
+            </a:r>
+          </a:p>
+          <a:p>
+            <a:pPr marL="628650" lvl="1" indent="-171450">
+              <a:buFontTx/>
+              <a:buChar char="-"/>
+            </a:pPr>
+            <a:endParaRPr lang="de-DE" dirty="0"/>
+          </a:p>
+          <a:p>
+            <a:pPr marL="628650" lvl="1" indent="-171450">
+              <a:buFontTx/>
+              <a:buChar char="-"/>
+            </a:pPr>
+            <a:r>
+              <a:rPr lang="de-DE" dirty="0"/>
+              <a:t>2 fragen offen:</a:t>
+            </a:r>
+          </a:p>
+          <a:p>
+            <a:pPr marL="1085850" lvl="2" indent="-171450">
+              <a:buFontTx/>
+              <a:buChar char="-"/>
+            </a:pPr>
+            <a:r>
+              <a:rPr lang="de-DE" dirty="0"/>
+              <a:t>Kommunikation Shell – </a:t>
+            </a:r>
+            <a:r>
+              <a:rPr lang="de-DE" dirty="0" err="1"/>
+              <a:t>WebExtension</a:t>
+            </a:r>
+            <a:endParaRPr lang="de-DE" dirty="0"/>
+          </a:p>
+          <a:p>
+            <a:pPr marL="1085850" lvl="2" indent="-171450">
+              <a:buFontTx/>
+              <a:buChar char="-"/>
+            </a:pPr>
+            <a:r>
+              <a:rPr lang="de-DE" dirty="0"/>
+              <a:t>Stub</a:t>
+            </a:r>
+          </a:p>
+          <a:p>
+            <a:pPr marL="628650" lvl="1" indent="-171450">
+              <a:buFontTx/>
+              <a:buChar char="-"/>
+            </a:pPr>
+            <a:endParaRPr lang="de-DE" dirty="0"/>
+          </a:p>
+          <a:p>
+            <a:pPr marL="628650" lvl="1" indent="-171450">
+              <a:buFontTx/>
+              <a:buChar char="-"/>
+            </a:pPr>
+            <a:endParaRPr lang="de-DE" dirty="0"/>
+          </a:p>
+          <a:p>
+            <a:pPr marL="628650" lvl="1" indent="-171450">
+              <a:buFontTx/>
+              <a:buChar char="-"/>
+            </a:pPr>
+            <a:endParaRPr lang="de-DE" dirty="0"/>
+          </a:p>
+        </p:txBody>
+      </p:sp>
+      <p:sp>
+        <p:nvSpPr>
+          <p:cNvPr id="4" name="Footer Placeholder 3"/>
+          <p:cNvSpPr>
+            <a:spLocks noGrp="1"/>
+          </p:cNvSpPr>
+          <p:nvPr>
+            <p:ph type="ftr" sz="quarter" idx="4"/>
+          </p:nvPr>
+        </p:nvSpPr>
+        <p:spPr/>
+        <p:txBody>
+          <a:bodyPr/>
+          <a:lstStyle/>
+          <a:p>
+            <a:endParaRPr lang="en-US"/>
+          </a:p>
+        </p:txBody>
+      </p:sp>
+      <p:sp>
+        <p:nvSpPr>
+          <p:cNvPr id="5" name="Slide Number Placeholder 4"/>
+          <p:cNvSpPr>
+            <a:spLocks noGrp="1"/>
+          </p:cNvSpPr>
+          <p:nvPr>
+            <p:ph type="sldNum" sz="quarter" idx="5"/>
+          </p:nvPr>
+        </p:nvSpPr>
+        <p:spPr/>
+        <p:txBody>
+          <a:bodyPr/>
+          <a:lstStyle/>
+          <a:p>
+            <a:fld id="{97EEB764-55E2-4077-8C7A-EB9EFE7145E2}" type="slidenum">
+              <a:rPr lang="en-US" smtClean="0"/>
+              <a:t>14</a:t>
+            </a:fld>
+            <a:endParaRPr lang="en-US"/>
+          </a:p>
+        </p:txBody>
+      </p:sp>
+    </p:spTree>
+    <p:extLst>
+      <p:ext uri="{BB962C8B-B14F-4D97-AF65-F5344CB8AC3E}">
+        <p14:creationId xmlns:p14="http://schemas.microsoft.com/office/powerpoint/2010/main" val="4034740071"/>
+      </p:ext>
+    </p:extLst>
+  </p:cSld>
+  <p:clrMapOvr>
+    <a:masterClrMapping/>
+  </p:clrMapOvr>
+</p:notes>
+</file>
+
+<file path=ppt/notesSlides/notesSlide11.xml><?xml version="1.0" encoding="utf-8"?>
+<p:notes xmlns:a="http://schemas.openxmlformats.org/drawingml/2006/main" xmlns:r="http://schemas.openxmlformats.org/officeDocument/2006/relationships" xmlns:p="http://schemas.openxmlformats.org/presentationml/2006/main">
+  <p:cSld>
+    <p:spTree>
+      <p:nvGrpSpPr>
+        <p:cNvPr id="1" name=""/>
+        <p:cNvGrpSpPr/>
+        <p:nvPr/>
+      </p:nvGrpSpPr>
+      <p:grpSpPr>
+        <a:xfrm>
+          <a:off x="0" y="0"/>
+          <a:ext cx="0" cy="0"/>
+          <a:chOff x="0" y="0"/>
+          <a:chExt cx="0" cy="0"/>
+        </a:xfrm>
+      </p:grpSpPr>
+      <p:sp>
+        <p:nvSpPr>
+          <p:cNvPr id="2" name="Slide Image Placeholder 1"/>
+          <p:cNvSpPr>
+            <a:spLocks noGrp="1" noRot="1" noChangeAspect="1"/>
+          </p:cNvSpPr>
+          <p:nvPr>
+            <p:ph type="sldImg"/>
+          </p:nvPr>
+        </p:nvSpPr>
+        <p:spPr/>
+      </p:sp>
+      <p:sp>
+        <p:nvSpPr>
+          <p:cNvPr id="3" name="Notes Placeholder 2"/>
+          <p:cNvSpPr>
+            <a:spLocks noGrp="1"/>
+          </p:cNvSpPr>
+          <p:nvPr>
+            <p:ph type="body" idx="1"/>
+          </p:nvPr>
+        </p:nvSpPr>
+        <p:spPr/>
+        <p:txBody>
+          <a:bodyPr/>
+          <a:lstStyle/>
+          <a:p>
+            <a:pPr marL="171450" indent="-171450">
+              <a:buFontTx/>
+              <a:buChar char="-"/>
+            </a:pPr>
+            <a:r>
+              <a:rPr lang="de-DE" dirty="0"/>
+              <a:t>Mischung: Human + </a:t>
+            </a:r>
+            <a:r>
+              <a:rPr lang="de-DE" dirty="0" err="1"/>
+              <a:t>compakt</a:t>
+            </a:r>
+            <a:endParaRPr lang="de-DE" dirty="0"/>
+          </a:p>
+          <a:p>
+            <a:pPr marL="171450" indent="-171450">
+              <a:buFontTx/>
+              <a:buChar char="-"/>
+            </a:pPr>
+            <a:r>
+              <a:rPr lang="de-DE" dirty="0"/>
+              <a:t>mehrere </a:t>
+            </a:r>
+            <a:r>
+              <a:rPr lang="de-DE" dirty="0" err="1"/>
+              <a:t>geräte</a:t>
+            </a:r>
+            <a:r>
+              <a:rPr lang="de-DE" dirty="0"/>
+              <a:t>, mehrere </a:t>
+            </a:r>
+            <a:r>
+              <a:rPr lang="de-DE" dirty="0" err="1"/>
+              <a:t>shells</a:t>
+            </a:r>
+            <a:r>
+              <a:rPr lang="de-DE" dirty="0"/>
+              <a:t> -&gt; parallel</a:t>
+            </a:r>
+          </a:p>
+          <a:p>
+            <a:pPr marL="171450" indent="-171450">
+              <a:buFontTx/>
+              <a:buChar char="-"/>
+            </a:pPr>
+            <a:endParaRPr lang="de-DE" dirty="0"/>
+          </a:p>
+          <a:p>
+            <a:pPr marL="171450" indent="-171450">
+              <a:buFontTx/>
+              <a:buChar char="-"/>
+            </a:pPr>
+            <a:r>
+              <a:rPr lang="de-DE" dirty="0" err="1"/>
+              <a:t>stateful</a:t>
+            </a:r>
+            <a:r>
+              <a:rPr lang="de-DE" dirty="0"/>
+              <a:t> -&gt; WS + registrieren </a:t>
+            </a:r>
+            <a:r>
+              <a:rPr lang="de-DE" dirty="0" err="1"/>
+              <a:t>Addressen</a:t>
+            </a:r>
+            <a:endParaRPr lang="de-DE" dirty="0"/>
+          </a:p>
+          <a:p>
+            <a:pPr marL="171450" indent="-171450">
+              <a:buFontTx/>
+              <a:buChar char="-"/>
+            </a:pPr>
+            <a:endParaRPr lang="de-DE" dirty="0"/>
+          </a:p>
+          <a:p>
+            <a:pPr marL="171450" indent="-171450">
+              <a:buFontTx/>
+              <a:buChar char="-"/>
+            </a:pPr>
+            <a:r>
+              <a:rPr lang="de-DE" dirty="0"/>
+              <a:t>Struktur:</a:t>
+            </a:r>
+          </a:p>
+          <a:p>
+            <a:pPr marL="628650" lvl="1" indent="-171450">
+              <a:buFontTx/>
+              <a:buChar char="-"/>
+            </a:pPr>
+            <a:r>
+              <a:rPr lang="de-DE" dirty="0"/>
+              <a:t>typ</a:t>
+            </a:r>
+          </a:p>
+          <a:p>
+            <a:pPr marL="628650" lvl="1" indent="-171450">
+              <a:buFontTx/>
+              <a:buChar char="-"/>
+            </a:pPr>
+            <a:r>
+              <a:rPr lang="de-DE" dirty="0" err="1"/>
+              <a:t>sender</a:t>
+            </a:r>
+            <a:endParaRPr lang="de-DE" dirty="0"/>
+          </a:p>
+          <a:p>
+            <a:pPr marL="628650" lvl="1" indent="-171450">
+              <a:buFontTx/>
+              <a:buChar char="-"/>
+            </a:pPr>
+            <a:r>
+              <a:rPr lang="de-DE" dirty="0" err="1"/>
+              <a:t>empfänger</a:t>
+            </a:r>
+            <a:endParaRPr lang="de-DE" dirty="0"/>
+          </a:p>
+          <a:p>
+            <a:pPr marL="628650" lvl="1" indent="-171450">
+              <a:buFontTx/>
+              <a:buChar char="-"/>
+            </a:pPr>
+            <a:r>
+              <a:rPr lang="de-DE" dirty="0" err="1"/>
+              <a:t>payload</a:t>
+            </a:r>
+            <a:r>
+              <a:rPr lang="de-DE" dirty="0"/>
+              <a:t> </a:t>
+            </a:r>
+            <a:r>
+              <a:rPr lang="de-DE" dirty="0" err="1"/>
+              <a:t>felder</a:t>
+            </a:r>
+            <a:endParaRPr lang="de-DE" dirty="0"/>
+          </a:p>
+          <a:p>
+            <a:pPr marL="1085850" lvl="2" indent="-171450">
+              <a:buFontTx/>
+              <a:buChar char="-"/>
+            </a:pPr>
+            <a:r>
+              <a:rPr lang="de-DE" dirty="0"/>
+              <a:t>hier </a:t>
+            </a:r>
+            <a:r>
+              <a:rPr lang="de-DE" dirty="0" err="1"/>
+              <a:t>Flashcommand</a:t>
+            </a:r>
+            <a:endParaRPr lang="de-DE" dirty="0"/>
+          </a:p>
+        </p:txBody>
+      </p:sp>
+      <p:sp>
+        <p:nvSpPr>
+          <p:cNvPr id="4" name="Footer Placeholder 3"/>
+          <p:cNvSpPr>
+            <a:spLocks noGrp="1"/>
+          </p:cNvSpPr>
+          <p:nvPr>
+            <p:ph type="ftr" sz="quarter" idx="4"/>
+          </p:nvPr>
+        </p:nvSpPr>
+        <p:spPr/>
+        <p:txBody>
+          <a:bodyPr/>
+          <a:lstStyle/>
+          <a:p>
+            <a:endParaRPr lang="en-US"/>
+          </a:p>
+        </p:txBody>
+      </p:sp>
+      <p:sp>
+        <p:nvSpPr>
+          <p:cNvPr id="5" name="Slide Number Placeholder 4"/>
+          <p:cNvSpPr>
+            <a:spLocks noGrp="1"/>
+          </p:cNvSpPr>
+          <p:nvPr>
+            <p:ph type="sldNum" sz="quarter" idx="5"/>
+          </p:nvPr>
+        </p:nvSpPr>
+        <p:spPr/>
+        <p:txBody>
+          <a:bodyPr/>
+          <a:lstStyle/>
+          <a:p>
+            <a:fld id="{97EEB764-55E2-4077-8C7A-EB9EFE7145E2}" type="slidenum">
+              <a:rPr lang="en-US" smtClean="0"/>
+              <a:t>15</a:t>
+            </a:fld>
+            <a:endParaRPr lang="en-US"/>
+          </a:p>
+        </p:txBody>
+      </p:sp>
+    </p:spTree>
+    <p:extLst>
+      <p:ext uri="{BB962C8B-B14F-4D97-AF65-F5344CB8AC3E}">
+        <p14:creationId xmlns:p14="http://schemas.microsoft.com/office/powerpoint/2010/main" val="4283148127"/>
+      </p:ext>
+    </p:extLst>
+  </p:cSld>
+  <p:clrMapOvr>
+    <a:masterClrMapping/>
+  </p:clrMapOvr>
+</p:notes>
+</file>
+
+<file path=ppt/notesSlides/notesSlide12.xml><?xml version="1.0" encoding="utf-8"?>
+<p:notes xmlns:a="http://schemas.openxmlformats.org/drawingml/2006/main" xmlns:r="http://schemas.openxmlformats.org/officeDocument/2006/relationships" xmlns:p="http://schemas.openxmlformats.org/presentationml/2006/main">
+  <p:cSld>
+    <p:spTree>
+      <p:nvGrpSpPr>
+        <p:cNvPr id="1" name=""/>
+        <p:cNvGrpSpPr/>
+        <p:nvPr/>
+      </p:nvGrpSpPr>
+      <p:grpSpPr>
+        <a:xfrm>
+          <a:off x="0" y="0"/>
+          <a:ext cx="0" cy="0"/>
+          <a:chOff x="0" y="0"/>
+          <a:chExt cx="0" cy="0"/>
+        </a:xfrm>
+      </p:grpSpPr>
+      <p:sp>
+        <p:nvSpPr>
+          <p:cNvPr id="2" name="Slide Image Placeholder 1"/>
+          <p:cNvSpPr>
+            <a:spLocks noGrp="1" noRot="1" noChangeAspect="1"/>
+          </p:cNvSpPr>
+          <p:nvPr>
+            <p:ph type="sldImg"/>
+          </p:nvPr>
+        </p:nvSpPr>
+        <p:spPr/>
+      </p:sp>
+      <p:sp>
+        <p:nvSpPr>
+          <p:cNvPr id="3" name="Notes Placeholder 2"/>
+          <p:cNvSpPr>
+            <a:spLocks noGrp="1"/>
+          </p:cNvSpPr>
+          <p:nvPr>
+            <p:ph type="body" idx="1"/>
+          </p:nvPr>
+        </p:nvSpPr>
+        <p:spPr/>
+        <p:txBody>
+          <a:bodyPr/>
+          <a:lstStyle/>
+          <a:p>
+            <a:pPr marL="171450" indent="-171450">
+              <a:buFontTx/>
+              <a:buChar char="-"/>
+            </a:pPr>
+            <a:r>
+              <a:rPr lang="de-DE" dirty="0" err="1"/>
+              <a:t>parsing</a:t>
+            </a:r>
+            <a:r>
+              <a:rPr lang="de-DE" dirty="0"/>
+              <a:t> </a:t>
+            </a:r>
+            <a:r>
+              <a:rPr lang="de-DE" dirty="0" err="1"/>
+              <a:t>problem</a:t>
+            </a:r>
+            <a:endParaRPr lang="de-DE" dirty="0"/>
+          </a:p>
+          <a:p>
+            <a:pPr marL="171450" indent="-171450">
+              <a:buFontTx/>
+              <a:buChar char="-"/>
+            </a:pPr>
+            <a:endParaRPr lang="de-DE" dirty="0"/>
+          </a:p>
+          <a:p>
+            <a:pPr marL="171450" indent="-171450">
+              <a:buFontTx/>
+              <a:buChar char="-"/>
+            </a:pPr>
+            <a:r>
+              <a:rPr lang="de-DE" dirty="0" err="1"/>
+              <a:t>patch</a:t>
+            </a:r>
+            <a:r>
+              <a:rPr lang="de-DE" dirty="0"/>
+              <a:t> </a:t>
+            </a:r>
+            <a:r>
+              <a:rPr lang="de-DE" dirty="0" err="1"/>
+              <a:t>riot</a:t>
+            </a:r>
+            <a:endParaRPr lang="de-DE" dirty="0"/>
+          </a:p>
+          <a:p>
+            <a:pPr marL="171450" indent="-171450">
+              <a:buFontTx/>
+              <a:buChar char="-"/>
+            </a:pPr>
+            <a:r>
+              <a:rPr lang="de-DE" dirty="0" err="1"/>
+              <a:t>call</a:t>
+            </a:r>
+            <a:r>
+              <a:rPr lang="de-DE" dirty="0"/>
+              <a:t> </a:t>
+            </a:r>
+            <a:r>
+              <a:rPr lang="de-DE" dirty="0" err="1"/>
+              <a:t>stub</a:t>
+            </a:r>
+            <a:endParaRPr lang="de-DE" dirty="0"/>
+          </a:p>
+          <a:p>
+            <a:pPr marL="171450" indent="-171450">
+              <a:buFontTx/>
+              <a:buChar char="-"/>
+            </a:pPr>
+            <a:endParaRPr lang="de-DE" dirty="0"/>
+          </a:p>
+          <a:p>
+            <a:pPr marL="171450" indent="-171450">
+              <a:buFontTx/>
+              <a:buChar char="-"/>
+            </a:pPr>
+            <a:r>
+              <a:rPr lang="de-DE" dirty="0" err="1"/>
+              <a:t>commands</a:t>
+            </a:r>
+            <a:r>
+              <a:rPr lang="de-DE" dirty="0"/>
+              <a:t> zum Client</a:t>
+            </a:r>
+          </a:p>
+          <a:p>
+            <a:pPr marL="171450" indent="-171450">
+              <a:buFontTx/>
+              <a:buChar char="-"/>
+            </a:pPr>
+            <a:r>
+              <a:rPr lang="de-DE" dirty="0" err="1"/>
+              <a:t>output</a:t>
+            </a:r>
+            <a:r>
+              <a:rPr lang="de-DE" dirty="0"/>
+              <a:t> anzeigen</a:t>
+            </a:r>
+          </a:p>
+          <a:p>
+            <a:pPr marL="171450" indent="-171450">
+              <a:buFontTx/>
+              <a:buChar char="-"/>
+            </a:pPr>
+            <a:r>
+              <a:rPr lang="de-DE" dirty="0"/>
+              <a:t>input an </a:t>
+            </a:r>
+            <a:r>
+              <a:rPr lang="de-DE" dirty="0" err="1"/>
+              <a:t>CLient</a:t>
+            </a:r>
+            <a:endParaRPr lang="de-DE" dirty="0"/>
+          </a:p>
+        </p:txBody>
+      </p:sp>
+      <p:sp>
+        <p:nvSpPr>
+          <p:cNvPr id="4" name="Footer Placeholder 3"/>
+          <p:cNvSpPr>
+            <a:spLocks noGrp="1"/>
+          </p:cNvSpPr>
+          <p:nvPr>
+            <p:ph type="ftr" sz="quarter" idx="4"/>
+          </p:nvPr>
+        </p:nvSpPr>
+        <p:spPr/>
+        <p:txBody>
+          <a:bodyPr/>
+          <a:lstStyle/>
+          <a:p>
+            <a:endParaRPr lang="en-US"/>
+          </a:p>
+        </p:txBody>
+      </p:sp>
+      <p:sp>
+        <p:nvSpPr>
+          <p:cNvPr id="5" name="Slide Number Placeholder 4"/>
+          <p:cNvSpPr>
+            <a:spLocks noGrp="1"/>
+          </p:cNvSpPr>
+          <p:nvPr>
+            <p:ph type="sldNum" sz="quarter" idx="5"/>
+          </p:nvPr>
+        </p:nvSpPr>
+        <p:spPr/>
+        <p:txBody>
+          <a:bodyPr/>
+          <a:lstStyle/>
+          <a:p>
+            <a:fld id="{97EEB764-55E2-4077-8C7A-EB9EFE7145E2}" type="slidenum">
+              <a:rPr lang="en-US" smtClean="0"/>
+              <a:t>16</a:t>
+            </a:fld>
+            <a:endParaRPr lang="en-US"/>
+          </a:p>
+        </p:txBody>
+      </p:sp>
+    </p:spTree>
+    <p:extLst>
+      <p:ext uri="{BB962C8B-B14F-4D97-AF65-F5344CB8AC3E}">
+        <p14:creationId xmlns:p14="http://schemas.microsoft.com/office/powerpoint/2010/main" val="293639556"/>
+      </p:ext>
+    </p:extLst>
+  </p:cSld>
+  <p:clrMapOvr>
+    <a:masterClrMapping/>
+  </p:clrMapOvr>
+</p:notes>
+</file>
+
+<file path=ppt/notesSlides/notesSlide13.xml><?xml version="1.0" encoding="utf-8"?>
+<p:notes xmlns:a="http://schemas.openxmlformats.org/drawingml/2006/main" xmlns:r="http://schemas.openxmlformats.org/officeDocument/2006/relationships" xmlns:p="http://schemas.openxmlformats.org/presentationml/2006/main">
+  <p:cSld>
+    <p:spTree>
+      <p:nvGrpSpPr>
+        <p:cNvPr id="1" name="">
+          <a:extLst>
+            <a:ext uri="{FF2B5EF4-FFF2-40B4-BE49-F238E27FC236}">
+              <a16:creationId xmlns:a16="http://schemas.microsoft.com/office/drawing/2014/main" id="{596C238F-824A-54DD-6279-D43B9BDA34BC}"/>
+            </a:ext>
+          </a:extLst>
+        </p:cNvPr>
+        <p:cNvGrpSpPr/>
+        <p:nvPr/>
+      </p:nvGrpSpPr>
+      <p:grpSpPr>
+        <a:xfrm>
+          <a:off x="0" y="0"/>
+          <a:ext cx="0" cy="0"/>
+          <a:chOff x="0" y="0"/>
+          <a:chExt cx="0" cy="0"/>
+        </a:xfrm>
+      </p:grpSpPr>
+      <p:sp>
+        <p:nvSpPr>
+          <p:cNvPr id="2" name="Slide Image Placeholder 1">
+            <a:extLst>
+              <a:ext uri="{FF2B5EF4-FFF2-40B4-BE49-F238E27FC236}">
+                <a16:creationId xmlns:a16="http://schemas.microsoft.com/office/drawing/2014/main" id="{33067954-3F76-1016-2376-9984ECE8A060}"/>
+              </a:ext>
+            </a:extLst>
+          </p:cNvPr>
+          <p:cNvSpPr>
+            <a:spLocks noGrp="1" noRot="1" noChangeAspect="1"/>
+          </p:cNvSpPr>
+          <p:nvPr>
+            <p:ph type="sldImg"/>
+          </p:nvPr>
+        </p:nvSpPr>
+        <p:spPr/>
+      </p:sp>
+      <p:sp>
+        <p:nvSpPr>
+          <p:cNvPr id="3" name="Notes Placeholder 2">
+            <a:extLst>
+              <a:ext uri="{FF2B5EF4-FFF2-40B4-BE49-F238E27FC236}">
+                <a16:creationId xmlns:a16="http://schemas.microsoft.com/office/drawing/2014/main" id="{8CC15027-6A11-6B07-C150-C632DFDF02B3}"/>
+              </a:ext>
+            </a:extLst>
+          </p:cNvPr>
+          <p:cNvSpPr>
+            <a:spLocks noGrp="1"/>
+          </p:cNvSpPr>
+          <p:nvPr>
+            <p:ph type="body" idx="1"/>
+          </p:nvPr>
+        </p:nvSpPr>
+        <p:spPr/>
+        <p:txBody>
+          <a:bodyPr/>
+          <a:lstStyle/>
+          <a:p>
+            <a:endParaRPr lang="de-DE" dirty="0"/>
+          </a:p>
+        </p:txBody>
+      </p:sp>
+      <p:sp>
+        <p:nvSpPr>
+          <p:cNvPr id="4" name="Footer Placeholder 3">
+            <a:extLst>
+              <a:ext uri="{FF2B5EF4-FFF2-40B4-BE49-F238E27FC236}">
+                <a16:creationId xmlns:a16="http://schemas.microsoft.com/office/drawing/2014/main" id="{A2CD8FF5-9B38-0883-D8F4-8F87F8CD7B39}"/>
+              </a:ext>
+            </a:extLst>
+          </p:cNvPr>
+          <p:cNvSpPr>
+            <a:spLocks noGrp="1"/>
+          </p:cNvSpPr>
+          <p:nvPr>
+            <p:ph type="ftr" sz="quarter" idx="4"/>
+          </p:nvPr>
+        </p:nvSpPr>
+        <p:spPr/>
+        <p:txBody>
+          <a:bodyPr/>
+          <a:lstStyle/>
+          <a:p>
+            <a:endParaRPr lang="en-US"/>
+          </a:p>
+        </p:txBody>
+      </p:sp>
+      <p:sp>
+        <p:nvSpPr>
+          <p:cNvPr id="5" name="Slide Number Placeholder 4">
+            <a:extLst>
+              <a:ext uri="{FF2B5EF4-FFF2-40B4-BE49-F238E27FC236}">
+                <a16:creationId xmlns:a16="http://schemas.microsoft.com/office/drawing/2014/main" id="{D774687B-6D75-FE70-75E5-117EB8C3C65A}"/>
+              </a:ext>
+            </a:extLst>
+          </p:cNvPr>
+          <p:cNvSpPr>
+            <a:spLocks noGrp="1"/>
+          </p:cNvSpPr>
+          <p:nvPr>
+            <p:ph type="sldNum" sz="quarter" idx="5"/>
+          </p:nvPr>
+        </p:nvSpPr>
+        <p:spPr/>
+        <p:txBody>
+          <a:bodyPr/>
+          <a:lstStyle/>
+          <a:p>
+            <a:fld id="{97EEB764-55E2-4077-8C7A-EB9EFE7145E2}" type="slidenum">
+              <a:rPr lang="en-US" smtClean="0"/>
+              <a:t>19</a:t>
+            </a:fld>
+            <a:endParaRPr lang="en-US"/>
+          </a:p>
+        </p:txBody>
+      </p:sp>
+    </p:spTree>
+    <p:extLst>
+      <p:ext uri="{BB962C8B-B14F-4D97-AF65-F5344CB8AC3E}">
+        <p14:creationId xmlns:p14="http://schemas.microsoft.com/office/powerpoint/2010/main" val="433357005"/>
+      </p:ext>
+    </p:extLst>
+  </p:cSld>
+  <p:clrMapOvr>
+    <a:masterClrMapping/>
+  </p:clrMapOvr>
+</p:notes>
+</file>
+
+<file path=ppt/notesSlides/notesSlide14.xml><?xml version="1.0" encoding="utf-8"?>
+<p:notes xmlns:a="http://schemas.openxmlformats.org/drawingml/2006/main" xmlns:r="http://schemas.openxmlformats.org/officeDocument/2006/relationships" xmlns:p="http://schemas.openxmlformats.org/presentationml/2006/main">
+  <p:cSld>
+    <p:spTree>
+      <p:nvGrpSpPr>
+        <p:cNvPr id="1" name=""/>
+        <p:cNvGrpSpPr/>
+        <p:nvPr/>
+      </p:nvGrpSpPr>
+      <p:grpSpPr>
+        <a:xfrm>
+          <a:off x="0" y="0"/>
+          <a:ext cx="0" cy="0"/>
+          <a:chOff x="0" y="0"/>
+          <a:chExt cx="0" cy="0"/>
+        </a:xfrm>
+      </p:grpSpPr>
+      <p:sp>
+        <p:nvSpPr>
+          <p:cNvPr id="2" name="Slide Image Placeholder 1"/>
+          <p:cNvSpPr>
+            <a:spLocks noGrp="1" noRot="1" noChangeAspect="1"/>
+          </p:cNvSpPr>
+          <p:nvPr>
+            <p:ph type="sldImg"/>
+          </p:nvPr>
+        </p:nvSpPr>
+        <p:spPr/>
+      </p:sp>
+      <p:sp>
+        <p:nvSpPr>
+          <p:cNvPr id="3" name="Notes Placeholder 2"/>
+          <p:cNvSpPr>
+            <a:spLocks noGrp="1"/>
+          </p:cNvSpPr>
+          <p:nvPr>
+            <p:ph type="body" idx="1"/>
+          </p:nvPr>
+        </p:nvSpPr>
+        <p:spPr/>
+        <p:txBody>
+          <a:bodyPr/>
+          <a:lstStyle/>
+          <a:p>
+            <a:endParaRPr lang="de-DE" dirty="0"/>
+          </a:p>
+          <a:p>
+            <a:pPr marL="171450" indent="-171450">
+              <a:buFontTx/>
+              <a:buChar char="-"/>
+            </a:pPr>
+            <a:r>
+              <a:rPr lang="de-DE" dirty="0"/>
+              <a:t>Gerätezugriff durch Web APIs ist erschwert</a:t>
+            </a:r>
+          </a:p>
+          <a:p>
+            <a:pPr marL="171450" indent="-171450">
+              <a:buFontTx/>
+              <a:buChar char="-"/>
+            </a:pPr>
+            <a:r>
+              <a:rPr lang="de-DE" dirty="0" err="1"/>
+              <a:t>VSCode</a:t>
+            </a:r>
+            <a:r>
+              <a:rPr lang="de-DE" dirty="0"/>
+              <a:t> Web </a:t>
+            </a:r>
+            <a:r>
+              <a:rPr lang="de-DE" dirty="0" err="1"/>
+              <a:t>Extensions</a:t>
+            </a:r>
+            <a:r>
+              <a:rPr lang="de-DE" dirty="0"/>
+              <a:t> an vielen Punkten (aus Sicherheitsgründen) beschränkt</a:t>
+            </a:r>
+          </a:p>
+          <a:p>
+            <a:pPr marL="171450" indent="-171450">
+              <a:buFontTx/>
+              <a:buChar char="-"/>
+            </a:pPr>
+            <a:r>
+              <a:rPr lang="de-DE" dirty="0"/>
+              <a:t>Neue Geräte müssen manuell eingebaut werden -&gt; </a:t>
+            </a:r>
+            <a:r>
+              <a:rPr lang="de-DE" dirty="0" err="1"/>
+              <a:t>flasher</a:t>
+            </a:r>
+            <a:r>
+              <a:rPr lang="de-DE" dirty="0"/>
+              <a:t> + </a:t>
+            </a:r>
+            <a:r>
+              <a:rPr lang="de-DE" dirty="0" err="1"/>
+              <a:t>make</a:t>
+            </a:r>
+            <a:endParaRPr lang="de-DE" dirty="0"/>
+          </a:p>
+          <a:p>
+            <a:pPr marL="171450" indent="-171450">
+              <a:buFontTx/>
+              <a:buChar char="-"/>
+            </a:pPr>
+            <a:r>
+              <a:rPr lang="de-DE" dirty="0"/>
+              <a:t>Treiber</a:t>
+            </a:r>
+          </a:p>
+          <a:p>
+            <a:pPr marL="171450" indent="-171450">
+              <a:buFontTx/>
+              <a:buChar char="-"/>
+            </a:pPr>
+            <a:endParaRPr lang="de-DE" dirty="0"/>
+          </a:p>
+        </p:txBody>
+      </p:sp>
+      <p:sp>
+        <p:nvSpPr>
+          <p:cNvPr id="4" name="Footer Placeholder 3"/>
+          <p:cNvSpPr>
+            <a:spLocks noGrp="1"/>
+          </p:cNvSpPr>
+          <p:nvPr>
+            <p:ph type="ftr" sz="quarter" idx="4"/>
+          </p:nvPr>
+        </p:nvSpPr>
+        <p:spPr/>
+        <p:txBody>
+          <a:bodyPr/>
+          <a:lstStyle/>
+          <a:p>
+            <a:endParaRPr lang="en-US"/>
+          </a:p>
+        </p:txBody>
+      </p:sp>
+      <p:sp>
+        <p:nvSpPr>
+          <p:cNvPr id="5" name="Slide Number Placeholder 4"/>
+          <p:cNvSpPr>
+            <a:spLocks noGrp="1"/>
+          </p:cNvSpPr>
+          <p:nvPr>
+            <p:ph type="sldNum" sz="quarter" idx="5"/>
+          </p:nvPr>
+        </p:nvSpPr>
+        <p:spPr/>
+        <p:txBody>
+          <a:bodyPr/>
+          <a:lstStyle/>
+          <a:p>
+            <a:fld id="{97EEB764-55E2-4077-8C7A-EB9EFE7145E2}" type="slidenum">
+              <a:rPr lang="en-US" smtClean="0"/>
+              <a:t>20</a:t>
+            </a:fld>
+            <a:endParaRPr lang="en-US"/>
+          </a:p>
+        </p:txBody>
+      </p:sp>
+    </p:spTree>
+    <p:extLst>
+      <p:ext uri="{BB962C8B-B14F-4D97-AF65-F5344CB8AC3E}">
+        <p14:creationId xmlns:p14="http://schemas.microsoft.com/office/powerpoint/2010/main" val="103726413"/>
+      </p:ext>
+    </p:extLst>
+  </p:cSld>
+  <p:clrMapOvr>
+    <a:masterClrMapping/>
+  </p:clrMapOvr>
+</p:notes>
+</file>
+
+<file path=ppt/notesSlides/notesSlide15.xml><?xml version="1.0" encoding="utf-8"?>
+<p:notes xmlns:a="http://schemas.openxmlformats.org/drawingml/2006/main" xmlns:r="http://schemas.openxmlformats.org/officeDocument/2006/relationships" xmlns:p="http://schemas.openxmlformats.org/presentationml/2006/main">
+  <p:cSld>
+    <p:spTree>
+      <p:nvGrpSpPr>
+        <p:cNvPr id="1" name=""/>
+        <p:cNvGrpSpPr/>
+        <p:nvPr/>
+      </p:nvGrpSpPr>
+      <p:grpSpPr>
+        <a:xfrm>
+          <a:off x="0" y="0"/>
+          <a:ext cx="0" cy="0"/>
+          <a:chOff x="0" y="0"/>
+          <a:chExt cx="0" cy="0"/>
+        </a:xfrm>
+      </p:grpSpPr>
+      <p:sp>
+        <p:nvSpPr>
+          <p:cNvPr id="2" name="Slide Image Placeholder 1"/>
+          <p:cNvSpPr>
+            <a:spLocks noGrp="1" noRot="1" noChangeAspect="1"/>
+          </p:cNvSpPr>
+          <p:nvPr>
+            <p:ph type="sldImg"/>
+          </p:nvPr>
+        </p:nvSpPr>
+        <p:spPr/>
+      </p:sp>
+      <p:sp>
+        <p:nvSpPr>
+          <p:cNvPr id="3" name="Notes Placeholder 2"/>
+          <p:cNvSpPr>
+            <a:spLocks noGrp="1"/>
+          </p:cNvSpPr>
+          <p:nvPr>
+            <p:ph type="body" idx="1"/>
+          </p:nvPr>
+        </p:nvSpPr>
+        <p:spPr/>
+        <p:txBody>
+          <a:bodyPr/>
+          <a:lstStyle/>
+          <a:p>
+            <a:endParaRPr lang="de-DE" dirty="0"/>
+          </a:p>
+        </p:txBody>
+      </p:sp>
+      <p:sp>
+        <p:nvSpPr>
+          <p:cNvPr id="4" name="Footer Placeholder 3"/>
+          <p:cNvSpPr>
+            <a:spLocks noGrp="1"/>
+          </p:cNvSpPr>
+          <p:nvPr>
+            <p:ph type="ftr" sz="quarter" idx="4"/>
+          </p:nvPr>
+        </p:nvSpPr>
+        <p:spPr/>
+        <p:txBody>
+          <a:bodyPr/>
+          <a:lstStyle/>
+          <a:p>
+            <a:endParaRPr lang="en-US"/>
+          </a:p>
+        </p:txBody>
+      </p:sp>
+      <p:sp>
+        <p:nvSpPr>
+          <p:cNvPr id="5" name="Slide Number Placeholder 4"/>
+          <p:cNvSpPr>
+            <a:spLocks noGrp="1"/>
+          </p:cNvSpPr>
+          <p:nvPr>
+            <p:ph type="sldNum" sz="quarter" idx="5"/>
+          </p:nvPr>
+        </p:nvSpPr>
+        <p:spPr/>
+        <p:txBody>
+          <a:bodyPr/>
+          <a:lstStyle/>
+          <a:p>
+            <a:fld id="{97EEB764-55E2-4077-8C7A-EB9EFE7145E2}" type="slidenum">
+              <a:rPr lang="en-US" smtClean="0"/>
+              <a:t>21</a:t>
+            </a:fld>
+            <a:endParaRPr lang="en-US"/>
+          </a:p>
+        </p:txBody>
+      </p:sp>
+    </p:spTree>
+    <p:extLst>
+      <p:ext uri="{BB962C8B-B14F-4D97-AF65-F5344CB8AC3E}">
+        <p14:creationId xmlns:p14="http://schemas.microsoft.com/office/powerpoint/2010/main" val="2201932495"/>
+      </p:ext>
+    </p:extLst>
+  </p:cSld>
+  <p:clrMapOvr>
+    <a:masterClrMapping/>
+  </p:clrMapOvr>
+</p:notes>
+</file>
+
+<file path=ppt/notesSlides/notesSlide16.xml><?xml version="1.0" encoding="utf-8"?>
+<p:notes xmlns:a="http://schemas.openxmlformats.org/drawingml/2006/main" xmlns:r="http://schemas.openxmlformats.org/officeDocument/2006/relationships" xmlns:p="http://schemas.openxmlformats.org/presentationml/2006/main">
+  <p:cSld>
+    <p:spTree>
+      <p:nvGrpSpPr>
+        <p:cNvPr id="1" name=""/>
+        <p:cNvGrpSpPr/>
+        <p:nvPr/>
+      </p:nvGrpSpPr>
+      <p:grpSpPr>
+        <a:xfrm>
+          <a:off x="0" y="0"/>
+          <a:ext cx="0" cy="0"/>
+          <a:chOff x="0" y="0"/>
+          <a:chExt cx="0" cy="0"/>
+        </a:xfrm>
+      </p:grpSpPr>
+      <p:sp>
+        <p:nvSpPr>
+          <p:cNvPr id="2" name="Slide Image Placeholder 1"/>
+          <p:cNvSpPr>
+            <a:spLocks noGrp="1" noRot="1" noChangeAspect="1"/>
+          </p:cNvSpPr>
+          <p:nvPr>
+            <p:ph type="sldImg"/>
+          </p:nvPr>
+        </p:nvSpPr>
+        <p:spPr/>
+      </p:sp>
+      <p:sp>
+        <p:nvSpPr>
+          <p:cNvPr id="3" name="Notes Placeholder 2"/>
+          <p:cNvSpPr>
+            <a:spLocks noGrp="1"/>
+          </p:cNvSpPr>
+          <p:nvPr>
+            <p:ph type="body" idx="1"/>
+          </p:nvPr>
+        </p:nvSpPr>
+        <p:spPr/>
+        <p:txBody>
+          <a:bodyPr/>
+          <a:lstStyle/>
+          <a:p>
+            <a:pPr marL="171450" indent="-171450">
+              <a:buFontTx/>
+              <a:buChar char="-"/>
+            </a:pPr>
+            <a:r>
+              <a:rPr lang="de-DE" dirty="0" err="1"/>
+              <a:t>default</a:t>
+            </a:r>
+            <a:r>
+              <a:rPr lang="de-DE" dirty="0"/>
+              <a:t> </a:t>
+            </a:r>
+            <a:r>
+              <a:rPr lang="de-DE" dirty="0" err="1"/>
+              <a:t>workspace</a:t>
+            </a:r>
+            <a:endParaRPr lang="de-DE" dirty="0"/>
+          </a:p>
+          <a:p>
+            <a:pPr marL="171450" indent="-171450">
+              <a:buFontTx/>
+              <a:buChar char="-"/>
+            </a:pPr>
+            <a:endParaRPr lang="de-DE" dirty="0"/>
+          </a:p>
+          <a:p>
+            <a:pPr marL="171450" indent="-171450">
+              <a:buFontTx/>
+              <a:buChar char="-"/>
+            </a:pPr>
+            <a:r>
+              <a:rPr lang="de-DE" dirty="0"/>
+              <a:t>open </a:t>
+            </a:r>
+            <a:r>
+              <a:rPr lang="de-DE" dirty="0" err="1"/>
+              <a:t>shell</a:t>
+            </a:r>
+            <a:r>
+              <a:rPr lang="de-DE" dirty="0"/>
+              <a:t> </a:t>
+            </a:r>
+            <a:r>
+              <a:rPr lang="de-DE" dirty="0" err="1"/>
+              <a:t>project</a:t>
+            </a:r>
+            <a:endParaRPr lang="de-DE" dirty="0"/>
+          </a:p>
+          <a:p>
+            <a:pPr marL="171450" indent="-171450">
+              <a:buFontTx/>
+              <a:buChar char="-"/>
+            </a:pPr>
+            <a:endParaRPr lang="de-DE" dirty="0"/>
+          </a:p>
+          <a:p>
+            <a:pPr marL="171450" indent="-171450">
+              <a:buFontTx/>
+              <a:buChar char="-"/>
+            </a:pPr>
+            <a:r>
+              <a:rPr lang="de-DE" dirty="0" err="1"/>
+              <a:t>add</a:t>
+            </a:r>
+            <a:r>
+              <a:rPr lang="de-DE" dirty="0"/>
+              <a:t> esp32 (</a:t>
+            </a:r>
+            <a:r>
+              <a:rPr lang="de-DE" dirty="0" err="1"/>
+              <a:t>hello</a:t>
+            </a:r>
+            <a:r>
+              <a:rPr lang="de-DE" dirty="0"/>
+              <a:t> </a:t>
+            </a:r>
+            <a:r>
+              <a:rPr lang="de-DE" dirty="0" err="1"/>
+              <a:t>world</a:t>
+            </a:r>
+            <a:r>
+              <a:rPr lang="de-DE" dirty="0"/>
+              <a:t>)</a:t>
+            </a:r>
+          </a:p>
+          <a:p>
+            <a:pPr marL="171450" indent="-171450">
+              <a:buFontTx/>
+              <a:buChar char="-"/>
+            </a:pPr>
+            <a:r>
+              <a:rPr lang="de-DE" dirty="0" err="1"/>
+              <a:t>flash</a:t>
+            </a:r>
+            <a:r>
+              <a:rPr lang="de-DE" dirty="0"/>
+              <a:t> esp32</a:t>
+            </a:r>
+          </a:p>
+          <a:p>
+            <a:pPr marL="171450" indent="-171450">
+              <a:buFontTx/>
+              <a:buChar char="-"/>
+            </a:pPr>
+            <a:r>
+              <a:rPr lang="de-DE" dirty="0" err="1"/>
+              <a:t>term</a:t>
+            </a:r>
+            <a:r>
+              <a:rPr lang="de-DE" dirty="0"/>
+              <a:t> (offen)</a:t>
+            </a:r>
+          </a:p>
+          <a:p>
+            <a:pPr marL="171450" indent="-171450">
+              <a:buFontTx/>
+              <a:buChar char="-"/>
+            </a:pPr>
+            <a:endParaRPr lang="de-DE" dirty="0"/>
+          </a:p>
+          <a:p>
+            <a:pPr marL="171450" indent="-171450">
+              <a:buFontTx/>
+              <a:buChar char="-"/>
+            </a:pPr>
+            <a:r>
+              <a:rPr lang="de-DE" dirty="0" err="1"/>
+              <a:t>add</a:t>
+            </a:r>
+            <a:r>
+              <a:rPr lang="de-DE" dirty="0"/>
+              <a:t> </a:t>
+            </a:r>
+            <a:r>
+              <a:rPr lang="de-DE" dirty="0" err="1"/>
+              <a:t>adafruit</a:t>
+            </a:r>
+            <a:r>
+              <a:rPr lang="de-DE" dirty="0"/>
+              <a:t> (</a:t>
+            </a:r>
+            <a:r>
+              <a:rPr lang="de-DE" dirty="0" err="1"/>
+              <a:t>shell</a:t>
+            </a:r>
+            <a:r>
+              <a:rPr lang="de-DE" dirty="0"/>
+              <a:t>)</a:t>
+            </a:r>
+          </a:p>
+          <a:p>
+            <a:pPr marL="171450" indent="-171450">
+              <a:buFontTx/>
+              <a:buChar char="-"/>
+            </a:pPr>
+            <a:r>
+              <a:rPr lang="de-DE" dirty="0" err="1"/>
+              <a:t>flash</a:t>
+            </a:r>
+            <a:endParaRPr lang="de-DE" dirty="0"/>
+          </a:p>
+          <a:p>
+            <a:pPr marL="171450" indent="-171450">
+              <a:buFontTx/>
+              <a:buChar char="-"/>
+            </a:pPr>
+            <a:r>
+              <a:rPr lang="de-DE" dirty="0" err="1"/>
+              <a:t>term</a:t>
+            </a:r>
+            <a:endParaRPr lang="de-DE" dirty="0"/>
+          </a:p>
+          <a:p>
+            <a:pPr marL="171450" indent="-171450">
+              <a:buFontTx/>
+              <a:buChar char="-"/>
+            </a:pPr>
+            <a:endParaRPr lang="de-DE" dirty="0"/>
+          </a:p>
+          <a:p>
+            <a:pPr marL="171450" indent="-171450">
+              <a:buFontTx/>
+              <a:buChar char="-"/>
+            </a:pPr>
+            <a:r>
+              <a:rPr lang="de-DE" dirty="0"/>
+              <a:t>cd </a:t>
+            </a:r>
+            <a:r>
+              <a:rPr lang="de-DE" dirty="0" err="1"/>
+              <a:t>timer</a:t>
+            </a:r>
+            <a:endParaRPr lang="de-DE" dirty="0"/>
+          </a:p>
+          <a:p>
+            <a:pPr marL="171450" indent="-171450">
+              <a:buFontTx/>
+              <a:buChar char="-"/>
+            </a:pPr>
+            <a:r>
+              <a:rPr lang="de-DE" dirty="0" err="1"/>
+              <a:t>make</a:t>
+            </a:r>
+            <a:r>
+              <a:rPr lang="de-DE" dirty="0"/>
+              <a:t> </a:t>
+            </a:r>
+            <a:r>
+              <a:rPr lang="de-DE" dirty="0" err="1"/>
+              <a:t>by</a:t>
+            </a:r>
+            <a:r>
+              <a:rPr lang="de-DE" dirty="0"/>
+              <a:t> </a:t>
+            </a:r>
+            <a:r>
+              <a:rPr lang="de-DE" dirty="0" err="1"/>
+              <a:t>keyup</a:t>
+            </a:r>
+            <a:endParaRPr lang="de-DE" dirty="0"/>
+          </a:p>
+        </p:txBody>
+      </p:sp>
+      <p:sp>
+        <p:nvSpPr>
+          <p:cNvPr id="4" name="Footer Placeholder 3"/>
+          <p:cNvSpPr>
+            <a:spLocks noGrp="1"/>
+          </p:cNvSpPr>
+          <p:nvPr>
+            <p:ph type="ftr" sz="quarter" idx="4"/>
+          </p:nvPr>
+        </p:nvSpPr>
+        <p:spPr/>
+        <p:txBody>
+          <a:bodyPr/>
+          <a:lstStyle/>
+          <a:p>
+            <a:endParaRPr lang="en-US"/>
+          </a:p>
+        </p:txBody>
+      </p:sp>
+      <p:sp>
+        <p:nvSpPr>
+          <p:cNvPr id="5" name="Slide Number Placeholder 4"/>
+          <p:cNvSpPr>
+            <a:spLocks noGrp="1"/>
+          </p:cNvSpPr>
+          <p:nvPr>
+            <p:ph type="sldNum" sz="quarter" idx="5"/>
+          </p:nvPr>
+        </p:nvSpPr>
+        <p:spPr/>
+        <p:txBody>
+          <a:bodyPr/>
+          <a:lstStyle/>
+          <a:p>
+            <a:fld id="{97EEB764-55E2-4077-8C7A-EB9EFE7145E2}" type="slidenum">
+              <a:rPr lang="en-US" smtClean="0"/>
+              <a:t>23</a:t>
+            </a:fld>
+            <a:endParaRPr lang="en-US"/>
+          </a:p>
+        </p:txBody>
+      </p:sp>
+    </p:spTree>
+    <p:extLst>
+      <p:ext uri="{BB962C8B-B14F-4D97-AF65-F5344CB8AC3E}">
+        <p14:creationId xmlns:p14="http://schemas.microsoft.com/office/powerpoint/2010/main" val="2010879930"/>
+      </p:ext>
+    </p:extLst>
+  </p:cSld>
+  <p:clrMapOvr>
+    <a:masterClrMapping/>
+  </p:clrMapOvr>
+</p:notes>
+</file>
+
+<file path=ppt/notesSlides/notesSlide17.xml><?xml version="1.0" encoding="utf-8"?>
+<p:notes xmlns:a="http://schemas.openxmlformats.org/drawingml/2006/main" xmlns:r="http://schemas.openxmlformats.org/officeDocument/2006/relationships" xmlns:p="http://schemas.openxmlformats.org/presentationml/2006/main">
+  <p:cSld>
+    <p:spTree>
+      <p:nvGrpSpPr>
+        <p:cNvPr id="1" name=""/>
+        <p:cNvGrpSpPr/>
+        <p:nvPr/>
+      </p:nvGrpSpPr>
+      <p:grpSpPr>
+        <a:xfrm>
+          <a:off x="0" y="0"/>
+          <a:ext cx="0" cy="0"/>
+          <a:chOff x="0" y="0"/>
+          <a:chExt cx="0" cy="0"/>
+        </a:xfrm>
+      </p:grpSpPr>
+      <p:sp>
+        <p:nvSpPr>
+          <p:cNvPr id="2" name="Slide Image Placeholder 1"/>
+          <p:cNvSpPr>
+            <a:spLocks noGrp="1" noRot="1" noChangeAspect="1"/>
+          </p:cNvSpPr>
+          <p:nvPr>
+            <p:ph type="sldImg"/>
+          </p:nvPr>
+        </p:nvSpPr>
+        <p:spPr/>
+      </p:sp>
+      <p:sp>
+        <p:nvSpPr>
+          <p:cNvPr id="3" name="Notes Placeholder 2"/>
+          <p:cNvSpPr>
+            <a:spLocks noGrp="1"/>
+          </p:cNvSpPr>
+          <p:nvPr>
+            <p:ph type="body" idx="1"/>
+          </p:nvPr>
+        </p:nvSpPr>
+        <p:spPr/>
+        <p:txBody>
+          <a:bodyPr/>
+          <a:lstStyle/>
+          <a:p>
+            <a:endParaRPr lang="de-DE" dirty="0"/>
+          </a:p>
+        </p:txBody>
+      </p:sp>
+      <p:sp>
+        <p:nvSpPr>
+          <p:cNvPr id="4" name="Footer Placeholder 3"/>
+          <p:cNvSpPr>
+            <a:spLocks noGrp="1"/>
+          </p:cNvSpPr>
+          <p:nvPr>
+            <p:ph type="ftr" sz="quarter" idx="4"/>
+          </p:nvPr>
+        </p:nvSpPr>
+        <p:spPr/>
+        <p:txBody>
+          <a:bodyPr/>
+          <a:lstStyle/>
+          <a:p>
+            <a:endParaRPr lang="en-US"/>
+          </a:p>
+        </p:txBody>
+      </p:sp>
+      <p:sp>
+        <p:nvSpPr>
+          <p:cNvPr id="5" name="Slide Number Placeholder 4"/>
+          <p:cNvSpPr>
+            <a:spLocks noGrp="1"/>
+          </p:cNvSpPr>
+          <p:nvPr>
+            <p:ph type="sldNum" sz="quarter" idx="5"/>
+          </p:nvPr>
+        </p:nvSpPr>
+        <p:spPr/>
+        <p:txBody>
+          <a:bodyPr/>
+          <a:lstStyle/>
+          <a:p>
+            <a:fld id="{97EEB764-55E2-4077-8C7A-EB9EFE7145E2}" type="slidenum">
+              <a:rPr lang="en-US" smtClean="0"/>
+              <a:t>25</a:t>
+            </a:fld>
+            <a:endParaRPr lang="en-US"/>
+          </a:p>
+        </p:txBody>
+      </p:sp>
+    </p:spTree>
+    <p:extLst>
+      <p:ext uri="{BB962C8B-B14F-4D97-AF65-F5344CB8AC3E}">
+        <p14:creationId xmlns:p14="http://schemas.microsoft.com/office/powerpoint/2010/main" val="3259599336"/>
+      </p:ext>
+    </p:extLst>
+  </p:cSld>
+  <p:clrMapOvr>
+    <a:masterClrMapping/>
+  </p:clrMapOvr>
+</p:notes>
+</file>
+
+<file path=ppt/notesSlides/notesSlide18.xml><?xml version="1.0" encoding="utf-8"?>
+<p:notes xmlns:a="http://schemas.openxmlformats.org/drawingml/2006/main" xmlns:r="http://schemas.openxmlformats.org/officeDocument/2006/relationships" xmlns:p="http://schemas.openxmlformats.org/presentationml/2006/main">
+  <p:cSld>
+    <p:spTree>
+      <p:nvGrpSpPr>
+        <p:cNvPr id="1" name=""/>
+        <p:cNvGrpSpPr/>
+        <p:nvPr/>
+      </p:nvGrpSpPr>
+      <p:grpSpPr>
+        <a:xfrm>
+          <a:off x="0" y="0"/>
+          <a:ext cx="0" cy="0"/>
+          <a:chOff x="0" y="0"/>
+          <a:chExt cx="0" cy="0"/>
+        </a:xfrm>
+      </p:grpSpPr>
+      <p:sp>
+        <p:nvSpPr>
+          <p:cNvPr id="2" name="Slide Image Placeholder 1"/>
+          <p:cNvSpPr>
+            <a:spLocks noGrp="1" noRot="1" noChangeAspect="1"/>
+          </p:cNvSpPr>
+          <p:nvPr>
+            <p:ph type="sldImg"/>
+          </p:nvPr>
+        </p:nvSpPr>
+        <p:spPr/>
+      </p:sp>
+      <p:sp>
+        <p:nvSpPr>
+          <p:cNvPr id="3" name="Notes Placeholder 2"/>
+          <p:cNvSpPr>
+            <a:spLocks noGrp="1"/>
+          </p:cNvSpPr>
+          <p:nvPr>
+            <p:ph type="body" idx="1"/>
+          </p:nvPr>
+        </p:nvSpPr>
+        <p:spPr/>
+        <p:txBody>
+          <a:bodyPr/>
+          <a:lstStyle/>
+          <a:p>
+            <a:endParaRPr lang="de-DE" dirty="0"/>
+          </a:p>
+        </p:txBody>
+      </p:sp>
+      <p:sp>
+        <p:nvSpPr>
+          <p:cNvPr id="4" name="Footer Placeholder 3"/>
+          <p:cNvSpPr>
+            <a:spLocks noGrp="1"/>
+          </p:cNvSpPr>
+          <p:nvPr>
+            <p:ph type="ftr" sz="quarter" idx="4"/>
+          </p:nvPr>
+        </p:nvSpPr>
+        <p:spPr/>
+        <p:txBody>
+          <a:bodyPr/>
+          <a:lstStyle/>
+          <a:p>
+            <a:endParaRPr lang="en-US"/>
+          </a:p>
+        </p:txBody>
+      </p:sp>
+      <p:sp>
+        <p:nvSpPr>
+          <p:cNvPr id="5" name="Slide Number Placeholder 4"/>
+          <p:cNvSpPr>
+            <a:spLocks noGrp="1"/>
+          </p:cNvSpPr>
+          <p:nvPr>
+            <p:ph type="sldNum" sz="quarter" idx="5"/>
+          </p:nvPr>
+        </p:nvSpPr>
+        <p:spPr/>
+        <p:txBody>
+          <a:bodyPr/>
+          <a:lstStyle/>
+          <a:p>
+            <a:fld id="{97EEB764-55E2-4077-8C7A-EB9EFE7145E2}" type="slidenum">
+              <a:rPr lang="en-US" smtClean="0"/>
+              <a:t>26</a:t>
+            </a:fld>
+            <a:endParaRPr lang="en-US"/>
+          </a:p>
+        </p:txBody>
+      </p:sp>
+    </p:spTree>
+    <p:extLst>
+      <p:ext uri="{BB962C8B-B14F-4D97-AF65-F5344CB8AC3E}">
+        <p14:creationId xmlns:p14="http://schemas.microsoft.com/office/powerpoint/2010/main" val="3344899725"/>
+      </p:ext>
+    </p:extLst>
+  </p:cSld>
+  <p:clrMapOvr>
+    <a:masterClrMapping/>
+  </p:clrMapOvr>
+</p:notes>
+</file>
+
+<file path=ppt/notesSlides/notesSlide19.xml><?xml version="1.0" encoding="utf-8"?>
+<p:notes xmlns:a="http://schemas.openxmlformats.org/drawingml/2006/main" xmlns:r="http://schemas.openxmlformats.org/officeDocument/2006/relationships" xmlns:p="http://schemas.openxmlformats.org/presentationml/2006/main">
+  <p:cSld>
+    <p:spTree>
+      <p:nvGrpSpPr>
+        <p:cNvPr id="1" name=""/>
+        <p:cNvGrpSpPr/>
+        <p:nvPr/>
+      </p:nvGrpSpPr>
+      <p:grpSpPr>
+        <a:xfrm>
+          <a:off x="0" y="0"/>
+          <a:ext cx="0" cy="0"/>
+          <a:chOff x="0" y="0"/>
+          <a:chExt cx="0" cy="0"/>
+        </a:xfrm>
+      </p:grpSpPr>
+      <p:sp>
+        <p:nvSpPr>
+          <p:cNvPr id="2" name="Slide Image Placeholder 1"/>
+          <p:cNvSpPr>
+            <a:spLocks noGrp="1" noRot="1" noChangeAspect="1"/>
+          </p:cNvSpPr>
+          <p:nvPr>
+            <p:ph type="sldImg"/>
+          </p:nvPr>
+        </p:nvSpPr>
+        <p:spPr/>
+      </p:sp>
+      <p:sp>
+        <p:nvSpPr>
+          <p:cNvPr id="3" name="Notes Placeholder 2"/>
+          <p:cNvSpPr>
+            <a:spLocks noGrp="1"/>
+          </p:cNvSpPr>
+          <p:nvPr>
+            <p:ph type="body" idx="1"/>
+          </p:nvPr>
+        </p:nvSpPr>
+        <p:spPr/>
+        <p:txBody>
+          <a:bodyPr/>
+          <a:lstStyle/>
+          <a:p>
+            <a:endParaRPr lang="de-DE" dirty="0"/>
+          </a:p>
+        </p:txBody>
+      </p:sp>
+      <p:sp>
+        <p:nvSpPr>
+          <p:cNvPr id="4" name="Footer Placeholder 3"/>
+          <p:cNvSpPr>
+            <a:spLocks noGrp="1"/>
+          </p:cNvSpPr>
+          <p:nvPr>
+            <p:ph type="ftr" sz="quarter" idx="4"/>
+          </p:nvPr>
+        </p:nvSpPr>
+        <p:spPr/>
+        <p:txBody>
+          <a:bodyPr/>
+          <a:lstStyle/>
+          <a:p>
+            <a:endParaRPr lang="en-US"/>
+          </a:p>
+        </p:txBody>
+      </p:sp>
+      <p:sp>
+        <p:nvSpPr>
+          <p:cNvPr id="5" name="Slide Number Placeholder 4"/>
+          <p:cNvSpPr>
+            <a:spLocks noGrp="1"/>
+          </p:cNvSpPr>
+          <p:nvPr>
+            <p:ph type="sldNum" sz="quarter" idx="5"/>
+          </p:nvPr>
+        </p:nvSpPr>
+        <p:spPr/>
+        <p:txBody>
+          <a:bodyPr/>
+          <a:lstStyle/>
+          <a:p>
+            <a:fld id="{97EEB764-55E2-4077-8C7A-EB9EFE7145E2}" type="slidenum">
+              <a:rPr lang="en-US" smtClean="0"/>
+              <a:t>27</a:t>
+            </a:fld>
+            <a:endParaRPr lang="en-US"/>
+          </a:p>
+        </p:txBody>
+      </p:sp>
+    </p:spTree>
+    <p:extLst>
+      <p:ext uri="{BB962C8B-B14F-4D97-AF65-F5344CB8AC3E}">
+        <p14:creationId xmlns:p14="http://schemas.microsoft.com/office/powerpoint/2010/main" val="2034988327"/>
+      </p:ext>
+    </p:extLst>
+  </p:cSld>
+  <p:clrMapOvr>
+    <a:masterClrMapping/>
+  </p:clrMapOvr>
+</p:notes>
+</file>
+
 <file path=ppt/notesSlides/notesSlide2.xml><?xml version="1.0" encoding="utf-8"?>
 <p:notes xmlns:a="http://schemas.openxmlformats.org/drawingml/2006/main" xmlns:r="http://schemas.openxmlformats.org/officeDocument/2006/relationships" xmlns:p="http://schemas.openxmlformats.org/presentationml/2006/main">
   <p:cSld>
@@ -845,391 +2657,78 @@
           <a:bodyPr/>
           <a:lstStyle/>
           <a:p>
-            <a:pPr marL="171450" indent="-171450">
-              <a:buFontTx/>
-              <a:buChar char="-"/>
-            </a:pPr>
-            <a:r>
-              <a:rPr lang="de-DE" dirty="0" err="1"/>
-              <a:t>WebSite</a:t>
-            </a:r>
-            <a:r>
-              <a:rPr lang="de-DE" dirty="0"/>
-              <a:t> lässt keine direkte </a:t>
-            </a:r>
-            <a:r>
-              <a:rPr lang="de-DE" dirty="0" err="1"/>
-              <a:t>kommunikation</a:t>
-            </a:r>
-            <a:r>
-              <a:rPr lang="de-DE" dirty="0"/>
-              <a:t> mit </a:t>
-            </a:r>
-            <a:r>
-              <a:rPr lang="de-DE" dirty="0" err="1"/>
-              <a:t>geräten</a:t>
-            </a:r>
-            <a:r>
-              <a:rPr lang="de-DE" dirty="0"/>
-              <a:t> zu</a:t>
-            </a:r>
-          </a:p>
-          <a:p>
-            <a:pPr marL="171450" indent="-171450">
-              <a:buFontTx/>
-              <a:buChar char="-"/>
-            </a:pPr>
-            <a:r>
-              <a:rPr lang="de-DE" dirty="0"/>
-              <a:t>deswegen APIs</a:t>
-            </a:r>
-          </a:p>
-          <a:p>
-            <a:pPr marL="171450" indent="-171450">
-              <a:buFontTx/>
-              <a:buChar char="-"/>
-            </a:pPr>
-            <a:r>
-              <a:rPr lang="de-DE" dirty="0"/>
-              <a:t>so kann man zB auf USB Serielle oder HID </a:t>
-            </a:r>
-            <a:r>
-              <a:rPr lang="de-DE" dirty="0" err="1"/>
-              <a:t>geräte</a:t>
-            </a:r>
-            <a:r>
-              <a:rPr lang="de-DE" dirty="0"/>
-              <a:t> zugreifen</a:t>
-            </a:r>
-          </a:p>
-          <a:p>
-            <a:pPr marL="171450" indent="-171450">
-              <a:buFontTx/>
-              <a:buChar char="-"/>
-            </a:pPr>
-            <a:r>
-              <a:rPr lang="de-DE" dirty="0"/>
-              <a:t>diese APIs werden allerdings nicht von allen Browsern gleich unterstützt</a:t>
-            </a:r>
-          </a:p>
-          <a:p>
-            <a:pPr marL="171450" indent="-171450">
-              <a:buFontTx/>
-              <a:buChar char="-"/>
-            </a:pPr>
-            <a:r>
-              <a:rPr lang="de-DE" dirty="0"/>
-              <a:t>so wird </a:t>
-            </a:r>
-            <a:r>
-              <a:rPr lang="de-DE" dirty="0" err="1"/>
-              <a:t>WebSerial</a:t>
-            </a:r>
-            <a:r>
-              <a:rPr lang="de-DE" dirty="0"/>
-              <a:t> (was wir zum </a:t>
-            </a:r>
-            <a:r>
-              <a:rPr lang="de-DE" dirty="0" err="1"/>
-              <a:t>flahsen</a:t>
-            </a:r>
-            <a:r>
-              <a:rPr lang="de-DE" dirty="0"/>
-              <a:t> brauchen) nur auf </a:t>
-            </a:r>
-            <a:r>
-              <a:rPr lang="de-DE" dirty="0" err="1"/>
-              <a:t>chromium</a:t>
-            </a:r>
-            <a:r>
-              <a:rPr lang="de-DE" dirty="0"/>
-              <a:t> basierten </a:t>
-            </a:r>
-            <a:r>
-              <a:rPr lang="de-DE" dirty="0" err="1"/>
-              <a:t>browsern</a:t>
-            </a:r>
-            <a:r>
-              <a:rPr lang="de-DE" dirty="0"/>
-              <a:t> unterstützt</a:t>
-            </a:r>
-          </a:p>
-          <a:p>
-            <a:pPr marL="171450" indent="-171450">
-              <a:buFontTx/>
-              <a:buChar char="-"/>
-            </a:pPr>
-            <a:r>
-              <a:rPr lang="de-DE" dirty="0" err="1"/>
-              <a:t>darüberhinaus</a:t>
-            </a:r>
-            <a:r>
-              <a:rPr lang="de-DE" dirty="0"/>
-              <a:t> ist web zugriff auf HW </a:t>
-            </a:r>
-            <a:r>
-              <a:rPr lang="de-DE" dirty="0" err="1"/>
-              <a:t>devices</a:t>
-            </a:r>
-            <a:r>
-              <a:rPr lang="de-DE" dirty="0"/>
-              <a:t> ein großes Sicherheitsrisiko</a:t>
-            </a:r>
-          </a:p>
-          <a:p>
-            <a:pPr marL="171450" indent="-171450">
-              <a:buFontTx/>
-              <a:buChar char="-"/>
-            </a:pPr>
-            <a:r>
-              <a:rPr lang="de-DE" dirty="0"/>
-              <a:t>weshalb man jedes Gerät einzeln zulassen muss</a:t>
-            </a:r>
-          </a:p>
-          <a:p>
-            <a:pPr marL="171450" indent="-171450">
-              <a:buFontTx/>
-              <a:buChar char="-"/>
-            </a:pPr>
+            <a:r>
+              <a:rPr lang="de-DE" dirty="0"/>
+              <a:t>Stellt euch vor</a:t>
+            </a:r>
+          </a:p>
+          <a:p>
             <a:endParaRPr lang="de-DE" dirty="0"/>
           </a:p>
           <a:p>
-            <a:pPr marL="171450" indent="-171450">
-              <a:buFontTx/>
-              <a:buChar char="-"/>
-            </a:pPr>
-            <a:r>
-              <a:rPr lang="de-DE" dirty="0"/>
-              <a:t>nun wenn man mit einem µC seriell kommunizieren kann,</a:t>
-            </a:r>
-          </a:p>
-          <a:p>
-            <a:pPr marL="171450" indent="-171450">
-              <a:buFontTx/>
-              <a:buChar char="-"/>
-            </a:pPr>
-            <a:r>
-              <a:rPr lang="de-DE" dirty="0"/>
-              <a:t>benötigt man </a:t>
-            </a:r>
-            <a:r>
-              <a:rPr lang="de-DE" dirty="0" err="1"/>
-              <a:t>immernoch</a:t>
-            </a:r>
-            <a:r>
-              <a:rPr lang="de-DE" dirty="0"/>
-              <a:t> einen </a:t>
-            </a:r>
-            <a:r>
-              <a:rPr lang="de-DE" dirty="0" err="1"/>
-              <a:t>flasher</a:t>
-            </a:r>
-            <a:r>
-              <a:rPr lang="de-DE" dirty="0"/>
-              <a:t> der </a:t>
-            </a:r>
-            <a:r>
-              <a:rPr lang="de-DE" dirty="0" err="1"/>
-              <a:t>impl</a:t>
-            </a:r>
-            <a:r>
-              <a:rPr lang="de-DE" dirty="0"/>
-              <a:t> in </a:t>
-            </a:r>
-            <a:r>
-              <a:rPr lang="de-DE" dirty="0" err="1"/>
-              <a:t>js</a:t>
-            </a:r>
-            <a:r>
-              <a:rPr lang="de-DE" dirty="0"/>
-              <a:t>, die </a:t>
-            </a:r>
-            <a:r>
-              <a:rPr lang="de-DE" dirty="0" err="1"/>
-              <a:t>compileten</a:t>
-            </a:r>
-            <a:r>
-              <a:rPr lang="de-DE" dirty="0"/>
-              <a:t> </a:t>
-            </a:r>
-            <a:r>
-              <a:rPr lang="de-DE" dirty="0" err="1"/>
-              <a:t>binaries</a:t>
-            </a:r>
-            <a:r>
-              <a:rPr lang="de-DE" dirty="0"/>
-              <a:t> auf den µC überträgt</a:t>
-            </a:r>
-          </a:p>
-          <a:p>
-            <a:pPr marL="171450" indent="-171450">
-              <a:buFontTx/>
-              <a:buChar char="-"/>
-            </a:pPr>
-            <a:r>
-              <a:rPr lang="de-DE" dirty="0"/>
-              <a:t>hängt vom </a:t>
-            </a:r>
-            <a:r>
-              <a:rPr lang="de-DE" dirty="0" err="1"/>
-              <a:t>device</a:t>
-            </a:r>
-            <a:r>
-              <a:rPr lang="de-DE" dirty="0"/>
-              <a:t> ab -&gt; mehrere </a:t>
-            </a:r>
-            <a:r>
-              <a:rPr lang="de-DE" dirty="0" err="1"/>
-              <a:t>flasher</a:t>
-            </a:r>
+            <a:r>
+              <a:rPr lang="de-DE" dirty="0" err="1"/>
+              <a:t>website</a:t>
+            </a:r>
+            <a:r>
+              <a:rPr lang="de-DE" dirty="0"/>
+              <a:t> aufmachen</a:t>
+            </a:r>
+          </a:p>
+          <a:p>
             <a:endParaRPr lang="de-DE" dirty="0"/>
           </a:p>
           <a:p>
-            <a:pPr marL="171450" indent="-171450">
-              <a:buFontTx/>
-              <a:buChar char="-"/>
-            </a:pPr>
-            <a:r>
-              <a:rPr lang="de-DE" dirty="0"/>
-              <a:t>eigene </a:t>
-            </a:r>
-            <a:r>
-              <a:rPr lang="de-DE" dirty="0" err="1"/>
-              <a:t>flasher</a:t>
-            </a:r>
-            <a:r>
-              <a:rPr lang="de-DE" dirty="0"/>
-              <a:t> zu schreiben ist nicht praktikabel</a:t>
-            </a:r>
-          </a:p>
-          <a:p>
-            <a:pPr marL="171450" indent="-171450">
-              <a:buFontTx/>
-              <a:buChar char="-"/>
-            </a:pPr>
+            <a:r>
+              <a:rPr lang="de-DE" dirty="0"/>
+              <a:t>RIOT code schreiben </a:t>
+            </a:r>
+          </a:p>
+          <a:p>
             <a:endParaRPr lang="de-DE" dirty="0"/>
           </a:p>
           <a:p>
-            <a:pPr marL="171450" indent="-171450">
-              <a:buFontTx/>
-              <a:buChar char="-"/>
-            </a:pPr>
-            <a:r>
-              <a:rPr lang="de-DE" dirty="0" err="1"/>
-              <a:t>flashing</a:t>
-            </a:r>
-            <a:r>
-              <a:rPr lang="de-DE" dirty="0"/>
-              <a:t> </a:t>
-            </a:r>
-            <a:r>
-              <a:rPr lang="de-DE" dirty="0" err="1"/>
-              <a:t>websiten</a:t>
-            </a:r>
-            <a:r>
-              <a:rPr lang="de-DE" dirty="0"/>
-              <a:t> existieren, ABER:</a:t>
-            </a:r>
-          </a:p>
-          <a:p>
-            <a:pPr marL="171450" indent="-171450">
-              <a:buFontTx/>
-              <a:buChar char="-"/>
-            </a:pPr>
-            <a:r>
-              <a:rPr lang="de-DE" dirty="0"/>
-              <a:t>für spezifische </a:t>
-            </a:r>
-            <a:r>
-              <a:rPr lang="de-DE" dirty="0" err="1"/>
-              <a:t>devices</a:t>
+            <a:r>
+              <a:rPr lang="de-DE" dirty="0"/>
+              <a:t>dann direkt einfach </a:t>
+            </a:r>
+            <a:r>
+              <a:rPr lang="de-DE" dirty="0" err="1"/>
+              <a:t>builden</a:t>
+            </a:r>
+            <a:r>
+              <a:rPr lang="de-DE" dirty="0"/>
+              <a:t> und </a:t>
+            </a:r>
+            <a:r>
+              <a:rPr lang="de-DE" dirty="0" err="1"/>
+              <a:t>flashen</a:t>
             </a:r>
             <a:endParaRPr lang="de-DE" dirty="0"/>
           </a:p>
           <a:p>
-            <a:pPr marL="171450" indent="-171450">
-              <a:buFontTx/>
-              <a:buChar char="-"/>
-            </a:pPr>
-            <a:r>
-              <a:rPr lang="de-DE" dirty="0"/>
-              <a:t>muss seine eigenen </a:t>
-            </a:r>
-            <a:r>
-              <a:rPr lang="de-DE" dirty="0" err="1"/>
-              <a:t>binaries</a:t>
-            </a:r>
-            <a:r>
-              <a:rPr lang="de-DE" dirty="0"/>
-              <a:t> hochladen</a:t>
-            </a:r>
-          </a:p>
-          <a:p>
-            <a:pPr marL="171450" indent="-171450">
-              <a:buFontTx/>
-              <a:buChar char="-"/>
-            </a:pPr>
-            <a:r>
-              <a:rPr lang="de-DE" dirty="0"/>
-              <a:t>nicht für alle </a:t>
-            </a:r>
-            <a:r>
-              <a:rPr lang="de-DE" dirty="0" err="1"/>
-              <a:t>geräte</a:t>
-            </a:r>
-            <a:r>
-              <a:rPr lang="de-DE" dirty="0"/>
-              <a:t> und wenn verteilt</a:t>
-            </a:r>
-          </a:p>
-          <a:p>
-            <a:pPr marL="171450" indent="-171450">
-              <a:buFontTx/>
-              <a:buChar char="-"/>
-            </a:pPr>
             <a:endParaRPr lang="de-DE" dirty="0"/>
           </a:p>
           <a:p>
-            <a:pPr marL="171450" indent="-171450">
-              <a:buFontTx/>
-              <a:buChar char="-"/>
-            </a:pPr>
-            <a:r>
-              <a:rPr lang="de-DE" dirty="0"/>
-              <a:t>können </a:t>
-            </a:r>
-            <a:r>
-              <a:rPr lang="de-DE" dirty="0" err="1"/>
-              <a:t>immernoch</a:t>
-            </a:r>
-            <a:r>
-              <a:rPr lang="de-DE" dirty="0"/>
-              <a:t> keinen eigenen Code schreiben, </a:t>
-            </a:r>
-            <a:r>
-              <a:rPr lang="de-DE" dirty="0" err="1"/>
-              <a:t>könn</a:t>
-            </a:r>
-            <a:r>
-              <a:rPr lang="de-DE" dirty="0"/>
-              <a:t> wir nicht </a:t>
-            </a:r>
-            <a:r>
-              <a:rPr lang="de-DE" dirty="0" err="1"/>
-              <a:t>iwie</a:t>
-            </a:r>
-            <a:r>
-              <a:rPr lang="de-DE" dirty="0"/>
-              <a:t> einen Editor hosten in dem wir auch </a:t>
-            </a:r>
-            <a:r>
-              <a:rPr lang="de-DE" dirty="0" err="1"/>
-              <a:t>flashen</a:t>
-            </a:r>
-            <a:r>
-              <a:rPr lang="de-DE" dirty="0"/>
-              <a:t> können</a:t>
-            </a:r>
+            <a:r>
+              <a:rPr lang="de-DE" dirty="0"/>
+              <a:t>kein </a:t>
+            </a:r>
+            <a:r>
+              <a:rPr lang="de-DE" dirty="0" err="1"/>
+              <a:t>setup</a:t>
+            </a:r>
+            <a:endParaRPr lang="de-DE" dirty="0"/>
+          </a:p>
+          <a:p>
+            <a:endParaRPr lang="de-DE" dirty="0"/>
+          </a:p>
+          <a:p>
+            <a:r>
+              <a:rPr lang="de-DE" dirty="0" err="1"/>
+              <a:t>platformunabhängig</a:t>
+            </a:r>
+            <a:endParaRPr lang="de-DE" dirty="0"/>
           </a:p>
         </p:txBody>
       </p:sp>
@@ -1269,7 +2768,7 @@
           <a:p>
             <a:fld id="{97EEB764-55E2-4077-8C7A-EB9EFE7145E2}" type="slidenum">
               <a:rPr lang="en-US" smtClean="0"/>
-              <a:t>7</a:t>
+              <a:t>3</a:t>
             </a:fld>
             <a:endParaRPr lang="en-US"/>
           </a:p>
@@ -1278,7 +2777,7 @@
     </p:spTree>
     <p:extLst>
       <p:ext uri="{BB962C8B-B14F-4D97-AF65-F5344CB8AC3E}">
-        <p14:creationId xmlns:p14="http://schemas.microsoft.com/office/powerpoint/2010/main" val="2489729305"/>
+        <p14:creationId xmlns:p14="http://schemas.microsoft.com/office/powerpoint/2010/main" val="635431635"/>
       </p:ext>
     </p:extLst>
   </p:cSld>
@@ -1372,7 +2871,7 @@
           <a:p>
             <a:fld id="{97EEB764-55E2-4077-8C7A-EB9EFE7145E2}" type="slidenum">
               <a:rPr lang="en-US" smtClean="0"/>
-              <a:t>8</a:t>
+              <a:t>4</a:t>
             </a:fld>
             <a:endParaRPr lang="en-US"/>
           </a:p>
@@ -1381,7 +2880,7 @@
     </p:spTree>
     <p:extLst>
       <p:ext uri="{BB962C8B-B14F-4D97-AF65-F5344CB8AC3E}">
-        <p14:creationId xmlns:p14="http://schemas.microsoft.com/office/powerpoint/2010/main" val="1022627258"/>
+        <p14:creationId xmlns:p14="http://schemas.microsoft.com/office/powerpoint/2010/main" val="1457005428"/>
       </p:ext>
     </p:extLst>
   </p:cSld>
@@ -1396,13 +2895,7 @@
   <p:cSld>
     <p:spTree>
       <p:nvGrpSpPr>
-        <p:cNvPr id="1" name="">
-          <a:extLst>
-            <a:ext uri="{FF2B5EF4-FFF2-40B4-BE49-F238E27FC236}">
-              <a16:creationId xmlns:a16="http://schemas.microsoft.com/office/drawing/2014/main" id="{CCA59D0E-05E5-F02E-779D-C74E115956AF}"/>
-            </a:ext>
-          </a:extLst>
-        </p:cNvPr>
+        <p:cNvPr id="1" name=""/>
         <p:cNvGrpSpPr/>
         <p:nvPr/>
       </p:nvGrpSpPr>
@@ -1416,13 +2909,7 @@
       </p:grpSpPr>
       <p:sp>
         <p:nvSpPr>
-          <p:cNvPr id="2" name="Slide Image Placeholder 1">
-            <a:extLst>
-              <a:ext uri="{FF2B5EF4-FFF2-40B4-BE49-F238E27FC236}">
-                <a16:creationId xmlns:a16="http://schemas.microsoft.com/office/drawing/2014/main" id="{25545A38-2962-C6F8-3CB4-CD6EAAAF739C}"/>
-              </a:ext>
-            </a:extLst>
-          </p:cNvPr>
+          <p:cNvPr id="2" name="Slide Image Placeholder 1"/>
           <p:cNvSpPr>
             <a:spLocks noGrp="1" noRot="1" noChangeAspect="1"/>
           </p:cNvSpPr>
@@ -1434,13 +2921,7 @@
       </p:sp>
       <p:sp>
         <p:nvSpPr>
-          <p:cNvPr id="3" name="Notes Placeholder 2">
-            <a:extLst>
-              <a:ext uri="{FF2B5EF4-FFF2-40B4-BE49-F238E27FC236}">
-                <a16:creationId xmlns:a16="http://schemas.microsoft.com/office/drawing/2014/main" id="{5074630E-94A1-BC8D-F805-523264EF8C88}"/>
-              </a:ext>
-            </a:extLst>
-          </p:cNvPr>
+          <p:cNvPr id="3" name="Notes Placeholder 2"/>
           <p:cNvSpPr>
             <a:spLocks noGrp="1"/>
           </p:cNvSpPr>
@@ -1452,6 +2933,15 @@
         <p:txBody>
           <a:bodyPr/>
           <a:lstStyle/>
+          <a:p>
+            <a:r>
+              <a:rPr lang="de-DE" dirty="0"/>
+              <a:t>Ziele im Rahmen unseres Projektes</a:t>
+            </a:r>
+          </a:p>
+          <a:p>
+            <a:endParaRPr lang="de-DE" dirty="0"/>
+          </a:p>
           <a:p>
             <a:pPr marL="171450" indent="-171450">
               <a:buFontTx/>
@@ -1459,83 +2949,17 @@
             </a:pPr>
             <a:r>
               <a:rPr lang="de-DE" dirty="0" err="1"/>
-              <a:t>ham</a:t>
-            </a:r>
-            <a:r>
-              <a:rPr lang="de-DE" dirty="0"/>
-              <a:t> uns web IDEs </a:t>
-            </a:r>
-            <a:r>
-              <a:rPr lang="de-DE" dirty="0" err="1"/>
-              <a:t>angeguggt</a:t>
+              <a:t>geräte</a:t>
+            </a:r>
+            <a:r>
+              <a:rPr lang="de-DE" dirty="0"/>
+              <a:t> von einem Browser </a:t>
+            </a:r>
+            <a:r>
+              <a:rPr lang="de-DE" dirty="0" err="1"/>
+              <a:t>flashen</a:t>
             </a:r>
             <a:endParaRPr lang="de-DE" dirty="0"/>
-          </a:p>
-          <a:p>
-            <a:pPr marL="171450" indent="-171450">
-              <a:buFontTx/>
-              <a:buChar char="-"/>
-            </a:pPr>
-            <a:r>
-              <a:rPr lang="de-DE" dirty="0"/>
-              <a:t>viele haben Monaco als Frontend, bekannt von </a:t>
-            </a:r>
-            <a:r>
-              <a:rPr lang="de-DE" dirty="0" err="1"/>
-              <a:t>VSCode</a:t>
-            </a:r>
-            <a:endParaRPr lang="de-DE" dirty="0"/>
-          </a:p>
-          <a:p>
-            <a:pPr marL="171450" indent="-171450">
-              <a:buFontTx/>
-              <a:buChar char="-"/>
-            </a:pPr>
-            <a:r>
-              <a:rPr lang="de-DE" dirty="0" err="1"/>
-              <a:t>VSCode</a:t>
-            </a:r>
-            <a:r>
-              <a:rPr lang="de-DE" dirty="0"/>
-              <a:t> für viele vertraut</a:t>
-            </a:r>
-          </a:p>
-          <a:p>
-            <a:pPr marL="171450" indent="-171450">
-              <a:buFontTx/>
-              <a:buChar char="-"/>
-            </a:pPr>
-            <a:r>
-              <a:rPr lang="de-DE" dirty="0"/>
-              <a:t>unterstütz </a:t>
-            </a:r>
-            <a:r>
-              <a:rPr lang="de-DE" dirty="0" err="1"/>
-              <a:t>Extensions</a:t>
-            </a:r>
-            <a:endParaRPr lang="de-DE" dirty="0"/>
-          </a:p>
-          <a:p>
-            <a:pPr marL="171450" indent="-171450">
-              <a:buFontTx/>
-              <a:buChar char="-"/>
-            </a:pPr>
-            <a:r>
-              <a:rPr lang="de-DE" dirty="0" err="1"/>
-              <a:t>coder</a:t>
-            </a:r>
-            <a:r>
-              <a:rPr lang="de-DE" dirty="0"/>
-              <a:t>/code-server kann einfach </a:t>
-            </a:r>
-            <a:r>
-              <a:rPr lang="de-DE" dirty="0" err="1"/>
-              <a:t>gehosted</a:t>
-            </a:r>
-            <a:r>
-              <a:rPr lang="de-DE" dirty="0"/>
-              <a:t> werden um eine Web IDE bereit zustellen</a:t>
-            </a:r>
           </a:p>
           <a:p>
             <a:pPr marL="171450" indent="-171450">
@@ -1551,11 +2975,11 @@
             </a:pPr>
             <a:r>
               <a:rPr lang="de-DE" dirty="0"/>
-              <a:t>IDEE: </a:t>
-            </a:r>
-            <a:r>
-              <a:rPr lang="de-DE" dirty="0" err="1"/>
-              <a:t>vscode</a:t>
+              <a:t>fertiges </a:t>
+            </a:r>
+            <a:r>
+              <a:rPr lang="de-DE" dirty="0" err="1"/>
+              <a:t>dev</a:t>
             </a:r>
             <a:r>
               <a:rPr lang="de-DE" dirty="0"/>
@@ -1563,40 +2987,15 @@
             </a:r>
             <a:r>
               <a:rPr lang="de-DE" dirty="0" err="1"/>
-              <a:t>extension</a:t>
-            </a:r>
-            <a:r>
-              <a:rPr lang="de-DE" dirty="0"/>
-              <a:t> zum </a:t>
-            </a:r>
-            <a:r>
-              <a:rPr lang="de-DE" dirty="0" err="1"/>
-              <a:t>flashen</a:t>
-            </a:r>
-            <a:endParaRPr lang="de-DE" dirty="0"/>
-          </a:p>
-          <a:p>
-            <a:pPr marL="171450" indent="-171450">
-              <a:buFontTx/>
-              <a:buChar char="-"/>
-            </a:pPr>
-            <a:r>
-              <a:rPr lang="de-DE" dirty="0" err="1"/>
-              <a:t>auto</a:t>
-            </a:r>
-            <a:r>
-              <a:rPr lang="de-DE" dirty="0"/>
-              <a:t> deploy</a:t>
-            </a:r>
-          </a:p>
-          <a:p>
-            <a:pPr marL="171450" indent="-171450">
-              <a:buFontTx/>
-              <a:buChar char="-"/>
-            </a:pPr>
-            <a:r>
-              <a:rPr lang="de-DE" dirty="0" err="1"/>
-              <a:t>geräteverwaltung</a:t>
+              <a:t>env</a:t>
+            </a:r>
+            <a:r>
+              <a:rPr lang="de-DE" dirty="0"/>
+              <a:t> mit </a:t>
+            </a:r>
+            <a:r>
+              <a:rPr lang="de-DE" dirty="0" err="1"/>
+              <a:t>editor</a:t>
             </a:r>
             <a:endParaRPr lang="de-DE" dirty="0"/>
           </a:p>
@@ -1613,45 +3012,68 @@
               <a:buChar char="-"/>
             </a:pPr>
             <a:r>
-              <a:rPr lang="de-DE" dirty="0"/>
-              <a:t>in Kontrast zu anderen </a:t>
-            </a:r>
-            <a:r>
-              <a:rPr lang="de-DE" dirty="0" err="1"/>
-              <a:t>Flasher</a:t>
-            </a:r>
-            <a:r>
-              <a:rPr lang="de-DE" dirty="0"/>
-              <a:t> Websites -&gt; seinen code direkt </a:t>
-            </a:r>
-            <a:r>
-              <a:rPr lang="de-DE" dirty="0" err="1"/>
-              <a:t>builden</a:t>
-            </a:r>
-            <a:r>
-              <a:rPr lang="de-DE" dirty="0"/>
-              <a:t> und </a:t>
-            </a:r>
-            <a:r>
-              <a:rPr lang="de-DE" dirty="0" err="1"/>
-              <a:t>flashen</a:t>
-            </a:r>
-            <a:r>
-              <a:rPr lang="de-DE" dirty="0"/>
-              <a:t> </a:t>
-            </a:r>
-          </a:p>
-        </p:txBody>
-      </p:sp>
-      <p:sp>
-        <p:nvSpPr>
-          <p:cNvPr id="4" name="Footer Placeholder 3">
-            <a:extLst>
-              <a:ext uri="{FF2B5EF4-FFF2-40B4-BE49-F238E27FC236}">
-                <a16:creationId xmlns:a16="http://schemas.microsoft.com/office/drawing/2014/main" id="{2B8D8344-AA30-ABA3-A9B9-B40D427EE69F}"/>
-              </a:ext>
-            </a:extLst>
-          </p:cNvPr>
+              <a:rPr lang="de-DE" dirty="0" err="1"/>
+              <a:t>shortcuts</a:t>
+            </a:r>
+            <a:r>
+              <a:rPr lang="de-DE" dirty="0"/>
+              <a:t> für Anfänger</a:t>
+            </a:r>
+          </a:p>
+          <a:p>
+            <a:pPr marL="171450" indent="-171450">
+              <a:buFontTx/>
+              <a:buChar char="-"/>
+            </a:pPr>
+            <a:endParaRPr lang="de-DE" dirty="0"/>
+          </a:p>
+          <a:p>
+            <a:pPr marL="171450" indent="-171450">
+              <a:buFontTx/>
+              <a:buChar char="-"/>
+            </a:pPr>
+            <a:r>
+              <a:rPr lang="de-DE" dirty="0"/>
+              <a:t>möglichst nah an RIOT bleiben</a:t>
+            </a:r>
+          </a:p>
+          <a:p>
+            <a:pPr marL="171450" indent="-171450">
+              <a:buFontTx/>
+              <a:buChar char="-"/>
+            </a:pPr>
+            <a:endParaRPr lang="de-DE" dirty="0"/>
+          </a:p>
+          <a:p>
+            <a:pPr marL="171450" indent="-171450">
+              <a:buFontTx/>
+              <a:buChar char="-"/>
+            </a:pPr>
+            <a:r>
+              <a:rPr lang="de-DE" dirty="0"/>
+              <a:t>einfache lokale Benutzung </a:t>
+            </a:r>
+          </a:p>
+          <a:p>
+            <a:pPr marL="171450" indent="-171450">
+              <a:buFontTx/>
+              <a:buChar char="-"/>
+            </a:pPr>
+            <a:r>
+              <a:rPr lang="de-DE" dirty="0"/>
+              <a:t>oder auch zentrales </a:t>
+            </a:r>
+            <a:r>
+              <a:rPr lang="de-DE" dirty="0" err="1"/>
+              <a:t>hosting</a:t>
+            </a:r>
+            <a:endParaRPr lang="de-DE" dirty="0"/>
+          </a:p>
+        </p:txBody>
+      </p:sp>
+      <p:sp>
+        <p:nvSpPr>
+          <p:cNvPr id="4" name="Footer Placeholder 3"/>
           <p:cNvSpPr>
             <a:spLocks noGrp="1"/>
           </p:cNvSpPr>
@@ -1670,13 +3092,7 @@
       </p:sp>
       <p:sp>
         <p:nvSpPr>
-          <p:cNvPr id="5" name="Slide Number Placeholder 4">
-            <a:extLst>
-              <a:ext uri="{FF2B5EF4-FFF2-40B4-BE49-F238E27FC236}">
-                <a16:creationId xmlns:a16="http://schemas.microsoft.com/office/drawing/2014/main" id="{2C380744-32DE-C7ED-5F85-E1FF5C54BB51}"/>
-              </a:ext>
-            </a:extLst>
-          </p:cNvPr>
+          <p:cNvPr id="5" name="Slide Number Placeholder 4"/>
           <p:cNvSpPr>
             <a:spLocks noGrp="1"/>
           </p:cNvSpPr>
@@ -1691,7 +3107,7 @@
           <a:p>
             <a:fld id="{97EEB764-55E2-4077-8C7A-EB9EFE7145E2}" type="slidenum">
               <a:rPr lang="en-US" smtClean="0"/>
-              <a:t>9</a:t>
+              <a:t>5</a:t>
             </a:fld>
             <a:endParaRPr lang="en-US"/>
           </a:p>
@@ -1700,7 +3116,7 @@
     </p:spTree>
     <p:extLst>
       <p:ext uri="{BB962C8B-B14F-4D97-AF65-F5344CB8AC3E}">
-        <p14:creationId xmlns:p14="http://schemas.microsoft.com/office/powerpoint/2010/main" val="3783422821"/>
+        <p14:creationId xmlns:p14="http://schemas.microsoft.com/office/powerpoint/2010/main" val="1919197482"/>
       </p:ext>
     </p:extLst>
   </p:cSld>
@@ -1754,6 +3170,915 @@
           <a:bodyPr/>
           <a:lstStyle/>
           <a:p>
+            <a:pPr marL="171450" indent="-171450">
+              <a:buFontTx/>
+              <a:buChar char="-"/>
+            </a:pPr>
+            <a:r>
+              <a:rPr lang="de-DE" dirty="0" err="1"/>
+              <a:t>WebSite</a:t>
+            </a:r>
+            <a:r>
+              <a:rPr lang="de-DE" dirty="0"/>
+              <a:t> lässt keine direkte </a:t>
+            </a:r>
+            <a:r>
+              <a:rPr lang="de-DE" dirty="0" err="1"/>
+              <a:t>kommunikation</a:t>
+            </a:r>
+            <a:r>
+              <a:rPr lang="de-DE" dirty="0"/>
+              <a:t> mit </a:t>
+            </a:r>
+            <a:r>
+              <a:rPr lang="de-DE" dirty="0" err="1"/>
+              <a:t>geräten</a:t>
+            </a:r>
+            <a:r>
+              <a:rPr lang="de-DE" dirty="0"/>
+              <a:t> zu</a:t>
+            </a:r>
+          </a:p>
+          <a:p>
+            <a:pPr marL="171450" indent="-171450">
+              <a:buFontTx/>
+              <a:buChar char="-"/>
+            </a:pPr>
+            <a:r>
+              <a:rPr lang="de-DE" dirty="0"/>
+              <a:t>deswegen APIs</a:t>
+            </a:r>
+          </a:p>
+          <a:p>
+            <a:pPr marL="171450" indent="-171450">
+              <a:buFontTx/>
+              <a:buChar char="-"/>
+            </a:pPr>
+            <a:r>
+              <a:rPr lang="de-DE" dirty="0"/>
+              <a:t>so kann man zB auf USB Serielle oder HID </a:t>
+            </a:r>
+            <a:r>
+              <a:rPr lang="de-DE" dirty="0" err="1"/>
+              <a:t>geräte</a:t>
+            </a:r>
+            <a:r>
+              <a:rPr lang="de-DE" dirty="0"/>
+              <a:t> zugreifen</a:t>
+            </a:r>
+          </a:p>
+          <a:p>
+            <a:pPr marL="171450" indent="-171450">
+              <a:buFontTx/>
+              <a:buChar char="-"/>
+            </a:pPr>
+            <a:r>
+              <a:rPr lang="de-DE" dirty="0"/>
+              <a:t>diese APIs werden allerdings nicht von allen Browsern gleich unterstützt</a:t>
+            </a:r>
+          </a:p>
+          <a:p>
+            <a:pPr marL="171450" indent="-171450">
+              <a:buFontTx/>
+              <a:buChar char="-"/>
+            </a:pPr>
+            <a:r>
+              <a:rPr lang="de-DE" dirty="0"/>
+              <a:t>so wird </a:t>
+            </a:r>
+            <a:r>
+              <a:rPr lang="de-DE" dirty="0" err="1"/>
+              <a:t>WebSerial</a:t>
+            </a:r>
+            <a:r>
+              <a:rPr lang="de-DE" dirty="0"/>
+              <a:t> (was wir zum </a:t>
+            </a:r>
+            <a:r>
+              <a:rPr lang="de-DE" dirty="0" err="1"/>
+              <a:t>flahsen</a:t>
+            </a:r>
+            <a:r>
+              <a:rPr lang="de-DE" dirty="0"/>
+              <a:t> brauchen) nur auf </a:t>
+            </a:r>
+            <a:r>
+              <a:rPr lang="de-DE" dirty="0" err="1"/>
+              <a:t>chromium</a:t>
+            </a:r>
+            <a:r>
+              <a:rPr lang="de-DE" dirty="0"/>
+              <a:t> basierten </a:t>
+            </a:r>
+            <a:r>
+              <a:rPr lang="de-DE" dirty="0" err="1"/>
+              <a:t>browsern</a:t>
+            </a:r>
+            <a:r>
+              <a:rPr lang="de-DE" dirty="0"/>
+              <a:t> unterstützt</a:t>
+            </a:r>
+          </a:p>
+          <a:p>
+            <a:pPr marL="171450" indent="-171450">
+              <a:buFontTx/>
+              <a:buChar char="-"/>
+            </a:pPr>
+            <a:r>
+              <a:rPr lang="de-DE" dirty="0" err="1"/>
+              <a:t>darüberhinaus</a:t>
+            </a:r>
+            <a:r>
+              <a:rPr lang="de-DE" dirty="0"/>
+              <a:t> ist web zugriff auf HW </a:t>
+            </a:r>
+            <a:r>
+              <a:rPr lang="de-DE" dirty="0" err="1"/>
+              <a:t>devices</a:t>
+            </a:r>
+            <a:r>
+              <a:rPr lang="de-DE" dirty="0"/>
+              <a:t> ein großes Sicherheitsrisiko</a:t>
+            </a:r>
+          </a:p>
+          <a:p>
+            <a:pPr marL="171450" indent="-171450">
+              <a:buFontTx/>
+              <a:buChar char="-"/>
+            </a:pPr>
+            <a:r>
+              <a:rPr lang="de-DE" dirty="0"/>
+              <a:t>weshalb man jedes Gerät einzeln zulassen muss</a:t>
+            </a:r>
+          </a:p>
+          <a:p>
+            <a:pPr marL="171450" indent="-171450">
+              <a:buFontTx/>
+              <a:buChar char="-"/>
+            </a:pPr>
+            <a:endParaRPr lang="de-DE" dirty="0"/>
+          </a:p>
+          <a:p>
+            <a:pPr marL="171450" indent="-171450">
+              <a:buFontTx/>
+              <a:buChar char="-"/>
+            </a:pPr>
+            <a:r>
+              <a:rPr lang="de-DE" dirty="0"/>
+              <a:t>nun wenn man mit einem µC seriell kommunizieren kann,</a:t>
+            </a:r>
+          </a:p>
+          <a:p>
+            <a:pPr marL="171450" indent="-171450">
+              <a:buFontTx/>
+              <a:buChar char="-"/>
+            </a:pPr>
+            <a:r>
+              <a:rPr lang="de-DE" dirty="0"/>
+              <a:t>benötigt man </a:t>
+            </a:r>
+            <a:r>
+              <a:rPr lang="de-DE" dirty="0" err="1"/>
+              <a:t>immernoch</a:t>
+            </a:r>
+            <a:r>
+              <a:rPr lang="de-DE" dirty="0"/>
+              <a:t> einen </a:t>
+            </a:r>
+            <a:r>
+              <a:rPr lang="de-DE" dirty="0" err="1"/>
+              <a:t>flasher</a:t>
+            </a:r>
+            <a:r>
+              <a:rPr lang="de-DE" dirty="0"/>
+              <a:t> der </a:t>
+            </a:r>
+            <a:r>
+              <a:rPr lang="de-DE" dirty="0" err="1"/>
+              <a:t>impl</a:t>
+            </a:r>
+            <a:r>
+              <a:rPr lang="de-DE" dirty="0"/>
+              <a:t> in </a:t>
+            </a:r>
+            <a:r>
+              <a:rPr lang="de-DE" dirty="0" err="1"/>
+              <a:t>js</a:t>
+            </a:r>
+            <a:r>
+              <a:rPr lang="de-DE" dirty="0"/>
+              <a:t>, die </a:t>
+            </a:r>
+            <a:r>
+              <a:rPr lang="de-DE" dirty="0" err="1"/>
+              <a:t>compileten</a:t>
+            </a:r>
+            <a:r>
+              <a:rPr lang="de-DE" dirty="0"/>
+              <a:t> </a:t>
+            </a:r>
+            <a:r>
+              <a:rPr lang="de-DE" dirty="0" err="1"/>
+              <a:t>binaries</a:t>
+            </a:r>
+            <a:r>
+              <a:rPr lang="de-DE" dirty="0"/>
+              <a:t> auf den µC überträgt</a:t>
+            </a:r>
+          </a:p>
+          <a:p>
+            <a:pPr marL="171450" indent="-171450">
+              <a:buFontTx/>
+              <a:buChar char="-"/>
+            </a:pPr>
+            <a:r>
+              <a:rPr lang="de-DE" dirty="0"/>
+              <a:t>hängt vom </a:t>
+            </a:r>
+            <a:r>
+              <a:rPr lang="de-DE" dirty="0" err="1"/>
+              <a:t>device</a:t>
+            </a:r>
+            <a:r>
+              <a:rPr lang="de-DE" dirty="0"/>
+              <a:t> ab -&gt; mehrere </a:t>
+            </a:r>
+            <a:r>
+              <a:rPr lang="de-DE" dirty="0" err="1"/>
+              <a:t>flasher</a:t>
+            </a:r>
+            <a:endParaRPr lang="de-DE" dirty="0"/>
+          </a:p>
+          <a:p>
+            <a:pPr marL="171450" indent="-171450">
+              <a:buFontTx/>
+              <a:buChar char="-"/>
+            </a:pPr>
+            <a:r>
+              <a:rPr lang="de-DE" dirty="0"/>
+              <a:t>eigene </a:t>
+            </a:r>
+            <a:r>
+              <a:rPr lang="de-DE" dirty="0" err="1"/>
+              <a:t>flasher</a:t>
+            </a:r>
+            <a:r>
+              <a:rPr lang="de-DE" dirty="0"/>
+              <a:t> zu schreiben ist nicht praktikabel</a:t>
+            </a:r>
+          </a:p>
+          <a:p>
+            <a:pPr marL="171450" indent="-171450">
+              <a:buFontTx/>
+              <a:buChar char="-"/>
+            </a:pPr>
+            <a:endParaRPr lang="de-DE" dirty="0"/>
+          </a:p>
+          <a:p>
+            <a:pPr marL="171450" indent="-171450">
+              <a:buFontTx/>
+              <a:buChar char="-"/>
+            </a:pPr>
+            <a:r>
+              <a:rPr lang="de-DE" dirty="0" err="1"/>
+              <a:t>flashing</a:t>
+            </a:r>
+            <a:r>
+              <a:rPr lang="de-DE" dirty="0"/>
+              <a:t> </a:t>
+            </a:r>
+            <a:r>
+              <a:rPr lang="de-DE" dirty="0" err="1"/>
+              <a:t>websiten</a:t>
+            </a:r>
+            <a:r>
+              <a:rPr lang="de-DE" dirty="0"/>
+              <a:t> existieren, ABER:</a:t>
+            </a:r>
+          </a:p>
+          <a:p>
+            <a:pPr marL="171450" indent="-171450">
+              <a:buFontTx/>
+              <a:buChar char="-"/>
+            </a:pPr>
+            <a:r>
+              <a:rPr lang="de-DE" dirty="0"/>
+              <a:t>für spezifische </a:t>
+            </a:r>
+            <a:r>
+              <a:rPr lang="de-DE" dirty="0" err="1"/>
+              <a:t>devices</a:t>
+            </a:r>
+            <a:endParaRPr lang="de-DE" dirty="0"/>
+          </a:p>
+          <a:p>
+            <a:pPr marL="171450" indent="-171450">
+              <a:buFontTx/>
+              <a:buChar char="-"/>
+            </a:pPr>
+            <a:r>
+              <a:rPr lang="de-DE" dirty="0"/>
+              <a:t>muss seine eigenen </a:t>
+            </a:r>
+            <a:r>
+              <a:rPr lang="de-DE" dirty="0" err="1"/>
+              <a:t>binaries</a:t>
+            </a:r>
+            <a:r>
+              <a:rPr lang="de-DE" dirty="0"/>
+              <a:t> hochladen</a:t>
+            </a:r>
+          </a:p>
+          <a:p>
+            <a:pPr marL="171450" indent="-171450">
+              <a:buFontTx/>
+              <a:buChar char="-"/>
+            </a:pPr>
+            <a:r>
+              <a:rPr lang="de-DE" dirty="0"/>
+              <a:t>nicht für alle </a:t>
+            </a:r>
+            <a:r>
+              <a:rPr lang="de-DE" dirty="0" err="1"/>
+              <a:t>geräte</a:t>
+            </a:r>
+            <a:r>
+              <a:rPr lang="de-DE" dirty="0"/>
+              <a:t> und wenn verteilt</a:t>
+            </a:r>
+          </a:p>
+          <a:p>
+            <a:pPr marL="171450" indent="-171450">
+              <a:buFontTx/>
+              <a:buChar char="-"/>
+            </a:pPr>
+            <a:endParaRPr lang="de-DE" dirty="0"/>
+          </a:p>
+          <a:p>
+            <a:pPr marL="171450" indent="-171450">
+              <a:buFontTx/>
+              <a:buChar char="-"/>
+            </a:pPr>
+            <a:r>
+              <a:rPr lang="de-DE" dirty="0"/>
+              <a:t>können </a:t>
+            </a:r>
+            <a:r>
+              <a:rPr lang="de-DE" dirty="0" err="1"/>
+              <a:t>immernoch</a:t>
+            </a:r>
+            <a:r>
+              <a:rPr lang="de-DE" dirty="0"/>
+              <a:t> keinen eigenen Code schreiben, </a:t>
+            </a:r>
+            <a:r>
+              <a:rPr lang="de-DE" dirty="0" err="1"/>
+              <a:t>könn</a:t>
+            </a:r>
+            <a:r>
+              <a:rPr lang="de-DE" dirty="0"/>
+              <a:t> wir nicht </a:t>
+            </a:r>
+            <a:r>
+              <a:rPr lang="de-DE" dirty="0" err="1"/>
+              <a:t>iwie</a:t>
+            </a:r>
+            <a:r>
+              <a:rPr lang="de-DE" dirty="0"/>
+              <a:t> einen Editor hosten in dem wir auch </a:t>
+            </a:r>
+            <a:r>
+              <a:rPr lang="de-DE" dirty="0" err="1"/>
+              <a:t>flashen</a:t>
+            </a:r>
+            <a:r>
+              <a:rPr lang="de-DE" dirty="0"/>
+              <a:t> können</a:t>
+            </a:r>
+          </a:p>
+        </p:txBody>
+      </p:sp>
+      <p:sp>
+        <p:nvSpPr>
+          <p:cNvPr id="4" name="Footer Placeholder 3"/>
+          <p:cNvSpPr>
+            <a:spLocks noGrp="1"/>
+          </p:cNvSpPr>
+          <p:nvPr>
+            <p:ph type="ftr" sz="quarter" idx="4"/>
+          </p:nvPr>
+        </p:nvSpPr>
+        <p:spPr/>
+        <p:txBody>
+          <a:bodyPr/>
+          <a:lstStyle/>
+          <a:p>
+            <a:endParaRPr lang="en-US"/>
+          </a:p>
+        </p:txBody>
+      </p:sp>
+      <p:sp>
+        <p:nvSpPr>
+          <p:cNvPr id="5" name="Slide Number Placeholder 4"/>
+          <p:cNvSpPr>
+            <a:spLocks noGrp="1"/>
+          </p:cNvSpPr>
+          <p:nvPr>
+            <p:ph type="sldNum" sz="quarter" idx="5"/>
+          </p:nvPr>
+        </p:nvSpPr>
+        <p:spPr/>
+        <p:txBody>
+          <a:bodyPr/>
+          <a:lstStyle/>
+          <a:p>
+            <a:fld id="{97EEB764-55E2-4077-8C7A-EB9EFE7145E2}" type="slidenum">
+              <a:rPr lang="en-US" smtClean="0"/>
+              <a:t>7</a:t>
+            </a:fld>
+            <a:endParaRPr lang="en-US"/>
+          </a:p>
+        </p:txBody>
+      </p:sp>
+    </p:spTree>
+    <p:extLst>
+      <p:ext uri="{BB962C8B-B14F-4D97-AF65-F5344CB8AC3E}">
+        <p14:creationId xmlns:p14="http://schemas.microsoft.com/office/powerpoint/2010/main" val="2489729305"/>
+      </p:ext>
+    </p:extLst>
+  </p:cSld>
+  <p:clrMapOvr>
+    <a:masterClrMapping/>
+  </p:clrMapOvr>
+</p:notes>
+</file>
+
+<file path=ppt/notesSlides/notesSlide6.xml><?xml version="1.0" encoding="utf-8"?>
+<p:notes xmlns:a="http://schemas.openxmlformats.org/drawingml/2006/main" xmlns:r="http://schemas.openxmlformats.org/officeDocument/2006/relationships" xmlns:p="http://schemas.openxmlformats.org/presentationml/2006/main">
+  <p:cSld>
+    <p:spTree>
+      <p:nvGrpSpPr>
+        <p:cNvPr id="1" name=""/>
+        <p:cNvGrpSpPr/>
+        <p:nvPr/>
+      </p:nvGrpSpPr>
+      <p:grpSpPr>
+        <a:xfrm>
+          <a:off x="0" y="0"/>
+          <a:ext cx="0" cy="0"/>
+          <a:chOff x="0" y="0"/>
+          <a:chExt cx="0" cy="0"/>
+        </a:xfrm>
+      </p:grpSpPr>
+      <p:sp>
+        <p:nvSpPr>
+          <p:cNvPr id="2" name="Slide Image Placeholder 1"/>
+          <p:cNvSpPr>
+            <a:spLocks noGrp="1" noRot="1" noChangeAspect="1"/>
+          </p:cNvSpPr>
+          <p:nvPr>
+            <p:ph type="sldImg"/>
+          </p:nvPr>
+        </p:nvSpPr>
+        <p:spPr/>
+      </p:sp>
+      <p:sp>
+        <p:nvSpPr>
+          <p:cNvPr id="3" name="Notes Placeholder 2"/>
+          <p:cNvSpPr>
+            <a:spLocks noGrp="1"/>
+          </p:cNvSpPr>
+          <p:nvPr>
+            <p:ph type="body" idx="1"/>
+          </p:nvPr>
+        </p:nvSpPr>
+        <p:spPr/>
+        <p:txBody>
+          <a:bodyPr/>
+          <a:lstStyle/>
+          <a:p>
+            <a:endParaRPr lang="de-DE" dirty="0"/>
+          </a:p>
+        </p:txBody>
+      </p:sp>
+      <p:sp>
+        <p:nvSpPr>
+          <p:cNvPr id="4" name="Footer Placeholder 3"/>
+          <p:cNvSpPr>
+            <a:spLocks noGrp="1"/>
+          </p:cNvSpPr>
+          <p:nvPr>
+            <p:ph type="ftr" sz="quarter" idx="4"/>
+          </p:nvPr>
+        </p:nvSpPr>
+        <p:spPr/>
+        <p:txBody>
+          <a:bodyPr/>
+          <a:lstStyle/>
+          <a:p>
+            <a:endParaRPr lang="en-US"/>
+          </a:p>
+        </p:txBody>
+      </p:sp>
+      <p:sp>
+        <p:nvSpPr>
+          <p:cNvPr id="5" name="Slide Number Placeholder 4"/>
+          <p:cNvSpPr>
+            <a:spLocks noGrp="1"/>
+          </p:cNvSpPr>
+          <p:nvPr>
+            <p:ph type="sldNum" sz="quarter" idx="5"/>
+          </p:nvPr>
+        </p:nvSpPr>
+        <p:spPr/>
+        <p:txBody>
+          <a:bodyPr/>
+          <a:lstStyle/>
+          <a:p>
+            <a:fld id="{97EEB764-55E2-4077-8C7A-EB9EFE7145E2}" type="slidenum">
+              <a:rPr lang="en-US" smtClean="0"/>
+              <a:t>8</a:t>
+            </a:fld>
+            <a:endParaRPr lang="en-US"/>
+          </a:p>
+        </p:txBody>
+      </p:sp>
+    </p:spTree>
+    <p:extLst>
+      <p:ext uri="{BB962C8B-B14F-4D97-AF65-F5344CB8AC3E}">
+        <p14:creationId xmlns:p14="http://schemas.microsoft.com/office/powerpoint/2010/main" val="1022627258"/>
+      </p:ext>
+    </p:extLst>
+  </p:cSld>
+  <p:clrMapOvr>
+    <a:masterClrMapping/>
+  </p:clrMapOvr>
+</p:notes>
+</file>
+
+<file path=ppt/notesSlides/notesSlide7.xml><?xml version="1.0" encoding="utf-8"?>
+<p:notes xmlns:a="http://schemas.openxmlformats.org/drawingml/2006/main" xmlns:r="http://schemas.openxmlformats.org/officeDocument/2006/relationships" xmlns:p="http://schemas.openxmlformats.org/presentationml/2006/main">
+  <p:cSld>
+    <p:spTree>
+      <p:nvGrpSpPr>
+        <p:cNvPr id="1" name="">
+          <a:extLst>
+            <a:ext uri="{FF2B5EF4-FFF2-40B4-BE49-F238E27FC236}">
+              <a16:creationId xmlns:a16="http://schemas.microsoft.com/office/drawing/2014/main" id="{CCA59D0E-05E5-F02E-779D-C74E115956AF}"/>
+            </a:ext>
+          </a:extLst>
+        </p:cNvPr>
+        <p:cNvGrpSpPr/>
+        <p:nvPr/>
+      </p:nvGrpSpPr>
+      <p:grpSpPr>
+        <a:xfrm>
+          <a:off x="0" y="0"/>
+          <a:ext cx="0" cy="0"/>
+          <a:chOff x="0" y="0"/>
+          <a:chExt cx="0" cy="0"/>
+        </a:xfrm>
+      </p:grpSpPr>
+      <p:sp>
+        <p:nvSpPr>
+          <p:cNvPr id="2" name="Slide Image Placeholder 1">
+            <a:extLst>
+              <a:ext uri="{FF2B5EF4-FFF2-40B4-BE49-F238E27FC236}">
+                <a16:creationId xmlns:a16="http://schemas.microsoft.com/office/drawing/2014/main" id="{25545A38-2962-C6F8-3CB4-CD6EAAAF739C}"/>
+              </a:ext>
+            </a:extLst>
+          </p:cNvPr>
+          <p:cNvSpPr>
+            <a:spLocks noGrp="1" noRot="1" noChangeAspect="1"/>
+          </p:cNvSpPr>
+          <p:nvPr>
+            <p:ph type="sldImg"/>
+          </p:nvPr>
+        </p:nvSpPr>
+        <p:spPr/>
+      </p:sp>
+      <p:sp>
+        <p:nvSpPr>
+          <p:cNvPr id="3" name="Notes Placeholder 2">
+            <a:extLst>
+              <a:ext uri="{FF2B5EF4-FFF2-40B4-BE49-F238E27FC236}">
+                <a16:creationId xmlns:a16="http://schemas.microsoft.com/office/drawing/2014/main" id="{5074630E-94A1-BC8D-F805-523264EF8C88}"/>
+              </a:ext>
+            </a:extLst>
+          </p:cNvPr>
+          <p:cNvSpPr>
+            <a:spLocks noGrp="1"/>
+          </p:cNvSpPr>
+          <p:nvPr>
+            <p:ph type="body" idx="1"/>
+          </p:nvPr>
+        </p:nvSpPr>
+        <p:spPr/>
+        <p:txBody>
+          <a:bodyPr/>
+          <a:lstStyle/>
+          <a:p>
+            <a:pPr marL="171450" indent="-171450">
+              <a:buFontTx/>
+              <a:buChar char="-"/>
+            </a:pPr>
+            <a:r>
+              <a:rPr lang="de-DE" dirty="0" err="1"/>
+              <a:t>ham</a:t>
+            </a:r>
+            <a:r>
+              <a:rPr lang="de-DE" dirty="0"/>
+              <a:t> uns web IDEs </a:t>
+            </a:r>
+            <a:r>
+              <a:rPr lang="de-DE" dirty="0" err="1"/>
+              <a:t>angeguggt</a:t>
+            </a:r>
+            <a:endParaRPr lang="de-DE" dirty="0"/>
+          </a:p>
+          <a:p>
+            <a:pPr marL="171450" indent="-171450">
+              <a:buFontTx/>
+              <a:buChar char="-"/>
+            </a:pPr>
+            <a:r>
+              <a:rPr lang="de-DE" dirty="0"/>
+              <a:t>viele haben Monaco als Frontend, bekannt von </a:t>
+            </a:r>
+            <a:r>
+              <a:rPr lang="de-DE" dirty="0" err="1"/>
+              <a:t>VSCode</a:t>
+            </a:r>
+            <a:endParaRPr lang="de-DE" dirty="0"/>
+          </a:p>
+          <a:p>
+            <a:pPr marL="171450" indent="-171450">
+              <a:buFontTx/>
+              <a:buChar char="-"/>
+            </a:pPr>
+            <a:r>
+              <a:rPr lang="de-DE" dirty="0" err="1"/>
+              <a:t>VSCode</a:t>
+            </a:r>
+            <a:r>
+              <a:rPr lang="de-DE" dirty="0"/>
+              <a:t> für viele vertraut</a:t>
+            </a:r>
+          </a:p>
+          <a:p>
+            <a:pPr marL="171450" indent="-171450">
+              <a:buFontTx/>
+              <a:buChar char="-"/>
+            </a:pPr>
+            <a:r>
+              <a:rPr lang="de-DE" dirty="0"/>
+              <a:t>unterstütz </a:t>
+            </a:r>
+            <a:r>
+              <a:rPr lang="de-DE" dirty="0" err="1"/>
+              <a:t>Extensions</a:t>
+            </a:r>
+            <a:endParaRPr lang="de-DE" dirty="0"/>
+          </a:p>
+          <a:p>
+            <a:pPr marL="171450" indent="-171450">
+              <a:buFontTx/>
+              <a:buChar char="-"/>
+            </a:pPr>
+            <a:r>
+              <a:rPr lang="de-DE" dirty="0" err="1"/>
+              <a:t>coder</a:t>
+            </a:r>
+            <a:r>
+              <a:rPr lang="de-DE" dirty="0"/>
+              <a:t>/code-server kann einfach </a:t>
+            </a:r>
+            <a:r>
+              <a:rPr lang="de-DE" dirty="0" err="1"/>
+              <a:t>gehosted</a:t>
+            </a:r>
+            <a:r>
+              <a:rPr lang="de-DE" dirty="0"/>
+              <a:t> werden um eine Web IDE bereit zustellen</a:t>
+            </a:r>
+          </a:p>
+          <a:p>
+            <a:pPr marL="171450" indent="-171450">
+              <a:buFontTx/>
+              <a:buChar char="-"/>
+            </a:pPr>
+            <a:endParaRPr lang="de-DE" dirty="0"/>
+          </a:p>
+          <a:p>
+            <a:pPr marL="171450" indent="-171450">
+              <a:buFontTx/>
+              <a:buChar char="-"/>
+            </a:pPr>
+            <a:r>
+              <a:rPr lang="de-DE" dirty="0"/>
+              <a:t>IDEE: </a:t>
+            </a:r>
+            <a:r>
+              <a:rPr lang="de-DE" dirty="0" err="1"/>
+              <a:t>vscode</a:t>
+            </a:r>
+            <a:r>
+              <a:rPr lang="de-DE" dirty="0"/>
+              <a:t> </a:t>
+            </a:r>
+            <a:r>
+              <a:rPr lang="de-DE" dirty="0" err="1"/>
+              <a:t>extension</a:t>
+            </a:r>
+            <a:r>
+              <a:rPr lang="de-DE" dirty="0"/>
+              <a:t> zum </a:t>
+            </a:r>
+            <a:r>
+              <a:rPr lang="de-DE" dirty="0" err="1"/>
+              <a:t>flashen</a:t>
+            </a:r>
+            <a:endParaRPr lang="de-DE" dirty="0"/>
+          </a:p>
+          <a:p>
+            <a:pPr marL="171450" indent="-171450">
+              <a:buFontTx/>
+              <a:buChar char="-"/>
+            </a:pPr>
+            <a:r>
+              <a:rPr lang="de-DE" dirty="0" err="1"/>
+              <a:t>auto</a:t>
+            </a:r>
+            <a:r>
+              <a:rPr lang="de-DE" dirty="0"/>
+              <a:t> deploy</a:t>
+            </a:r>
+          </a:p>
+          <a:p>
+            <a:pPr marL="171450" indent="-171450">
+              <a:buFontTx/>
+              <a:buChar char="-"/>
+            </a:pPr>
+            <a:r>
+              <a:rPr lang="de-DE" dirty="0" err="1"/>
+              <a:t>geräteverwaltung</a:t>
+            </a:r>
+            <a:endParaRPr lang="de-DE" dirty="0"/>
+          </a:p>
+          <a:p>
+            <a:pPr marL="171450" indent="-171450">
+              <a:buFontTx/>
+              <a:buChar char="-"/>
+            </a:pPr>
+            <a:endParaRPr lang="de-DE" dirty="0"/>
+          </a:p>
+          <a:p>
+            <a:pPr marL="171450" indent="-171450">
+              <a:buFontTx/>
+              <a:buChar char="-"/>
+            </a:pPr>
+            <a:r>
+              <a:rPr lang="de-DE" dirty="0"/>
+              <a:t>in Kontrast zu anderen </a:t>
+            </a:r>
+            <a:r>
+              <a:rPr lang="de-DE" dirty="0" err="1"/>
+              <a:t>Flasher</a:t>
+            </a:r>
+            <a:r>
+              <a:rPr lang="de-DE" dirty="0"/>
+              <a:t> Websites -&gt; seinen code direkt </a:t>
+            </a:r>
+            <a:r>
+              <a:rPr lang="de-DE" dirty="0" err="1"/>
+              <a:t>builden</a:t>
+            </a:r>
+            <a:r>
+              <a:rPr lang="de-DE" dirty="0"/>
+              <a:t> und </a:t>
+            </a:r>
+            <a:r>
+              <a:rPr lang="de-DE" dirty="0" err="1"/>
+              <a:t>flashen</a:t>
+            </a:r>
+            <a:r>
+              <a:rPr lang="de-DE" dirty="0"/>
+              <a:t> </a:t>
+            </a:r>
+          </a:p>
+        </p:txBody>
+      </p:sp>
+      <p:sp>
+        <p:nvSpPr>
+          <p:cNvPr id="4" name="Footer Placeholder 3">
+            <a:extLst>
+              <a:ext uri="{FF2B5EF4-FFF2-40B4-BE49-F238E27FC236}">
+                <a16:creationId xmlns:a16="http://schemas.microsoft.com/office/drawing/2014/main" id="{2B8D8344-AA30-ABA3-A9B9-B40D427EE69F}"/>
+              </a:ext>
+            </a:extLst>
+          </p:cNvPr>
+          <p:cNvSpPr>
+            <a:spLocks noGrp="1"/>
+          </p:cNvSpPr>
+          <p:nvPr>
+            <p:ph type="ftr" sz="quarter" idx="4"/>
+          </p:nvPr>
+        </p:nvSpPr>
+        <p:spPr/>
+        <p:txBody>
+          <a:bodyPr/>
+          <a:lstStyle/>
+          <a:p>
+            <a:endParaRPr lang="en-US"/>
+          </a:p>
+        </p:txBody>
+      </p:sp>
+      <p:sp>
+        <p:nvSpPr>
+          <p:cNvPr id="5" name="Slide Number Placeholder 4">
+            <a:extLst>
+              <a:ext uri="{FF2B5EF4-FFF2-40B4-BE49-F238E27FC236}">
+                <a16:creationId xmlns:a16="http://schemas.microsoft.com/office/drawing/2014/main" id="{2C380744-32DE-C7ED-5F85-E1FF5C54BB51}"/>
+              </a:ext>
+            </a:extLst>
+          </p:cNvPr>
+          <p:cNvSpPr>
+            <a:spLocks noGrp="1"/>
+          </p:cNvSpPr>
+          <p:nvPr>
+            <p:ph type="sldNum" sz="quarter" idx="5"/>
+          </p:nvPr>
+        </p:nvSpPr>
+        <p:spPr/>
+        <p:txBody>
+          <a:bodyPr/>
+          <a:lstStyle/>
+          <a:p>
+            <a:fld id="{97EEB764-55E2-4077-8C7A-EB9EFE7145E2}" type="slidenum">
+              <a:rPr lang="en-US" smtClean="0"/>
+              <a:t>9</a:t>
+            </a:fld>
+            <a:endParaRPr lang="en-US"/>
+          </a:p>
+        </p:txBody>
+      </p:sp>
+    </p:spTree>
+    <p:extLst>
+      <p:ext uri="{BB962C8B-B14F-4D97-AF65-F5344CB8AC3E}">
+        <p14:creationId xmlns:p14="http://schemas.microsoft.com/office/powerpoint/2010/main" val="3783422821"/>
+      </p:ext>
+    </p:extLst>
+  </p:cSld>
+  <p:clrMapOvr>
+    <a:masterClrMapping/>
+  </p:clrMapOvr>
+</p:notes>
+</file>
+
+<file path=ppt/notesSlides/notesSlide8.xml><?xml version="1.0" encoding="utf-8"?>
+<p:notes xmlns:a="http://schemas.openxmlformats.org/drawingml/2006/main" xmlns:r="http://schemas.openxmlformats.org/officeDocument/2006/relationships" xmlns:p="http://schemas.openxmlformats.org/presentationml/2006/main">
+  <p:cSld>
+    <p:spTree>
+      <p:nvGrpSpPr>
+        <p:cNvPr id="1" name=""/>
+        <p:cNvGrpSpPr/>
+        <p:nvPr/>
+      </p:nvGrpSpPr>
+      <p:grpSpPr>
+        <a:xfrm>
+          <a:off x="0" y="0"/>
+          <a:ext cx="0" cy="0"/>
+          <a:chOff x="0" y="0"/>
+          <a:chExt cx="0" cy="0"/>
+        </a:xfrm>
+      </p:grpSpPr>
+      <p:sp>
+        <p:nvSpPr>
+          <p:cNvPr id="2" name="Slide Image Placeholder 1"/>
+          <p:cNvSpPr>
+            <a:spLocks noGrp="1" noRot="1" noChangeAspect="1"/>
+          </p:cNvSpPr>
+          <p:nvPr>
+            <p:ph type="sldImg"/>
+          </p:nvPr>
+        </p:nvSpPr>
+        <p:spPr/>
+      </p:sp>
+      <p:sp>
+        <p:nvSpPr>
+          <p:cNvPr id="3" name="Notes Placeholder 2"/>
+          <p:cNvSpPr>
+            <a:spLocks noGrp="1"/>
+          </p:cNvSpPr>
+          <p:nvPr>
+            <p:ph type="body" idx="1"/>
+          </p:nvPr>
+        </p:nvSpPr>
+        <p:spPr/>
+        <p:txBody>
+          <a:bodyPr/>
+          <a:lstStyle/>
+          <a:p>
             <a:pPr marL="0" indent="0">
               <a:buFontTx/>
               <a:buNone/>
@@ -1817,7 +4142,7 @@
 </p:notes>
 </file>
 
-<file path=ppt/notesSlides/notesSlide6.xml><?xml version="1.0" encoding="utf-8"?>
+<file path=ppt/notesSlides/notesSlide9.xml><?xml version="1.0" encoding="utf-8"?>
 <p:notes xmlns:a="http://schemas.openxmlformats.org/drawingml/2006/main" xmlns:r="http://schemas.openxmlformats.org/officeDocument/2006/relationships" xmlns:p="http://schemas.openxmlformats.org/presentationml/2006/main">
   <p:cSld>
     <p:spTree>
@@ -15865,7 +18190,7 @@
           </p:nvPr>
         </p:nvPicPr>
         <p:blipFill rotWithShape="1">
-          <a:blip r:embed="rId2">
+          <a:blip r:embed="rId3">
             <a:extLst>
               <a:ext uri="{28A0092B-C50C-407E-A947-70E740481C1C}">
                 <a14:useLocalDpi xmlns:a14="http://schemas.microsoft.com/office/drawing/2010/main" val="0"/>
@@ -15930,103 +18255,6 @@
 </file>
 
 <file path=ppt/slides/slide15.xml><?xml version="1.0" encoding="utf-8"?>
-<p:sld xmlns:a="http://schemas.openxmlformats.org/drawingml/2006/main" xmlns:r="http://schemas.openxmlformats.org/officeDocument/2006/relationships" xmlns:p="http://schemas.openxmlformats.org/presentationml/2006/main">
-  <p:cSld>
-    <p:spTree>
-      <p:nvGrpSpPr>
-        <p:cNvPr id="1" name="">
-          <a:extLst>
-            <a:ext uri="{FF2B5EF4-FFF2-40B4-BE49-F238E27FC236}">
-              <a16:creationId xmlns:a16="http://schemas.microsoft.com/office/drawing/2014/main" id="{B3C25E2F-30BF-7701-343D-87A1AEF063DD}"/>
-            </a:ext>
-          </a:extLst>
-        </p:cNvPr>
-        <p:cNvGrpSpPr/>
-        <p:nvPr/>
-      </p:nvGrpSpPr>
-      <p:grpSpPr>
-        <a:xfrm>
-          <a:off x="0" y="0"/>
-          <a:ext cx="0" cy="0"/>
-          <a:chOff x="0" y="0"/>
-          <a:chExt cx="0" cy="0"/>
-        </a:xfrm>
-      </p:grpSpPr>
-      <p:sp>
-        <p:nvSpPr>
-          <p:cNvPr id="2" name="Title 1">
-            <a:extLst>
-              <a:ext uri="{FF2B5EF4-FFF2-40B4-BE49-F238E27FC236}">
-                <a16:creationId xmlns:a16="http://schemas.microsoft.com/office/drawing/2014/main" id="{B1DA3F5A-D0BD-5403-2171-3C9B81234503}"/>
-              </a:ext>
-            </a:extLst>
-          </p:cNvPr>
-          <p:cNvSpPr>
-            <a:spLocks noGrp="1"/>
-          </p:cNvSpPr>
-          <p:nvPr>
-            <p:ph type="title"/>
-          </p:nvPr>
-        </p:nvSpPr>
-        <p:spPr/>
-        <p:txBody>
-          <a:bodyPr/>
-          <a:lstStyle/>
-          <a:p>
-            <a:r>
-              <a:rPr lang="de-DE" dirty="0"/>
-              <a:t>But </a:t>
-            </a:r>
-            <a:r>
-              <a:rPr lang="de-DE" dirty="0" err="1"/>
-              <a:t>Why</a:t>
-            </a:r>
-            <a:r>
-              <a:rPr lang="de-DE" dirty="0"/>
-              <a:t>?</a:t>
-            </a:r>
-          </a:p>
-        </p:txBody>
-      </p:sp>
-      <p:sp>
-        <p:nvSpPr>
-          <p:cNvPr id="3" name="Text Placeholder 2">
-            <a:extLst>
-              <a:ext uri="{FF2B5EF4-FFF2-40B4-BE49-F238E27FC236}">
-                <a16:creationId xmlns:a16="http://schemas.microsoft.com/office/drawing/2014/main" id="{E7C8C5A7-9946-B933-6F1D-8AC933036DB2}"/>
-              </a:ext>
-            </a:extLst>
-          </p:cNvPr>
-          <p:cNvSpPr>
-            <a:spLocks noGrp="1"/>
-          </p:cNvSpPr>
-          <p:nvPr>
-            <p:ph type="body" sz="quarter" idx="10"/>
-          </p:nvPr>
-        </p:nvSpPr>
-        <p:spPr/>
-        <p:txBody>
-          <a:bodyPr/>
-          <a:lstStyle/>
-          <a:p>
-            <a:endParaRPr lang="de-DE"/>
-          </a:p>
-        </p:txBody>
-      </p:sp>
-    </p:spTree>
-    <p:extLst>
-      <p:ext uri="{BB962C8B-B14F-4D97-AF65-F5344CB8AC3E}">
-        <p14:creationId xmlns:p14="http://schemas.microsoft.com/office/powerpoint/2010/main" val="3933650863"/>
-      </p:ext>
-    </p:extLst>
-  </p:cSld>
-  <p:clrMapOvr>
-    <a:masterClrMapping/>
-  </p:clrMapOvr>
-</p:sld>
-</file>
-
-<file path=ppt/slides/slide16.xml><?xml version="1.0" encoding="utf-8"?>
 <p:sld xmlns:a="http://schemas.openxmlformats.org/drawingml/2006/main" xmlns:r="http://schemas.openxmlformats.org/officeDocument/2006/relationships" xmlns:p="http://schemas.openxmlformats.org/presentationml/2006/main">
   <p:cSld>
     <p:spTree>
@@ -16070,7 +18298,10 @@
           <a:bodyPr/>
           <a:lstStyle/>
           <a:p>
-            <a:endParaRPr lang="de-DE"/>
+            <a:r>
+              <a:rPr lang="de-DE" dirty="0"/>
+              <a:t>Protocol</a:t>
+            </a:r>
           </a:p>
         </p:txBody>
       </p:sp>
@@ -16095,14 +18326,634 @@
           <a:bodyPr/>
           <a:lstStyle/>
           <a:p>
-            <a:endParaRPr lang="de-DE"/>
-          </a:p>
-        </p:txBody>
-      </p:sp>
+            <a:pPr marL="342900" indent="-342900">
+              <a:buFont typeface="Arial" panose="020B0604020202020204" pitchFamily="34" charset="0"/>
+              <a:buChar char="•"/>
+            </a:pPr>
+            <a:r>
+              <a:rPr lang="de-DE" dirty="0" err="1"/>
+              <a:t>Requirements</a:t>
+            </a:r>
+            <a:r>
+              <a:rPr lang="de-DE" dirty="0"/>
+              <a:t>:</a:t>
+            </a:r>
+          </a:p>
+          <a:p>
+            <a:pPr marL="576263" lvl="2" indent="-342900"/>
+            <a:r>
+              <a:rPr lang="de-DE" dirty="0"/>
+              <a:t>Buttons </a:t>
+            </a:r>
+            <a:r>
+              <a:rPr lang="de-DE" dirty="0" err="1"/>
+              <a:t>issue</a:t>
+            </a:r>
+            <a:r>
+              <a:rPr lang="de-DE" dirty="0"/>
+              <a:t> </a:t>
+            </a:r>
+            <a:r>
+              <a:rPr lang="de-DE" dirty="0" err="1"/>
+              <a:t>commands</a:t>
+            </a:r>
+            <a:r>
+              <a:rPr lang="de-DE" dirty="0"/>
+              <a:t> (Client -&gt; Shell)</a:t>
+            </a:r>
+          </a:p>
+          <a:p>
+            <a:pPr marL="576263" lvl="2" indent="-342900"/>
+            <a:r>
+              <a:rPr lang="de-DE" dirty="0" err="1"/>
+              <a:t>Commands</a:t>
+            </a:r>
+            <a:r>
+              <a:rPr lang="de-DE" dirty="0"/>
+              <a:t> </a:t>
+            </a:r>
+            <a:r>
+              <a:rPr lang="de-DE" dirty="0" err="1"/>
+              <a:t>are</a:t>
+            </a:r>
+            <a:r>
+              <a:rPr lang="de-DE" dirty="0"/>
+              <a:t> </a:t>
+            </a:r>
+            <a:r>
+              <a:rPr lang="de-DE" dirty="0" err="1"/>
+              <a:t>sent</a:t>
+            </a:r>
+            <a:r>
+              <a:rPr lang="de-DE" dirty="0"/>
+              <a:t> to Client</a:t>
+            </a:r>
+          </a:p>
+          <a:p>
+            <a:pPr marL="576263" lvl="2" indent="-342900"/>
+            <a:r>
+              <a:rPr lang="de-DE" dirty="0"/>
+              <a:t>Log </a:t>
+            </a:r>
+            <a:r>
+              <a:rPr lang="de-DE" dirty="0" err="1"/>
+              <a:t>messages</a:t>
+            </a:r>
+            <a:r>
+              <a:rPr lang="de-DE" dirty="0"/>
+              <a:t> and User Input </a:t>
+            </a:r>
+            <a:r>
+              <a:rPr lang="de-DE" dirty="0" err="1"/>
+              <a:t>are</a:t>
+            </a:r>
+            <a:r>
+              <a:rPr lang="de-DE" dirty="0"/>
+              <a:t> </a:t>
+            </a:r>
+            <a:r>
+              <a:rPr lang="de-DE" dirty="0" err="1"/>
+              <a:t>shared</a:t>
+            </a:r>
+            <a:endParaRPr lang="de-DE" dirty="0"/>
+          </a:p>
+          <a:p>
+            <a:pPr marL="342900" lvl="1" indent="-342900">
+              <a:buFont typeface="Arial" panose="020B0604020202020204" pitchFamily="34" charset="0"/>
+              <a:buChar char="•"/>
+            </a:pPr>
+            <a:endParaRPr lang="de-DE" dirty="0"/>
+          </a:p>
+          <a:p>
+            <a:pPr marL="342900" lvl="1" indent="-342900">
+              <a:buFont typeface="Arial" panose="020B0604020202020204" pitchFamily="34" charset="0"/>
+              <a:buChar char="•"/>
+            </a:pPr>
+            <a:r>
+              <a:rPr lang="de-DE" dirty="0"/>
+              <a:t>human-</a:t>
+            </a:r>
+            <a:r>
+              <a:rPr lang="de-DE" dirty="0" err="1"/>
+              <a:t>readable</a:t>
+            </a:r>
+            <a:r>
+              <a:rPr lang="de-DE" dirty="0"/>
+              <a:t> and </a:t>
+            </a:r>
+            <a:r>
+              <a:rPr lang="de-DE" dirty="0" err="1"/>
+              <a:t>compact</a:t>
+            </a:r>
+            <a:endParaRPr lang="de-DE" dirty="0"/>
+          </a:p>
+          <a:p>
+            <a:pPr marL="342900" lvl="1" indent="-342900">
+              <a:buFont typeface="Arial" panose="020B0604020202020204" pitchFamily="34" charset="0"/>
+              <a:buChar char="•"/>
+            </a:pPr>
+            <a:r>
+              <a:rPr lang="de-DE" dirty="0" err="1"/>
+              <a:t>stateful</a:t>
+            </a:r>
+            <a:r>
+              <a:rPr lang="de-DE" dirty="0"/>
+              <a:t>, </a:t>
+            </a:r>
+            <a:r>
+              <a:rPr lang="de-DE" dirty="0" err="1"/>
+              <a:t>addressed</a:t>
+            </a:r>
+            <a:r>
+              <a:rPr lang="de-DE" dirty="0"/>
+              <a:t> -&gt; </a:t>
+            </a:r>
+            <a:r>
+              <a:rPr lang="de-DE" dirty="0" err="1"/>
+              <a:t>parallelism</a:t>
+            </a:r>
+            <a:endParaRPr lang="de-DE" dirty="0"/>
+          </a:p>
+          <a:p>
+            <a:pPr marL="342900" lvl="1" indent="-342900">
+              <a:buFont typeface="Arial" panose="020B0604020202020204" pitchFamily="34" charset="0"/>
+              <a:buChar char="•"/>
+            </a:pPr>
+            <a:endParaRPr lang="de-DE" dirty="0"/>
+          </a:p>
+        </p:txBody>
+      </p:sp>
+      <p:pic>
+        <p:nvPicPr>
+          <p:cNvPr id="3" name="Picture 2">
+            <a:extLst>
+              <a:ext uri="{FF2B5EF4-FFF2-40B4-BE49-F238E27FC236}">
+                <a16:creationId xmlns:a16="http://schemas.microsoft.com/office/drawing/2014/main" id="{64359E21-B7DC-1E77-7F1A-1129C0086C17}"/>
+              </a:ext>
+            </a:extLst>
+          </p:cNvPr>
+          <p:cNvPicPr>
+            <a:picLocks noChangeAspect="1"/>
+          </p:cNvPicPr>
+          <p:nvPr/>
+        </p:nvPicPr>
+        <p:blipFill>
+          <a:blip r:embed="rId3">
+            <a:extLst>
+              <a:ext uri="{28A0092B-C50C-407E-A947-70E740481C1C}">
+                <a14:useLocalDpi xmlns:a14="http://schemas.microsoft.com/office/drawing/2010/main" val="0"/>
+              </a:ext>
+            </a:extLst>
+          </a:blip>
+          <a:stretch>
+            <a:fillRect/>
+          </a:stretch>
+        </p:blipFill>
+        <p:spPr>
+          <a:xfrm>
+            <a:off x="6853646" y="1211905"/>
+            <a:ext cx="4728754" cy="4434189"/>
+          </a:xfrm>
+          <a:prstGeom prst="rect">
+            <a:avLst/>
+          </a:prstGeom>
+        </p:spPr>
+      </p:pic>
     </p:spTree>
     <p:extLst>
       <p:ext uri="{BB962C8B-B14F-4D97-AF65-F5344CB8AC3E}">
         <p14:creationId xmlns:p14="http://schemas.microsoft.com/office/powerpoint/2010/main" val="2366101902"/>
+      </p:ext>
+    </p:extLst>
+  </p:cSld>
+  <p:clrMapOvr>
+    <a:masterClrMapping/>
+  </p:clrMapOvr>
+</p:sld>
+</file>
+
+<file path=ppt/slides/slide16.xml><?xml version="1.0" encoding="utf-8"?>
+<p:sld xmlns:a="http://schemas.openxmlformats.org/drawingml/2006/main" xmlns:r="http://schemas.openxmlformats.org/officeDocument/2006/relationships" xmlns:p="http://schemas.openxmlformats.org/presentationml/2006/main">
+  <p:cSld>
+    <p:spTree>
+      <p:nvGrpSpPr>
+        <p:cNvPr id="1" name="">
+          <a:extLst>
+            <a:ext uri="{FF2B5EF4-FFF2-40B4-BE49-F238E27FC236}">
+              <a16:creationId xmlns:a16="http://schemas.microsoft.com/office/drawing/2014/main" id="{29C24CC4-519F-806F-4E45-2A20BDB50C28}"/>
+            </a:ext>
+          </a:extLst>
+        </p:cNvPr>
+        <p:cNvGrpSpPr/>
+        <p:nvPr/>
+      </p:nvGrpSpPr>
+      <p:grpSpPr>
+        <a:xfrm>
+          <a:off x="0" y="0"/>
+          <a:ext cx="0" cy="0"/>
+          <a:chOff x="0" y="0"/>
+          <a:chExt cx="0" cy="0"/>
+        </a:xfrm>
+      </p:grpSpPr>
+      <p:sp>
+        <p:nvSpPr>
+          <p:cNvPr id="6" name="Titel 5">
+            <a:extLst>
+              <a:ext uri="{FF2B5EF4-FFF2-40B4-BE49-F238E27FC236}">
+                <a16:creationId xmlns:a16="http://schemas.microsoft.com/office/drawing/2014/main" id="{BF8424A1-DFE3-687F-387D-3632E640AC44}"/>
+              </a:ext>
+            </a:extLst>
+          </p:cNvPr>
+          <p:cNvSpPr>
+            <a:spLocks noGrp="1"/>
+          </p:cNvSpPr>
+          <p:nvPr>
+            <p:ph type="title"/>
+          </p:nvPr>
+        </p:nvSpPr>
+        <p:spPr/>
+        <p:txBody>
+          <a:bodyPr/>
+          <a:lstStyle/>
+          <a:p>
+            <a:r>
+              <a:rPr lang="de-DE" dirty="0"/>
+              <a:t>Stub</a:t>
+            </a:r>
+          </a:p>
+        </p:txBody>
+      </p:sp>
+      <p:sp>
+        <p:nvSpPr>
+          <p:cNvPr id="7" name="Inhaltsplatzhalter 6">
+            <a:extLst>
+              <a:ext uri="{FF2B5EF4-FFF2-40B4-BE49-F238E27FC236}">
+                <a16:creationId xmlns:a16="http://schemas.microsoft.com/office/drawing/2014/main" id="{1DC0C020-AC2E-DAA1-5CEA-B68A6D055D19}"/>
+              </a:ext>
+            </a:extLst>
+          </p:cNvPr>
+          <p:cNvSpPr>
+            <a:spLocks noGrp="1"/>
+          </p:cNvSpPr>
+          <p:nvPr>
+            <p:ph idx="1"/>
+          </p:nvPr>
+        </p:nvSpPr>
+        <p:spPr/>
+        <p:txBody>
+          <a:bodyPr/>
+          <a:lstStyle/>
+          <a:p>
+            <a:pPr marL="342900" indent="-342900">
+              <a:buFont typeface="Arial" panose="020B0604020202020204" pitchFamily="34" charset="0"/>
+              <a:buChar char="•"/>
+            </a:pPr>
+            <a:r>
+              <a:rPr lang="de-DE" dirty="0" err="1"/>
+              <a:t>Why</a:t>
+            </a:r>
+            <a:r>
+              <a:rPr lang="de-DE" dirty="0"/>
+              <a:t>?</a:t>
+            </a:r>
+          </a:p>
+          <a:p>
+            <a:pPr marL="576263" lvl="2" indent="-342900"/>
+            <a:r>
+              <a:rPr lang="de-DE" dirty="0" err="1"/>
+              <a:t>make</a:t>
+            </a:r>
+            <a:r>
+              <a:rPr lang="de-DE" dirty="0"/>
+              <a:t> </a:t>
+            </a:r>
+            <a:r>
+              <a:rPr lang="de-DE" dirty="0" err="1"/>
+              <a:t>flash</a:t>
+            </a:r>
+            <a:r>
+              <a:rPr lang="de-DE" dirty="0"/>
+              <a:t> -&gt; </a:t>
+            </a:r>
+            <a:r>
+              <a:rPr lang="de-DE" dirty="0" err="1"/>
+              <a:t>parsable</a:t>
+            </a:r>
+            <a:endParaRPr lang="de-DE" dirty="0"/>
+          </a:p>
+          <a:p>
+            <a:pPr marL="576263" lvl="2" indent="-342900"/>
+            <a:r>
+              <a:rPr lang="de-DE" dirty="0"/>
+              <a:t>./my_flash_script.sh -&gt; </a:t>
+            </a:r>
+            <a:r>
+              <a:rPr lang="de-DE" dirty="0" err="1"/>
+              <a:t>more</a:t>
+            </a:r>
+            <a:r>
+              <a:rPr lang="de-DE" dirty="0"/>
+              <a:t> </a:t>
+            </a:r>
+            <a:r>
+              <a:rPr lang="de-DE" dirty="0" err="1"/>
+              <a:t>difficult</a:t>
+            </a:r>
+            <a:endParaRPr lang="de-DE" dirty="0"/>
+          </a:p>
+          <a:p>
+            <a:pPr marL="576263" lvl="2" indent="-342900"/>
+            <a:r>
+              <a:rPr lang="de-DE" dirty="0"/>
+              <a:t>./</a:t>
+            </a:r>
+            <a:r>
+              <a:rPr lang="de-DE" dirty="0" err="1"/>
+              <a:t>my_flash_tool.bin</a:t>
+            </a:r>
+            <a:r>
+              <a:rPr lang="de-DE" dirty="0"/>
+              <a:t> -&gt; impossible</a:t>
+            </a:r>
+          </a:p>
+          <a:p>
+            <a:pPr marL="342900" lvl="1" indent="-342900">
+              <a:buFont typeface="Arial" panose="020B0604020202020204" pitchFamily="34" charset="0"/>
+              <a:buChar char="•"/>
+            </a:pPr>
+            <a:r>
+              <a:rPr lang="de-DE" dirty="0"/>
+              <a:t>Solution:</a:t>
+            </a:r>
+          </a:p>
+          <a:p>
+            <a:pPr marL="576263" lvl="2" indent="-342900"/>
+            <a:r>
+              <a:rPr lang="de-DE" dirty="0" err="1"/>
+              <a:t>patch</a:t>
+            </a:r>
+            <a:r>
+              <a:rPr lang="de-DE" dirty="0"/>
+              <a:t> </a:t>
+            </a:r>
+            <a:r>
+              <a:rPr lang="de-DE" dirty="0" err="1"/>
+              <a:t>riot</a:t>
+            </a:r>
+            <a:r>
+              <a:rPr lang="de-DE" dirty="0"/>
+              <a:t> </a:t>
+            </a:r>
+            <a:r>
+              <a:rPr lang="de-DE" dirty="0" err="1"/>
+              <a:t>slightly</a:t>
+            </a:r>
+            <a:r>
+              <a:rPr lang="de-DE" dirty="0"/>
+              <a:t> -&gt; </a:t>
+            </a:r>
+            <a:r>
+              <a:rPr lang="de-DE" dirty="0" err="1"/>
+              <a:t>adjust</a:t>
+            </a:r>
+            <a:r>
+              <a:rPr lang="de-DE" dirty="0"/>
+              <a:t> </a:t>
+            </a:r>
+            <a:r>
+              <a:rPr lang="de-DE" dirty="0" err="1"/>
+              <a:t>make</a:t>
+            </a:r>
+            <a:r>
+              <a:rPr lang="de-DE" dirty="0"/>
+              <a:t> </a:t>
+            </a:r>
+            <a:r>
+              <a:rPr lang="de-DE" dirty="0" err="1"/>
+              <a:t>targets</a:t>
+            </a:r>
+            <a:r>
+              <a:rPr lang="de-DE" dirty="0"/>
+              <a:t> to </a:t>
+            </a:r>
+            <a:r>
+              <a:rPr lang="de-DE" dirty="0" err="1"/>
+              <a:t>call</a:t>
+            </a:r>
+            <a:r>
+              <a:rPr lang="de-DE" dirty="0"/>
+              <a:t> a </a:t>
+            </a:r>
+            <a:r>
+              <a:rPr lang="de-DE" dirty="0" err="1"/>
+              <a:t>stub</a:t>
+            </a:r>
+            <a:r>
+              <a:rPr lang="de-DE" dirty="0"/>
+              <a:t> </a:t>
+            </a:r>
+            <a:r>
+              <a:rPr lang="de-DE" dirty="0" err="1"/>
+              <a:t>instead</a:t>
+            </a:r>
+            <a:endParaRPr lang="de-DE" dirty="0"/>
+          </a:p>
+          <a:p>
+            <a:pPr marL="576263" lvl="2" indent="-342900"/>
+            <a:r>
+              <a:rPr lang="de-DE" dirty="0" err="1"/>
+              <a:t>stub</a:t>
+            </a:r>
+            <a:r>
+              <a:rPr lang="de-DE" dirty="0"/>
+              <a:t> </a:t>
+            </a:r>
+            <a:r>
+              <a:rPr lang="de-DE" dirty="0" err="1"/>
+              <a:t>is</a:t>
+            </a:r>
+            <a:r>
+              <a:rPr lang="de-DE" dirty="0"/>
+              <a:t> </a:t>
+            </a:r>
+            <a:r>
+              <a:rPr lang="de-DE" dirty="0" err="1"/>
+              <a:t>called</a:t>
+            </a:r>
+            <a:r>
+              <a:rPr lang="de-DE" dirty="0"/>
+              <a:t> </a:t>
+            </a:r>
+            <a:r>
+              <a:rPr lang="de-DE" dirty="0" err="1"/>
+              <a:t>as</a:t>
+            </a:r>
+            <a:r>
+              <a:rPr lang="de-DE" dirty="0"/>
+              <a:t> </a:t>
+            </a:r>
+            <a:r>
+              <a:rPr lang="de-DE" dirty="0" err="1"/>
+              <a:t>flasher</a:t>
+            </a:r>
+            <a:r>
+              <a:rPr lang="de-DE" dirty="0"/>
+              <a:t> </a:t>
+            </a:r>
+            <a:r>
+              <a:rPr lang="de-DE" dirty="0" err="1"/>
+              <a:t>or</a:t>
+            </a:r>
+            <a:r>
+              <a:rPr lang="de-DE" dirty="0"/>
+              <a:t> </a:t>
+            </a:r>
+            <a:r>
+              <a:rPr lang="de-DE" dirty="0" err="1"/>
+              <a:t>serial</a:t>
+            </a:r>
+            <a:r>
+              <a:rPr lang="de-DE" dirty="0"/>
+              <a:t> </a:t>
+            </a:r>
+            <a:r>
+              <a:rPr lang="de-DE" dirty="0" err="1"/>
+              <a:t>tool</a:t>
+            </a:r>
+            <a:r>
+              <a:rPr lang="de-DE" dirty="0"/>
+              <a:t> </a:t>
+            </a:r>
+            <a:r>
+              <a:rPr lang="de-DE" dirty="0" err="1"/>
+              <a:t>with</a:t>
+            </a:r>
+            <a:r>
+              <a:rPr lang="de-DE" dirty="0"/>
+              <a:t> </a:t>
+            </a:r>
+            <a:r>
+              <a:rPr lang="de-DE" dirty="0" err="1"/>
+              <a:t>their</a:t>
+            </a:r>
+            <a:r>
+              <a:rPr lang="de-DE" dirty="0"/>
+              <a:t> </a:t>
+            </a:r>
+            <a:r>
+              <a:rPr lang="de-DE" dirty="0" err="1"/>
+              <a:t>respective</a:t>
+            </a:r>
+            <a:r>
+              <a:rPr lang="de-DE" dirty="0"/>
+              <a:t> </a:t>
+            </a:r>
+            <a:r>
+              <a:rPr lang="de-DE" dirty="0" err="1"/>
+              <a:t>args</a:t>
+            </a:r>
+            <a:endParaRPr lang="de-DE" dirty="0"/>
+          </a:p>
+          <a:p>
+            <a:pPr marL="576263" lvl="2" indent="-342900"/>
+            <a:r>
+              <a:rPr lang="de-DE" dirty="0" err="1"/>
+              <a:t>stub</a:t>
+            </a:r>
+            <a:r>
+              <a:rPr lang="de-DE" dirty="0"/>
+              <a:t> </a:t>
+            </a:r>
+            <a:r>
+              <a:rPr lang="de-DE" dirty="0" err="1"/>
+              <a:t>communicates</a:t>
+            </a:r>
+            <a:r>
+              <a:rPr lang="de-DE" dirty="0"/>
+              <a:t> </a:t>
+            </a:r>
+            <a:r>
+              <a:rPr lang="de-DE" dirty="0" err="1"/>
+              <a:t>with</a:t>
+            </a:r>
+            <a:r>
+              <a:rPr lang="de-DE" dirty="0"/>
+              <a:t> </a:t>
+            </a:r>
+            <a:r>
+              <a:rPr lang="de-DE" dirty="0" err="1"/>
+              <a:t>the</a:t>
+            </a:r>
+            <a:r>
+              <a:rPr lang="de-DE" dirty="0"/>
+              <a:t> </a:t>
+            </a:r>
+            <a:r>
+              <a:rPr lang="de-DE" dirty="0" err="1"/>
+              <a:t>client</a:t>
+            </a:r>
+            <a:r>
+              <a:rPr lang="de-DE" dirty="0"/>
+              <a:t>:</a:t>
+            </a:r>
+          </a:p>
+          <a:p>
+            <a:pPr marL="800100" lvl="3" indent="-342900"/>
+            <a:r>
+              <a:rPr lang="de-DE" dirty="0" err="1"/>
+              <a:t>invokes</a:t>
+            </a:r>
+            <a:r>
+              <a:rPr lang="de-DE" dirty="0"/>
+              <a:t> </a:t>
+            </a:r>
+            <a:r>
+              <a:rPr lang="de-DE" dirty="0" err="1"/>
+              <a:t>commands</a:t>
+            </a:r>
+            <a:endParaRPr lang="de-DE" dirty="0"/>
+          </a:p>
+          <a:p>
+            <a:pPr marL="800100" lvl="3" indent="-342900"/>
+            <a:r>
+              <a:rPr lang="de-DE" dirty="0" err="1"/>
+              <a:t>displays</a:t>
+            </a:r>
+            <a:r>
+              <a:rPr lang="de-DE" dirty="0"/>
+              <a:t> </a:t>
+            </a:r>
+            <a:r>
+              <a:rPr lang="de-DE" dirty="0" err="1"/>
+              <a:t>output</a:t>
+            </a:r>
+            <a:endParaRPr lang="de-DE" dirty="0"/>
+          </a:p>
+          <a:p>
+            <a:pPr marL="800100" lvl="3" indent="-342900"/>
+            <a:r>
+              <a:rPr lang="de-DE" dirty="0" err="1"/>
+              <a:t>relays</a:t>
+            </a:r>
+            <a:r>
+              <a:rPr lang="de-DE" dirty="0"/>
+              <a:t> </a:t>
+            </a:r>
+            <a:r>
+              <a:rPr lang="de-DE" dirty="0" err="1"/>
+              <a:t>user</a:t>
+            </a:r>
+            <a:r>
+              <a:rPr lang="de-DE" dirty="0"/>
+              <a:t> input</a:t>
+            </a:r>
+          </a:p>
+        </p:txBody>
+      </p:sp>
+    </p:spTree>
+    <p:extLst>
+      <p:ext uri="{BB962C8B-B14F-4D97-AF65-F5344CB8AC3E}">
+        <p14:creationId xmlns:p14="http://schemas.microsoft.com/office/powerpoint/2010/main" val="145542316"/>
       </p:ext>
     </p:extLst>
   </p:cSld>
@@ -16131,10 +18982,10 @@
       </p:grpSpPr>
       <p:sp>
         <p:nvSpPr>
-          <p:cNvPr id="19" name="Titel 18">
-            <a:extLst>
-              <a:ext uri="{FF2B5EF4-FFF2-40B4-BE49-F238E27FC236}">
-                <a16:creationId xmlns:a16="http://schemas.microsoft.com/office/drawing/2014/main" id="{D9C06D64-1A6C-4083-825A-6939C3E97FAE}"/>
+          <p:cNvPr id="4" name="Title 3">
+            <a:extLst>
+              <a:ext uri="{FF2B5EF4-FFF2-40B4-BE49-F238E27FC236}">
+                <a16:creationId xmlns:a16="http://schemas.microsoft.com/office/drawing/2014/main" id="{EA73E7B0-DC1D-6D0F-536A-E36E9840D6A4}"/>
               </a:ext>
             </a:extLst>
           </p:cNvPr>
@@ -16151,27 +19002,35 @@
           <a:lstStyle/>
           <a:p>
             <a:r>
-              <a:rPr lang="de-DE" dirty="0"/>
-              <a:t>Hinweise zur Nutzung der Layouts</a:t>
-            </a:r>
-            <a:endParaRPr lang="en-US" dirty="0"/>
-          </a:p>
-        </p:txBody>
-      </p:sp>
-      <p:sp>
-        <p:nvSpPr>
-          <p:cNvPr id="20" name="Inhaltsplatzhalter 19">
-            <a:extLst>
-              <a:ext uri="{FF2B5EF4-FFF2-40B4-BE49-F238E27FC236}">
-                <a16:creationId xmlns:a16="http://schemas.microsoft.com/office/drawing/2014/main" id="{B6B6F4D4-0AF8-493D-AE50-AEF77EDFBC9F}"/>
-              </a:ext>
-            </a:extLst>
-          </p:cNvPr>
-          <p:cNvSpPr>
-            <a:spLocks noGrp="1"/>
-          </p:cNvSpPr>
-          <p:nvPr>
-            <p:ph idx="1"/>
+              <a:rPr lang="de-DE" dirty="0" err="1"/>
+              <a:t>Packaging</a:t>
+            </a:r>
+            <a:r>
+              <a:rPr lang="de-DE" dirty="0"/>
+              <a:t> and </a:t>
+            </a:r>
+            <a:r>
+              <a:rPr lang="de-DE" dirty="0" err="1"/>
+              <a:t>Deployment</a:t>
+            </a:r>
+            <a:endParaRPr lang="de-DE" dirty="0"/>
+          </a:p>
+        </p:txBody>
+      </p:sp>
+      <p:sp>
+        <p:nvSpPr>
+          <p:cNvPr id="5" name="Text Placeholder 4">
+            <a:extLst>
+              <a:ext uri="{FF2B5EF4-FFF2-40B4-BE49-F238E27FC236}">
+                <a16:creationId xmlns:a16="http://schemas.microsoft.com/office/drawing/2014/main" id="{83FDC90E-3D1D-D7FF-6DBA-B11082863BD1}"/>
+              </a:ext>
+            </a:extLst>
+          </p:cNvPr>
+          <p:cNvSpPr>
+            <a:spLocks noGrp="1"/>
+          </p:cNvSpPr>
+          <p:nvPr>
+            <p:ph type="body" sz="quarter" idx="10"/>
           </p:nvPr>
         </p:nvSpPr>
         <p:spPr/>
@@ -16179,68 +19038,14 @@
           <a:bodyPr/>
           <a:lstStyle/>
           <a:p>
-            <a:r>
-              <a:rPr lang="de-DE" dirty="0"/>
-              <a:t>Es stehen verschiedene Titel-, Abschnitts- und Inhaltsfolien-Layouts zur Auswahl (Rechtsklick auf eine Folie in der Übersicht &gt; Layout &gt; Layout auswählen.</a:t>
-            </a:r>
-          </a:p>
-          <a:p>
-            <a:r>
-              <a:rPr lang="de-DE" dirty="0"/>
-              <a:t>Die Farbflächen der Folien können (ausschließlich) in den CD-Farben eingefärbt werden, siehe Folie 4. Achten Sie auf ausreichenden Kontrast der Hintergrundfarbe zur Schrift.</a:t>
-            </a:r>
-          </a:p>
-          <a:p>
-            <a:r>
-              <a:rPr lang="de-DE" dirty="0"/>
-              <a:t>Von den Titelfolien gibt es 2 Typen:</a:t>
-            </a:r>
-          </a:p>
-          <a:p>
-            <a:pPr marL="342900" indent="-342900">
-              <a:buFontTx/>
-              <a:buChar char="-"/>
-            </a:pPr>
-            <a:r>
-              <a:rPr lang="de-DE" dirty="0"/>
-              <a:t>Titelfolien „</a:t>
-            </a:r>
-            <a:r>
-              <a:rPr lang="de-DE" dirty="0" err="1"/>
-              <a:t>Shape_fix</a:t>
-            </a:r>
-            <a:r>
-              <a:rPr lang="de-DE" dirty="0"/>
-              <a:t>“ mit auf Folienformat beschnittenen Farbflächen. Hier können die Farbflächen nicht verschoben werden.</a:t>
-            </a:r>
-          </a:p>
-          <a:p>
-            <a:pPr marL="342900" indent="-342900">
-              <a:buFontTx/>
-              <a:buChar char="-"/>
-            </a:pPr>
-            <a:r>
-              <a:rPr lang="de-DE" dirty="0"/>
-              <a:t>„Titelfolien „</a:t>
-            </a:r>
-            <a:r>
-              <a:rPr lang="de-DE" dirty="0" err="1"/>
-              <a:t>Shape_variabel</a:t>
-            </a:r>
-            <a:r>
-              <a:rPr lang="de-DE" dirty="0"/>
-              <a:t>“ mit den unbeschnittenen Shapes. Diese können frei im Folienformat verschoben werden, um z. B. bestimmten Textanordnungen gerecht zu werden. </a:t>
-            </a:r>
-          </a:p>
-          <a:p>
-            <a:endParaRPr lang="en-US" dirty="0"/>
+            <a:endParaRPr lang="de-DE"/>
           </a:p>
         </p:txBody>
       </p:sp>
     </p:spTree>
     <p:extLst>
       <p:ext uri="{BB962C8B-B14F-4D97-AF65-F5344CB8AC3E}">
-        <p14:creationId xmlns:p14="http://schemas.microsoft.com/office/powerpoint/2010/main" val="448726076"/>
+        <p14:creationId xmlns:p14="http://schemas.microsoft.com/office/powerpoint/2010/main" val="2006983984"/>
       </p:ext>
     </p:extLst>
   </p:cSld>
@@ -16269,10 +19074,10 @@
       </p:grpSpPr>
       <p:sp>
         <p:nvSpPr>
-          <p:cNvPr id="19" name="Titel 18">
-            <a:extLst>
-              <a:ext uri="{FF2B5EF4-FFF2-40B4-BE49-F238E27FC236}">
-                <a16:creationId xmlns:a16="http://schemas.microsoft.com/office/drawing/2014/main" id="{D9C06D64-1A6C-4083-825A-6939C3E97FAE}"/>
+          <p:cNvPr id="2" name="Title 1">
+            <a:extLst>
+              <a:ext uri="{FF2B5EF4-FFF2-40B4-BE49-F238E27FC236}">
+                <a16:creationId xmlns:a16="http://schemas.microsoft.com/office/drawing/2014/main" id="{CD45FB2F-2174-63F0-C58F-3333705E752C}"/>
               </a:ext>
             </a:extLst>
           </p:cNvPr>
@@ -16283,35 +19088,24 @@
             <p:ph type="title"/>
           </p:nvPr>
         </p:nvSpPr>
-        <p:spPr>
-          <a:xfrm>
-            <a:off x="609600" y="404813"/>
-            <a:ext cx="10972800" cy="647700"/>
-          </a:xfrm>
-          <a:noFill/>
-        </p:spPr>
+        <p:spPr/>
         <p:txBody>
           <a:bodyPr/>
           <a:lstStyle/>
           <a:p>
             <a:r>
               <a:rPr lang="de-DE" dirty="0"/>
-              <a:t>Titel Schriftgröße 32 </a:t>
-            </a:r>
-            <a:r>
-              <a:rPr lang="de-DE" dirty="0" err="1"/>
-              <a:t>pt</a:t>
-            </a:r>
-            <a:endParaRPr lang="en-US" dirty="0"/>
-          </a:p>
-        </p:txBody>
-      </p:sp>
-      <p:sp>
-        <p:nvSpPr>
-          <p:cNvPr id="20" name="Inhaltsplatzhalter 19">
-            <a:extLst>
-              <a:ext uri="{FF2B5EF4-FFF2-40B4-BE49-F238E27FC236}">
-                <a16:creationId xmlns:a16="http://schemas.microsoft.com/office/drawing/2014/main" id="{B6B6F4D4-0AF8-493D-AE50-AEF77EDFBC9F}"/>
+              <a:t>Docker</a:t>
+            </a:r>
+          </a:p>
+        </p:txBody>
+      </p:sp>
+      <p:sp>
+        <p:nvSpPr>
+          <p:cNvPr id="3" name="Content Placeholder 2">
+            <a:extLst>
+              <a:ext uri="{FF2B5EF4-FFF2-40B4-BE49-F238E27FC236}">
+                <a16:creationId xmlns:a16="http://schemas.microsoft.com/office/drawing/2014/main" id="{A618E1DF-3350-29EF-2A8D-13423E0278AB}"/>
               </a:ext>
             </a:extLst>
           </p:cNvPr>
@@ -16322,99 +19116,206 @@
             <p:ph idx="1"/>
           </p:nvPr>
         </p:nvSpPr>
-        <p:spPr>
-          <a:xfrm>
-            <a:off x="609599" y="1736725"/>
-            <a:ext cx="10972801" cy="4105275"/>
-          </a:xfrm>
-        </p:spPr>
+        <p:spPr/>
         <p:txBody>
           <a:bodyPr/>
           <a:lstStyle/>
           <a:p>
-            <a:r>
-              <a:rPr lang="de-DE" dirty="0"/>
-              <a:t>Mastertext Inhalt – Schriftgröße 20 </a:t>
-            </a:r>
-            <a:r>
-              <a:rPr lang="de-DE" dirty="0" err="1"/>
-              <a:t>pt</a:t>
+            <a:pPr marL="342900" indent="-342900">
+              <a:buFont typeface="Arial" panose="020B0604020202020204" pitchFamily="34" charset="0"/>
+              <a:buChar char="•"/>
+            </a:pPr>
+            <a:r>
+              <a:rPr lang="de-DE" dirty="0" err="1"/>
+              <a:t>package</a:t>
+            </a:r>
+            <a:r>
+              <a:rPr lang="de-DE" dirty="0"/>
+              <a:t> </a:t>
+            </a:r>
+            <a:r>
+              <a:rPr lang="de-DE" dirty="0" err="1"/>
+              <a:t>into</a:t>
+            </a:r>
+            <a:r>
+              <a:rPr lang="de-DE" dirty="0"/>
+              <a:t> a </a:t>
+            </a:r>
+            <a:r>
+              <a:rPr lang="de-DE" dirty="0" err="1"/>
+              <a:t>docker</a:t>
+            </a:r>
+            <a:r>
+              <a:rPr lang="de-DE" dirty="0"/>
+              <a:t> </a:t>
+            </a:r>
+            <a:r>
+              <a:rPr lang="de-DE" dirty="0" err="1"/>
+              <a:t>image</a:t>
+            </a:r>
+            <a:r>
+              <a:rPr lang="de-DE" dirty="0"/>
+              <a:t>, </a:t>
+            </a:r>
+            <a:r>
+              <a:rPr lang="de-DE" dirty="0" err="1"/>
+              <a:t>containing</a:t>
+            </a:r>
+            <a:r>
+              <a:rPr lang="de-DE" dirty="0"/>
+              <a:t>:</a:t>
+            </a:r>
+          </a:p>
+          <a:p>
+            <a:pPr marL="576263" lvl="2" indent="-342900"/>
+            <a:r>
+              <a:rPr lang="de-DE" dirty="0"/>
+              <a:t>code-server (</a:t>
+            </a:r>
+            <a:r>
+              <a:rPr lang="de-DE" dirty="0" err="1"/>
+              <a:t>autostart</a:t>
+            </a:r>
+            <a:r>
+              <a:rPr lang="de-DE" dirty="0"/>
+              <a:t>)</a:t>
+            </a:r>
+          </a:p>
+          <a:p>
+            <a:pPr marL="576263" lvl="2" indent="-342900"/>
+            <a:r>
+              <a:rPr lang="de-DE" dirty="0" err="1"/>
+              <a:t>riot</a:t>
+            </a:r>
+            <a:r>
+              <a:rPr lang="de-DE" dirty="0"/>
+              <a:t>-web-tools:</a:t>
+            </a:r>
+          </a:p>
+          <a:p>
+            <a:pPr marL="800100" lvl="3" indent="-342900"/>
+            <a:r>
+              <a:rPr lang="de-DE" dirty="0" err="1"/>
+              <a:t>relay</a:t>
+            </a:r>
+            <a:r>
+              <a:rPr lang="de-DE" dirty="0"/>
+              <a:t> (</a:t>
+            </a:r>
+            <a:r>
+              <a:rPr lang="de-DE" dirty="0" err="1"/>
+              <a:t>autostart</a:t>
+            </a:r>
+            <a:r>
+              <a:rPr lang="de-DE" dirty="0"/>
+              <a:t>)</a:t>
+            </a:r>
+          </a:p>
+          <a:p>
+            <a:pPr marL="800100" lvl="3" indent="-342900"/>
+            <a:r>
+              <a:rPr lang="de-DE" dirty="0" err="1"/>
+              <a:t>shell</a:t>
+            </a:r>
+            <a:r>
+              <a:rPr lang="de-DE" dirty="0"/>
+              <a:t> (</a:t>
+            </a:r>
+            <a:r>
+              <a:rPr lang="de-DE" dirty="0" err="1"/>
+              <a:t>default</a:t>
+            </a:r>
+            <a:r>
+              <a:rPr lang="de-DE" dirty="0"/>
+              <a:t> </a:t>
+            </a:r>
+            <a:r>
+              <a:rPr lang="de-DE" dirty="0" err="1"/>
+              <a:t>shell</a:t>
+            </a:r>
+            <a:r>
+              <a:rPr lang="de-DE" dirty="0"/>
+              <a:t> </a:t>
+            </a:r>
+            <a:r>
+              <a:rPr lang="de-DE" dirty="0" err="1"/>
+              <a:t>for</a:t>
+            </a:r>
+            <a:r>
+              <a:rPr lang="de-DE" dirty="0"/>
+              <a:t> code-server)</a:t>
+            </a:r>
+          </a:p>
+          <a:p>
+            <a:pPr marL="800100" lvl="3" indent="-342900"/>
+            <a:r>
+              <a:rPr lang="de-DE" dirty="0" err="1"/>
+              <a:t>stub</a:t>
             </a:r>
             <a:endParaRPr lang="de-DE" dirty="0"/>
           </a:p>
           <a:p>
-            <a:r>
-              <a:rPr lang="de-DE" dirty="0"/>
-              <a:t>getestet in folgenden Settings (Lesedistanz erste bis letzte Reihe):</a:t>
-            </a:r>
-          </a:p>
-          <a:p>
-            <a:pPr lvl="2"/>
-            <a:r>
-              <a:rPr lang="de-DE" dirty="0"/>
-              <a:t>HSZ Audimax </a:t>
-            </a:r>
-          </a:p>
-          <a:p>
-            <a:pPr lvl="2"/>
-            <a:r>
-              <a:rPr lang="de-DE" dirty="0"/>
-              <a:t>HSZ Hörsaal 03</a:t>
-            </a:r>
-          </a:p>
-          <a:p>
-            <a:pPr lvl="2"/>
-            <a:r>
-              <a:rPr lang="de-DE" dirty="0"/>
-              <a:t>HSZ Seminarraum E01</a:t>
-            </a:r>
-          </a:p>
-          <a:p>
-            <a:r>
-              <a:rPr lang="de-DE" dirty="0"/>
-              <a:t>Schriftgröße kann nach bedarf angepasst werden auf Werte zwischen 16pt und 24pt.</a:t>
-            </a:r>
-          </a:p>
-          <a:p>
-            <a:r>
-              <a:rPr lang="de-DE" dirty="0"/>
-              <a:t>Normaler Lesetext (vgl. </a:t>
-            </a:r>
-            <a:r>
-              <a:rPr lang="de-DE" dirty="0">
-                <a:hlinkClick r:id="rId2"/>
-              </a:rPr>
-              <a:t>https://leserlich.info/leserlich-und-lesbar</a:t>
-            </a:r>
-            <a:r>
-              <a:rPr lang="de-DE" dirty="0"/>
-              <a:t>) </a:t>
-            </a:r>
-            <a:br>
-              <a:rPr lang="de-DE" dirty="0"/>
-            </a:br>
-            <a:r>
-              <a:rPr lang="de-DE" dirty="0"/>
-              <a:t>sollte i.d.R. nicht kleiner als 16 </a:t>
-            </a:r>
-            <a:r>
-              <a:rPr lang="de-DE" dirty="0" err="1"/>
-              <a:t>pt</a:t>
-            </a:r>
-            <a:r>
-              <a:rPr lang="de-DE" dirty="0"/>
-              <a:t> sein</a:t>
-            </a:r>
-          </a:p>
-          <a:p>
-            <a:endParaRPr lang="en-US" dirty="0"/>
+            <a:pPr marL="576263" lvl="2" indent="-342900"/>
+            <a:r>
+              <a:rPr lang="de-DE" dirty="0"/>
+              <a:t>RIOT and </a:t>
+            </a:r>
+            <a:r>
+              <a:rPr lang="de-DE" dirty="0" err="1"/>
+              <a:t>its</a:t>
+            </a:r>
+            <a:r>
+              <a:rPr lang="de-DE" dirty="0"/>
+              <a:t> </a:t>
+            </a:r>
+            <a:r>
+              <a:rPr lang="de-DE" dirty="0" err="1"/>
+              <a:t>dependencies</a:t>
+            </a:r>
+            <a:endParaRPr lang="de-DE" dirty="0"/>
+          </a:p>
+          <a:p>
+            <a:pPr marL="576263" lvl="2" indent="-342900"/>
+            <a:r>
+              <a:rPr lang="de-DE" dirty="0" err="1"/>
+              <a:t>user</a:t>
+            </a:r>
+            <a:r>
+              <a:rPr lang="de-DE" dirty="0"/>
+              <a:t> </a:t>
+            </a:r>
+            <a:r>
+              <a:rPr lang="de-DE" dirty="0" err="1"/>
+              <a:t>environment</a:t>
+            </a:r>
+            <a:r>
+              <a:rPr lang="de-DE" dirty="0"/>
+              <a:t> /</a:t>
+            </a:r>
+            <a:r>
+              <a:rPr lang="de-DE" dirty="0" err="1"/>
+              <a:t>home</a:t>
+            </a:r>
+            <a:r>
+              <a:rPr lang="de-DE" dirty="0"/>
+              <a:t>/</a:t>
+            </a:r>
+            <a:r>
+              <a:rPr lang="de-DE" dirty="0" err="1"/>
+              <a:t>coder</a:t>
+            </a:r>
+            <a:endParaRPr lang="de-DE" dirty="0"/>
+          </a:p>
+          <a:p>
+            <a:pPr marL="576263" lvl="2" indent="-342900"/>
+            <a:endParaRPr lang="de-DE" dirty="0"/>
           </a:p>
         </p:txBody>
       </p:sp>
     </p:spTree>
     <p:extLst>
       <p:ext uri="{BB962C8B-B14F-4D97-AF65-F5344CB8AC3E}">
-        <p14:creationId xmlns:p14="http://schemas.microsoft.com/office/powerpoint/2010/main" val="3923462308"/>
+        <p14:creationId xmlns:p14="http://schemas.microsoft.com/office/powerpoint/2010/main" val="741403339"/>
       </p:ext>
     </p:extLst>
   </p:cSld>
@@ -16429,7 +19330,13 @@
   <p:cSld>
     <p:spTree>
       <p:nvGrpSpPr>
-        <p:cNvPr id="1" name=""/>
+        <p:cNvPr id="1" name="">
+          <a:extLst>
+            <a:ext uri="{FF2B5EF4-FFF2-40B4-BE49-F238E27FC236}">
+              <a16:creationId xmlns:a16="http://schemas.microsoft.com/office/drawing/2014/main" id="{5C054FEF-1E7E-C3FA-D7C9-1428D3895F53}"/>
+            </a:ext>
+          </a:extLst>
+        </p:cNvPr>
         <p:cNvGrpSpPr/>
         <p:nvPr/>
       </p:nvGrpSpPr>
@@ -16443,10 +19350,10 @@
       </p:grpSpPr>
       <p:sp>
         <p:nvSpPr>
-          <p:cNvPr id="4" name="Titel 3">
-            <a:extLst>
-              <a:ext uri="{FF2B5EF4-FFF2-40B4-BE49-F238E27FC236}">
-                <a16:creationId xmlns:a16="http://schemas.microsoft.com/office/drawing/2014/main" id="{63E8F6C8-3424-434A-977D-2E381AC65D4A}"/>
+          <p:cNvPr id="2" name="Title 1">
+            <a:extLst>
+              <a:ext uri="{FF2B5EF4-FFF2-40B4-BE49-F238E27FC236}">
+                <a16:creationId xmlns:a16="http://schemas.microsoft.com/office/drawing/2014/main" id="{A85A75C6-8F9A-CE8D-D1B2-6AA0D1B18311}"/>
               </a:ext>
             </a:extLst>
           </p:cNvPr>
@@ -16464,3284 +19371,40 @@
           <a:p>
             <a:r>
               <a:rPr lang="de-DE" dirty="0"/>
-              <a:t>TUD Farben</a:t>
-            </a:r>
-            <a:endParaRPr lang="en-US" dirty="0"/>
-          </a:p>
-        </p:txBody>
-      </p:sp>
-      <p:grpSp>
-        <p:nvGrpSpPr>
-          <p:cNvPr id="71" name="Gruppieren 70">
-            <a:extLst>
-              <a:ext uri="{FF2B5EF4-FFF2-40B4-BE49-F238E27FC236}">
-                <a16:creationId xmlns:a16="http://schemas.microsoft.com/office/drawing/2014/main" id="{E5D52C39-7129-4BAC-83B2-BC7CC36C7900}"/>
-              </a:ext>
-            </a:extLst>
-          </p:cNvPr>
-          <p:cNvGrpSpPr/>
-          <p:nvPr/>
-        </p:nvGrpSpPr>
-        <p:grpSpPr>
-          <a:xfrm>
-            <a:off x="609600" y="3152775"/>
-            <a:ext cx="11439525" cy="1106488"/>
-            <a:chOff x="609600" y="2609850"/>
-            <a:chExt cx="11439525" cy="1106488"/>
-          </a:xfrm>
-        </p:grpSpPr>
-        <p:sp>
-          <p:nvSpPr>
-            <p:cNvPr id="10" name="Rechteck 9">
-              <a:extLst>
-                <a:ext uri="{FF2B5EF4-FFF2-40B4-BE49-F238E27FC236}">
-                  <a16:creationId xmlns:a16="http://schemas.microsoft.com/office/drawing/2014/main" id="{1FC3AD65-8337-40EA-88E3-B0A8EEB820D4}"/>
-                </a:ext>
-              </a:extLst>
-            </p:cNvPr>
-            <p:cNvSpPr/>
-            <p:nvPr/>
-          </p:nvSpPr>
-          <p:spPr>
-            <a:xfrm>
-              <a:off x="609600" y="2609850"/>
-              <a:ext cx="733425" cy="381000"/>
-            </a:xfrm>
-            <a:prstGeom prst="rect">
-              <a:avLst/>
-            </a:prstGeom>
-            <a:solidFill>
-              <a:srgbClr val="2F57B2"/>
-            </a:solidFill>
-            <a:ln>
-              <a:noFill/>
-            </a:ln>
-          </p:spPr>
-          <p:style>
-            <a:lnRef idx="2">
-              <a:schemeClr val="accent1">
-                <a:shade val="50000"/>
-              </a:schemeClr>
-            </a:lnRef>
-            <a:fillRef idx="1">
-              <a:schemeClr val="accent1"/>
-            </a:fillRef>
-            <a:effectRef idx="0">
-              <a:schemeClr val="accent1"/>
-            </a:effectRef>
-            <a:fontRef idx="minor">
-              <a:schemeClr val="lt1"/>
-            </a:fontRef>
-          </p:style>
-          <p:txBody>
-            <a:bodyPr rtlCol="0" anchor="ctr"/>
-            <a:lstStyle/>
-            <a:p>
-              <a:pPr algn="ctr"/>
-              <a:endParaRPr lang="en-US"/>
-            </a:p>
-          </p:txBody>
-        </p:sp>
-        <p:sp>
-          <p:nvSpPr>
-            <p:cNvPr id="11" name="Rechteck 10">
-              <a:extLst>
-                <a:ext uri="{FF2B5EF4-FFF2-40B4-BE49-F238E27FC236}">
-                  <a16:creationId xmlns:a16="http://schemas.microsoft.com/office/drawing/2014/main" id="{FE25C7C2-63CE-47E9-A199-B615234159FA}"/>
-                </a:ext>
-              </a:extLst>
-            </p:cNvPr>
-            <p:cNvSpPr/>
-            <p:nvPr/>
-          </p:nvSpPr>
-          <p:spPr>
-            <a:xfrm>
-              <a:off x="1889522" y="2609850"/>
-              <a:ext cx="733425" cy="381000"/>
-            </a:xfrm>
-            <a:prstGeom prst="rect">
-              <a:avLst/>
-            </a:prstGeom>
-            <a:solidFill>
-              <a:srgbClr val="7369BE"/>
-            </a:solidFill>
-            <a:ln>
-              <a:noFill/>
-            </a:ln>
-          </p:spPr>
-          <p:style>
-            <a:lnRef idx="2">
-              <a:schemeClr val="accent1">
-                <a:shade val="50000"/>
-              </a:schemeClr>
-            </a:lnRef>
-            <a:fillRef idx="1">
-              <a:schemeClr val="accent1"/>
-            </a:fillRef>
-            <a:effectRef idx="0">
-              <a:schemeClr val="accent1"/>
-            </a:effectRef>
-            <a:fontRef idx="minor">
-              <a:schemeClr val="lt1"/>
-            </a:fontRef>
-          </p:style>
-          <p:txBody>
-            <a:bodyPr rtlCol="0" anchor="ctr"/>
-            <a:lstStyle/>
-            <a:p>
-              <a:pPr algn="ctr"/>
-              <a:endParaRPr lang="en-US"/>
-            </a:p>
-          </p:txBody>
-        </p:sp>
-        <p:sp>
-          <p:nvSpPr>
-            <p:cNvPr id="12" name="Rechteck 11">
-              <a:extLst>
-                <a:ext uri="{FF2B5EF4-FFF2-40B4-BE49-F238E27FC236}">
-                  <a16:creationId xmlns:a16="http://schemas.microsoft.com/office/drawing/2014/main" id="{AFD7EEEF-4DC0-46B5-9B4F-E8AED738FCA3}"/>
-                </a:ext>
-              </a:extLst>
-            </p:cNvPr>
-            <p:cNvSpPr/>
-            <p:nvPr/>
-          </p:nvSpPr>
-          <p:spPr>
-            <a:xfrm>
-              <a:off x="3169444" y="2609850"/>
-              <a:ext cx="733425" cy="381000"/>
-            </a:xfrm>
-            <a:prstGeom prst="rect">
-              <a:avLst/>
-            </a:prstGeom>
-            <a:solidFill>
-              <a:srgbClr val="BC1589"/>
-            </a:solidFill>
-            <a:ln>
-              <a:noFill/>
-            </a:ln>
-          </p:spPr>
-          <p:style>
-            <a:lnRef idx="2">
-              <a:schemeClr val="accent1">
-                <a:shade val="50000"/>
-              </a:schemeClr>
-            </a:lnRef>
-            <a:fillRef idx="1">
-              <a:schemeClr val="accent1"/>
-            </a:fillRef>
-            <a:effectRef idx="0">
-              <a:schemeClr val="accent1"/>
-            </a:effectRef>
-            <a:fontRef idx="minor">
-              <a:schemeClr val="lt1"/>
-            </a:fontRef>
-          </p:style>
-          <p:txBody>
-            <a:bodyPr rtlCol="0" anchor="ctr"/>
-            <a:lstStyle/>
-            <a:p>
-              <a:pPr algn="ctr"/>
-              <a:endParaRPr lang="en-US"/>
-            </a:p>
-          </p:txBody>
-        </p:sp>
-        <p:sp>
-          <p:nvSpPr>
-            <p:cNvPr id="13" name="Rechteck 12">
-              <a:extLst>
-                <a:ext uri="{FF2B5EF4-FFF2-40B4-BE49-F238E27FC236}">
-                  <a16:creationId xmlns:a16="http://schemas.microsoft.com/office/drawing/2014/main" id="{459AE714-FBEC-4415-8E6C-E4B3ADE523E9}"/>
-                </a:ext>
-              </a:extLst>
-            </p:cNvPr>
-            <p:cNvSpPr/>
-            <p:nvPr/>
-          </p:nvSpPr>
-          <p:spPr>
-            <a:xfrm>
-              <a:off x="4449366" y="2609850"/>
-              <a:ext cx="733425" cy="381000"/>
-            </a:xfrm>
-            <a:prstGeom prst="rect">
-              <a:avLst/>
-            </a:prstGeom>
-            <a:solidFill>
-              <a:srgbClr val="D20F41"/>
-            </a:solidFill>
-            <a:ln>
-              <a:noFill/>
-            </a:ln>
-          </p:spPr>
-          <p:style>
-            <a:lnRef idx="2">
-              <a:schemeClr val="accent1">
-                <a:shade val="50000"/>
-              </a:schemeClr>
-            </a:lnRef>
-            <a:fillRef idx="1">
-              <a:schemeClr val="accent1"/>
-            </a:fillRef>
-            <a:effectRef idx="0">
-              <a:schemeClr val="accent1"/>
-            </a:effectRef>
-            <a:fontRef idx="minor">
-              <a:schemeClr val="lt1"/>
-            </a:fontRef>
-          </p:style>
-          <p:txBody>
-            <a:bodyPr rtlCol="0" anchor="ctr"/>
-            <a:lstStyle/>
-            <a:p>
-              <a:pPr algn="ctr"/>
-              <a:endParaRPr lang="en-US"/>
-            </a:p>
-          </p:txBody>
-        </p:sp>
-        <p:sp>
-          <p:nvSpPr>
-            <p:cNvPr id="14" name="Rechteck 13">
-              <a:extLst>
-                <a:ext uri="{FF2B5EF4-FFF2-40B4-BE49-F238E27FC236}">
-                  <a16:creationId xmlns:a16="http://schemas.microsoft.com/office/drawing/2014/main" id="{BA3EF785-ECD3-4474-B482-2F3805D7C1A5}"/>
-                </a:ext>
-              </a:extLst>
-            </p:cNvPr>
-            <p:cNvSpPr/>
-            <p:nvPr/>
-          </p:nvSpPr>
-          <p:spPr>
-            <a:xfrm>
-              <a:off x="5729288" y="2609850"/>
-              <a:ext cx="733425" cy="381000"/>
-            </a:xfrm>
-            <a:prstGeom prst="rect">
-              <a:avLst/>
-            </a:prstGeom>
-            <a:solidFill>
-              <a:srgbClr val="C85000"/>
-            </a:solidFill>
-            <a:ln>
-              <a:noFill/>
-            </a:ln>
-          </p:spPr>
-          <p:style>
-            <a:lnRef idx="2">
-              <a:schemeClr val="accent1">
-                <a:shade val="50000"/>
-              </a:schemeClr>
-            </a:lnRef>
-            <a:fillRef idx="1">
-              <a:schemeClr val="accent1"/>
-            </a:fillRef>
-            <a:effectRef idx="0">
-              <a:schemeClr val="accent1"/>
-            </a:effectRef>
-            <a:fontRef idx="minor">
-              <a:schemeClr val="lt1"/>
-            </a:fontRef>
-          </p:style>
-          <p:txBody>
-            <a:bodyPr rtlCol="0" anchor="ctr"/>
-            <a:lstStyle/>
-            <a:p>
-              <a:pPr algn="ctr"/>
-              <a:endParaRPr lang="en-US"/>
-            </a:p>
-          </p:txBody>
-        </p:sp>
-        <p:sp>
-          <p:nvSpPr>
-            <p:cNvPr id="15" name="Rechteck 14">
-              <a:extLst>
-                <a:ext uri="{FF2B5EF4-FFF2-40B4-BE49-F238E27FC236}">
-                  <a16:creationId xmlns:a16="http://schemas.microsoft.com/office/drawing/2014/main" id="{84ECD5B7-3900-4884-A382-8DEB480B10F1}"/>
-                </a:ext>
-              </a:extLst>
-            </p:cNvPr>
-            <p:cNvSpPr/>
-            <p:nvPr/>
-          </p:nvSpPr>
-          <p:spPr>
-            <a:xfrm>
-              <a:off x="7009210" y="2609850"/>
-              <a:ext cx="733425" cy="381000"/>
-            </a:xfrm>
-            <a:prstGeom prst="rect">
-              <a:avLst/>
-            </a:prstGeom>
-            <a:solidFill>
-              <a:srgbClr val="FFC700"/>
-            </a:solidFill>
-            <a:ln>
-              <a:noFill/>
-            </a:ln>
-          </p:spPr>
-          <p:style>
-            <a:lnRef idx="2">
-              <a:schemeClr val="accent1">
-                <a:shade val="50000"/>
-              </a:schemeClr>
-            </a:lnRef>
-            <a:fillRef idx="1">
-              <a:schemeClr val="accent1"/>
-            </a:fillRef>
-            <a:effectRef idx="0">
-              <a:schemeClr val="accent1"/>
-            </a:effectRef>
-            <a:fontRef idx="minor">
-              <a:schemeClr val="lt1"/>
-            </a:fontRef>
-          </p:style>
-          <p:txBody>
-            <a:bodyPr rtlCol="0" anchor="ctr"/>
-            <a:lstStyle/>
-            <a:p>
-              <a:pPr algn="ctr"/>
-              <a:endParaRPr lang="en-US"/>
-            </a:p>
-          </p:txBody>
-        </p:sp>
-        <p:sp>
-          <p:nvSpPr>
-            <p:cNvPr id="16" name="Rechteck 15">
-              <a:extLst>
-                <a:ext uri="{FF2B5EF4-FFF2-40B4-BE49-F238E27FC236}">
-                  <a16:creationId xmlns:a16="http://schemas.microsoft.com/office/drawing/2014/main" id="{3DB30718-7156-48F7-887E-E8CC188CFDA7}"/>
-                </a:ext>
-              </a:extLst>
-            </p:cNvPr>
-            <p:cNvSpPr/>
-            <p:nvPr/>
-          </p:nvSpPr>
-          <p:spPr>
-            <a:xfrm>
-              <a:off x="8289132" y="2609850"/>
-              <a:ext cx="733425" cy="381000"/>
-            </a:xfrm>
-            <a:prstGeom prst="rect">
-              <a:avLst/>
-            </a:prstGeom>
-            <a:solidFill>
-              <a:srgbClr val="767A23"/>
-            </a:solidFill>
-            <a:ln>
-              <a:noFill/>
-            </a:ln>
-          </p:spPr>
-          <p:style>
-            <a:lnRef idx="2">
-              <a:schemeClr val="accent1">
-                <a:shade val="50000"/>
-              </a:schemeClr>
-            </a:lnRef>
-            <a:fillRef idx="1">
-              <a:schemeClr val="accent1"/>
-            </a:fillRef>
-            <a:effectRef idx="0">
-              <a:schemeClr val="accent1"/>
-            </a:effectRef>
-            <a:fontRef idx="minor">
-              <a:schemeClr val="lt1"/>
-            </a:fontRef>
-          </p:style>
-          <p:txBody>
-            <a:bodyPr rtlCol="0" anchor="ctr"/>
-            <a:lstStyle/>
-            <a:p>
-              <a:pPr algn="ctr"/>
-              <a:endParaRPr lang="en-US"/>
-            </a:p>
-          </p:txBody>
-        </p:sp>
-        <p:sp>
-          <p:nvSpPr>
-            <p:cNvPr id="17" name="Rechteck 16">
-              <a:extLst>
-                <a:ext uri="{FF2B5EF4-FFF2-40B4-BE49-F238E27FC236}">
-                  <a16:creationId xmlns:a16="http://schemas.microsoft.com/office/drawing/2014/main" id="{D120921B-0757-4264-BF3D-1E5FDDD63614}"/>
-                </a:ext>
-              </a:extLst>
-            </p:cNvPr>
-            <p:cNvSpPr/>
-            <p:nvPr/>
-          </p:nvSpPr>
-          <p:spPr>
-            <a:xfrm>
-              <a:off x="9569054" y="2609850"/>
-              <a:ext cx="733425" cy="381000"/>
-            </a:xfrm>
-            <a:prstGeom prst="rect">
-              <a:avLst/>
-            </a:prstGeom>
-            <a:solidFill>
-              <a:srgbClr val="007D4B"/>
-            </a:solidFill>
-            <a:ln>
-              <a:noFill/>
-            </a:ln>
-          </p:spPr>
-          <p:style>
-            <a:lnRef idx="2">
-              <a:schemeClr val="accent1">
-                <a:shade val="50000"/>
-              </a:schemeClr>
-            </a:lnRef>
-            <a:fillRef idx="1">
-              <a:schemeClr val="accent1"/>
-            </a:fillRef>
-            <a:effectRef idx="0">
-              <a:schemeClr val="accent1"/>
-            </a:effectRef>
-            <a:fontRef idx="minor">
-              <a:schemeClr val="lt1"/>
-            </a:fontRef>
-          </p:style>
-          <p:txBody>
-            <a:bodyPr rtlCol="0" anchor="ctr"/>
-            <a:lstStyle/>
-            <a:p>
-              <a:pPr algn="ctr"/>
-              <a:endParaRPr lang="en-US"/>
-            </a:p>
-          </p:txBody>
-        </p:sp>
-        <p:sp>
-          <p:nvSpPr>
-            <p:cNvPr id="18" name="Rechteck 17">
-              <a:extLst>
-                <a:ext uri="{FF2B5EF4-FFF2-40B4-BE49-F238E27FC236}">
-                  <a16:creationId xmlns:a16="http://schemas.microsoft.com/office/drawing/2014/main" id="{25DFB171-B7F2-4262-A1ED-1DFEA8A78F62}"/>
-                </a:ext>
-              </a:extLst>
-            </p:cNvPr>
-            <p:cNvSpPr/>
-            <p:nvPr/>
-          </p:nvSpPr>
-          <p:spPr>
-            <a:xfrm>
-              <a:off x="10848975" y="2609850"/>
-              <a:ext cx="733425" cy="381000"/>
-            </a:xfrm>
-            <a:prstGeom prst="rect">
-              <a:avLst/>
-            </a:prstGeom>
-            <a:solidFill>
-              <a:srgbClr val="0A777F"/>
-            </a:solidFill>
-            <a:ln>
-              <a:noFill/>
-            </a:ln>
-          </p:spPr>
-          <p:style>
-            <a:lnRef idx="2">
-              <a:schemeClr val="accent1">
-                <a:shade val="50000"/>
-              </a:schemeClr>
-            </a:lnRef>
-            <a:fillRef idx="1">
-              <a:schemeClr val="accent1"/>
-            </a:fillRef>
-            <a:effectRef idx="0">
-              <a:schemeClr val="accent1"/>
-            </a:effectRef>
-            <a:fontRef idx="minor">
-              <a:schemeClr val="lt1"/>
-            </a:fontRef>
-          </p:style>
-          <p:txBody>
-            <a:bodyPr rtlCol="0" anchor="ctr"/>
-            <a:lstStyle/>
-            <a:p>
-              <a:pPr algn="ctr"/>
-              <a:endParaRPr lang="en-US"/>
-            </a:p>
-          </p:txBody>
-        </p:sp>
-        <p:sp>
-          <p:nvSpPr>
-            <p:cNvPr id="45" name="Textfeld 44">
-              <a:extLst>
-                <a:ext uri="{FF2B5EF4-FFF2-40B4-BE49-F238E27FC236}">
-                  <a16:creationId xmlns:a16="http://schemas.microsoft.com/office/drawing/2014/main" id="{A0B61FC9-92DE-4BF9-8408-FD004145574F}"/>
-                </a:ext>
-              </a:extLst>
-            </p:cNvPr>
-            <p:cNvSpPr txBox="1"/>
-            <p:nvPr/>
-          </p:nvSpPr>
-          <p:spPr>
-            <a:xfrm>
-              <a:off x="609600" y="3100785"/>
-              <a:ext cx="1200150" cy="615553"/>
-            </a:xfrm>
-            <a:prstGeom prst="rect">
-              <a:avLst/>
-            </a:prstGeom>
-            <a:noFill/>
-          </p:spPr>
-          <p:txBody>
-            <a:bodyPr wrap="square" lIns="0" tIns="0" rIns="0" bIns="0" rtlCol="0">
-              <a:spAutoFit/>
-            </a:bodyPr>
-            <a:lstStyle/>
-            <a:p>
-              <a:r>
-                <a:rPr lang="en-US" sz="800" dirty="0" err="1"/>
-                <a:t>Blau</a:t>
-              </a:r>
-              <a:r>
-                <a:rPr lang="en-US" sz="800" dirty="0"/>
-                <a:t> 1</a:t>
-              </a:r>
-            </a:p>
-            <a:p>
-              <a:pPr>
-                <a:tabLst>
-                  <a:tab pos="360000" algn="l"/>
-                </a:tabLst>
-              </a:pPr>
-              <a:r>
-                <a:rPr lang="en-US" sz="800" dirty="0"/>
-                <a:t>Hex	#2F57B2</a:t>
-              </a:r>
-            </a:p>
-            <a:p>
-              <a:pPr>
-                <a:tabLst>
-                  <a:tab pos="360000" algn="l"/>
-                </a:tabLst>
-              </a:pPr>
-              <a:r>
-                <a:rPr lang="en-US" sz="800" dirty="0"/>
-                <a:t>RGB	47 / 87 / 178</a:t>
-              </a:r>
-            </a:p>
-            <a:p>
-              <a:pPr>
-                <a:tabLst>
-                  <a:tab pos="360000" algn="l"/>
-                </a:tabLst>
-              </a:pPr>
-              <a:r>
-                <a:rPr lang="en-US" sz="800" dirty="0"/>
-                <a:t>CMYK	90 / 50 / 0 / 0</a:t>
-              </a:r>
-            </a:p>
-            <a:p>
-              <a:pPr>
-                <a:tabLst>
-                  <a:tab pos="360000" algn="l"/>
-                </a:tabLst>
-              </a:pPr>
-              <a:r>
-                <a:rPr lang="en-US" sz="800" dirty="0"/>
-                <a:t>NCS	3050-R90B</a:t>
-              </a:r>
-            </a:p>
-          </p:txBody>
-        </p:sp>
-        <p:sp>
-          <p:nvSpPr>
-            <p:cNvPr id="46" name="Textfeld 45">
-              <a:extLst>
-                <a:ext uri="{FF2B5EF4-FFF2-40B4-BE49-F238E27FC236}">
-                  <a16:creationId xmlns:a16="http://schemas.microsoft.com/office/drawing/2014/main" id="{B54B16F4-BD41-4EE8-B67B-79B4C18725B2}"/>
-                </a:ext>
-              </a:extLst>
-            </p:cNvPr>
-            <p:cNvSpPr txBox="1"/>
-            <p:nvPr/>
-          </p:nvSpPr>
-          <p:spPr>
-            <a:xfrm>
-              <a:off x="1889522" y="3100785"/>
-              <a:ext cx="1200150" cy="615553"/>
-            </a:xfrm>
-            <a:prstGeom prst="rect">
-              <a:avLst/>
-            </a:prstGeom>
-            <a:noFill/>
-          </p:spPr>
-          <p:txBody>
-            <a:bodyPr wrap="square" lIns="0" tIns="0" rIns="0" bIns="0" rtlCol="0">
-              <a:spAutoFit/>
-            </a:bodyPr>
-            <a:lstStyle/>
-            <a:p>
-              <a:pPr>
-                <a:tabLst>
-                  <a:tab pos="360000" algn="l"/>
-                </a:tabLst>
-              </a:pPr>
-              <a:r>
-                <a:rPr lang="en-US" sz="800" dirty="0" err="1"/>
-                <a:t>Violett</a:t>
-              </a:r>
-              <a:r>
-                <a:rPr lang="en-US" sz="800" dirty="0"/>
-                <a:t> 1</a:t>
-              </a:r>
-            </a:p>
-            <a:p>
-              <a:pPr>
-                <a:tabLst>
-                  <a:tab pos="360000" algn="l"/>
-                </a:tabLst>
-              </a:pPr>
-              <a:r>
-                <a:rPr lang="en-US" sz="800" dirty="0"/>
-                <a:t>Hex	#7369BE</a:t>
-              </a:r>
-            </a:p>
-            <a:p>
-              <a:pPr>
-                <a:tabLst>
-                  <a:tab pos="360000" algn="l"/>
-                </a:tabLst>
-              </a:pPr>
-              <a:r>
-                <a:rPr lang="en-US" sz="800" dirty="0"/>
-                <a:t>RGB	115 / 105 / 190</a:t>
-              </a:r>
-            </a:p>
-            <a:p>
-              <a:pPr>
-                <a:tabLst>
-                  <a:tab pos="360000" algn="l"/>
-                </a:tabLst>
-              </a:pPr>
-              <a:r>
-                <a:rPr lang="en-US" sz="800" dirty="0"/>
-                <a:t>CMYK	64 / 62 / 0 / 0</a:t>
-              </a:r>
-            </a:p>
-            <a:p>
-              <a:pPr>
-                <a:tabLst>
-                  <a:tab pos="360000" algn="l"/>
-                </a:tabLst>
-              </a:pPr>
-              <a:r>
-                <a:rPr lang="en-US" sz="800" dirty="0"/>
-                <a:t>NCS	2050-R60B</a:t>
-              </a:r>
-            </a:p>
-          </p:txBody>
-        </p:sp>
-        <p:sp>
-          <p:nvSpPr>
-            <p:cNvPr id="47" name="Textfeld 46">
-              <a:extLst>
-                <a:ext uri="{FF2B5EF4-FFF2-40B4-BE49-F238E27FC236}">
-                  <a16:creationId xmlns:a16="http://schemas.microsoft.com/office/drawing/2014/main" id="{97172466-33ED-4CC1-92DE-5502E8AB8393}"/>
-                </a:ext>
-              </a:extLst>
-            </p:cNvPr>
-            <p:cNvSpPr txBox="1"/>
-            <p:nvPr/>
-          </p:nvSpPr>
-          <p:spPr>
-            <a:xfrm>
-              <a:off x="3169444" y="3100785"/>
-              <a:ext cx="1200150" cy="615553"/>
-            </a:xfrm>
-            <a:prstGeom prst="rect">
-              <a:avLst/>
-            </a:prstGeom>
-            <a:noFill/>
-          </p:spPr>
-          <p:txBody>
-            <a:bodyPr wrap="square" lIns="0" tIns="0" rIns="0" bIns="0" rtlCol="0">
-              <a:spAutoFit/>
-            </a:bodyPr>
-            <a:lstStyle/>
-            <a:p>
-              <a:pPr>
-                <a:tabLst>
-                  <a:tab pos="360000" algn="l"/>
-                </a:tabLst>
-              </a:pPr>
-              <a:r>
-                <a:rPr lang="en-US" sz="800" dirty="0"/>
-                <a:t>Magenta 1</a:t>
-              </a:r>
-            </a:p>
-            <a:p>
-              <a:pPr>
-                <a:tabLst>
-                  <a:tab pos="360000" algn="l"/>
-                </a:tabLst>
-              </a:pPr>
-              <a:r>
-                <a:rPr lang="en-US" sz="800" dirty="0"/>
-                <a:t>Hex	#BC1589</a:t>
-              </a:r>
-            </a:p>
-            <a:p>
-              <a:pPr>
-                <a:tabLst>
-                  <a:tab pos="360000" algn="l"/>
-                </a:tabLst>
-              </a:pPr>
-              <a:r>
-                <a:rPr lang="en-US" sz="800" dirty="0"/>
-                <a:t>RGB	188 / 21 / 137</a:t>
-              </a:r>
-            </a:p>
-            <a:p>
-              <a:pPr>
-                <a:tabLst>
-                  <a:tab pos="360000" algn="l"/>
-                </a:tabLst>
-              </a:pPr>
-              <a:r>
-                <a:rPr lang="en-US" sz="800" dirty="0"/>
-                <a:t>CMYK	30 / 96 / 0 / 0</a:t>
-              </a:r>
-            </a:p>
-            <a:p>
-              <a:pPr>
-                <a:tabLst>
-                  <a:tab pos="360000" algn="l"/>
-                </a:tabLst>
-              </a:pPr>
-              <a:r>
-                <a:rPr lang="en-US" sz="800" dirty="0"/>
-                <a:t>NCS	2060-R40B</a:t>
-              </a:r>
-            </a:p>
-          </p:txBody>
-        </p:sp>
-        <p:sp>
-          <p:nvSpPr>
-            <p:cNvPr id="48" name="Textfeld 47">
-              <a:extLst>
-                <a:ext uri="{FF2B5EF4-FFF2-40B4-BE49-F238E27FC236}">
-                  <a16:creationId xmlns:a16="http://schemas.microsoft.com/office/drawing/2014/main" id="{DEE3163C-D613-4E28-9A9C-09979C7175C2}"/>
-                </a:ext>
-              </a:extLst>
-            </p:cNvPr>
-            <p:cNvSpPr txBox="1"/>
-            <p:nvPr/>
-          </p:nvSpPr>
-          <p:spPr>
-            <a:xfrm>
-              <a:off x="4449366" y="3100785"/>
-              <a:ext cx="1200150" cy="615553"/>
-            </a:xfrm>
-            <a:prstGeom prst="rect">
-              <a:avLst/>
-            </a:prstGeom>
-            <a:noFill/>
-          </p:spPr>
-          <p:txBody>
-            <a:bodyPr wrap="square" lIns="0" tIns="0" rIns="0" bIns="0" rtlCol="0">
-              <a:spAutoFit/>
-            </a:bodyPr>
-            <a:lstStyle/>
-            <a:p>
-              <a:pPr>
-                <a:tabLst>
-                  <a:tab pos="360000" algn="l"/>
-                </a:tabLst>
-              </a:pPr>
-              <a:r>
-                <a:rPr lang="nn-NO" sz="800" dirty="0"/>
-                <a:t>Rot 1</a:t>
-              </a:r>
-            </a:p>
-            <a:p>
-              <a:pPr>
-                <a:tabLst>
-                  <a:tab pos="360000" algn="l"/>
-                </a:tabLst>
-              </a:pPr>
-              <a:r>
-                <a:rPr lang="nn-NO" sz="800" dirty="0"/>
-                <a:t>Hex	#D20F41</a:t>
-              </a:r>
-            </a:p>
-            <a:p>
-              <a:pPr>
-                <a:tabLst>
-                  <a:tab pos="360000" algn="l"/>
-                </a:tabLst>
-              </a:pPr>
-              <a:r>
-                <a:rPr lang="nn-NO" sz="800" dirty="0"/>
-                <a:t>RGB	210 / 15 / 65</a:t>
-              </a:r>
-            </a:p>
-            <a:p>
-              <a:pPr>
-                <a:tabLst>
-                  <a:tab pos="360000" algn="l"/>
-                </a:tabLst>
-              </a:pPr>
-              <a:r>
-                <a:rPr lang="nn-NO" sz="800" dirty="0"/>
-                <a:t>CMYK	0 / 100 / 60 / 0</a:t>
-              </a:r>
-            </a:p>
-            <a:p>
-              <a:pPr>
-                <a:tabLst>
-                  <a:tab pos="360000" algn="l"/>
-                </a:tabLst>
-              </a:pPr>
-              <a:r>
-                <a:rPr lang="nn-NO" sz="800" dirty="0"/>
-                <a:t>NCS	1080-R</a:t>
-              </a:r>
-              <a:endParaRPr lang="en-US" sz="800" dirty="0"/>
-            </a:p>
-          </p:txBody>
-        </p:sp>
-        <p:sp>
-          <p:nvSpPr>
-            <p:cNvPr id="49" name="Textfeld 48">
-              <a:extLst>
-                <a:ext uri="{FF2B5EF4-FFF2-40B4-BE49-F238E27FC236}">
-                  <a16:creationId xmlns:a16="http://schemas.microsoft.com/office/drawing/2014/main" id="{8ADAC513-C015-41BE-8F24-4F71D1D97649}"/>
-                </a:ext>
-              </a:extLst>
-            </p:cNvPr>
-            <p:cNvSpPr txBox="1"/>
-            <p:nvPr/>
-          </p:nvSpPr>
-          <p:spPr>
-            <a:xfrm>
-              <a:off x="5729288" y="3100785"/>
-              <a:ext cx="1200150" cy="615553"/>
-            </a:xfrm>
-            <a:prstGeom prst="rect">
-              <a:avLst/>
-            </a:prstGeom>
-            <a:noFill/>
-          </p:spPr>
-          <p:txBody>
-            <a:bodyPr wrap="square" lIns="0" tIns="0" rIns="0" bIns="0" rtlCol="0">
-              <a:spAutoFit/>
-            </a:bodyPr>
-            <a:lstStyle/>
-            <a:p>
-              <a:pPr>
-                <a:tabLst>
-                  <a:tab pos="360000" algn="l"/>
-                </a:tabLst>
-              </a:pPr>
-              <a:r>
-                <a:rPr lang="en-US" sz="800" dirty="0"/>
-                <a:t>Orange 1</a:t>
-              </a:r>
-            </a:p>
-            <a:p>
-              <a:pPr>
-                <a:tabLst>
-                  <a:tab pos="360000" algn="l"/>
-                </a:tabLst>
-              </a:pPr>
-              <a:r>
-                <a:rPr lang="en-US" sz="800" dirty="0"/>
-                <a:t>Hex	#C85000</a:t>
-              </a:r>
-            </a:p>
-            <a:p>
-              <a:pPr>
-                <a:tabLst>
-                  <a:tab pos="360000" algn="l"/>
-                </a:tabLst>
-              </a:pPr>
-              <a:r>
-                <a:rPr lang="en-US" sz="800" dirty="0"/>
-                <a:t>RGB	200 / 80 / 0</a:t>
-              </a:r>
-            </a:p>
-            <a:p>
-              <a:pPr>
-                <a:tabLst>
-                  <a:tab pos="360000" algn="l"/>
-                </a:tabLst>
-              </a:pPr>
-              <a:r>
-                <a:rPr lang="en-US" sz="800" dirty="0"/>
-                <a:t>CMYK	0 / 90 / 100 / 20</a:t>
-              </a:r>
-            </a:p>
-            <a:p>
-              <a:pPr>
-                <a:tabLst>
-                  <a:tab pos="360000" algn="l"/>
-                </a:tabLst>
-              </a:pPr>
-              <a:r>
-                <a:rPr lang="en-US" sz="800" dirty="0"/>
-                <a:t>NCS	2075-Y70R</a:t>
-              </a:r>
-            </a:p>
-          </p:txBody>
-        </p:sp>
-        <p:sp>
-          <p:nvSpPr>
-            <p:cNvPr id="50" name="Textfeld 49">
-              <a:extLst>
-                <a:ext uri="{FF2B5EF4-FFF2-40B4-BE49-F238E27FC236}">
-                  <a16:creationId xmlns:a16="http://schemas.microsoft.com/office/drawing/2014/main" id="{7A3F46FD-A442-404E-9C2C-744A39C9E27F}"/>
-                </a:ext>
-              </a:extLst>
-            </p:cNvPr>
-            <p:cNvSpPr txBox="1"/>
-            <p:nvPr/>
-          </p:nvSpPr>
-          <p:spPr>
-            <a:xfrm>
-              <a:off x="7009210" y="3100785"/>
-              <a:ext cx="1200150" cy="615553"/>
-            </a:xfrm>
-            <a:prstGeom prst="rect">
-              <a:avLst/>
-            </a:prstGeom>
-            <a:noFill/>
-          </p:spPr>
-          <p:txBody>
-            <a:bodyPr wrap="square" lIns="0" tIns="0" rIns="0" bIns="0" rtlCol="0">
-              <a:spAutoFit/>
-            </a:bodyPr>
-            <a:lstStyle/>
-            <a:p>
-              <a:pPr>
-                <a:tabLst>
-                  <a:tab pos="360000" algn="l"/>
-                </a:tabLst>
-              </a:pPr>
-              <a:r>
-                <a:rPr lang="en-US" sz="800" dirty="0"/>
-                <a:t>Gelb 1</a:t>
-              </a:r>
-            </a:p>
-            <a:p>
-              <a:pPr>
-                <a:tabLst>
-                  <a:tab pos="360000" algn="l"/>
-                </a:tabLst>
-              </a:pPr>
-              <a:r>
-                <a:rPr lang="en-US" sz="800" dirty="0"/>
-                <a:t>Hex	#FFC700</a:t>
-              </a:r>
-            </a:p>
-            <a:p>
-              <a:pPr>
-                <a:tabLst>
-                  <a:tab pos="360000" algn="l"/>
-                </a:tabLst>
-              </a:pPr>
-              <a:r>
-                <a:rPr lang="en-US" sz="800" dirty="0"/>
-                <a:t>RGB	255 / 199 / 0</a:t>
-              </a:r>
-            </a:p>
-            <a:p>
-              <a:pPr>
-                <a:tabLst>
-                  <a:tab pos="360000" algn="l"/>
-                </a:tabLst>
-              </a:pPr>
-              <a:r>
-                <a:rPr lang="en-US" sz="800" dirty="0"/>
-                <a:t>CMYK	0 / 25 / 100 / 0</a:t>
-              </a:r>
-            </a:p>
-            <a:p>
-              <a:pPr>
-                <a:tabLst>
-                  <a:tab pos="360000" algn="l"/>
-                </a:tabLst>
-              </a:pPr>
-              <a:r>
-                <a:rPr lang="en-US" sz="800" dirty="0"/>
-                <a:t>NCS	0580-Y10R</a:t>
-              </a:r>
-            </a:p>
-          </p:txBody>
-        </p:sp>
-        <p:sp>
-          <p:nvSpPr>
-            <p:cNvPr id="51" name="Textfeld 50">
-              <a:extLst>
-                <a:ext uri="{FF2B5EF4-FFF2-40B4-BE49-F238E27FC236}">
-                  <a16:creationId xmlns:a16="http://schemas.microsoft.com/office/drawing/2014/main" id="{E249D392-89A6-4E56-B61E-6A07B539BA89}"/>
-                </a:ext>
-              </a:extLst>
-            </p:cNvPr>
-            <p:cNvSpPr txBox="1"/>
-            <p:nvPr/>
-          </p:nvSpPr>
-          <p:spPr>
-            <a:xfrm>
-              <a:off x="8289132" y="3100785"/>
-              <a:ext cx="1200150" cy="615553"/>
-            </a:xfrm>
-            <a:prstGeom prst="rect">
-              <a:avLst/>
-            </a:prstGeom>
-            <a:noFill/>
-          </p:spPr>
-          <p:txBody>
-            <a:bodyPr wrap="square" lIns="0" tIns="0" rIns="0" bIns="0" rtlCol="0">
-              <a:spAutoFit/>
-            </a:bodyPr>
-            <a:lstStyle/>
-            <a:p>
-              <a:pPr>
-                <a:tabLst>
-                  <a:tab pos="360000" algn="l"/>
-                </a:tabLst>
-              </a:pPr>
-              <a:r>
-                <a:rPr lang="en-US" sz="800" dirty="0" err="1"/>
-                <a:t>Oliv</a:t>
-              </a:r>
-              <a:r>
-                <a:rPr lang="en-US" sz="800" dirty="0"/>
-                <a:t> 1</a:t>
-              </a:r>
-            </a:p>
-            <a:p>
-              <a:pPr>
-                <a:tabLst>
-                  <a:tab pos="360000" algn="l"/>
-                </a:tabLst>
-              </a:pPr>
-              <a:r>
-                <a:rPr lang="en-US" sz="800" dirty="0"/>
-                <a:t>Hex	#767A23</a:t>
-              </a:r>
-            </a:p>
-            <a:p>
-              <a:pPr>
-                <a:tabLst>
-                  <a:tab pos="360000" algn="l"/>
-                </a:tabLst>
-              </a:pPr>
-              <a:r>
-                <a:rPr lang="en-US" sz="800" dirty="0"/>
-                <a:t>RGB	118 / 122 / 35</a:t>
-              </a:r>
-            </a:p>
-            <a:p>
-              <a:pPr>
-                <a:tabLst>
-                  <a:tab pos="360000" algn="l"/>
-                </a:tabLst>
-              </a:pPr>
-              <a:r>
-                <a:rPr lang="en-US" sz="800" dirty="0"/>
-                <a:t>CMYK	50 / 35 / 100 / 22</a:t>
-              </a:r>
-            </a:p>
-            <a:p>
-              <a:pPr>
-                <a:tabLst>
-                  <a:tab pos="360000" algn="l"/>
-                </a:tabLst>
-              </a:pPr>
-              <a:r>
-                <a:rPr lang="en-US" sz="800" dirty="0"/>
-                <a:t>NCS	4040-G80Y</a:t>
-              </a:r>
-            </a:p>
-          </p:txBody>
-        </p:sp>
-        <p:sp>
-          <p:nvSpPr>
-            <p:cNvPr id="52" name="Textfeld 51">
-              <a:extLst>
-                <a:ext uri="{FF2B5EF4-FFF2-40B4-BE49-F238E27FC236}">
-                  <a16:creationId xmlns:a16="http://schemas.microsoft.com/office/drawing/2014/main" id="{D1588A47-C981-46CA-9716-0258B0E95FBD}"/>
-                </a:ext>
-              </a:extLst>
-            </p:cNvPr>
-            <p:cNvSpPr txBox="1"/>
-            <p:nvPr/>
-          </p:nvSpPr>
-          <p:spPr>
-            <a:xfrm>
-              <a:off x="9569054" y="3100785"/>
-              <a:ext cx="1200150" cy="615553"/>
-            </a:xfrm>
-            <a:prstGeom prst="rect">
-              <a:avLst/>
-            </a:prstGeom>
-            <a:noFill/>
-          </p:spPr>
-          <p:txBody>
-            <a:bodyPr wrap="square" lIns="0" tIns="0" rIns="0" bIns="0" rtlCol="0">
-              <a:spAutoFit/>
-            </a:bodyPr>
-            <a:lstStyle/>
-            <a:p>
-              <a:pPr>
-                <a:tabLst>
-                  <a:tab pos="360000" algn="l"/>
-                </a:tabLst>
-              </a:pPr>
-              <a:r>
-                <a:rPr lang="en-US" sz="800" dirty="0" err="1"/>
-                <a:t>Grün</a:t>
-              </a:r>
-              <a:r>
-                <a:rPr lang="en-US" sz="800" dirty="0"/>
-                <a:t> 1</a:t>
-              </a:r>
-            </a:p>
-            <a:p>
-              <a:pPr>
-                <a:tabLst>
-                  <a:tab pos="360000" algn="l"/>
-                </a:tabLst>
-              </a:pPr>
-              <a:r>
-                <a:rPr lang="en-US" sz="800" dirty="0"/>
-                <a:t>Hex	#007D4B</a:t>
-              </a:r>
-            </a:p>
-            <a:p>
-              <a:pPr>
-                <a:tabLst>
-                  <a:tab pos="360000" algn="l"/>
-                </a:tabLst>
-              </a:pPr>
-              <a:r>
-                <a:rPr lang="en-US" sz="800" dirty="0"/>
-                <a:t>RGB	0 / 125 / 75</a:t>
-              </a:r>
-            </a:p>
-            <a:p>
-              <a:pPr>
-                <a:tabLst>
-                  <a:tab pos="360000" algn="l"/>
-                </a:tabLst>
-              </a:pPr>
-              <a:r>
-                <a:rPr lang="en-US" sz="800" dirty="0"/>
-                <a:t>CMYK	90 / 0 / 80 / 15</a:t>
-              </a:r>
-            </a:p>
-            <a:p>
-              <a:pPr>
-                <a:tabLst>
-                  <a:tab pos="360000" algn="l"/>
-                </a:tabLst>
-              </a:pPr>
-              <a:r>
-                <a:rPr lang="en-US" sz="800" dirty="0"/>
-                <a:t>NCS	3050-G</a:t>
-              </a:r>
-            </a:p>
-          </p:txBody>
-        </p:sp>
-        <p:sp>
-          <p:nvSpPr>
-            <p:cNvPr id="53" name="Textfeld 52">
-              <a:extLst>
-                <a:ext uri="{FF2B5EF4-FFF2-40B4-BE49-F238E27FC236}">
-                  <a16:creationId xmlns:a16="http://schemas.microsoft.com/office/drawing/2014/main" id="{17B21D9B-AEC8-4E96-8A67-3F7A3E453047}"/>
-                </a:ext>
-              </a:extLst>
-            </p:cNvPr>
-            <p:cNvSpPr txBox="1"/>
-            <p:nvPr/>
-          </p:nvSpPr>
-          <p:spPr>
-            <a:xfrm>
-              <a:off x="10848975" y="3100785"/>
-              <a:ext cx="1200150" cy="615553"/>
-            </a:xfrm>
-            <a:prstGeom prst="rect">
-              <a:avLst/>
-            </a:prstGeom>
-            <a:noFill/>
-          </p:spPr>
-          <p:txBody>
-            <a:bodyPr wrap="square" lIns="0" tIns="0" rIns="0" bIns="0" rtlCol="0">
-              <a:spAutoFit/>
-            </a:bodyPr>
-            <a:lstStyle/>
-            <a:p>
-              <a:pPr>
-                <a:tabLst>
-                  <a:tab pos="360000" algn="l"/>
-                </a:tabLst>
-              </a:pPr>
-              <a:r>
-                <a:rPr lang="en-US" sz="800" dirty="0" err="1"/>
-                <a:t>Türkis</a:t>
-              </a:r>
-              <a:r>
-                <a:rPr lang="en-US" sz="800" dirty="0"/>
-                <a:t> 1</a:t>
-              </a:r>
-            </a:p>
-            <a:p>
-              <a:pPr>
-                <a:tabLst>
-                  <a:tab pos="360000" algn="l"/>
-                </a:tabLst>
-              </a:pPr>
-              <a:r>
-                <a:rPr lang="en-US" sz="800" dirty="0"/>
-                <a:t>Hex	#0A777F</a:t>
-              </a:r>
-            </a:p>
-            <a:p>
-              <a:pPr>
-                <a:tabLst>
-                  <a:tab pos="360000" algn="l"/>
-                </a:tabLst>
-              </a:pPr>
-              <a:r>
-                <a:rPr lang="en-US" sz="800" dirty="0"/>
-                <a:t>RGB	10 / 119 / 127</a:t>
-              </a:r>
-            </a:p>
-            <a:p>
-              <a:pPr>
-                <a:tabLst>
-                  <a:tab pos="360000" algn="l"/>
-                </a:tabLst>
-              </a:pPr>
-              <a:r>
-                <a:rPr lang="en-US" sz="800" dirty="0"/>
-                <a:t>CMYK	100 / 10 / 30 / 40</a:t>
-              </a:r>
-            </a:p>
-            <a:p>
-              <a:pPr>
-                <a:tabLst>
-                  <a:tab pos="360000" algn="l"/>
-                </a:tabLst>
-              </a:pPr>
-              <a:r>
-                <a:rPr lang="en-US" sz="800" dirty="0"/>
-                <a:t>NCS	3060-B10G</a:t>
-              </a:r>
-            </a:p>
-          </p:txBody>
-        </p:sp>
-      </p:grpSp>
-      <p:grpSp>
-        <p:nvGrpSpPr>
-          <p:cNvPr id="63" name="Gruppieren 62">
-            <a:extLst>
-              <a:ext uri="{FF2B5EF4-FFF2-40B4-BE49-F238E27FC236}">
-                <a16:creationId xmlns:a16="http://schemas.microsoft.com/office/drawing/2014/main" id="{0D2C28E4-D483-4DB7-9ED4-146FA2DA7A26}"/>
-              </a:ext>
-            </a:extLst>
-          </p:cNvPr>
-          <p:cNvGrpSpPr/>
-          <p:nvPr/>
-        </p:nvGrpSpPr>
-        <p:grpSpPr>
-          <a:xfrm>
-            <a:off x="596900" y="4681538"/>
-            <a:ext cx="11452225" cy="1120775"/>
-            <a:chOff x="596900" y="4138613"/>
-            <a:chExt cx="11452225" cy="1120775"/>
-          </a:xfrm>
-        </p:grpSpPr>
-        <p:sp>
-          <p:nvSpPr>
-            <p:cNvPr id="19" name="Rechteck 18">
-              <a:extLst>
-                <a:ext uri="{FF2B5EF4-FFF2-40B4-BE49-F238E27FC236}">
-                  <a16:creationId xmlns:a16="http://schemas.microsoft.com/office/drawing/2014/main" id="{C03525DC-6B00-499C-A028-67779E2A1795}"/>
-                </a:ext>
-              </a:extLst>
-            </p:cNvPr>
-            <p:cNvSpPr/>
-            <p:nvPr/>
-          </p:nvSpPr>
-          <p:spPr>
-            <a:xfrm>
-              <a:off x="596900" y="4138613"/>
-              <a:ext cx="733425" cy="381000"/>
-            </a:xfrm>
-            <a:prstGeom prst="rect">
-              <a:avLst/>
-            </a:prstGeom>
-            <a:solidFill>
-              <a:srgbClr val="97C6FF"/>
-            </a:solidFill>
-            <a:ln>
-              <a:noFill/>
-            </a:ln>
-          </p:spPr>
-          <p:style>
-            <a:lnRef idx="2">
-              <a:schemeClr val="accent1">
-                <a:shade val="50000"/>
-              </a:schemeClr>
-            </a:lnRef>
-            <a:fillRef idx="1">
-              <a:schemeClr val="accent1"/>
-            </a:fillRef>
-            <a:effectRef idx="0">
-              <a:schemeClr val="accent1"/>
-            </a:effectRef>
-            <a:fontRef idx="minor">
-              <a:schemeClr val="lt1"/>
-            </a:fontRef>
-          </p:style>
-          <p:txBody>
-            <a:bodyPr rtlCol="0" anchor="ctr"/>
-            <a:lstStyle/>
-            <a:p>
-              <a:pPr algn="ctr"/>
-              <a:endParaRPr lang="en-US"/>
-            </a:p>
-          </p:txBody>
-        </p:sp>
-        <p:sp>
-          <p:nvSpPr>
-            <p:cNvPr id="20" name="Rechteck 19">
-              <a:extLst>
-                <a:ext uri="{FF2B5EF4-FFF2-40B4-BE49-F238E27FC236}">
-                  <a16:creationId xmlns:a16="http://schemas.microsoft.com/office/drawing/2014/main" id="{7AD4994E-0655-4410-90DA-75EB1594F8A6}"/>
-                </a:ext>
-              </a:extLst>
-            </p:cNvPr>
-            <p:cNvSpPr/>
-            <p:nvPr/>
-          </p:nvSpPr>
-          <p:spPr>
-            <a:xfrm>
-              <a:off x="1878409" y="4138613"/>
-              <a:ext cx="733425" cy="381000"/>
-            </a:xfrm>
-            <a:prstGeom prst="rect">
-              <a:avLst/>
-            </a:prstGeom>
-            <a:solidFill>
-              <a:srgbClr val="C8C8FF"/>
-            </a:solidFill>
-            <a:ln>
-              <a:noFill/>
-            </a:ln>
-          </p:spPr>
-          <p:style>
-            <a:lnRef idx="2">
-              <a:schemeClr val="accent1">
-                <a:shade val="50000"/>
-              </a:schemeClr>
-            </a:lnRef>
-            <a:fillRef idx="1">
-              <a:schemeClr val="accent1"/>
-            </a:fillRef>
-            <a:effectRef idx="0">
-              <a:schemeClr val="accent1"/>
-            </a:effectRef>
-            <a:fontRef idx="minor">
-              <a:schemeClr val="lt1"/>
-            </a:fontRef>
-          </p:style>
-          <p:txBody>
-            <a:bodyPr rtlCol="0" anchor="ctr"/>
-            <a:lstStyle/>
-            <a:p>
-              <a:pPr algn="ctr"/>
-              <a:endParaRPr lang="en-US"/>
-            </a:p>
-          </p:txBody>
-        </p:sp>
-        <p:sp>
-          <p:nvSpPr>
-            <p:cNvPr id="21" name="Rechteck 20">
-              <a:extLst>
-                <a:ext uri="{FF2B5EF4-FFF2-40B4-BE49-F238E27FC236}">
-                  <a16:creationId xmlns:a16="http://schemas.microsoft.com/office/drawing/2014/main" id="{71E777B2-6E6B-40FC-A9D7-346217FF6FE6}"/>
-                </a:ext>
-              </a:extLst>
-            </p:cNvPr>
-            <p:cNvSpPr/>
-            <p:nvPr/>
-          </p:nvSpPr>
-          <p:spPr>
-            <a:xfrm>
-              <a:off x="3159918" y="4138613"/>
-              <a:ext cx="733425" cy="381000"/>
-            </a:xfrm>
-            <a:prstGeom prst="rect">
-              <a:avLst/>
-            </a:prstGeom>
-            <a:solidFill>
-              <a:srgbClr val="FFB9FF"/>
-            </a:solidFill>
-            <a:ln>
-              <a:noFill/>
-            </a:ln>
-          </p:spPr>
-          <p:style>
-            <a:lnRef idx="2">
-              <a:schemeClr val="accent1">
-                <a:shade val="50000"/>
-              </a:schemeClr>
-            </a:lnRef>
-            <a:fillRef idx="1">
-              <a:schemeClr val="accent1"/>
-            </a:fillRef>
-            <a:effectRef idx="0">
-              <a:schemeClr val="accent1"/>
-            </a:effectRef>
-            <a:fontRef idx="minor">
-              <a:schemeClr val="lt1"/>
-            </a:fontRef>
-          </p:style>
-          <p:txBody>
-            <a:bodyPr rtlCol="0" anchor="ctr"/>
-            <a:lstStyle/>
-            <a:p>
-              <a:pPr algn="ctr"/>
-              <a:endParaRPr lang="en-US"/>
-            </a:p>
-          </p:txBody>
-        </p:sp>
-        <p:sp>
-          <p:nvSpPr>
-            <p:cNvPr id="22" name="Rechteck 21">
-              <a:extLst>
-                <a:ext uri="{FF2B5EF4-FFF2-40B4-BE49-F238E27FC236}">
-                  <a16:creationId xmlns:a16="http://schemas.microsoft.com/office/drawing/2014/main" id="{1C8F898A-1C62-42E9-8192-36E04C8F0EE0}"/>
-                </a:ext>
-              </a:extLst>
-            </p:cNvPr>
-            <p:cNvSpPr/>
-            <p:nvPr/>
-          </p:nvSpPr>
-          <p:spPr>
-            <a:xfrm>
-              <a:off x="4441427" y="4138613"/>
-              <a:ext cx="733425" cy="381000"/>
-            </a:xfrm>
-            <a:prstGeom prst="rect">
-              <a:avLst/>
-            </a:prstGeom>
-            <a:solidFill>
-              <a:srgbClr val="FFAAA5"/>
-            </a:solidFill>
-            <a:ln>
-              <a:noFill/>
-            </a:ln>
-          </p:spPr>
-          <p:style>
-            <a:lnRef idx="2">
-              <a:schemeClr val="accent1">
-                <a:shade val="50000"/>
-              </a:schemeClr>
-            </a:lnRef>
-            <a:fillRef idx="1">
-              <a:schemeClr val="accent1"/>
-            </a:fillRef>
-            <a:effectRef idx="0">
-              <a:schemeClr val="accent1"/>
-            </a:effectRef>
-            <a:fontRef idx="minor">
-              <a:schemeClr val="lt1"/>
-            </a:fontRef>
-          </p:style>
-          <p:txBody>
-            <a:bodyPr rtlCol="0" anchor="ctr"/>
-            <a:lstStyle/>
-            <a:p>
-              <a:pPr algn="ctr"/>
-              <a:endParaRPr lang="en-US"/>
-            </a:p>
-          </p:txBody>
-        </p:sp>
-        <p:sp>
-          <p:nvSpPr>
-            <p:cNvPr id="23" name="Rechteck 22">
-              <a:extLst>
-                <a:ext uri="{FF2B5EF4-FFF2-40B4-BE49-F238E27FC236}">
-                  <a16:creationId xmlns:a16="http://schemas.microsoft.com/office/drawing/2014/main" id="{C9445892-E2B6-4CB0-B2AC-9B9033502294}"/>
-                </a:ext>
-              </a:extLst>
-            </p:cNvPr>
-            <p:cNvSpPr/>
-            <p:nvPr/>
-          </p:nvSpPr>
-          <p:spPr>
-            <a:xfrm>
-              <a:off x="5722936" y="4138613"/>
-              <a:ext cx="733425" cy="381000"/>
-            </a:xfrm>
-            <a:prstGeom prst="rect">
-              <a:avLst/>
-            </a:prstGeom>
-            <a:solidFill>
-              <a:srgbClr val="FFBE78"/>
-            </a:solidFill>
-            <a:ln>
-              <a:noFill/>
-            </a:ln>
-          </p:spPr>
-          <p:style>
-            <a:lnRef idx="2">
-              <a:schemeClr val="accent1">
-                <a:shade val="50000"/>
-              </a:schemeClr>
-            </a:lnRef>
-            <a:fillRef idx="1">
-              <a:schemeClr val="accent1"/>
-            </a:fillRef>
-            <a:effectRef idx="0">
-              <a:schemeClr val="accent1"/>
-            </a:effectRef>
-            <a:fontRef idx="minor">
-              <a:schemeClr val="lt1"/>
-            </a:fontRef>
-          </p:style>
-          <p:txBody>
-            <a:bodyPr rtlCol="0" anchor="ctr"/>
-            <a:lstStyle/>
-            <a:p>
-              <a:pPr algn="ctr"/>
-              <a:endParaRPr lang="en-US" dirty="0"/>
-            </a:p>
-          </p:txBody>
-        </p:sp>
-        <p:sp>
-          <p:nvSpPr>
-            <p:cNvPr id="24" name="Rechteck 23">
-              <a:extLst>
-                <a:ext uri="{FF2B5EF4-FFF2-40B4-BE49-F238E27FC236}">
-                  <a16:creationId xmlns:a16="http://schemas.microsoft.com/office/drawing/2014/main" id="{8F867D91-C7AB-4064-9152-940A22934B92}"/>
-                </a:ext>
-              </a:extLst>
-            </p:cNvPr>
-            <p:cNvSpPr/>
-            <p:nvPr/>
-          </p:nvSpPr>
-          <p:spPr>
-            <a:xfrm>
-              <a:off x="7004445" y="4138613"/>
-              <a:ext cx="733425" cy="381000"/>
-            </a:xfrm>
-            <a:prstGeom prst="rect">
-              <a:avLst/>
-            </a:prstGeom>
-            <a:solidFill>
-              <a:srgbClr val="FFE483"/>
-            </a:solidFill>
-            <a:ln>
-              <a:noFill/>
-            </a:ln>
-          </p:spPr>
-          <p:style>
-            <a:lnRef idx="2">
-              <a:schemeClr val="accent1">
-                <a:shade val="50000"/>
-              </a:schemeClr>
-            </a:lnRef>
-            <a:fillRef idx="1">
-              <a:schemeClr val="accent1"/>
-            </a:fillRef>
-            <a:effectRef idx="0">
-              <a:schemeClr val="accent1"/>
-            </a:effectRef>
-            <a:fontRef idx="minor">
-              <a:schemeClr val="lt1"/>
-            </a:fontRef>
-          </p:style>
-          <p:txBody>
-            <a:bodyPr rtlCol="0" anchor="ctr"/>
-            <a:lstStyle/>
-            <a:p>
-              <a:pPr algn="ctr"/>
-              <a:endParaRPr lang="en-US" dirty="0"/>
-            </a:p>
-          </p:txBody>
-        </p:sp>
-        <p:sp>
-          <p:nvSpPr>
-            <p:cNvPr id="25" name="Rechteck 24">
-              <a:extLst>
-                <a:ext uri="{FF2B5EF4-FFF2-40B4-BE49-F238E27FC236}">
-                  <a16:creationId xmlns:a16="http://schemas.microsoft.com/office/drawing/2014/main" id="{4F98B275-7272-42A4-BE21-CF6574D92787}"/>
-                </a:ext>
-              </a:extLst>
-            </p:cNvPr>
-            <p:cNvSpPr/>
-            <p:nvPr/>
-          </p:nvSpPr>
-          <p:spPr>
-            <a:xfrm>
-              <a:off x="8285954" y="4138613"/>
-              <a:ext cx="733425" cy="381000"/>
-            </a:xfrm>
-            <a:prstGeom prst="rect">
-              <a:avLst/>
-            </a:prstGeom>
-            <a:solidFill>
-              <a:srgbClr val="D2DC46"/>
-            </a:solidFill>
-            <a:ln>
-              <a:noFill/>
-            </a:ln>
-          </p:spPr>
-          <p:style>
-            <a:lnRef idx="2">
-              <a:schemeClr val="accent1">
-                <a:shade val="50000"/>
-              </a:schemeClr>
-            </a:lnRef>
-            <a:fillRef idx="1">
-              <a:schemeClr val="accent1"/>
-            </a:fillRef>
-            <a:effectRef idx="0">
-              <a:schemeClr val="accent1"/>
-            </a:effectRef>
-            <a:fontRef idx="minor">
-              <a:schemeClr val="lt1"/>
-            </a:fontRef>
-          </p:style>
-          <p:txBody>
-            <a:bodyPr rtlCol="0" anchor="ctr"/>
-            <a:lstStyle/>
-            <a:p>
-              <a:pPr algn="ctr"/>
-              <a:endParaRPr lang="en-US" dirty="0"/>
-            </a:p>
-          </p:txBody>
-        </p:sp>
-        <p:sp>
-          <p:nvSpPr>
-            <p:cNvPr id="26" name="Rechteck 25">
-              <a:extLst>
-                <a:ext uri="{FF2B5EF4-FFF2-40B4-BE49-F238E27FC236}">
-                  <a16:creationId xmlns:a16="http://schemas.microsoft.com/office/drawing/2014/main" id="{CC35FD80-87D7-40D1-828C-CBB0CFA5E700}"/>
-                </a:ext>
-              </a:extLst>
-            </p:cNvPr>
-            <p:cNvSpPr/>
-            <p:nvPr/>
-          </p:nvSpPr>
-          <p:spPr>
-            <a:xfrm>
-              <a:off x="9567463" y="4138613"/>
-              <a:ext cx="733425" cy="381000"/>
-            </a:xfrm>
-            <a:prstGeom prst="rect">
-              <a:avLst/>
-            </a:prstGeom>
-            <a:solidFill>
-              <a:srgbClr val="8CE6AA"/>
-            </a:solidFill>
-            <a:ln>
-              <a:noFill/>
-            </a:ln>
-          </p:spPr>
-          <p:style>
-            <a:lnRef idx="2">
-              <a:schemeClr val="accent1">
-                <a:shade val="50000"/>
-              </a:schemeClr>
-            </a:lnRef>
-            <a:fillRef idx="1">
-              <a:schemeClr val="accent1"/>
-            </a:fillRef>
-            <a:effectRef idx="0">
-              <a:schemeClr val="accent1"/>
-            </a:effectRef>
-            <a:fontRef idx="minor">
-              <a:schemeClr val="lt1"/>
-            </a:fontRef>
-          </p:style>
-          <p:txBody>
-            <a:bodyPr rtlCol="0" anchor="ctr"/>
-            <a:lstStyle/>
-            <a:p>
-              <a:pPr algn="ctr"/>
-              <a:endParaRPr lang="en-US"/>
-            </a:p>
-          </p:txBody>
-        </p:sp>
-        <p:sp>
-          <p:nvSpPr>
-            <p:cNvPr id="27" name="Rechteck 26">
-              <a:extLst>
-                <a:ext uri="{FF2B5EF4-FFF2-40B4-BE49-F238E27FC236}">
-                  <a16:creationId xmlns:a16="http://schemas.microsoft.com/office/drawing/2014/main" id="{290DCA2F-F522-4203-A40A-363C1B073648}"/>
-                </a:ext>
-              </a:extLst>
-            </p:cNvPr>
-            <p:cNvSpPr/>
-            <p:nvPr/>
-          </p:nvSpPr>
-          <p:spPr>
-            <a:xfrm>
-              <a:off x="10848975" y="4138613"/>
-              <a:ext cx="733425" cy="381000"/>
-            </a:xfrm>
-            <a:prstGeom prst="rect">
-              <a:avLst/>
-            </a:prstGeom>
-            <a:solidFill>
-              <a:srgbClr val="8CE6D7"/>
-            </a:solidFill>
-            <a:ln>
-              <a:noFill/>
-            </a:ln>
-          </p:spPr>
-          <p:style>
-            <a:lnRef idx="2">
-              <a:schemeClr val="accent1">
-                <a:shade val="50000"/>
-              </a:schemeClr>
-            </a:lnRef>
-            <a:fillRef idx="1">
-              <a:schemeClr val="accent1"/>
-            </a:fillRef>
-            <a:effectRef idx="0">
-              <a:schemeClr val="accent1"/>
-            </a:effectRef>
-            <a:fontRef idx="minor">
-              <a:schemeClr val="lt1"/>
-            </a:fontRef>
-          </p:style>
-          <p:txBody>
-            <a:bodyPr rtlCol="0" anchor="ctr"/>
-            <a:lstStyle/>
-            <a:p>
-              <a:pPr algn="ctr"/>
-              <a:endParaRPr lang="en-US"/>
-            </a:p>
-          </p:txBody>
-        </p:sp>
-        <p:sp>
-          <p:nvSpPr>
-            <p:cNvPr id="54" name="Textfeld 53">
-              <a:extLst>
-                <a:ext uri="{FF2B5EF4-FFF2-40B4-BE49-F238E27FC236}">
-                  <a16:creationId xmlns:a16="http://schemas.microsoft.com/office/drawing/2014/main" id="{EE5E6E0E-9E7E-4985-B2BB-6B0229531741}"/>
-                </a:ext>
-              </a:extLst>
-            </p:cNvPr>
-            <p:cNvSpPr txBox="1"/>
-            <p:nvPr/>
-          </p:nvSpPr>
-          <p:spPr>
-            <a:xfrm>
-              <a:off x="609600" y="4643835"/>
-              <a:ext cx="1200150" cy="615553"/>
-            </a:xfrm>
-            <a:prstGeom prst="rect">
-              <a:avLst/>
-            </a:prstGeom>
-            <a:noFill/>
-          </p:spPr>
-          <p:txBody>
-            <a:bodyPr wrap="square" lIns="0" tIns="0" rIns="0" bIns="0" rtlCol="0">
-              <a:spAutoFit/>
-            </a:bodyPr>
-            <a:lstStyle/>
-            <a:p>
-              <a:pPr>
-                <a:tabLst>
-                  <a:tab pos="360000" algn="l"/>
-                </a:tabLst>
-              </a:pPr>
-              <a:r>
-                <a:rPr lang="en-US" sz="800" dirty="0" err="1"/>
-                <a:t>Blau</a:t>
-              </a:r>
-              <a:r>
-                <a:rPr lang="en-US" sz="800" dirty="0"/>
-                <a:t> 2</a:t>
-              </a:r>
-            </a:p>
-            <a:p>
-              <a:pPr>
-                <a:tabLst>
-                  <a:tab pos="360000" algn="l"/>
-                </a:tabLst>
-              </a:pPr>
-              <a:r>
-                <a:rPr lang="en-US" sz="800" dirty="0"/>
-                <a:t>Hex	#97C6FF</a:t>
-              </a:r>
-            </a:p>
-            <a:p>
-              <a:pPr>
-                <a:tabLst>
-                  <a:tab pos="360000" algn="l"/>
-                </a:tabLst>
-              </a:pPr>
-              <a:r>
-                <a:rPr lang="en-US" sz="800" dirty="0"/>
-                <a:t>RGB	151 / 198 / 255</a:t>
-              </a:r>
-            </a:p>
-            <a:p>
-              <a:pPr>
-                <a:tabLst>
-                  <a:tab pos="360000" algn="l"/>
-                </a:tabLst>
-              </a:pPr>
-              <a:r>
-                <a:rPr lang="en-US" sz="800" dirty="0"/>
-                <a:t>CMYK	43 / 15 / 0 / 0</a:t>
-              </a:r>
-            </a:p>
-            <a:p>
-              <a:pPr>
-                <a:tabLst>
-                  <a:tab pos="360000" algn="l"/>
-                </a:tabLst>
-              </a:pPr>
-              <a:r>
-                <a:rPr lang="en-US" sz="800" dirty="0"/>
-                <a:t>NCS	1040-R90B</a:t>
-              </a:r>
-            </a:p>
-          </p:txBody>
-        </p:sp>
-        <p:sp>
-          <p:nvSpPr>
-            <p:cNvPr id="55" name="Textfeld 54">
-              <a:extLst>
-                <a:ext uri="{FF2B5EF4-FFF2-40B4-BE49-F238E27FC236}">
-                  <a16:creationId xmlns:a16="http://schemas.microsoft.com/office/drawing/2014/main" id="{80A1ABE7-6E52-4F47-A7F0-403DD26EB0AC}"/>
-                </a:ext>
-              </a:extLst>
-            </p:cNvPr>
-            <p:cNvSpPr txBox="1"/>
-            <p:nvPr/>
-          </p:nvSpPr>
-          <p:spPr>
-            <a:xfrm>
-              <a:off x="1889522" y="4643835"/>
-              <a:ext cx="1200150" cy="615553"/>
-            </a:xfrm>
-            <a:prstGeom prst="rect">
-              <a:avLst/>
-            </a:prstGeom>
-            <a:noFill/>
-          </p:spPr>
-          <p:txBody>
-            <a:bodyPr wrap="square" lIns="0" tIns="0" rIns="0" bIns="0" rtlCol="0">
-              <a:spAutoFit/>
-            </a:bodyPr>
-            <a:lstStyle/>
-            <a:p>
-              <a:pPr>
-                <a:tabLst>
-                  <a:tab pos="360000" algn="l"/>
-                </a:tabLst>
-              </a:pPr>
-              <a:r>
-                <a:rPr lang="en-US" sz="800" dirty="0" err="1"/>
-                <a:t>Violett</a:t>
-              </a:r>
-              <a:r>
-                <a:rPr lang="en-US" sz="800" dirty="0"/>
-                <a:t> 2</a:t>
-              </a:r>
-            </a:p>
-            <a:p>
-              <a:pPr>
-                <a:tabLst>
-                  <a:tab pos="360000" algn="l"/>
-                </a:tabLst>
-              </a:pPr>
-              <a:r>
-                <a:rPr lang="en-US" sz="800" dirty="0"/>
-                <a:t>Hex	#C8C8FF</a:t>
-              </a:r>
-            </a:p>
-            <a:p>
-              <a:pPr>
-                <a:tabLst>
-                  <a:tab pos="360000" algn="l"/>
-                </a:tabLst>
-              </a:pPr>
-              <a:r>
-                <a:rPr lang="en-US" sz="800" dirty="0"/>
-                <a:t>RGB	200 / 200 / 255</a:t>
-              </a:r>
-            </a:p>
-            <a:p>
-              <a:pPr>
-                <a:tabLst>
-                  <a:tab pos="360000" algn="l"/>
-                </a:tabLst>
-              </a:pPr>
-              <a:r>
-                <a:rPr lang="en-US" sz="800" dirty="0"/>
-                <a:t>CMYK	20 / 20 / 0 / 0</a:t>
-              </a:r>
-            </a:p>
-            <a:p>
-              <a:pPr>
-                <a:tabLst>
-                  <a:tab pos="360000" algn="l"/>
-                </a:tabLst>
-              </a:pPr>
-              <a:r>
-                <a:rPr lang="en-US" sz="800" dirty="0"/>
-                <a:t>NCS	0520-R60B</a:t>
-              </a:r>
-            </a:p>
-          </p:txBody>
-        </p:sp>
-        <p:sp>
-          <p:nvSpPr>
-            <p:cNvPr id="56" name="Textfeld 55">
-              <a:extLst>
-                <a:ext uri="{FF2B5EF4-FFF2-40B4-BE49-F238E27FC236}">
-                  <a16:creationId xmlns:a16="http://schemas.microsoft.com/office/drawing/2014/main" id="{C505F438-4057-4F6D-844A-D28EFD633C30}"/>
-                </a:ext>
-              </a:extLst>
-            </p:cNvPr>
-            <p:cNvSpPr txBox="1"/>
-            <p:nvPr/>
-          </p:nvSpPr>
-          <p:spPr>
-            <a:xfrm>
-              <a:off x="3169444" y="4643835"/>
-              <a:ext cx="1200150" cy="615553"/>
-            </a:xfrm>
-            <a:prstGeom prst="rect">
-              <a:avLst/>
-            </a:prstGeom>
-            <a:noFill/>
-          </p:spPr>
-          <p:txBody>
-            <a:bodyPr wrap="square" lIns="0" tIns="0" rIns="0" bIns="0" rtlCol="0">
-              <a:spAutoFit/>
-            </a:bodyPr>
-            <a:lstStyle/>
-            <a:p>
-              <a:pPr>
-                <a:tabLst>
-                  <a:tab pos="360000" algn="l"/>
-                </a:tabLst>
-              </a:pPr>
-              <a:r>
-                <a:rPr lang="en-US" sz="800" dirty="0"/>
-                <a:t>Magenta 2</a:t>
-              </a:r>
-            </a:p>
-            <a:p>
-              <a:pPr>
-                <a:tabLst>
-                  <a:tab pos="360000" algn="l"/>
-                </a:tabLst>
-              </a:pPr>
-              <a:r>
-                <a:rPr lang="en-US" sz="800" dirty="0"/>
-                <a:t>Hex	#FFB9FF</a:t>
-              </a:r>
-            </a:p>
-            <a:p>
-              <a:pPr>
-                <a:tabLst>
-                  <a:tab pos="360000" algn="l"/>
-                </a:tabLst>
-              </a:pPr>
-              <a:r>
-                <a:rPr lang="en-US" sz="800" dirty="0"/>
-                <a:t>RGB	255 / 185 / 255</a:t>
-              </a:r>
-            </a:p>
-            <a:p>
-              <a:pPr>
-                <a:tabLst>
-                  <a:tab pos="360000" algn="l"/>
-                </a:tabLst>
-              </a:pPr>
-              <a:r>
-                <a:rPr lang="en-US" sz="800" dirty="0"/>
-                <a:t>CMYK	0 / 30 / 0 / 0</a:t>
-              </a:r>
-            </a:p>
-            <a:p>
-              <a:pPr>
-                <a:tabLst>
-                  <a:tab pos="360000" algn="l"/>
-                </a:tabLst>
-              </a:pPr>
-              <a:r>
-                <a:rPr lang="en-US" sz="800" dirty="0"/>
-                <a:t>NCS	0520-R40B</a:t>
-              </a:r>
-            </a:p>
-          </p:txBody>
-        </p:sp>
-        <p:sp>
-          <p:nvSpPr>
-            <p:cNvPr id="57" name="Textfeld 56">
-              <a:extLst>
-                <a:ext uri="{FF2B5EF4-FFF2-40B4-BE49-F238E27FC236}">
-                  <a16:creationId xmlns:a16="http://schemas.microsoft.com/office/drawing/2014/main" id="{5B307C51-B940-4DA7-83B6-413E2C00CBE4}"/>
-                </a:ext>
-              </a:extLst>
-            </p:cNvPr>
-            <p:cNvSpPr txBox="1"/>
-            <p:nvPr/>
-          </p:nvSpPr>
-          <p:spPr>
-            <a:xfrm>
-              <a:off x="4449366" y="4643835"/>
-              <a:ext cx="1200150" cy="615553"/>
-            </a:xfrm>
-            <a:prstGeom prst="rect">
-              <a:avLst/>
-            </a:prstGeom>
-            <a:noFill/>
-          </p:spPr>
-          <p:txBody>
-            <a:bodyPr wrap="square" lIns="0" tIns="0" rIns="0" bIns="0" rtlCol="0">
-              <a:spAutoFit/>
-            </a:bodyPr>
-            <a:lstStyle/>
-            <a:p>
-              <a:pPr>
-                <a:tabLst>
-                  <a:tab pos="360000" algn="l"/>
-                </a:tabLst>
-              </a:pPr>
-              <a:r>
-                <a:rPr lang="nn-NO" sz="800" dirty="0"/>
-                <a:t>Rot 2</a:t>
-              </a:r>
-            </a:p>
-            <a:p>
-              <a:pPr>
-                <a:tabLst>
-                  <a:tab pos="360000" algn="l"/>
-                </a:tabLst>
-              </a:pPr>
-              <a:r>
-                <a:rPr lang="nn-NO" sz="800" dirty="0"/>
-                <a:t>Hex	#FFAAA5</a:t>
-              </a:r>
-            </a:p>
-            <a:p>
-              <a:pPr>
-                <a:tabLst>
-                  <a:tab pos="360000" algn="l"/>
-                </a:tabLst>
-              </a:pPr>
-              <a:r>
-                <a:rPr lang="nn-NO" sz="800" dirty="0"/>
-                <a:t>RGB	255 / 170 / 165</a:t>
-              </a:r>
-            </a:p>
-            <a:p>
-              <a:pPr>
-                <a:tabLst>
-                  <a:tab pos="360000" algn="l"/>
-                </a:tabLst>
-              </a:pPr>
-              <a:r>
-                <a:rPr lang="nn-NO" sz="800" dirty="0"/>
-                <a:t>CMYK	0 / 44 / 27 / 0</a:t>
-              </a:r>
-            </a:p>
-            <a:p>
-              <a:pPr>
-                <a:tabLst>
-                  <a:tab pos="360000" algn="l"/>
-                </a:tabLst>
-              </a:pPr>
-              <a:r>
-                <a:rPr lang="nn-NO" sz="800" dirty="0"/>
-                <a:t>NCS	1030-R</a:t>
-              </a:r>
-              <a:endParaRPr lang="en-US" sz="800" dirty="0"/>
-            </a:p>
-          </p:txBody>
-        </p:sp>
-        <p:sp>
-          <p:nvSpPr>
-            <p:cNvPr id="58" name="Textfeld 57">
-              <a:extLst>
-                <a:ext uri="{FF2B5EF4-FFF2-40B4-BE49-F238E27FC236}">
-                  <a16:creationId xmlns:a16="http://schemas.microsoft.com/office/drawing/2014/main" id="{294D7D7D-934A-40BA-8D37-C0F89A574BFA}"/>
-                </a:ext>
-              </a:extLst>
-            </p:cNvPr>
-            <p:cNvSpPr txBox="1"/>
-            <p:nvPr/>
-          </p:nvSpPr>
-          <p:spPr>
-            <a:xfrm>
-              <a:off x="5729288" y="4643835"/>
-              <a:ext cx="1200150" cy="615553"/>
-            </a:xfrm>
-            <a:prstGeom prst="rect">
-              <a:avLst/>
-            </a:prstGeom>
-            <a:noFill/>
-          </p:spPr>
-          <p:txBody>
-            <a:bodyPr wrap="square" lIns="0" tIns="0" rIns="0" bIns="0" rtlCol="0">
-              <a:spAutoFit/>
-            </a:bodyPr>
-            <a:lstStyle/>
-            <a:p>
-              <a:pPr>
-                <a:tabLst>
-                  <a:tab pos="360000" algn="l"/>
-                </a:tabLst>
-              </a:pPr>
-              <a:r>
-                <a:rPr lang="fr-FR" sz="800" dirty="0"/>
-                <a:t>Orange 2</a:t>
-              </a:r>
-            </a:p>
-            <a:p>
-              <a:pPr>
-                <a:tabLst>
-                  <a:tab pos="360000" algn="l"/>
-                </a:tabLst>
-              </a:pPr>
-              <a:r>
-                <a:rPr lang="fr-FR" sz="800" dirty="0" err="1"/>
-                <a:t>Hex</a:t>
-              </a:r>
-              <a:r>
-                <a:rPr lang="fr-FR" sz="800" dirty="0"/>
-                <a:t>	#FFBE78</a:t>
-              </a:r>
-            </a:p>
-            <a:p>
-              <a:pPr>
-                <a:tabLst>
-                  <a:tab pos="360000" algn="l"/>
-                </a:tabLst>
-              </a:pPr>
-              <a:r>
-                <a:rPr lang="fr-FR" sz="800" dirty="0"/>
-                <a:t>RGB	255 / 190 / 120</a:t>
-              </a:r>
-            </a:p>
-            <a:p>
-              <a:pPr>
-                <a:tabLst>
-                  <a:tab pos="360000" algn="l"/>
-                </a:tabLst>
-              </a:pPr>
-              <a:r>
-                <a:rPr lang="fr-FR" sz="800" dirty="0"/>
-                <a:t>CMYK	0 / 30 / 55 / 0</a:t>
-              </a:r>
-            </a:p>
-            <a:p>
-              <a:pPr>
-                <a:tabLst>
-                  <a:tab pos="360000" algn="l"/>
-                </a:tabLst>
-              </a:pPr>
-              <a:r>
-                <a:rPr lang="fr-FR" sz="800" dirty="0"/>
-                <a:t>NCS	1030-Y30R</a:t>
-              </a:r>
-              <a:endParaRPr lang="en-US" sz="800" dirty="0"/>
-            </a:p>
-          </p:txBody>
-        </p:sp>
-        <p:sp>
-          <p:nvSpPr>
-            <p:cNvPr id="59" name="Textfeld 58">
-              <a:extLst>
-                <a:ext uri="{FF2B5EF4-FFF2-40B4-BE49-F238E27FC236}">
-                  <a16:creationId xmlns:a16="http://schemas.microsoft.com/office/drawing/2014/main" id="{97181276-56DF-49BC-AE2D-384C0E6A3CAA}"/>
-                </a:ext>
-              </a:extLst>
-            </p:cNvPr>
-            <p:cNvSpPr txBox="1"/>
-            <p:nvPr/>
-          </p:nvSpPr>
-          <p:spPr>
-            <a:xfrm>
-              <a:off x="7009210" y="4643835"/>
-              <a:ext cx="1200150" cy="615553"/>
-            </a:xfrm>
-            <a:prstGeom prst="rect">
-              <a:avLst/>
-            </a:prstGeom>
-            <a:noFill/>
-          </p:spPr>
-          <p:txBody>
-            <a:bodyPr wrap="square" lIns="0" tIns="0" rIns="0" bIns="0" rtlCol="0">
-              <a:spAutoFit/>
-            </a:bodyPr>
-            <a:lstStyle/>
-            <a:p>
-              <a:pPr>
-                <a:tabLst>
-                  <a:tab pos="360000" algn="l"/>
-                </a:tabLst>
-              </a:pPr>
-              <a:r>
-                <a:rPr lang="en-US" sz="800" dirty="0"/>
-                <a:t>Gelb 2</a:t>
-              </a:r>
-            </a:p>
-            <a:p>
-              <a:pPr>
-                <a:tabLst>
-                  <a:tab pos="360000" algn="l"/>
-                </a:tabLst>
-              </a:pPr>
-              <a:r>
-                <a:rPr lang="en-US" sz="800" dirty="0"/>
-                <a:t>Hex	#FFE483</a:t>
-              </a:r>
-            </a:p>
-            <a:p>
-              <a:pPr>
-                <a:tabLst>
-                  <a:tab pos="360000" algn="l"/>
-                </a:tabLst>
-              </a:pPr>
-              <a:r>
-                <a:rPr lang="en-US" sz="800" dirty="0"/>
-                <a:t>RGB	255 / 228 / 131</a:t>
-              </a:r>
-            </a:p>
-            <a:p>
-              <a:pPr>
-                <a:tabLst>
-                  <a:tab pos="360000" algn="l"/>
-                </a:tabLst>
-              </a:pPr>
-              <a:r>
-                <a:rPr lang="en-US" sz="800" dirty="0"/>
-                <a:t>CMYK	0 / 5 / 50 / 0</a:t>
-              </a:r>
-            </a:p>
-            <a:p>
-              <a:pPr>
-                <a:tabLst>
-                  <a:tab pos="360000" algn="l"/>
-                </a:tabLst>
-              </a:pPr>
-              <a:r>
-                <a:rPr lang="en-US" sz="800" dirty="0"/>
-                <a:t>NCS	0530-G90Y</a:t>
-              </a:r>
-            </a:p>
-          </p:txBody>
-        </p:sp>
-        <p:sp>
-          <p:nvSpPr>
-            <p:cNvPr id="60" name="Textfeld 59">
-              <a:extLst>
-                <a:ext uri="{FF2B5EF4-FFF2-40B4-BE49-F238E27FC236}">
-                  <a16:creationId xmlns:a16="http://schemas.microsoft.com/office/drawing/2014/main" id="{5A50BECD-151A-450E-9B17-40F5A8A51F52}"/>
-                </a:ext>
-              </a:extLst>
-            </p:cNvPr>
-            <p:cNvSpPr txBox="1"/>
-            <p:nvPr/>
-          </p:nvSpPr>
-          <p:spPr>
-            <a:xfrm>
-              <a:off x="8289132" y="4643835"/>
-              <a:ext cx="1200150" cy="615553"/>
-            </a:xfrm>
-            <a:prstGeom prst="rect">
-              <a:avLst/>
-            </a:prstGeom>
-            <a:noFill/>
-          </p:spPr>
-          <p:txBody>
-            <a:bodyPr wrap="square" lIns="0" tIns="0" rIns="0" bIns="0" rtlCol="0">
-              <a:spAutoFit/>
-            </a:bodyPr>
-            <a:lstStyle/>
-            <a:p>
-              <a:pPr>
-                <a:tabLst>
-                  <a:tab pos="360000" algn="l"/>
-                </a:tabLst>
-              </a:pPr>
-              <a:r>
-                <a:rPr lang="en-US" sz="800" dirty="0" err="1"/>
-                <a:t>Oliv</a:t>
-              </a:r>
-              <a:r>
-                <a:rPr lang="en-US" sz="800" dirty="0"/>
-                <a:t> 2</a:t>
-              </a:r>
-            </a:p>
-            <a:p>
-              <a:pPr>
-                <a:tabLst>
-                  <a:tab pos="360000" algn="l"/>
-                </a:tabLst>
-              </a:pPr>
-              <a:r>
-                <a:rPr lang="en-US" sz="800" dirty="0"/>
-                <a:t>Hex	#D2DC46</a:t>
-              </a:r>
-            </a:p>
-            <a:p>
-              <a:pPr>
-                <a:tabLst>
-                  <a:tab pos="360000" algn="l"/>
-                </a:tabLst>
-              </a:pPr>
-              <a:r>
-                <a:rPr lang="en-US" sz="800" dirty="0"/>
-                <a:t>RGB	210 / 220 / 70</a:t>
-              </a:r>
-            </a:p>
-            <a:p>
-              <a:pPr>
-                <a:tabLst>
-                  <a:tab pos="360000" algn="l"/>
-                </a:tabLst>
-              </a:pPr>
-              <a:r>
-                <a:rPr lang="en-US" sz="800" dirty="0"/>
-                <a:t>CMYK	25 / 0 / 81 / 0</a:t>
-              </a:r>
-            </a:p>
-            <a:p>
-              <a:pPr>
-                <a:tabLst>
-                  <a:tab pos="360000" algn="l"/>
-                </a:tabLst>
-              </a:pPr>
-              <a:r>
-                <a:rPr lang="en-US" sz="800" dirty="0"/>
-                <a:t>NCS	0550-G60Y</a:t>
-              </a:r>
-            </a:p>
-          </p:txBody>
-        </p:sp>
-        <p:sp>
-          <p:nvSpPr>
-            <p:cNvPr id="61" name="Textfeld 60">
-              <a:extLst>
-                <a:ext uri="{FF2B5EF4-FFF2-40B4-BE49-F238E27FC236}">
-                  <a16:creationId xmlns:a16="http://schemas.microsoft.com/office/drawing/2014/main" id="{65C35EB2-9EF4-42C9-89FA-56F3DF910281}"/>
-                </a:ext>
-              </a:extLst>
-            </p:cNvPr>
-            <p:cNvSpPr txBox="1"/>
-            <p:nvPr/>
-          </p:nvSpPr>
-          <p:spPr>
-            <a:xfrm>
-              <a:off x="9569054" y="4643835"/>
-              <a:ext cx="1200150" cy="615553"/>
-            </a:xfrm>
-            <a:prstGeom prst="rect">
-              <a:avLst/>
-            </a:prstGeom>
-            <a:noFill/>
-          </p:spPr>
-          <p:txBody>
-            <a:bodyPr wrap="square" lIns="0" tIns="0" rIns="0" bIns="0" rtlCol="0">
-              <a:spAutoFit/>
-            </a:bodyPr>
-            <a:lstStyle/>
-            <a:p>
-              <a:pPr>
-                <a:tabLst>
-                  <a:tab pos="360000" algn="l"/>
-                </a:tabLst>
-              </a:pPr>
-              <a:r>
-                <a:rPr lang="en-US" sz="800" dirty="0" err="1"/>
-                <a:t>Grün</a:t>
-              </a:r>
-              <a:r>
-                <a:rPr lang="en-US" sz="800" dirty="0"/>
-                <a:t> 2</a:t>
-              </a:r>
-            </a:p>
-            <a:p>
-              <a:pPr>
-                <a:tabLst>
-                  <a:tab pos="360000" algn="l"/>
-                </a:tabLst>
-              </a:pPr>
-              <a:r>
-                <a:rPr lang="en-US" sz="800" dirty="0"/>
-                <a:t>Hex	#8CE6AA</a:t>
-              </a:r>
-            </a:p>
-            <a:p>
-              <a:pPr>
-                <a:tabLst>
-                  <a:tab pos="360000" algn="l"/>
-                </a:tabLst>
-              </a:pPr>
-              <a:r>
-                <a:rPr lang="en-US" sz="800" dirty="0"/>
-                <a:t>RGB	140 / 230 / 170</a:t>
-              </a:r>
-            </a:p>
-            <a:p>
-              <a:pPr>
-                <a:tabLst>
-                  <a:tab pos="360000" algn="l"/>
-                </a:tabLst>
-              </a:pPr>
-              <a:r>
-                <a:rPr lang="en-US" sz="800" dirty="0"/>
-                <a:t>CMYK	45 / 0 / 45 / 0</a:t>
-              </a:r>
-            </a:p>
-            <a:p>
-              <a:pPr>
-                <a:tabLst>
-                  <a:tab pos="360000" algn="l"/>
-                </a:tabLst>
-              </a:pPr>
-              <a:r>
-                <a:rPr lang="en-US" sz="800" dirty="0"/>
-                <a:t>NCS	2030-G10Y</a:t>
-              </a:r>
-            </a:p>
-          </p:txBody>
-        </p:sp>
-        <p:sp>
-          <p:nvSpPr>
-            <p:cNvPr id="62" name="Textfeld 61">
-              <a:extLst>
-                <a:ext uri="{FF2B5EF4-FFF2-40B4-BE49-F238E27FC236}">
-                  <a16:creationId xmlns:a16="http://schemas.microsoft.com/office/drawing/2014/main" id="{18C8F522-3AA0-4E8D-B9C7-00BEB2991CB9}"/>
-                </a:ext>
-              </a:extLst>
-            </p:cNvPr>
-            <p:cNvSpPr txBox="1"/>
-            <p:nvPr/>
-          </p:nvSpPr>
-          <p:spPr>
-            <a:xfrm>
-              <a:off x="10848975" y="4643835"/>
-              <a:ext cx="1200150" cy="615553"/>
-            </a:xfrm>
-            <a:prstGeom prst="rect">
-              <a:avLst/>
-            </a:prstGeom>
-            <a:noFill/>
-          </p:spPr>
-          <p:txBody>
-            <a:bodyPr wrap="square" lIns="0" tIns="0" rIns="0" bIns="0" rtlCol="0">
-              <a:spAutoFit/>
-            </a:bodyPr>
-            <a:lstStyle/>
-            <a:p>
-              <a:pPr>
-                <a:tabLst>
-                  <a:tab pos="360000" algn="l"/>
-                </a:tabLst>
-              </a:pPr>
-              <a:r>
-                <a:rPr lang="en-US" sz="800" dirty="0" err="1"/>
-                <a:t>Türkis</a:t>
-              </a:r>
-              <a:r>
-                <a:rPr lang="en-US" sz="800" dirty="0"/>
-                <a:t> 2</a:t>
-              </a:r>
-            </a:p>
-            <a:p>
-              <a:pPr>
-                <a:tabLst>
-                  <a:tab pos="360000" algn="l"/>
-                </a:tabLst>
-              </a:pPr>
-              <a:r>
-                <a:rPr lang="en-US" sz="800" dirty="0"/>
-                <a:t>Hex	#8CE6D7</a:t>
-              </a:r>
-            </a:p>
-            <a:p>
-              <a:pPr>
-                <a:tabLst>
-                  <a:tab pos="360000" algn="l"/>
-                </a:tabLst>
-              </a:pPr>
-              <a:r>
-                <a:rPr lang="en-US" sz="800" dirty="0"/>
-                <a:t>RGB	140 / 230 / 215</a:t>
-              </a:r>
-            </a:p>
-            <a:p>
-              <a:pPr>
-                <a:tabLst>
-                  <a:tab pos="360000" algn="l"/>
-                </a:tabLst>
-              </a:pPr>
-              <a:r>
-                <a:rPr lang="en-US" sz="800" dirty="0"/>
-                <a:t>CMYK	45 / 0 / 20 / 0</a:t>
-              </a:r>
-            </a:p>
-            <a:p>
-              <a:pPr>
-                <a:tabLst>
-                  <a:tab pos="360000" algn="l"/>
-                </a:tabLst>
-              </a:pPr>
-              <a:r>
-                <a:rPr lang="en-US" sz="800" dirty="0"/>
-                <a:t>NCS	1030-B30G</a:t>
-              </a:r>
-            </a:p>
-          </p:txBody>
-        </p:sp>
-      </p:grpSp>
-      <p:grpSp>
-        <p:nvGrpSpPr>
-          <p:cNvPr id="72" name="Gruppieren 71">
-            <a:extLst>
-              <a:ext uri="{FF2B5EF4-FFF2-40B4-BE49-F238E27FC236}">
-                <a16:creationId xmlns:a16="http://schemas.microsoft.com/office/drawing/2014/main" id="{398D963C-95BC-4910-AD7E-824F016E2F76}"/>
-              </a:ext>
-            </a:extLst>
-          </p:cNvPr>
-          <p:cNvGrpSpPr/>
-          <p:nvPr/>
-        </p:nvGrpSpPr>
-        <p:grpSpPr>
-          <a:xfrm>
-            <a:off x="609600" y="1309688"/>
-            <a:ext cx="2019146" cy="1435100"/>
-            <a:chOff x="609600" y="1052513"/>
-            <a:chExt cx="2019146" cy="1435100"/>
-          </a:xfrm>
-        </p:grpSpPr>
-        <p:sp>
-          <p:nvSpPr>
-            <p:cNvPr id="40" name="Rechteck 39">
-              <a:extLst>
-                <a:ext uri="{FF2B5EF4-FFF2-40B4-BE49-F238E27FC236}">
-                  <a16:creationId xmlns:a16="http://schemas.microsoft.com/office/drawing/2014/main" id="{D91D7398-5451-4E2C-940D-03ADC617B18C}"/>
-                </a:ext>
-              </a:extLst>
-            </p:cNvPr>
-            <p:cNvSpPr/>
-            <p:nvPr/>
-          </p:nvSpPr>
-          <p:spPr>
-            <a:xfrm>
-              <a:off x="616346" y="1052513"/>
-              <a:ext cx="2012400" cy="684212"/>
-            </a:xfrm>
-            <a:prstGeom prst="rect">
-              <a:avLst/>
-            </a:prstGeom>
-            <a:solidFill>
-              <a:srgbClr val="00008C"/>
-            </a:solidFill>
-            <a:ln>
-              <a:noFill/>
-            </a:ln>
-          </p:spPr>
-          <p:style>
-            <a:lnRef idx="2">
-              <a:schemeClr val="accent1">
-                <a:shade val="50000"/>
-              </a:schemeClr>
-            </a:lnRef>
-            <a:fillRef idx="1">
-              <a:schemeClr val="accent1"/>
-            </a:fillRef>
-            <a:effectRef idx="0">
-              <a:schemeClr val="accent1"/>
-            </a:effectRef>
-            <a:fontRef idx="minor">
-              <a:schemeClr val="lt1"/>
-            </a:fontRef>
-          </p:style>
-          <p:txBody>
-            <a:bodyPr rtlCol="0" anchor="ctr"/>
-            <a:lstStyle/>
-            <a:p>
-              <a:pPr algn="ctr"/>
-              <a:endParaRPr lang="en-US"/>
-            </a:p>
-          </p:txBody>
-        </p:sp>
-        <p:sp>
-          <p:nvSpPr>
-            <p:cNvPr id="65" name="Textfeld 64">
-              <a:extLst>
-                <a:ext uri="{FF2B5EF4-FFF2-40B4-BE49-F238E27FC236}">
-                  <a16:creationId xmlns:a16="http://schemas.microsoft.com/office/drawing/2014/main" id="{FAC4F9D5-8339-4153-B67B-7ACC8E16CCE3}"/>
-                </a:ext>
-              </a:extLst>
-            </p:cNvPr>
-            <p:cNvSpPr txBox="1"/>
-            <p:nvPr/>
-          </p:nvSpPr>
-          <p:spPr>
-            <a:xfrm>
-              <a:off x="609600" y="1872060"/>
-              <a:ext cx="1666875" cy="615553"/>
-            </a:xfrm>
-            <a:prstGeom prst="rect">
-              <a:avLst/>
-            </a:prstGeom>
-            <a:noFill/>
-          </p:spPr>
-          <p:txBody>
-            <a:bodyPr wrap="square" lIns="0" tIns="0" rIns="0" bIns="0" rtlCol="0">
-              <a:spAutoFit/>
-            </a:bodyPr>
-            <a:lstStyle/>
-            <a:p>
-              <a:pPr>
-                <a:tabLst>
-                  <a:tab pos="360000" algn="l"/>
-                </a:tabLst>
-              </a:pPr>
-              <a:r>
-                <a:rPr lang="en-US" sz="800" dirty="0" err="1"/>
-                <a:t>Brillantblau</a:t>
-              </a:r>
-              <a:endParaRPr lang="en-US" sz="800" dirty="0"/>
-            </a:p>
-            <a:p>
-              <a:pPr>
-                <a:tabLst>
-                  <a:tab pos="360000" algn="l"/>
-                </a:tabLst>
-              </a:pPr>
-              <a:r>
-                <a:rPr lang="en-US" sz="800" dirty="0"/>
-                <a:t>Hex	#00008C</a:t>
-              </a:r>
-            </a:p>
-            <a:p>
-              <a:pPr>
-                <a:tabLst>
-                  <a:tab pos="360000" algn="l"/>
-                </a:tabLst>
-              </a:pPr>
-              <a:r>
-                <a:rPr lang="en-US" sz="800" dirty="0"/>
-                <a:t>RGB	0 / 0 / 140</a:t>
-              </a:r>
-            </a:p>
-            <a:p>
-              <a:pPr>
-                <a:tabLst>
-                  <a:tab pos="360000" algn="l"/>
-                </a:tabLst>
-              </a:pPr>
-              <a:r>
-                <a:rPr lang="en-US" sz="800" dirty="0"/>
-                <a:t>CMYK	100 / 80 / 5 / 0</a:t>
-              </a:r>
-            </a:p>
-            <a:p>
-              <a:pPr>
-                <a:tabLst>
-                  <a:tab pos="360000" algn="l"/>
-                </a:tabLst>
-              </a:pPr>
-              <a:r>
-                <a:rPr lang="en-US" sz="800" dirty="0"/>
-                <a:t>NCS	3060-R80B</a:t>
-              </a:r>
-            </a:p>
-          </p:txBody>
-        </p:sp>
-      </p:grpSp>
-      <p:grpSp>
-        <p:nvGrpSpPr>
-          <p:cNvPr id="73" name="Gruppieren 72">
-            <a:extLst>
-              <a:ext uri="{FF2B5EF4-FFF2-40B4-BE49-F238E27FC236}">
-                <a16:creationId xmlns:a16="http://schemas.microsoft.com/office/drawing/2014/main" id="{8AF3DAE7-8404-4007-AE1A-C23015BA371F}"/>
-              </a:ext>
-            </a:extLst>
-          </p:cNvPr>
-          <p:cNvGrpSpPr/>
-          <p:nvPr/>
-        </p:nvGrpSpPr>
-        <p:grpSpPr>
-          <a:xfrm>
-            <a:off x="7009210" y="1309688"/>
-            <a:ext cx="5039915" cy="1435100"/>
-            <a:chOff x="7009210" y="1052513"/>
-            <a:chExt cx="5039915" cy="1435100"/>
-          </a:xfrm>
-        </p:grpSpPr>
-        <p:sp>
-          <p:nvSpPr>
-            <p:cNvPr id="41" name="Rechteck 40">
-              <a:extLst>
-                <a:ext uri="{FF2B5EF4-FFF2-40B4-BE49-F238E27FC236}">
-                  <a16:creationId xmlns:a16="http://schemas.microsoft.com/office/drawing/2014/main" id="{0E41642A-5E53-4F23-8066-3BA82738D548}"/>
-                </a:ext>
-              </a:extLst>
-            </p:cNvPr>
-            <p:cNvSpPr/>
-            <p:nvPr/>
-          </p:nvSpPr>
-          <p:spPr>
-            <a:xfrm>
-              <a:off x="7009210" y="1052513"/>
-              <a:ext cx="733425" cy="684212"/>
-            </a:xfrm>
-            <a:prstGeom prst="rect">
-              <a:avLst/>
-            </a:prstGeom>
-            <a:solidFill>
-              <a:srgbClr val="00005A"/>
-            </a:solidFill>
-            <a:ln>
-              <a:noFill/>
-            </a:ln>
-          </p:spPr>
-          <p:style>
-            <a:lnRef idx="2">
-              <a:schemeClr val="accent1">
-                <a:shade val="50000"/>
-              </a:schemeClr>
-            </a:lnRef>
-            <a:fillRef idx="1">
-              <a:schemeClr val="accent1"/>
-            </a:fillRef>
-            <a:effectRef idx="0">
-              <a:schemeClr val="accent1"/>
-            </a:effectRef>
-            <a:fontRef idx="minor">
-              <a:schemeClr val="lt1"/>
-            </a:fontRef>
-          </p:style>
-          <p:txBody>
-            <a:bodyPr rtlCol="0" anchor="ctr"/>
-            <a:lstStyle/>
-            <a:p>
-              <a:pPr algn="ctr"/>
-              <a:endParaRPr lang="en-US"/>
-            </a:p>
-          </p:txBody>
-        </p:sp>
-        <p:sp>
-          <p:nvSpPr>
-            <p:cNvPr id="42" name="Rechteck 41">
-              <a:extLst>
-                <a:ext uri="{FF2B5EF4-FFF2-40B4-BE49-F238E27FC236}">
-                  <a16:creationId xmlns:a16="http://schemas.microsoft.com/office/drawing/2014/main" id="{76482F71-2A0A-4B23-80EB-0CD23AF14BB6}"/>
-                </a:ext>
-              </a:extLst>
-            </p:cNvPr>
-            <p:cNvSpPr/>
-            <p:nvPr/>
-          </p:nvSpPr>
-          <p:spPr>
-            <a:xfrm>
-              <a:off x="8289132" y="1052513"/>
-              <a:ext cx="733425" cy="684212"/>
-            </a:xfrm>
-            <a:prstGeom prst="rect">
-              <a:avLst/>
-            </a:prstGeom>
-            <a:solidFill>
-              <a:srgbClr val="000000"/>
-            </a:solidFill>
-            <a:ln>
-              <a:noFill/>
-            </a:ln>
-          </p:spPr>
-          <p:style>
-            <a:lnRef idx="2">
-              <a:schemeClr val="accent1">
-                <a:shade val="50000"/>
-              </a:schemeClr>
-            </a:lnRef>
-            <a:fillRef idx="1">
-              <a:schemeClr val="accent1"/>
-            </a:fillRef>
-            <a:effectRef idx="0">
-              <a:schemeClr val="accent1"/>
-            </a:effectRef>
-            <a:fontRef idx="minor">
-              <a:schemeClr val="lt1"/>
-            </a:fontRef>
-          </p:style>
-          <p:txBody>
-            <a:bodyPr rtlCol="0" anchor="ctr"/>
-            <a:lstStyle/>
-            <a:p>
-              <a:pPr algn="ctr"/>
-              <a:endParaRPr lang="en-US"/>
-            </a:p>
-          </p:txBody>
-        </p:sp>
-        <p:sp>
-          <p:nvSpPr>
-            <p:cNvPr id="43" name="Rechteck 42">
-              <a:extLst>
-                <a:ext uri="{FF2B5EF4-FFF2-40B4-BE49-F238E27FC236}">
-                  <a16:creationId xmlns:a16="http://schemas.microsoft.com/office/drawing/2014/main" id="{CE15FFA5-549A-417B-A278-10F761D3342D}"/>
-                </a:ext>
-              </a:extLst>
-            </p:cNvPr>
-            <p:cNvSpPr/>
-            <p:nvPr/>
-          </p:nvSpPr>
-          <p:spPr>
-            <a:xfrm>
-              <a:off x="9569054" y="1052513"/>
-              <a:ext cx="733425" cy="684212"/>
-            </a:xfrm>
-            <a:prstGeom prst="rect">
-              <a:avLst/>
-            </a:prstGeom>
-            <a:solidFill>
-              <a:srgbClr val="323F4B"/>
-            </a:solidFill>
-            <a:ln>
-              <a:noFill/>
-            </a:ln>
-          </p:spPr>
-          <p:style>
-            <a:lnRef idx="2">
-              <a:schemeClr val="accent1">
-                <a:shade val="50000"/>
-              </a:schemeClr>
-            </a:lnRef>
-            <a:fillRef idx="1">
-              <a:schemeClr val="accent1"/>
-            </a:fillRef>
-            <a:effectRef idx="0">
-              <a:schemeClr val="accent1"/>
-            </a:effectRef>
-            <a:fontRef idx="minor">
-              <a:schemeClr val="lt1"/>
-            </a:fontRef>
-          </p:style>
-          <p:txBody>
-            <a:bodyPr rtlCol="0" anchor="ctr"/>
-            <a:lstStyle/>
-            <a:p>
-              <a:pPr algn="ctr"/>
-              <a:endParaRPr lang="en-US"/>
-            </a:p>
-          </p:txBody>
-        </p:sp>
-        <p:sp>
-          <p:nvSpPr>
-            <p:cNvPr id="44" name="Rechteck 43">
-              <a:extLst>
-                <a:ext uri="{FF2B5EF4-FFF2-40B4-BE49-F238E27FC236}">
-                  <a16:creationId xmlns:a16="http://schemas.microsoft.com/office/drawing/2014/main" id="{BCA40B61-6453-41D0-BD2B-4309F57036C7}"/>
-                </a:ext>
-              </a:extLst>
-            </p:cNvPr>
-            <p:cNvSpPr/>
-            <p:nvPr/>
-          </p:nvSpPr>
-          <p:spPr>
-            <a:xfrm>
-              <a:off x="10848975" y="1052513"/>
-              <a:ext cx="733425" cy="684212"/>
-            </a:xfrm>
-            <a:prstGeom prst="rect">
-              <a:avLst/>
-            </a:prstGeom>
-            <a:solidFill>
-              <a:srgbClr val="FFFFFF"/>
-            </a:solidFill>
-            <a:ln>
-              <a:solidFill>
-                <a:schemeClr val="tx1"/>
-              </a:solidFill>
-            </a:ln>
-          </p:spPr>
-          <p:style>
-            <a:lnRef idx="2">
-              <a:schemeClr val="accent1">
-                <a:shade val="50000"/>
-              </a:schemeClr>
-            </a:lnRef>
-            <a:fillRef idx="1">
-              <a:schemeClr val="accent1"/>
-            </a:fillRef>
-            <a:effectRef idx="0">
-              <a:schemeClr val="accent1"/>
-            </a:effectRef>
-            <a:fontRef idx="minor">
-              <a:schemeClr val="lt1"/>
-            </a:fontRef>
-          </p:style>
-          <p:txBody>
-            <a:bodyPr rtlCol="0" anchor="ctr"/>
-            <a:lstStyle/>
-            <a:p>
-              <a:pPr algn="ctr"/>
-              <a:endParaRPr lang="en-US"/>
-            </a:p>
-          </p:txBody>
-        </p:sp>
-        <p:sp>
-          <p:nvSpPr>
-            <p:cNvPr id="66" name="Textfeld 65">
-              <a:extLst>
-                <a:ext uri="{FF2B5EF4-FFF2-40B4-BE49-F238E27FC236}">
-                  <a16:creationId xmlns:a16="http://schemas.microsoft.com/office/drawing/2014/main" id="{10648FA2-0E4E-49FB-9604-036D1C1DD8AC}"/>
-                </a:ext>
-              </a:extLst>
-            </p:cNvPr>
-            <p:cNvSpPr txBox="1"/>
-            <p:nvPr/>
-          </p:nvSpPr>
-          <p:spPr>
-            <a:xfrm>
-              <a:off x="7009210" y="1872060"/>
-              <a:ext cx="1200150" cy="615553"/>
-            </a:xfrm>
-            <a:prstGeom prst="rect">
-              <a:avLst/>
-            </a:prstGeom>
-            <a:noFill/>
-          </p:spPr>
-          <p:txBody>
-            <a:bodyPr wrap="square" lIns="0" tIns="0" rIns="0" bIns="0" rtlCol="0">
-              <a:spAutoFit/>
-            </a:bodyPr>
-            <a:lstStyle/>
-            <a:p>
-              <a:pPr>
-                <a:tabLst>
-                  <a:tab pos="360000" algn="l"/>
-                </a:tabLst>
-              </a:pPr>
-              <a:r>
-                <a:rPr lang="en-US" sz="800" dirty="0" err="1"/>
-                <a:t>Dunkelblau</a:t>
-              </a:r>
-              <a:endParaRPr lang="en-US" sz="800" dirty="0"/>
-            </a:p>
-            <a:p>
-              <a:pPr>
-                <a:tabLst>
-                  <a:tab pos="360000" algn="l"/>
-                </a:tabLst>
-              </a:pPr>
-              <a:r>
-                <a:rPr lang="en-US" sz="800" dirty="0"/>
-                <a:t>Hex	#001450</a:t>
-              </a:r>
-            </a:p>
-            <a:p>
-              <a:pPr>
-                <a:tabLst>
-                  <a:tab pos="360000" algn="l"/>
-                </a:tabLst>
-              </a:pPr>
-              <a:r>
-                <a:rPr lang="en-US" sz="800" dirty="0"/>
-                <a:t>RGB	0 / 20 / 80</a:t>
-              </a:r>
-            </a:p>
-            <a:p>
-              <a:pPr>
-                <a:tabLst>
-                  <a:tab pos="360000" algn="l"/>
-                </a:tabLst>
-              </a:pPr>
-              <a:r>
-                <a:rPr lang="en-US" sz="800" dirty="0"/>
-                <a:t>CMYK	100 / 70 </a:t>
-              </a:r>
-              <a:r>
-                <a:rPr lang="en-US" sz="800"/>
-                <a:t>/ 10 </a:t>
-              </a:r>
-              <a:r>
-                <a:rPr lang="en-US" sz="800" dirty="0"/>
-                <a:t>/ 60</a:t>
-              </a:r>
-            </a:p>
-            <a:p>
-              <a:pPr>
-                <a:tabLst>
-                  <a:tab pos="360000" algn="l"/>
-                </a:tabLst>
-              </a:pPr>
-              <a:r>
-                <a:rPr lang="en-US" sz="800" dirty="0"/>
-                <a:t>NCS	7020-R70B</a:t>
-              </a:r>
-            </a:p>
-          </p:txBody>
-        </p:sp>
-        <p:sp>
-          <p:nvSpPr>
-            <p:cNvPr id="67" name="Textfeld 66">
-              <a:extLst>
-                <a:ext uri="{FF2B5EF4-FFF2-40B4-BE49-F238E27FC236}">
-                  <a16:creationId xmlns:a16="http://schemas.microsoft.com/office/drawing/2014/main" id="{28BF8421-3AF0-48E1-9F0C-05D94C393A78}"/>
-                </a:ext>
-              </a:extLst>
-            </p:cNvPr>
-            <p:cNvSpPr txBox="1"/>
-            <p:nvPr/>
-          </p:nvSpPr>
-          <p:spPr>
-            <a:xfrm>
-              <a:off x="8289132" y="1872060"/>
-              <a:ext cx="1200150" cy="615553"/>
-            </a:xfrm>
-            <a:prstGeom prst="rect">
-              <a:avLst/>
-            </a:prstGeom>
-            <a:noFill/>
-          </p:spPr>
-          <p:txBody>
-            <a:bodyPr wrap="square" lIns="0" tIns="0" rIns="0" bIns="0" rtlCol="0">
-              <a:spAutoFit/>
-            </a:bodyPr>
-            <a:lstStyle/>
-            <a:p>
-              <a:pPr>
-                <a:tabLst>
-                  <a:tab pos="360000" algn="l"/>
-                </a:tabLst>
-              </a:pPr>
-              <a:r>
-                <a:rPr lang="nn-NO" sz="800" dirty="0"/>
-                <a:t>Schwarz</a:t>
-              </a:r>
-            </a:p>
-            <a:p>
-              <a:pPr>
-                <a:tabLst>
-                  <a:tab pos="360000" algn="l"/>
-                </a:tabLst>
-              </a:pPr>
-              <a:r>
-                <a:rPr lang="nn-NO" sz="800" dirty="0"/>
-                <a:t>Hex	#00000</a:t>
-              </a:r>
-            </a:p>
-            <a:p>
-              <a:pPr>
-                <a:tabLst>
-                  <a:tab pos="360000" algn="l"/>
-                </a:tabLst>
-              </a:pPr>
-              <a:r>
-                <a:rPr lang="nn-NO" sz="800" dirty="0"/>
-                <a:t>RGB	0 / 0 / 0</a:t>
-              </a:r>
-            </a:p>
-            <a:p>
-              <a:pPr>
-                <a:tabLst>
-                  <a:tab pos="360000" algn="l"/>
-                </a:tabLst>
-              </a:pPr>
-              <a:r>
-                <a:rPr lang="nn-NO" sz="800" dirty="0"/>
-                <a:t>CMYK	0 / 0 / 0 / 100</a:t>
-              </a:r>
-            </a:p>
-            <a:p>
-              <a:pPr>
-                <a:tabLst>
-                  <a:tab pos="360000" algn="l"/>
-                </a:tabLst>
-              </a:pPr>
-              <a:r>
-                <a:rPr lang="nn-NO" sz="800" dirty="0"/>
-                <a:t>NCS	9000-N</a:t>
-              </a:r>
-              <a:endParaRPr lang="en-US" sz="800" dirty="0"/>
-            </a:p>
-          </p:txBody>
-        </p:sp>
-        <p:sp>
-          <p:nvSpPr>
-            <p:cNvPr id="68" name="Textfeld 67">
-              <a:extLst>
-                <a:ext uri="{FF2B5EF4-FFF2-40B4-BE49-F238E27FC236}">
-                  <a16:creationId xmlns:a16="http://schemas.microsoft.com/office/drawing/2014/main" id="{FC2833BB-3657-4CB9-87DF-B812D7EC31FE}"/>
-                </a:ext>
-              </a:extLst>
-            </p:cNvPr>
-            <p:cNvSpPr txBox="1"/>
-            <p:nvPr/>
-          </p:nvSpPr>
-          <p:spPr>
-            <a:xfrm>
-              <a:off x="9569054" y="1872060"/>
-              <a:ext cx="1200150" cy="615553"/>
-            </a:xfrm>
-            <a:prstGeom prst="rect">
-              <a:avLst/>
-            </a:prstGeom>
-            <a:noFill/>
-          </p:spPr>
-          <p:txBody>
-            <a:bodyPr wrap="square" lIns="0" tIns="0" rIns="0" bIns="0" rtlCol="0">
-              <a:spAutoFit/>
-            </a:bodyPr>
-            <a:lstStyle/>
-            <a:p>
-              <a:pPr>
-                <a:tabLst>
-                  <a:tab pos="360000" algn="l"/>
-                </a:tabLst>
-              </a:pPr>
-              <a:r>
-                <a:rPr lang="en-US" sz="800" dirty="0"/>
-                <a:t>Grau 100%</a:t>
-              </a:r>
-            </a:p>
-            <a:p>
-              <a:pPr>
-                <a:tabLst>
-                  <a:tab pos="360000" algn="l"/>
-                </a:tabLst>
-              </a:pPr>
-              <a:r>
-                <a:rPr lang="en-US" sz="800" dirty="0"/>
-                <a:t>Hex	#323F4B</a:t>
-              </a:r>
-            </a:p>
-            <a:p>
-              <a:pPr>
-                <a:tabLst>
-                  <a:tab pos="360000" algn="l"/>
-                </a:tabLst>
-              </a:pPr>
-              <a:r>
-                <a:rPr lang="en-US" sz="800" dirty="0"/>
-                <a:t>RGB	50 / 63 / 75</a:t>
-              </a:r>
-            </a:p>
-            <a:p>
-              <a:pPr>
-                <a:tabLst>
-                  <a:tab pos="360000" algn="l"/>
-                </a:tabLst>
-              </a:pPr>
-              <a:r>
-                <a:rPr lang="en-US" sz="800" dirty="0"/>
-                <a:t>CMYK	45 / 20 / 5 / 80</a:t>
-              </a:r>
-            </a:p>
-            <a:p>
-              <a:pPr>
-                <a:tabLst>
-                  <a:tab pos="360000" algn="l"/>
-                </a:tabLst>
-              </a:pPr>
-              <a:r>
-                <a:rPr lang="en-US" sz="800" dirty="0"/>
-                <a:t>NCS	8005-R80B</a:t>
-              </a:r>
-            </a:p>
-          </p:txBody>
-        </p:sp>
-        <p:sp>
-          <p:nvSpPr>
-            <p:cNvPr id="69" name="Textfeld 68">
-              <a:extLst>
-                <a:ext uri="{FF2B5EF4-FFF2-40B4-BE49-F238E27FC236}">
-                  <a16:creationId xmlns:a16="http://schemas.microsoft.com/office/drawing/2014/main" id="{2D11A905-2C95-4A86-9012-FE6F990FD455}"/>
-                </a:ext>
-              </a:extLst>
-            </p:cNvPr>
-            <p:cNvSpPr txBox="1"/>
-            <p:nvPr/>
-          </p:nvSpPr>
-          <p:spPr>
-            <a:xfrm>
-              <a:off x="10848975" y="1872060"/>
-              <a:ext cx="1200150" cy="615553"/>
-            </a:xfrm>
-            <a:prstGeom prst="rect">
-              <a:avLst/>
-            </a:prstGeom>
-            <a:noFill/>
-          </p:spPr>
-          <p:txBody>
-            <a:bodyPr wrap="square" lIns="0" tIns="0" rIns="0" bIns="0" rtlCol="0">
-              <a:spAutoFit/>
-            </a:bodyPr>
-            <a:lstStyle/>
-            <a:p>
-              <a:pPr>
-                <a:tabLst>
-                  <a:tab pos="360000" algn="l"/>
-                </a:tabLst>
-              </a:pPr>
-              <a:r>
-                <a:rPr lang="en-US" sz="800" dirty="0" err="1"/>
-                <a:t>Weiß</a:t>
-              </a:r>
-              <a:endParaRPr lang="en-US" sz="800" dirty="0"/>
-            </a:p>
-            <a:p>
-              <a:pPr>
-                <a:tabLst>
-                  <a:tab pos="360000" algn="l"/>
-                </a:tabLst>
-              </a:pPr>
-              <a:r>
-                <a:rPr lang="en-US" sz="800" dirty="0"/>
-                <a:t>Hex	#FFFFFF</a:t>
-              </a:r>
-            </a:p>
-            <a:p>
-              <a:pPr>
-                <a:tabLst>
-                  <a:tab pos="360000" algn="l"/>
-                </a:tabLst>
-              </a:pPr>
-              <a:r>
-                <a:rPr lang="en-US" sz="800" dirty="0"/>
-                <a:t>RGB	255 / 255 / 255</a:t>
-              </a:r>
-            </a:p>
-            <a:p>
-              <a:pPr>
-                <a:tabLst>
-                  <a:tab pos="360000" algn="l"/>
-                </a:tabLst>
-              </a:pPr>
-              <a:r>
-                <a:rPr lang="en-US" sz="800" dirty="0"/>
-                <a:t>CMYK	0 / 0 / 0 / 0</a:t>
-              </a:r>
-            </a:p>
-            <a:p>
-              <a:pPr>
-                <a:tabLst>
-                  <a:tab pos="360000" algn="l"/>
-                </a:tabLst>
-              </a:pPr>
-              <a:r>
-                <a:rPr lang="en-US" sz="800" dirty="0"/>
-                <a:t>NCS	0300-N</a:t>
-              </a:r>
-            </a:p>
-          </p:txBody>
-        </p:sp>
-      </p:grpSp>
+              <a:t>Limitation</a:t>
+            </a:r>
+          </a:p>
+        </p:txBody>
+      </p:sp>
+      <p:sp>
+        <p:nvSpPr>
+          <p:cNvPr id="3" name="Text Placeholder 2">
+            <a:extLst>
+              <a:ext uri="{FF2B5EF4-FFF2-40B4-BE49-F238E27FC236}">
+                <a16:creationId xmlns:a16="http://schemas.microsoft.com/office/drawing/2014/main" id="{D3E00221-4F0B-4F06-251C-93FEFFC1E862}"/>
+              </a:ext>
+            </a:extLst>
+          </p:cNvPr>
+          <p:cNvSpPr>
+            <a:spLocks noGrp="1"/>
+          </p:cNvSpPr>
+          <p:nvPr>
+            <p:ph type="body" sz="quarter" idx="10"/>
+          </p:nvPr>
+        </p:nvSpPr>
+        <p:spPr/>
+        <p:txBody>
+          <a:bodyPr/>
+          <a:lstStyle/>
+          <a:p>
+            <a:endParaRPr lang="de-DE"/>
+          </a:p>
+        </p:txBody>
+      </p:sp>
     </p:spTree>
     <p:extLst>
       <p:ext uri="{BB962C8B-B14F-4D97-AF65-F5344CB8AC3E}">
-        <p14:creationId xmlns:p14="http://schemas.microsoft.com/office/powerpoint/2010/main" val="3750483718"/>
+        <p14:creationId xmlns:p14="http://schemas.microsoft.com/office/powerpoint/2010/main" val="2997860574"/>
       </p:ext>
     </p:extLst>
   </p:cSld>
@@ -19853,18 +19516,18 @@
       </p:grpSpPr>
       <p:sp>
         <p:nvSpPr>
-          <p:cNvPr id="2" name="Titel 1">
-            <a:extLst>
-              <a:ext uri="{FF2B5EF4-FFF2-40B4-BE49-F238E27FC236}">
-                <a16:creationId xmlns:a16="http://schemas.microsoft.com/office/drawing/2014/main" id="{41392127-A6D4-4DE7-B042-2AE843D73193}"/>
-              </a:ext>
-            </a:extLst>
-          </p:cNvPr>
-          <p:cNvSpPr>
-            <a:spLocks noGrp="1"/>
-          </p:cNvSpPr>
-          <p:nvPr>
-            <p:ph type="ctrTitle"/>
+          <p:cNvPr id="4" name="Title 3">
+            <a:extLst>
+              <a:ext uri="{FF2B5EF4-FFF2-40B4-BE49-F238E27FC236}">
+                <a16:creationId xmlns:a16="http://schemas.microsoft.com/office/drawing/2014/main" id="{22D7CE72-3797-ACC9-5BAD-04412603E9D3}"/>
+              </a:ext>
+            </a:extLst>
+          </p:cNvPr>
+          <p:cNvSpPr>
+            <a:spLocks noGrp="1"/>
+          </p:cNvSpPr>
+          <p:nvPr>
+            <p:ph type="title"/>
           </p:nvPr>
         </p:nvSpPr>
         <p:spPr/>
@@ -19873,26 +19536,27 @@
           <a:lstStyle/>
           <a:p>
             <a:r>
-              <a:rPr lang="de-DE" dirty="0"/>
-              <a:t>Hier steht der Präsentationstitel</a:t>
-            </a:r>
-          </a:p>
-        </p:txBody>
-      </p:sp>
-      <p:sp>
-        <p:nvSpPr>
-          <p:cNvPr id="3" name="Untertitel 2">
-            <a:extLst>
-              <a:ext uri="{FF2B5EF4-FFF2-40B4-BE49-F238E27FC236}">
-                <a16:creationId xmlns:a16="http://schemas.microsoft.com/office/drawing/2014/main" id="{691F6330-C39B-4485-AD3C-BF8578A251E4}"/>
-              </a:ext>
-            </a:extLst>
-          </p:cNvPr>
-          <p:cNvSpPr>
-            <a:spLocks noGrp="1"/>
-          </p:cNvSpPr>
-          <p:nvPr>
-            <p:ph type="subTitle" idx="1"/>
+              <a:rPr lang="de-DE" dirty="0" err="1"/>
+              <a:t>Limitations</a:t>
+            </a:r>
+            <a:endParaRPr lang="de-DE" dirty="0"/>
+          </a:p>
+        </p:txBody>
+      </p:sp>
+      <p:sp>
+        <p:nvSpPr>
+          <p:cNvPr id="5" name="Content Placeholder 4">
+            <a:extLst>
+              <a:ext uri="{FF2B5EF4-FFF2-40B4-BE49-F238E27FC236}">
+                <a16:creationId xmlns:a16="http://schemas.microsoft.com/office/drawing/2014/main" id="{41E0F06F-E56A-DD06-AEFA-40963E674A72}"/>
+              </a:ext>
+            </a:extLst>
+          </p:cNvPr>
+          <p:cNvSpPr>
+            <a:spLocks noGrp="1"/>
+          </p:cNvSpPr>
+          <p:nvPr>
+            <p:ph idx="1"/>
           </p:nvPr>
         </p:nvSpPr>
         <p:spPr/>
@@ -19900,49 +19564,247 @@
           <a:bodyPr/>
           <a:lstStyle/>
           <a:p>
-            <a:r>
-              <a:rPr lang="de-DE" dirty="0"/>
-              <a:t>Hier steht ein Untertitel z.B. der Name des Vortragenden, Struktureinheit, </a:t>
-            </a:r>
-            <a:br>
-              <a:rPr lang="de-DE" dirty="0"/>
-            </a:br>
-            <a:r>
-              <a:rPr lang="de-DE" dirty="0"/>
-              <a:t>Ort und Datum des Vortrags sowie weitere Kontextinformationen</a:t>
-            </a:r>
-          </a:p>
-        </p:txBody>
-      </p:sp>
-      <p:sp>
-        <p:nvSpPr>
-          <p:cNvPr id="6" name="Textplatzhalter 5">
-            <a:extLst>
-              <a:ext uri="{FF2B5EF4-FFF2-40B4-BE49-F238E27FC236}">
-                <a16:creationId xmlns:a16="http://schemas.microsoft.com/office/drawing/2014/main" id="{03C57DC0-CDAD-4228-BA26-3D1CE1558B7C}"/>
-              </a:ext>
-            </a:extLst>
-          </p:cNvPr>
-          <p:cNvSpPr>
-            <a:spLocks noGrp="1"/>
-          </p:cNvSpPr>
-          <p:nvPr>
-            <p:ph type="body" sz="quarter" idx="10"/>
-          </p:nvPr>
-        </p:nvSpPr>
-        <p:spPr/>
-        <p:txBody>
-          <a:bodyPr/>
-          <a:lstStyle/>
-          <a:p>
-            <a:endParaRPr lang="de-DE"/>
+            <a:pPr marL="342900" indent="-342900">
+              <a:buFont typeface="Arial" panose="020B0604020202020204" pitchFamily="34" charset="0"/>
+              <a:buChar char="•"/>
+            </a:pPr>
+            <a:r>
+              <a:rPr lang="de-DE" dirty="0"/>
+              <a:t>web APIs </a:t>
+            </a:r>
+            <a:r>
+              <a:rPr lang="de-DE" dirty="0" err="1"/>
+              <a:t>are</a:t>
+            </a:r>
+            <a:r>
+              <a:rPr lang="de-DE" dirty="0"/>
+              <a:t> </a:t>
+            </a:r>
+            <a:r>
+              <a:rPr lang="de-DE" dirty="0" err="1"/>
+              <a:t>very</a:t>
+            </a:r>
+            <a:r>
+              <a:rPr lang="de-DE" dirty="0"/>
+              <a:t> </a:t>
+            </a:r>
+            <a:r>
+              <a:rPr lang="de-DE" dirty="0" err="1"/>
+              <a:t>constricted</a:t>
+            </a:r>
+            <a:endParaRPr lang="de-DE" dirty="0"/>
+          </a:p>
+          <a:p>
+            <a:pPr marL="342900" indent="-342900">
+              <a:buFont typeface="Arial" panose="020B0604020202020204" pitchFamily="34" charset="0"/>
+              <a:buChar char="•"/>
+            </a:pPr>
+            <a:r>
+              <a:rPr lang="de-DE" dirty="0" err="1"/>
+              <a:t>confined</a:t>
+            </a:r>
+            <a:r>
+              <a:rPr lang="de-DE" dirty="0"/>
+              <a:t> </a:t>
+            </a:r>
+            <a:r>
+              <a:rPr lang="de-DE" dirty="0" err="1"/>
+              <a:t>VSCode</a:t>
+            </a:r>
+            <a:r>
+              <a:rPr lang="de-DE" dirty="0"/>
+              <a:t> web </a:t>
+            </a:r>
+            <a:r>
+              <a:rPr lang="de-DE" dirty="0" err="1"/>
+              <a:t>extension</a:t>
+            </a:r>
+            <a:r>
+              <a:rPr lang="de-DE" dirty="0"/>
+              <a:t> </a:t>
+            </a:r>
+            <a:r>
+              <a:rPr lang="de-DE" dirty="0" err="1"/>
+              <a:t>context</a:t>
+            </a:r>
+            <a:r>
+              <a:rPr lang="de-DE" dirty="0"/>
+              <a:t> </a:t>
+            </a:r>
+          </a:p>
+          <a:p>
+            <a:pPr marL="342900" indent="-342900">
+              <a:buFont typeface="Arial" panose="020B0604020202020204" pitchFamily="34" charset="0"/>
+              <a:buChar char="•"/>
+            </a:pPr>
+            <a:r>
+              <a:rPr lang="de-DE" dirty="0" err="1"/>
+              <a:t>device</a:t>
+            </a:r>
+            <a:r>
+              <a:rPr lang="de-DE" dirty="0"/>
+              <a:t> support </a:t>
+            </a:r>
+            <a:r>
+              <a:rPr lang="de-DE" dirty="0" err="1"/>
+              <a:t>has</a:t>
+            </a:r>
+            <a:r>
+              <a:rPr lang="de-DE" dirty="0"/>
+              <a:t> to </a:t>
+            </a:r>
+            <a:r>
+              <a:rPr lang="de-DE" dirty="0" err="1"/>
+              <a:t>be</a:t>
+            </a:r>
+            <a:r>
+              <a:rPr lang="de-DE" dirty="0"/>
+              <a:t> </a:t>
+            </a:r>
+            <a:r>
+              <a:rPr lang="de-DE" dirty="0" err="1"/>
+              <a:t>added</a:t>
+            </a:r>
+            <a:r>
+              <a:rPr lang="de-DE" dirty="0"/>
+              <a:t> </a:t>
+            </a:r>
+            <a:r>
+              <a:rPr lang="de-DE" dirty="0" err="1"/>
+              <a:t>manually</a:t>
+            </a:r>
+            <a:r>
+              <a:rPr lang="de-DE" dirty="0"/>
+              <a:t> (flasher.js + </a:t>
+            </a:r>
+            <a:r>
+              <a:rPr lang="de-DE" dirty="0" err="1"/>
+              <a:t>make</a:t>
+            </a:r>
+            <a:r>
+              <a:rPr lang="de-DE" dirty="0"/>
+              <a:t> </a:t>
+            </a:r>
+            <a:r>
+              <a:rPr lang="de-DE" dirty="0" err="1"/>
+              <a:t>patch</a:t>
+            </a:r>
+            <a:r>
+              <a:rPr lang="de-DE" dirty="0"/>
+              <a:t>)</a:t>
+            </a:r>
+          </a:p>
+          <a:p>
+            <a:pPr marL="342900" indent="-342900">
+              <a:buFont typeface="Arial" panose="020B0604020202020204" pitchFamily="34" charset="0"/>
+              <a:buChar char="•"/>
+            </a:pPr>
+            <a:r>
+              <a:rPr lang="de-DE" dirty="0" err="1"/>
+              <a:t>some</a:t>
+            </a:r>
+            <a:r>
+              <a:rPr lang="de-DE" dirty="0"/>
+              <a:t> </a:t>
+            </a:r>
+            <a:r>
+              <a:rPr lang="de-DE" dirty="0" err="1"/>
+              <a:t>devices</a:t>
+            </a:r>
+            <a:r>
+              <a:rPr lang="de-DE" dirty="0"/>
+              <a:t> still </a:t>
+            </a:r>
+            <a:r>
+              <a:rPr lang="de-DE" dirty="0" err="1"/>
+              <a:t>require</a:t>
+            </a:r>
+            <a:r>
+              <a:rPr lang="de-DE" dirty="0"/>
+              <a:t> a </a:t>
+            </a:r>
+            <a:r>
+              <a:rPr lang="de-DE" dirty="0" err="1"/>
+              <a:t>driver</a:t>
+            </a:r>
+            <a:r>
+              <a:rPr lang="de-DE" dirty="0"/>
+              <a:t> to </a:t>
+            </a:r>
+            <a:r>
+              <a:rPr lang="de-DE" dirty="0" err="1"/>
+              <a:t>be</a:t>
+            </a:r>
+            <a:r>
+              <a:rPr lang="de-DE" dirty="0"/>
+              <a:t> </a:t>
+            </a:r>
+            <a:r>
+              <a:rPr lang="de-DE" dirty="0" err="1"/>
+              <a:t>recognized</a:t>
+            </a:r>
+            <a:r>
+              <a:rPr lang="de-DE" dirty="0"/>
+              <a:t> </a:t>
+            </a:r>
+            <a:r>
+              <a:rPr lang="de-DE" dirty="0" err="1"/>
+              <a:t>by</a:t>
+            </a:r>
+            <a:r>
+              <a:rPr lang="de-DE" dirty="0"/>
+              <a:t> </a:t>
+            </a:r>
+            <a:r>
+              <a:rPr lang="de-DE" dirty="0" err="1"/>
+              <a:t>your</a:t>
+            </a:r>
+            <a:r>
+              <a:rPr lang="de-DE" dirty="0"/>
+              <a:t> </a:t>
+            </a:r>
+            <a:r>
+              <a:rPr lang="de-DE" dirty="0" err="1"/>
+              <a:t>os</a:t>
+            </a:r>
+            <a:endParaRPr lang="de-DE" dirty="0"/>
+          </a:p>
+          <a:p>
+            <a:pPr marL="342900" indent="-342900">
+              <a:buFont typeface="Arial" panose="020B0604020202020204" pitchFamily="34" charset="0"/>
+              <a:buChar char="•"/>
+            </a:pPr>
+            <a:r>
+              <a:rPr lang="de-DE" dirty="0"/>
+              <a:t>1 </a:t>
+            </a:r>
+            <a:r>
+              <a:rPr lang="de-DE" dirty="0" err="1"/>
+              <a:t>container</a:t>
+            </a:r>
+            <a:r>
+              <a:rPr lang="de-DE" dirty="0"/>
+              <a:t> – 1 </a:t>
+            </a:r>
+            <a:r>
+              <a:rPr lang="de-DE" dirty="0" err="1"/>
+              <a:t>user</a:t>
+            </a:r>
+            <a:endParaRPr lang="de-DE" dirty="0"/>
+          </a:p>
+          <a:p>
+            <a:pPr marL="342900" indent="-342900">
+              <a:buFont typeface="Arial" panose="020B0604020202020204" pitchFamily="34" charset="0"/>
+              <a:buChar char="•"/>
+            </a:pPr>
+            <a:endParaRPr lang="de-DE" dirty="0"/>
           </a:p>
         </p:txBody>
       </p:sp>
     </p:spTree>
     <p:extLst>
       <p:ext uri="{BB962C8B-B14F-4D97-AF65-F5344CB8AC3E}">
-        <p14:creationId xmlns:p14="http://schemas.microsoft.com/office/powerpoint/2010/main" val="2213360576"/>
+        <p14:creationId xmlns:p14="http://schemas.microsoft.com/office/powerpoint/2010/main" val="1883924250"/>
       </p:ext>
     </p:extLst>
   </p:cSld>
@@ -19957,7 +19819,13 @@
   <p:cSld>
     <p:spTree>
       <p:nvGrpSpPr>
-        <p:cNvPr id="1" name=""/>
+        <p:cNvPr id="1" name="">
+          <a:extLst>
+            <a:ext uri="{FF2B5EF4-FFF2-40B4-BE49-F238E27FC236}">
+              <a16:creationId xmlns:a16="http://schemas.microsoft.com/office/drawing/2014/main" id="{A5108602-F26E-4402-81B5-C03EB3BB53CB}"/>
+            </a:ext>
+          </a:extLst>
+        </p:cNvPr>
         <p:cNvGrpSpPr/>
         <p:nvPr/>
       </p:nvGrpSpPr>
@@ -19971,18 +19839,18 @@
       </p:grpSpPr>
       <p:sp>
         <p:nvSpPr>
-          <p:cNvPr id="5" name="Titel 4">
-            <a:extLst>
-              <a:ext uri="{FF2B5EF4-FFF2-40B4-BE49-F238E27FC236}">
-                <a16:creationId xmlns:a16="http://schemas.microsoft.com/office/drawing/2014/main" id="{AF403F2C-4CD0-49EB-9D1C-4A32DA085917}"/>
-              </a:ext>
-            </a:extLst>
-          </p:cNvPr>
-          <p:cNvSpPr>
-            <a:spLocks noGrp="1"/>
-          </p:cNvSpPr>
-          <p:nvPr>
-            <p:ph type="ctrTitle"/>
+          <p:cNvPr id="2" name="Title 1">
+            <a:extLst>
+              <a:ext uri="{FF2B5EF4-FFF2-40B4-BE49-F238E27FC236}">
+                <a16:creationId xmlns:a16="http://schemas.microsoft.com/office/drawing/2014/main" id="{4D27F8BC-C520-B535-B921-65DB20E30002}"/>
+              </a:ext>
+            </a:extLst>
+          </p:cNvPr>
+          <p:cNvSpPr>
+            <a:spLocks noGrp="1"/>
+          </p:cNvSpPr>
+          <p:nvPr>
+            <p:ph type="title"/>
           </p:nvPr>
         </p:nvSpPr>
         <p:spPr/>
@@ -19990,41 +19858,19 @@
           <a:bodyPr/>
           <a:lstStyle/>
           <a:p>
-            <a:endParaRPr lang="de-DE"/>
-          </a:p>
-        </p:txBody>
-      </p:sp>
-      <p:sp>
-        <p:nvSpPr>
-          <p:cNvPr id="6" name="Untertitel 5">
-            <a:extLst>
-              <a:ext uri="{FF2B5EF4-FFF2-40B4-BE49-F238E27FC236}">
-                <a16:creationId xmlns:a16="http://schemas.microsoft.com/office/drawing/2014/main" id="{09F9827E-29F5-4B78-9D48-31E0A972475B}"/>
-              </a:ext>
-            </a:extLst>
-          </p:cNvPr>
-          <p:cNvSpPr>
-            <a:spLocks noGrp="1"/>
-          </p:cNvSpPr>
-          <p:nvPr>
-            <p:ph type="subTitle" idx="1"/>
-          </p:nvPr>
-        </p:nvSpPr>
-        <p:spPr/>
-        <p:txBody>
-          <a:bodyPr/>
-          <a:lstStyle/>
-          <a:p>
-            <a:endParaRPr lang="de-DE"/>
-          </a:p>
-        </p:txBody>
-      </p:sp>
-      <p:sp>
-        <p:nvSpPr>
-          <p:cNvPr id="7" name="Textplatzhalter 6">
-            <a:extLst>
-              <a:ext uri="{FF2B5EF4-FFF2-40B4-BE49-F238E27FC236}">
-                <a16:creationId xmlns:a16="http://schemas.microsoft.com/office/drawing/2014/main" id="{FDD7614A-B43E-4E41-A5A9-156F52E1C8B8}"/>
+            <a:r>
+              <a:rPr lang="de-DE" dirty="0"/>
+              <a:t>Features / Support</a:t>
+            </a:r>
+          </a:p>
+        </p:txBody>
+      </p:sp>
+      <p:sp>
+        <p:nvSpPr>
+          <p:cNvPr id="3" name="Text Placeholder 2">
+            <a:extLst>
+              <a:ext uri="{FF2B5EF4-FFF2-40B4-BE49-F238E27FC236}">
+                <a16:creationId xmlns:a16="http://schemas.microsoft.com/office/drawing/2014/main" id="{0D9ED7E7-1FDE-2597-B4A0-5DC92923DA5C}"/>
               </a:ext>
             </a:extLst>
           </p:cNvPr>
@@ -20047,7 +19893,7 @@
     </p:spTree>
     <p:extLst>
       <p:ext uri="{BB962C8B-B14F-4D97-AF65-F5344CB8AC3E}">
-        <p14:creationId xmlns:p14="http://schemas.microsoft.com/office/powerpoint/2010/main" val="37952302"/>
+        <p14:creationId xmlns:p14="http://schemas.microsoft.com/office/powerpoint/2010/main" val="2594913671"/>
       </p:ext>
     </p:extLst>
   </p:cSld>
@@ -20076,36 +19922,18 @@
       </p:grpSpPr>
       <p:sp>
         <p:nvSpPr>
-          <p:cNvPr id="8" name="Bildplatzhalter 7">
-            <a:extLst>
-              <a:ext uri="{FF2B5EF4-FFF2-40B4-BE49-F238E27FC236}">
-                <a16:creationId xmlns:a16="http://schemas.microsoft.com/office/drawing/2014/main" id="{4811EB53-062D-4059-B854-4732FB2C899E}"/>
-              </a:ext>
-            </a:extLst>
-          </p:cNvPr>
-          <p:cNvSpPr>
-            <a:spLocks noGrp="1"/>
-          </p:cNvSpPr>
-          <p:nvPr>
-            <p:ph type="pic" sz="quarter" idx="11"/>
-          </p:nvPr>
-        </p:nvSpPr>
-        <p:spPr/>
-      </p:sp>
-      <p:sp>
-        <p:nvSpPr>
-          <p:cNvPr id="5" name="Titel 4">
-            <a:extLst>
-              <a:ext uri="{FF2B5EF4-FFF2-40B4-BE49-F238E27FC236}">
-                <a16:creationId xmlns:a16="http://schemas.microsoft.com/office/drawing/2014/main" id="{F7BD043A-001A-4AF3-8AE3-C6D1E5432FB2}"/>
-              </a:ext>
-            </a:extLst>
-          </p:cNvPr>
-          <p:cNvSpPr>
-            <a:spLocks noGrp="1"/>
-          </p:cNvSpPr>
-          <p:nvPr>
-            <p:ph type="ctrTitle"/>
+          <p:cNvPr id="4" name="Title 3">
+            <a:extLst>
+              <a:ext uri="{FF2B5EF4-FFF2-40B4-BE49-F238E27FC236}">
+                <a16:creationId xmlns:a16="http://schemas.microsoft.com/office/drawing/2014/main" id="{2E5687C6-B809-8B7A-9B61-AC4753C91414}"/>
+              </a:ext>
+            </a:extLst>
+          </p:cNvPr>
+          <p:cNvSpPr>
+            <a:spLocks noGrp="1"/>
+          </p:cNvSpPr>
+          <p:nvPr>
+            <p:ph type="title"/>
           </p:nvPr>
         </p:nvSpPr>
         <p:spPr/>
@@ -20113,24 +19941,27 @@
           <a:bodyPr/>
           <a:lstStyle/>
           <a:p>
-            <a:endParaRPr lang="de-DE"/>
-          </a:p>
-        </p:txBody>
-      </p:sp>
-      <p:sp>
-        <p:nvSpPr>
-          <p:cNvPr id="6" name="Untertitel 5">
-            <a:extLst>
-              <a:ext uri="{FF2B5EF4-FFF2-40B4-BE49-F238E27FC236}">
-                <a16:creationId xmlns:a16="http://schemas.microsoft.com/office/drawing/2014/main" id="{6200F6E1-CC08-41B7-A8C4-6860BC56BB4F}"/>
-              </a:ext>
-            </a:extLst>
-          </p:cNvPr>
-          <p:cNvSpPr>
-            <a:spLocks noGrp="1"/>
-          </p:cNvSpPr>
-          <p:nvPr>
-            <p:ph type="subTitle" idx="1"/>
+            <a:r>
+              <a:rPr lang="de-DE" dirty="0"/>
+              <a:t>Features / Support</a:t>
+            </a:r>
+          </a:p>
+        </p:txBody>
+      </p:sp>
+      <p:sp>
+        <p:nvSpPr>
+          <p:cNvPr id="5" name="Content Placeholder 4">
+            <a:extLst>
+              <a:ext uri="{FF2B5EF4-FFF2-40B4-BE49-F238E27FC236}">
+                <a16:creationId xmlns:a16="http://schemas.microsoft.com/office/drawing/2014/main" id="{4BE06B6A-4CEB-8480-893A-23E5FB9B4D9F}"/>
+              </a:ext>
+            </a:extLst>
+          </p:cNvPr>
+          <p:cNvSpPr>
+            <a:spLocks noGrp="1"/>
+          </p:cNvSpPr>
+          <p:nvPr>
+            <p:ph idx="1"/>
           </p:nvPr>
         </p:nvSpPr>
         <p:spPr/>
@@ -20138,39 +19969,121 @@
           <a:bodyPr/>
           <a:lstStyle/>
           <a:p>
-            <a:endParaRPr lang="de-DE"/>
-          </a:p>
-        </p:txBody>
-      </p:sp>
-      <p:sp>
-        <p:nvSpPr>
-          <p:cNvPr id="7" name="Textplatzhalter 6">
-            <a:extLst>
-              <a:ext uri="{FF2B5EF4-FFF2-40B4-BE49-F238E27FC236}">
-                <a16:creationId xmlns:a16="http://schemas.microsoft.com/office/drawing/2014/main" id="{EBF446D3-B04F-4567-BFA1-34BF421B7D27}"/>
-              </a:ext>
-            </a:extLst>
-          </p:cNvPr>
-          <p:cNvSpPr>
-            <a:spLocks noGrp="1"/>
-          </p:cNvSpPr>
-          <p:nvPr>
-            <p:ph type="body" sz="quarter" idx="10"/>
-          </p:nvPr>
-        </p:nvSpPr>
-        <p:spPr/>
-        <p:txBody>
-          <a:bodyPr/>
-          <a:lstStyle/>
-          <a:p>
-            <a:endParaRPr lang="de-DE"/>
+            <a:pPr marL="342900" indent="-342900">
+              <a:buFont typeface="Arial" panose="020B0604020202020204" pitchFamily="34" charset="0"/>
+              <a:buChar char="•"/>
+            </a:pPr>
+            <a:r>
+              <a:rPr lang="de-DE" dirty="0" err="1"/>
+              <a:t>flash</a:t>
+            </a:r>
+            <a:r>
+              <a:rPr lang="de-DE" dirty="0"/>
+              <a:t> and </a:t>
+            </a:r>
+            <a:r>
+              <a:rPr lang="de-DE" dirty="0" err="1"/>
+              <a:t>term</a:t>
+            </a:r>
+            <a:r>
+              <a:rPr lang="de-DE" dirty="0"/>
+              <a:t> via:</a:t>
+            </a:r>
+          </a:p>
+          <a:p>
+            <a:pPr marL="576263" lvl="2" indent="-342900"/>
+            <a:r>
+              <a:rPr lang="de-DE" dirty="0"/>
+              <a:t>UI</a:t>
+            </a:r>
+          </a:p>
+          <a:p>
+            <a:pPr marL="576263" lvl="2" indent="-342900"/>
+            <a:r>
+              <a:rPr lang="de-DE" dirty="0"/>
+              <a:t>CLI</a:t>
+            </a:r>
+          </a:p>
+          <a:p>
+            <a:pPr marL="342900" lvl="1" indent="-342900">
+              <a:buFont typeface="Arial" panose="020B0604020202020204" pitchFamily="34" charset="0"/>
+              <a:buChar char="•"/>
+            </a:pPr>
+            <a:r>
+              <a:rPr lang="de-DE" dirty="0" err="1"/>
+              <a:t>coherent</a:t>
+            </a:r>
+            <a:r>
+              <a:rPr lang="de-DE" dirty="0"/>
+              <a:t> UI / CLI </a:t>
+            </a:r>
+            <a:r>
+              <a:rPr lang="de-DE" dirty="0" err="1"/>
+              <a:t>experience</a:t>
+            </a:r>
+            <a:endParaRPr lang="de-DE" dirty="0"/>
+          </a:p>
+          <a:p>
+            <a:pPr marL="342900" lvl="1" indent="-342900">
+              <a:buFont typeface="Arial" panose="020B0604020202020204" pitchFamily="34" charset="0"/>
+              <a:buChar char="•"/>
+            </a:pPr>
+            <a:r>
+              <a:rPr lang="de-DE" dirty="0"/>
+              <a:t>multiple </a:t>
+            </a:r>
+            <a:r>
+              <a:rPr lang="de-DE" dirty="0" err="1"/>
+              <a:t>devices</a:t>
+            </a:r>
+            <a:r>
+              <a:rPr lang="de-DE" dirty="0"/>
+              <a:t> and </a:t>
+            </a:r>
+            <a:r>
+              <a:rPr lang="de-DE" dirty="0" err="1"/>
+              <a:t>projects</a:t>
+            </a:r>
+            <a:endParaRPr lang="de-DE" dirty="0"/>
+          </a:p>
+          <a:p>
+            <a:pPr marL="342900" lvl="1" indent="-342900">
+              <a:buFont typeface="Arial" panose="020B0604020202020204" pitchFamily="34" charset="0"/>
+              <a:buChar char="•"/>
+            </a:pPr>
+            <a:r>
+              <a:rPr lang="de-DE" dirty="0" err="1"/>
+              <a:t>boards</a:t>
+            </a:r>
+            <a:r>
+              <a:rPr lang="de-DE" dirty="0"/>
+              <a:t>:</a:t>
+            </a:r>
+          </a:p>
+          <a:p>
+            <a:pPr marL="576263" lvl="2" indent="-342900"/>
+            <a:r>
+              <a:rPr lang="de-DE" dirty="0"/>
+              <a:t>adafruit-nrf52840 (RIOT kit)</a:t>
+            </a:r>
+          </a:p>
+          <a:p>
+            <a:pPr marL="576263" lvl="2" indent="-342900"/>
+            <a:r>
+              <a:rPr lang="de-DE" dirty="0" err="1"/>
+              <a:t>esp</a:t>
+            </a:r>
+            <a:r>
+              <a:rPr lang="de-DE" dirty="0"/>
+              <a:t> (all)</a:t>
+            </a:r>
           </a:p>
         </p:txBody>
       </p:sp>
     </p:spTree>
     <p:extLst>
       <p:ext uri="{BB962C8B-B14F-4D97-AF65-F5344CB8AC3E}">
-        <p14:creationId xmlns:p14="http://schemas.microsoft.com/office/powerpoint/2010/main" val="1491171527"/>
+        <p14:creationId xmlns:p14="http://schemas.microsoft.com/office/powerpoint/2010/main" val="4015091510"/>
       </p:ext>
     </p:extLst>
   </p:cSld>
@@ -20199,18 +20112,18 @@
       </p:grpSpPr>
       <p:sp>
         <p:nvSpPr>
-          <p:cNvPr id="6" name="Titel 5">
-            <a:extLst>
-              <a:ext uri="{FF2B5EF4-FFF2-40B4-BE49-F238E27FC236}">
-                <a16:creationId xmlns:a16="http://schemas.microsoft.com/office/drawing/2014/main" id="{79359034-6132-4867-83B4-AE54EA0764B4}"/>
-              </a:ext>
-            </a:extLst>
-          </p:cNvPr>
-          <p:cNvSpPr>
-            <a:spLocks noGrp="1"/>
-          </p:cNvSpPr>
-          <p:nvPr>
-            <p:ph type="ctrTitle"/>
+          <p:cNvPr id="4" name="Title 3">
+            <a:extLst>
+              <a:ext uri="{FF2B5EF4-FFF2-40B4-BE49-F238E27FC236}">
+                <a16:creationId xmlns:a16="http://schemas.microsoft.com/office/drawing/2014/main" id="{274D4D3B-073D-1EBF-720B-3E19ACC6FC0B}"/>
+              </a:ext>
+            </a:extLst>
+          </p:cNvPr>
+          <p:cNvSpPr>
+            <a:spLocks noGrp="1"/>
+          </p:cNvSpPr>
+          <p:nvPr>
+            <p:ph type="title"/>
           </p:nvPr>
         </p:nvSpPr>
         <p:spPr/>
@@ -20218,59 +20131,19 @@
           <a:bodyPr/>
           <a:lstStyle/>
           <a:p>
-            <a:endParaRPr lang="de-DE"/>
-          </a:p>
-        </p:txBody>
-      </p:sp>
-      <p:sp>
-        <p:nvSpPr>
-          <p:cNvPr id="7" name="Untertitel 6">
-            <a:extLst>
-              <a:ext uri="{FF2B5EF4-FFF2-40B4-BE49-F238E27FC236}">
-                <a16:creationId xmlns:a16="http://schemas.microsoft.com/office/drawing/2014/main" id="{5A6EB2F1-24AF-4F9B-8C00-53E854A50957}"/>
-              </a:ext>
-            </a:extLst>
-          </p:cNvPr>
-          <p:cNvSpPr>
-            <a:spLocks noGrp="1"/>
-          </p:cNvSpPr>
-          <p:nvPr>
-            <p:ph type="subTitle" idx="1"/>
-          </p:nvPr>
-        </p:nvSpPr>
-        <p:spPr/>
-        <p:txBody>
-          <a:bodyPr/>
-          <a:lstStyle/>
-          <a:p>
-            <a:endParaRPr lang="de-DE"/>
-          </a:p>
-        </p:txBody>
-      </p:sp>
-      <p:sp>
-        <p:nvSpPr>
-          <p:cNvPr id="9" name="Bildplatzhalter 8">
-            <a:extLst>
-              <a:ext uri="{FF2B5EF4-FFF2-40B4-BE49-F238E27FC236}">
-                <a16:creationId xmlns:a16="http://schemas.microsoft.com/office/drawing/2014/main" id="{FDDC15C2-508D-44C0-ACBE-F5B4A6E4DE64}"/>
-              </a:ext>
-            </a:extLst>
-          </p:cNvPr>
-          <p:cNvSpPr>
-            <a:spLocks noGrp="1"/>
-          </p:cNvSpPr>
-          <p:nvPr>
-            <p:ph type="pic" sz="quarter" idx="11"/>
-          </p:nvPr>
-        </p:nvSpPr>
-        <p:spPr/>
-      </p:sp>
-      <p:sp>
-        <p:nvSpPr>
-          <p:cNvPr id="8" name="Textplatzhalter 7">
-            <a:extLst>
-              <a:ext uri="{FF2B5EF4-FFF2-40B4-BE49-F238E27FC236}">
-                <a16:creationId xmlns:a16="http://schemas.microsoft.com/office/drawing/2014/main" id="{575CCBFE-BC1A-4A7A-BC8D-5D0C11869BFB}"/>
+            <a:r>
+              <a:rPr lang="de-DE" dirty="0"/>
+              <a:t>Demo</a:t>
+            </a:r>
+          </a:p>
+        </p:txBody>
+      </p:sp>
+      <p:sp>
+        <p:nvSpPr>
+          <p:cNvPr id="5" name="Text Placeholder 4">
+            <a:extLst>
+              <a:ext uri="{FF2B5EF4-FFF2-40B4-BE49-F238E27FC236}">
+                <a16:creationId xmlns:a16="http://schemas.microsoft.com/office/drawing/2014/main" id="{E2CE912E-1494-0E7F-BF9A-7E15C243C047}"/>
               </a:ext>
             </a:extLst>
           </p:cNvPr>
@@ -20293,7 +20166,7 @@
     </p:spTree>
     <p:extLst>
       <p:ext uri="{BB962C8B-B14F-4D97-AF65-F5344CB8AC3E}">
-        <p14:creationId xmlns:p14="http://schemas.microsoft.com/office/powerpoint/2010/main" val="585815824"/>
+        <p14:creationId xmlns:p14="http://schemas.microsoft.com/office/powerpoint/2010/main" val="2299765845"/>
       </p:ext>
     </p:extLst>
   </p:cSld>
@@ -20322,18 +20195,18 @@
       </p:grpSpPr>
       <p:sp>
         <p:nvSpPr>
-          <p:cNvPr id="4" name="Inhaltsplatzhalter 3">
-            <a:extLst>
-              <a:ext uri="{FF2B5EF4-FFF2-40B4-BE49-F238E27FC236}">
-                <a16:creationId xmlns:a16="http://schemas.microsoft.com/office/drawing/2014/main" id="{D2B22282-4FAE-44F9-AFE1-5CAEEEC2762D}"/>
-              </a:ext>
-            </a:extLst>
-          </p:cNvPr>
-          <p:cNvSpPr>
-            <a:spLocks noGrp="1"/>
-          </p:cNvSpPr>
-          <p:nvPr>
-            <p:ph sz="half" idx="1"/>
+          <p:cNvPr id="7" name="Title 6">
+            <a:extLst>
+              <a:ext uri="{FF2B5EF4-FFF2-40B4-BE49-F238E27FC236}">
+                <a16:creationId xmlns:a16="http://schemas.microsoft.com/office/drawing/2014/main" id="{7367F1D1-9BDF-981A-6F45-995A8672C8E8}"/>
+              </a:ext>
+            </a:extLst>
+          </p:cNvPr>
+          <p:cNvSpPr>
+            <a:spLocks noGrp="1"/>
+          </p:cNvSpPr>
+          <p:nvPr>
+            <p:ph type="title"/>
           </p:nvPr>
         </p:nvSpPr>
         <p:spPr/>
@@ -20341,42 +20214,52 @@
           <a:bodyPr/>
           <a:lstStyle/>
           <a:p>
-            <a:endParaRPr lang="de-DE"/>
-          </a:p>
-        </p:txBody>
-      </p:sp>
-      <p:sp>
-        <p:nvSpPr>
-          <p:cNvPr id="9" name="Bildplatzhalter 8">
-            <a:extLst>
-              <a:ext uri="{FF2B5EF4-FFF2-40B4-BE49-F238E27FC236}">
-                <a16:creationId xmlns:a16="http://schemas.microsoft.com/office/drawing/2014/main" id="{D5DDE304-0555-480B-95B1-FEA18673CD9B}"/>
-              </a:ext>
-            </a:extLst>
-          </p:cNvPr>
-          <p:cNvSpPr>
-            <a:spLocks noGrp="1"/>
-          </p:cNvSpPr>
-          <p:nvPr>
-            <p:ph type="pic" sz="quarter" idx="13"/>
-          </p:nvPr>
-        </p:nvSpPr>
-        <p:spPr/>
-      </p:sp>
-      <p:sp>
-        <p:nvSpPr>
-          <p:cNvPr id="10" name="Textplatzhalter 9">
-            <a:extLst>
-              <a:ext uri="{FF2B5EF4-FFF2-40B4-BE49-F238E27FC236}">
-                <a16:creationId xmlns:a16="http://schemas.microsoft.com/office/drawing/2014/main" id="{9BE67CA1-1E8C-4454-B124-2AC0DBF584CB}"/>
-              </a:ext>
-            </a:extLst>
-          </p:cNvPr>
-          <p:cNvSpPr>
-            <a:spLocks noGrp="1"/>
-          </p:cNvSpPr>
-          <p:nvPr>
-            <p:ph type="body" sz="quarter" idx="15"/>
+            <a:r>
+              <a:rPr lang="de-DE" dirty="0" err="1"/>
+              <a:t>Thanks</a:t>
+            </a:r>
+            <a:r>
+              <a:rPr lang="de-DE" dirty="0"/>
+              <a:t> </a:t>
+            </a:r>
+            <a:r>
+              <a:rPr lang="de-DE" dirty="0" err="1"/>
+              <a:t>for</a:t>
+            </a:r>
+            <a:r>
+              <a:rPr lang="de-DE" dirty="0"/>
+              <a:t> </a:t>
+            </a:r>
+            <a:r>
+              <a:rPr lang="de-DE" dirty="0" err="1"/>
+              <a:t>your</a:t>
+            </a:r>
+            <a:r>
+              <a:rPr lang="de-DE" dirty="0"/>
+              <a:t> </a:t>
+            </a:r>
+            <a:r>
+              <a:rPr lang="de-DE" dirty="0" err="1"/>
+              <a:t>attention</a:t>
+            </a:r>
+            <a:endParaRPr lang="de-DE" dirty="0"/>
+          </a:p>
+        </p:txBody>
+      </p:sp>
+      <p:sp>
+        <p:nvSpPr>
+          <p:cNvPr id="8" name="Content Placeholder 7">
+            <a:extLst>
+              <a:ext uri="{FF2B5EF4-FFF2-40B4-BE49-F238E27FC236}">
+                <a16:creationId xmlns:a16="http://schemas.microsoft.com/office/drawing/2014/main" id="{B8D9D380-B62B-0405-3046-7AF0DB6B6F72}"/>
+              </a:ext>
+            </a:extLst>
+          </p:cNvPr>
+          <p:cNvSpPr>
+            <a:spLocks noGrp="1"/>
+          </p:cNvSpPr>
+          <p:nvPr>
+            <p:ph idx="1"/>
           </p:nvPr>
         </p:nvSpPr>
         <p:spPr/>
@@ -20384,150 +20267,56 @@
           <a:bodyPr/>
           <a:lstStyle/>
           <a:p>
-            <a:endParaRPr lang="de-DE"/>
-          </a:p>
-        </p:txBody>
-      </p:sp>
-      <p:sp>
-        <p:nvSpPr>
-          <p:cNvPr id="5" name="Inhaltsplatzhalter 4">
-            <a:extLst>
-              <a:ext uri="{FF2B5EF4-FFF2-40B4-BE49-F238E27FC236}">
-                <a16:creationId xmlns:a16="http://schemas.microsoft.com/office/drawing/2014/main" id="{F9C1E27E-711F-4B6D-B964-7789105662A9}"/>
-              </a:ext>
-            </a:extLst>
-          </p:cNvPr>
-          <p:cNvSpPr>
-            <a:spLocks noGrp="1"/>
-          </p:cNvSpPr>
-          <p:nvPr>
-            <p:ph sz="half" idx="2"/>
-          </p:nvPr>
-        </p:nvSpPr>
-        <p:spPr/>
-        <p:txBody>
-          <a:bodyPr/>
-          <a:lstStyle/>
-          <a:p>
-            <a:endParaRPr lang="de-DE"/>
-          </a:p>
-        </p:txBody>
-      </p:sp>
-      <p:sp>
-        <p:nvSpPr>
-          <p:cNvPr id="8" name="Bildplatzhalter 7">
-            <a:extLst>
-              <a:ext uri="{FF2B5EF4-FFF2-40B4-BE49-F238E27FC236}">
-                <a16:creationId xmlns:a16="http://schemas.microsoft.com/office/drawing/2014/main" id="{8F72537B-DAD4-46FA-B194-9763A8DB95D0}"/>
-              </a:ext>
-            </a:extLst>
-          </p:cNvPr>
-          <p:cNvSpPr>
-            <a:spLocks noGrp="1"/>
-          </p:cNvSpPr>
-          <p:nvPr>
-            <p:ph type="pic" sz="quarter" idx="12"/>
-          </p:nvPr>
-        </p:nvSpPr>
-        <p:spPr/>
-      </p:sp>
-      <p:sp>
-        <p:nvSpPr>
-          <p:cNvPr id="11" name="Textplatzhalter 10">
-            <a:extLst>
-              <a:ext uri="{FF2B5EF4-FFF2-40B4-BE49-F238E27FC236}">
-                <a16:creationId xmlns:a16="http://schemas.microsoft.com/office/drawing/2014/main" id="{73AD8C1A-92DB-46DA-85DF-04A1B69E5CF9}"/>
-              </a:ext>
-            </a:extLst>
-          </p:cNvPr>
-          <p:cNvSpPr>
-            <a:spLocks noGrp="1"/>
-          </p:cNvSpPr>
-          <p:nvPr>
-            <p:ph type="body" sz="quarter" idx="16"/>
-          </p:nvPr>
-        </p:nvSpPr>
-        <p:spPr/>
-        <p:txBody>
-          <a:bodyPr/>
-          <a:lstStyle/>
-          <a:p>
-            <a:endParaRPr lang="de-DE"/>
-          </a:p>
-        </p:txBody>
-      </p:sp>
-      <p:sp>
-        <p:nvSpPr>
-          <p:cNvPr id="6" name="Inhaltsplatzhalter 5">
-            <a:extLst>
-              <a:ext uri="{FF2B5EF4-FFF2-40B4-BE49-F238E27FC236}">
-                <a16:creationId xmlns:a16="http://schemas.microsoft.com/office/drawing/2014/main" id="{CADA21C0-AFF7-41E8-B42B-5CFD3B522E69}"/>
-              </a:ext>
-            </a:extLst>
-          </p:cNvPr>
-          <p:cNvSpPr>
-            <a:spLocks noGrp="1"/>
-          </p:cNvSpPr>
-          <p:nvPr>
-            <p:ph sz="quarter" idx="10"/>
-          </p:nvPr>
-        </p:nvSpPr>
-        <p:spPr/>
-        <p:txBody>
-          <a:bodyPr/>
-          <a:lstStyle/>
-          <a:p>
-            <a:endParaRPr lang="de-DE"/>
-          </a:p>
-        </p:txBody>
-      </p:sp>
-      <p:sp>
-        <p:nvSpPr>
-          <p:cNvPr id="7" name="Bildplatzhalter 6">
-            <a:extLst>
-              <a:ext uri="{FF2B5EF4-FFF2-40B4-BE49-F238E27FC236}">
-                <a16:creationId xmlns:a16="http://schemas.microsoft.com/office/drawing/2014/main" id="{54D7B3E4-B88E-4B25-A6F2-9E6A3635130D}"/>
-              </a:ext>
-            </a:extLst>
-          </p:cNvPr>
-          <p:cNvSpPr>
-            <a:spLocks noGrp="1"/>
-          </p:cNvSpPr>
-          <p:nvPr>
-            <p:ph type="pic" sz="quarter" idx="11"/>
-          </p:nvPr>
-        </p:nvSpPr>
-        <p:spPr/>
-      </p:sp>
-      <p:sp>
-        <p:nvSpPr>
-          <p:cNvPr id="12" name="Textplatzhalter 11">
-            <a:extLst>
-              <a:ext uri="{FF2B5EF4-FFF2-40B4-BE49-F238E27FC236}">
-                <a16:creationId xmlns:a16="http://schemas.microsoft.com/office/drawing/2014/main" id="{E2D5C63B-C733-498D-B0FE-B89C433BD31E}"/>
-              </a:ext>
-            </a:extLst>
-          </p:cNvPr>
-          <p:cNvSpPr>
-            <a:spLocks noGrp="1"/>
-          </p:cNvSpPr>
-          <p:nvPr>
-            <p:ph type="body" sz="quarter" idx="17"/>
-          </p:nvPr>
-        </p:nvSpPr>
-        <p:spPr/>
-        <p:txBody>
-          <a:bodyPr/>
-          <a:lstStyle/>
-          <a:p>
-            <a:endParaRPr lang="de-DE"/>
+            <a:r>
+              <a:rPr lang="de-DE" dirty="0"/>
+              <a:t>RIOT-Web-Editor:</a:t>
+            </a:r>
+          </a:p>
+          <a:p>
+            <a:pPr marL="342900" indent="-342900">
+              <a:buFont typeface="Arial" panose="020B0604020202020204" pitchFamily="34" charset="0"/>
+              <a:buChar char="•"/>
+            </a:pPr>
+            <a:r>
+              <a:rPr lang="de-DE" dirty="0">
+                <a:hlinkClick r:id="rId2"/>
+              </a:rPr>
+              <a:t>https://github.com/cheater78/RIOT-WebEditor</a:t>
+            </a:r>
+            <a:endParaRPr lang="de-DE" dirty="0"/>
+          </a:p>
+          <a:p>
+            <a:r>
+              <a:rPr lang="de-DE" dirty="0"/>
+              <a:t>RIOT-VS-Code-Extension (Submodule)</a:t>
+            </a:r>
+          </a:p>
+          <a:p>
+            <a:pPr marL="342900" indent="-342900">
+              <a:buFont typeface="Arial" panose="020B0604020202020204" pitchFamily="34" charset="0"/>
+              <a:buChar char="•"/>
+            </a:pPr>
+            <a:r>
+              <a:rPr lang="de-DE" dirty="0">
+                <a:hlinkClick r:id="rId3"/>
+              </a:rPr>
+              <a:t>https://github.com/Barkolores/RIOT-VS-Code-Extension</a:t>
+            </a:r>
+            <a:endParaRPr lang="de-DE" dirty="0"/>
+          </a:p>
+          <a:p>
+            <a:pPr marL="342900" indent="-342900">
+              <a:buFont typeface="Arial" panose="020B0604020202020204" pitchFamily="34" charset="0"/>
+              <a:buChar char="•"/>
+            </a:pPr>
+            <a:endParaRPr lang="de-DE" dirty="0"/>
           </a:p>
         </p:txBody>
       </p:sp>
     </p:spTree>
     <p:extLst>
       <p:ext uri="{BB962C8B-B14F-4D97-AF65-F5344CB8AC3E}">
-        <p14:creationId xmlns:p14="http://schemas.microsoft.com/office/powerpoint/2010/main" val="2805487053"/>
+        <p14:creationId xmlns:p14="http://schemas.microsoft.com/office/powerpoint/2010/main" val="835040847"/>
       </p:ext>
     </p:extLst>
   </p:cSld>
@@ -20556,36 +20345,43 @@
       </p:grpSpPr>
       <p:sp>
         <p:nvSpPr>
-          <p:cNvPr id="4" name="Bildplatzhalter 3">
-            <a:extLst>
-              <a:ext uri="{FF2B5EF4-FFF2-40B4-BE49-F238E27FC236}">
-                <a16:creationId xmlns:a16="http://schemas.microsoft.com/office/drawing/2014/main" id="{C362CE5A-8A56-4314-82D9-21234C56D20C}"/>
-              </a:ext>
-            </a:extLst>
-          </p:cNvPr>
-          <p:cNvSpPr>
-            <a:spLocks noGrp="1"/>
-          </p:cNvSpPr>
-          <p:nvPr>
-            <p:ph type="pic" sz="quarter" idx="10"/>
+          <p:cNvPr id="4" name="Title 3">
+            <a:extLst>
+              <a:ext uri="{FF2B5EF4-FFF2-40B4-BE49-F238E27FC236}">
+                <a16:creationId xmlns:a16="http://schemas.microsoft.com/office/drawing/2014/main" id="{AB3CB6F2-E922-90E8-E828-1985D09614AE}"/>
+              </a:ext>
+            </a:extLst>
+          </p:cNvPr>
+          <p:cNvSpPr>
+            <a:spLocks noGrp="1"/>
+          </p:cNvSpPr>
+          <p:nvPr>
+            <p:ph type="title"/>
           </p:nvPr>
         </p:nvSpPr>
         <p:spPr/>
-      </p:sp>
-      <p:sp>
-        <p:nvSpPr>
-          <p:cNvPr id="5" name="Textplatzhalter 4">
-            <a:extLst>
-              <a:ext uri="{FF2B5EF4-FFF2-40B4-BE49-F238E27FC236}">
-                <a16:creationId xmlns:a16="http://schemas.microsoft.com/office/drawing/2014/main" id="{F2F61FF7-1988-4EC0-88B0-739AEA6AAEEB}"/>
-              </a:ext>
-            </a:extLst>
-          </p:cNvPr>
-          <p:cNvSpPr>
-            <a:spLocks noGrp="1"/>
-          </p:cNvSpPr>
-          <p:nvPr>
-            <p:ph type="body" sz="quarter" idx="12"/>
+        <p:txBody>
+          <a:bodyPr/>
+          <a:lstStyle/>
+          <a:p>
+            <a:endParaRPr lang="de-DE"/>
+          </a:p>
+        </p:txBody>
+      </p:sp>
+      <p:sp>
+        <p:nvSpPr>
+          <p:cNvPr id="5" name="Text Placeholder 4">
+            <a:extLst>
+              <a:ext uri="{FF2B5EF4-FFF2-40B4-BE49-F238E27FC236}">
+                <a16:creationId xmlns:a16="http://schemas.microsoft.com/office/drawing/2014/main" id="{DA05EB50-3C74-E111-ACAF-00A6DF7F0935}"/>
+              </a:ext>
+            </a:extLst>
+          </p:cNvPr>
+          <p:cNvSpPr>
+            <a:spLocks noGrp="1"/>
+          </p:cNvSpPr>
+          <p:nvPr>
+            <p:ph type="body" sz="quarter" idx="10"/>
           </p:nvPr>
         </p:nvSpPr>
         <p:spPr/>
@@ -20600,7 +20396,7 @@
     </p:spTree>
     <p:extLst>
       <p:ext uri="{BB962C8B-B14F-4D97-AF65-F5344CB8AC3E}">
-        <p14:creationId xmlns:p14="http://schemas.microsoft.com/office/powerpoint/2010/main" val="3649898597"/>
+        <p14:creationId xmlns:p14="http://schemas.microsoft.com/office/powerpoint/2010/main" val="1474551898"/>
       </p:ext>
     </p:extLst>
   </p:cSld>
@@ -20615,7 +20411,13 @@
   <p:cSld>
     <p:spTree>
       <p:nvGrpSpPr>
-        <p:cNvPr id="1" name=""/>
+        <p:cNvPr id="1" name="">
+          <a:extLst>
+            <a:ext uri="{FF2B5EF4-FFF2-40B4-BE49-F238E27FC236}">
+              <a16:creationId xmlns:a16="http://schemas.microsoft.com/office/drawing/2014/main" id="{60784346-9DF2-55A8-9F86-6DD431DF1B93}"/>
+            </a:ext>
+          </a:extLst>
+        </p:cNvPr>
         <p:cNvGrpSpPr/>
         <p:nvPr/>
       </p:nvGrpSpPr>
@@ -20629,28 +20431,10 @@
       </p:grpSpPr>
       <p:sp>
         <p:nvSpPr>
-          <p:cNvPr id="6" name="Bildplatzhalter 5">
-            <a:extLst>
-              <a:ext uri="{FF2B5EF4-FFF2-40B4-BE49-F238E27FC236}">
-                <a16:creationId xmlns:a16="http://schemas.microsoft.com/office/drawing/2014/main" id="{A0BF1A8A-9972-4C5F-AC59-C576C6A3F194}"/>
-              </a:ext>
-            </a:extLst>
-          </p:cNvPr>
-          <p:cNvSpPr>
-            <a:spLocks noGrp="1"/>
-          </p:cNvSpPr>
-          <p:nvPr>
-            <p:ph type="pic" sz="quarter" idx="11"/>
-          </p:nvPr>
-        </p:nvSpPr>
-        <p:spPr/>
-      </p:sp>
-      <p:sp>
-        <p:nvSpPr>
-          <p:cNvPr id="4" name="Titel 3">
-            <a:extLst>
-              <a:ext uri="{FF2B5EF4-FFF2-40B4-BE49-F238E27FC236}">
-                <a16:creationId xmlns:a16="http://schemas.microsoft.com/office/drawing/2014/main" id="{13D79719-47EB-45E0-8573-097CCB2A7138}"/>
+          <p:cNvPr id="6" name="Titel 5">
+            <a:extLst>
+              <a:ext uri="{FF2B5EF4-FFF2-40B4-BE49-F238E27FC236}">
+                <a16:creationId xmlns:a16="http://schemas.microsoft.com/office/drawing/2014/main" id="{0502C05F-B9B6-AFD5-1D76-03CF738DDDEC}"/>
               </a:ext>
             </a:extLst>
           </p:cNvPr>
@@ -20666,39 +20450,55 @@
           <a:bodyPr/>
           <a:lstStyle/>
           <a:p>
-            <a:endParaRPr lang="de-DE"/>
-          </a:p>
-        </p:txBody>
-      </p:sp>
-      <p:sp>
-        <p:nvSpPr>
-          <p:cNvPr id="5" name="Textplatzhalter 4">
-            <a:extLst>
-              <a:ext uri="{FF2B5EF4-FFF2-40B4-BE49-F238E27FC236}">
-                <a16:creationId xmlns:a16="http://schemas.microsoft.com/office/drawing/2014/main" id="{708341FB-0809-4F50-8B3F-6C3F0FE5911F}"/>
-              </a:ext>
-            </a:extLst>
-          </p:cNvPr>
-          <p:cNvSpPr>
-            <a:spLocks noGrp="1"/>
-          </p:cNvSpPr>
-          <p:nvPr>
-            <p:ph type="body" sz="quarter" idx="10"/>
-          </p:nvPr>
-        </p:nvSpPr>
-        <p:spPr/>
-        <p:txBody>
-          <a:bodyPr/>
-          <a:lstStyle/>
-          <a:p>
-            <a:endParaRPr lang="de-DE"/>
-          </a:p>
-        </p:txBody>
-      </p:sp>
+            <a:r>
+              <a:rPr lang="de-DE" dirty="0"/>
+              <a:t>Shell</a:t>
+            </a:r>
+          </a:p>
+        </p:txBody>
+      </p:sp>
+      <p:pic>
+        <p:nvPicPr>
+          <p:cNvPr id="3" name="Content Placeholder 2">
+            <a:extLst>
+              <a:ext uri="{FF2B5EF4-FFF2-40B4-BE49-F238E27FC236}">
+                <a16:creationId xmlns:a16="http://schemas.microsoft.com/office/drawing/2014/main" id="{AE1CB743-B9C4-E1C1-356B-BF282EB2A751}"/>
+              </a:ext>
+            </a:extLst>
+          </p:cNvPr>
+          <p:cNvPicPr>
+            <a:picLocks noGrp="1" noChangeAspect="1"/>
+          </p:cNvPicPr>
+          <p:nvPr>
+            <p:ph idx="1"/>
+          </p:nvPr>
+        </p:nvPicPr>
+        <p:blipFill>
+          <a:blip r:embed="rId3">
+            <a:extLst>
+              <a:ext uri="{28A0092B-C50C-407E-A947-70E740481C1C}">
+                <a14:useLocalDpi xmlns:a14="http://schemas.microsoft.com/office/drawing/2010/main" val="0"/>
+              </a:ext>
+            </a:extLst>
+          </a:blip>
+          <a:stretch>
+            <a:fillRect/>
+          </a:stretch>
+        </p:blipFill>
+        <p:spPr>
+          <a:xfrm>
+            <a:off x="1754459" y="1375954"/>
+            <a:ext cx="8683082" cy="4422503"/>
+          </a:xfrm>
+          <a:prstGeom prst="rect">
+            <a:avLst/>
+          </a:prstGeom>
+        </p:spPr>
+      </p:pic>
     </p:spTree>
     <p:extLst>
       <p:ext uri="{BB962C8B-B14F-4D97-AF65-F5344CB8AC3E}">
-        <p14:creationId xmlns:p14="http://schemas.microsoft.com/office/powerpoint/2010/main" val="2931708723"/>
+        <p14:creationId xmlns:p14="http://schemas.microsoft.com/office/powerpoint/2010/main" val="2941787629"/>
       </p:ext>
     </p:extLst>
   </p:cSld>
@@ -20727,10 +20527,10 @@
       </p:grpSpPr>
       <p:sp>
         <p:nvSpPr>
-          <p:cNvPr id="2" name="Titel 1">
-            <a:extLst>
-              <a:ext uri="{FF2B5EF4-FFF2-40B4-BE49-F238E27FC236}">
-                <a16:creationId xmlns:a16="http://schemas.microsoft.com/office/drawing/2014/main" id="{1577C8B2-8653-4318-AFFF-CFB5AD5ED20E}"/>
+          <p:cNvPr id="2" name="Title 1">
+            <a:extLst>
+              <a:ext uri="{FF2B5EF4-FFF2-40B4-BE49-F238E27FC236}">
+                <a16:creationId xmlns:a16="http://schemas.microsoft.com/office/drawing/2014/main" id="{2532CAE8-B7F6-6BA4-6054-43CF7BDB6345}"/>
               </a:ext>
             </a:extLst>
           </p:cNvPr>
@@ -20746,153 +20546,55 @@
           <a:bodyPr/>
           <a:lstStyle/>
           <a:p>
-            <a:endParaRPr lang="de-DE" dirty="0">
-              <a:solidFill>
-                <a:srgbClr val="00008C"/>
-              </a:solidFill>
-            </a:endParaRPr>
-          </a:p>
-        </p:txBody>
-      </p:sp>
-      <p:sp>
-        <p:nvSpPr>
-          <p:cNvPr id="3" name="Textplatzhalter 2">
-            <a:extLst>
-              <a:ext uri="{FF2B5EF4-FFF2-40B4-BE49-F238E27FC236}">
-                <a16:creationId xmlns:a16="http://schemas.microsoft.com/office/drawing/2014/main" id="{700FC70C-5ECA-4309-A9CF-A3A163FD4BA7}"/>
-              </a:ext>
-            </a:extLst>
-          </p:cNvPr>
-          <p:cNvSpPr>
-            <a:spLocks noGrp="1"/>
-          </p:cNvSpPr>
-          <p:nvPr>
-            <p:ph type="body" sz="quarter" idx="10"/>
-          </p:nvPr>
-        </p:nvSpPr>
-        <p:spPr/>
-        <p:txBody>
-          <a:bodyPr/>
-          <a:lstStyle/>
-          <a:p>
-            <a:endParaRPr lang="de-DE" dirty="0">
-              <a:solidFill>
-                <a:srgbClr val="00008C"/>
-              </a:solidFill>
-            </a:endParaRPr>
-          </a:p>
-        </p:txBody>
-      </p:sp>
+            <a:r>
+              <a:rPr lang="de-DE" dirty="0"/>
+              <a:t>Relay</a:t>
+            </a:r>
+          </a:p>
+        </p:txBody>
+      </p:sp>
+      <p:pic>
+        <p:nvPicPr>
+          <p:cNvPr id="5" name="Content Placeholder 4">
+            <a:extLst>
+              <a:ext uri="{FF2B5EF4-FFF2-40B4-BE49-F238E27FC236}">
+                <a16:creationId xmlns:a16="http://schemas.microsoft.com/office/drawing/2014/main" id="{91C648C3-5402-772B-1614-721EA33D1448}"/>
+              </a:ext>
+            </a:extLst>
+          </p:cNvPr>
+          <p:cNvPicPr>
+            <a:picLocks noGrp="1" noChangeAspect="1"/>
+          </p:cNvPicPr>
+          <p:nvPr>
+            <p:ph idx="1"/>
+          </p:nvPr>
+        </p:nvPicPr>
+        <p:blipFill>
+          <a:blip r:embed="rId3">
+            <a:extLst>
+              <a:ext uri="{28A0092B-C50C-407E-A947-70E740481C1C}">
+                <a14:useLocalDpi xmlns:a14="http://schemas.microsoft.com/office/drawing/2010/main" val="0"/>
+              </a:ext>
+            </a:extLst>
+          </a:blip>
+          <a:stretch>
+            <a:fillRect/>
+          </a:stretch>
+        </p:blipFill>
+        <p:spPr>
+          <a:xfrm>
+            <a:off x="2423600" y="2041281"/>
+            <a:ext cx="7344800" cy="3496163"/>
+          </a:xfrm>
+          <a:prstGeom prst="rect">
+            <a:avLst/>
+          </a:prstGeom>
+        </p:spPr>
+      </p:pic>
     </p:spTree>
     <p:extLst>
       <p:ext uri="{BB962C8B-B14F-4D97-AF65-F5344CB8AC3E}">
-        <p14:creationId xmlns:p14="http://schemas.microsoft.com/office/powerpoint/2010/main" val="3790995958"/>
-      </p:ext>
-    </p:extLst>
-  </p:cSld>
-  <p:clrMapOvr>
-    <a:masterClrMapping/>
-  </p:clrMapOvr>
-</p:sld>
-</file>
-
-<file path=ppt/slides/slide28.xml><?xml version="1.0" encoding="utf-8"?>
-<p:sld xmlns:a="http://schemas.openxmlformats.org/drawingml/2006/main" xmlns:r="http://schemas.openxmlformats.org/officeDocument/2006/relationships" xmlns:p="http://schemas.openxmlformats.org/presentationml/2006/main">
-  <p:cSld>
-    <p:spTree>
-      <p:nvGrpSpPr>
-        <p:cNvPr id="1" name=""/>
-        <p:cNvGrpSpPr/>
-        <p:nvPr/>
-      </p:nvGrpSpPr>
-      <p:grpSpPr>
-        <a:xfrm>
-          <a:off x="0" y="0"/>
-          <a:ext cx="0" cy="0"/>
-          <a:chOff x="0" y="0"/>
-          <a:chExt cx="0" cy="0"/>
-        </a:xfrm>
-      </p:grpSpPr>
-      <p:sp>
-        <p:nvSpPr>
-          <p:cNvPr id="4" name="Titel 3">
-            <a:extLst>
-              <a:ext uri="{FF2B5EF4-FFF2-40B4-BE49-F238E27FC236}">
-                <a16:creationId xmlns:a16="http://schemas.microsoft.com/office/drawing/2014/main" id="{E4A51DB8-9236-4C7B-BF74-499075921BDB}"/>
-              </a:ext>
-            </a:extLst>
-          </p:cNvPr>
-          <p:cNvSpPr>
-            <a:spLocks noGrp="1"/>
-          </p:cNvSpPr>
-          <p:nvPr>
-            <p:ph type="title"/>
-          </p:nvPr>
-        </p:nvSpPr>
-        <p:spPr/>
-        <p:txBody>
-          <a:bodyPr/>
-          <a:lstStyle/>
-          <a:p>
-            <a:endParaRPr lang="de-DE" dirty="0">
-              <a:solidFill>
-                <a:schemeClr val="bg1"/>
-              </a:solidFill>
-            </a:endParaRPr>
-          </a:p>
-        </p:txBody>
-      </p:sp>
-      <p:sp>
-        <p:nvSpPr>
-          <p:cNvPr id="5" name="Textplatzhalter 4">
-            <a:extLst>
-              <a:ext uri="{FF2B5EF4-FFF2-40B4-BE49-F238E27FC236}">
-                <a16:creationId xmlns:a16="http://schemas.microsoft.com/office/drawing/2014/main" id="{2E1EAC44-8F96-425F-A13B-726137757D20}"/>
-              </a:ext>
-            </a:extLst>
-          </p:cNvPr>
-          <p:cNvSpPr>
-            <a:spLocks noGrp="1"/>
-          </p:cNvSpPr>
-          <p:nvPr>
-            <p:ph type="body" sz="quarter" idx="10"/>
-          </p:nvPr>
-        </p:nvSpPr>
-        <p:spPr/>
-        <p:txBody>
-          <a:bodyPr/>
-          <a:lstStyle/>
-          <a:p>
-            <a:endParaRPr lang="de-DE">
-              <a:solidFill>
-                <a:schemeClr val="bg1"/>
-              </a:solidFill>
-            </a:endParaRPr>
-          </a:p>
-        </p:txBody>
-      </p:sp>
-      <p:sp>
-        <p:nvSpPr>
-          <p:cNvPr id="6" name="Bildplatzhalter 5">
-            <a:extLst>
-              <a:ext uri="{FF2B5EF4-FFF2-40B4-BE49-F238E27FC236}">
-                <a16:creationId xmlns:a16="http://schemas.microsoft.com/office/drawing/2014/main" id="{9E396AD7-ACCD-4E0C-B6DD-DB27BC964FF2}"/>
-              </a:ext>
-            </a:extLst>
-          </p:cNvPr>
-          <p:cNvSpPr>
-            <a:spLocks noGrp="1"/>
-          </p:cNvSpPr>
-          <p:nvPr>
-            <p:ph type="pic" sz="quarter" idx="11"/>
-          </p:nvPr>
-        </p:nvSpPr>
-        <p:spPr/>
-      </p:sp>
-    </p:spTree>
-    <p:extLst>
-      <p:ext uri="{BB962C8B-B14F-4D97-AF65-F5344CB8AC3E}">
-        <p14:creationId xmlns:p14="http://schemas.microsoft.com/office/powerpoint/2010/main" val="182210615"/>
+        <p14:creationId xmlns:p14="http://schemas.microsoft.com/office/powerpoint/2010/main" val="792652635"/>
       </p:ext>
     </p:extLst>
   </p:cSld>

--- a/docs/project-log/RIoTPresentation.pptx
+++ b/docs/project-log/RIoTPresentation.pptx
@@ -6,39 +6,31 @@
     <p:sldMasterId id="2147483741" r:id="rId2"/>
   </p:sldMasterIdLst>
   <p:notesMasterIdLst>
-    <p:notesMasterId r:id="rId30"/>
+    <p:notesMasterId r:id="rId22"/>
   </p:notesMasterIdLst>
   <p:handoutMasterIdLst>
-    <p:handoutMasterId r:id="rId31"/>
+    <p:handoutMasterId r:id="rId23"/>
   </p:handoutMasterIdLst>
   <p:sldIdLst>
     <p:sldId id="288" r:id="rId3"/>
-    <p:sldId id="287" r:id="rId4"/>
-    <p:sldId id="305" r:id="rId5"/>
-    <p:sldId id="304" r:id="rId6"/>
-    <p:sldId id="299" r:id="rId7"/>
-    <p:sldId id="298" r:id="rId8"/>
-    <p:sldId id="301" r:id="rId9"/>
-    <p:sldId id="300" r:id="rId10"/>
-    <p:sldId id="303" r:id="rId11"/>
-    <p:sldId id="307" r:id="rId12"/>
-    <p:sldId id="306" r:id="rId13"/>
-    <p:sldId id="308" r:id="rId14"/>
-    <p:sldId id="302" r:id="rId15"/>
-    <p:sldId id="295" r:id="rId16"/>
-    <p:sldId id="296" r:id="rId17"/>
-    <p:sldId id="309" r:id="rId18"/>
-    <p:sldId id="315" r:id="rId19"/>
-    <p:sldId id="314" r:id="rId20"/>
-    <p:sldId id="316" r:id="rId21"/>
-    <p:sldId id="313" r:id="rId22"/>
-    <p:sldId id="312" r:id="rId23"/>
-    <p:sldId id="317" r:id="rId24"/>
-    <p:sldId id="318" r:id="rId25"/>
-    <p:sldId id="319" r:id="rId26"/>
-    <p:sldId id="320" r:id="rId27"/>
-    <p:sldId id="310" r:id="rId28"/>
-    <p:sldId id="311" r:id="rId29"/>
+    <p:sldId id="305" r:id="rId4"/>
+    <p:sldId id="299" r:id="rId5"/>
+    <p:sldId id="301" r:id="rId6"/>
+    <p:sldId id="303" r:id="rId7"/>
+    <p:sldId id="307" r:id="rId8"/>
+    <p:sldId id="308" r:id="rId9"/>
+    <p:sldId id="302" r:id="rId10"/>
+    <p:sldId id="295" r:id="rId11"/>
+    <p:sldId id="296" r:id="rId12"/>
+    <p:sldId id="314" r:id="rId13"/>
+    <p:sldId id="313" r:id="rId14"/>
+    <p:sldId id="317" r:id="rId15"/>
+    <p:sldId id="318" r:id="rId16"/>
+    <p:sldId id="321" r:id="rId17"/>
+    <p:sldId id="319" r:id="rId18"/>
+    <p:sldId id="320" r:id="rId19"/>
+    <p:sldId id="310" r:id="rId20"/>
+    <p:sldId id="311" r:id="rId21"/>
   </p:sldIdLst>
   <p:sldSz cx="12192000" cy="6858000"/>
   <p:notesSz cx="6858000" cy="9144000"/>
@@ -250,7 +242,7 @@
           <a:p>
             <a:fld id="{65B67984-F0B9-4D31-A8F6-8AF021B9C2EF}" type="datetimeFigureOut">
               <a:rPr lang="en-US" smtClean="0"/>
-              <a:t>3/24/2026</a:t>
+              <a:t>3/25/2026</a:t>
             </a:fld>
             <a:endParaRPr lang="en-US"/>
           </a:p>
@@ -428,7 +420,7 @@
           <a:p>
             <a:fld id="{885960CC-0992-4111-87D3-C02B03B2EA6C}" type="datetimeFigureOut">
               <a:rPr lang="en-US" smtClean="0"/>
-              <a:t>3/24/2026</a:t>
+              <a:t>3/25/2026</a:t>
             </a:fld>
             <a:endParaRPr lang="en-US"/>
           </a:p>
@@ -849,122 +841,38 @@
               <a:buChar char="-"/>
             </a:pPr>
             <a:r>
-              <a:rPr lang="de-DE" dirty="0"/>
-              <a:t>frontend:</a:t>
-            </a:r>
-          </a:p>
-          <a:p>
-            <a:pPr marL="628650" lvl="1" indent="-171450">
-              <a:buFontTx/>
-              <a:buChar char="-"/>
-            </a:pPr>
-            <a:r>
-              <a:rPr lang="de-DE" dirty="0" err="1"/>
-              <a:t>Vsccode</a:t>
-            </a:r>
-            <a:r>
-              <a:rPr lang="de-DE" dirty="0"/>
-              <a:t> ext</a:t>
-            </a:r>
-          </a:p>
-          <a:p>
-            <a:pPr marL="628650" lvl="1" indent="-171450">
-              <a:buFontTx/>
-              <a:buChar char="-"/>
-            </a:pPr>
-            <a:r>
-              <a:rPr lang="de-DE" dirty="0" err="1"/>
-              <a:t>Commadlines</a:t>
+              <a:rPr lang="de-DE" dirty="0" err="1"/>
+              <a:t>default</a:t>
+            </a:r>
+            <a:r>
+              <a:rPr lang="de-DE" dirty="0"/>
+              <a:t> </a:t>
+            </a:r>
+            <a:r>
+              <a:rPr lang="de-DE" dirty="0" err="1"/>
+              <a:t>workspace</a:t>
             </a:r>
             <a:endParaRPr lang="de-DE" dirty="0"/>
           </a:p>
           <a:p>
-            <a:pPr marL="171450" lvl="0" indent="-171450">
+            <a:pPr marL="171450" indent="-171450">
               <a:buFontTx/>
               <a:buChar char="-"/>
             </a:pPr>
             <a:endParaRPr lang="de-DE" dirty="0"/>
           </a:p>
           <a:p>
-            <a:pPr marL="171450" lvl="0" indent="-171450">
+            <a:pPr marL="171450" indent="-171450">
               <a:buFontTx/>
               <a:buChar char="-"/>
             </a:pPr>
             <a:r>
               <a:rPr lang="de-DE" dirty="0"/>
-              <a:t>backend:</a:t>
-            </a:r>
-          </a:p>
-          <a:p>
-            <a:pPr marL="628650" lvl="1" indent="-171450">
-              <a:buFontTx/>
-              <a:buChar char="-"/>
-            </a:pPr>
-            <a:r>
-              <a:rPr lang="de-DE" dirty="0"/>
-              <a:t>code-server</a:t>
-            </a:r>
-          </a:p>
-          <a:p>
-            <a:pPr marL="628650" lvl="1" indent="-171450">
-              <a:buFontTx/>
-              <a:buChar char="-"/>
-            </a:pPr>
-            <a:r>
-              <a:rPr lang="de-DE" dirty="0" err="1"/>
-              <a:t>nutzer</a:t>
-            </a:r>
-            <a:r>
-              <a:rPr lang="de-DE" dirty="0"/>
-              <a:t> input in cli</a:t>
-            </a:r>
-          </a:p>
-          <a:p>
-            <a:pPr marL="628650" lvl="1" indent="-171450">
-              <a:buFontTx/>
-              <a:buChar char="-"/>
-            </a:pPr>
-            <a:r>
-              <a:rPr lang="de-DE" dirty="0"/>
-              <a:t>viele CLIs – eine </a:t>
-            </a:r>
-            <a:r>
-              <a:rPr lang="de-DE" dirty="0" err="1"/>
-              <a:t>extension</a:t>
-            </a:r>
-            <a:r>
-              <a:rPr lang="de-DE" dirty="0"/>
-              <a:t> -&gt; </a:t>
-            </a:r>
-            <a:r>
-              <a:rPr lang="de-DE" dirty="0" err="1"/>
-              <a:t>relay</a:t>
-            </a:r>
-            <a:r>
-              <a:rPr lang="de-DE" dirty="0"/>
-              <a:t> (EINE CONNECTION, zentraler host)</a:t>
-            </a:r>
-          </a:p>
-          <a:p>
-            <a:pPr marL="628650" lvl="1" indent="-171450">
-              <a:buFontTx/>
-              <a:buChar char="-"/>
-            </a:pPr>
-            <a:r>
-              <a:rPr lang="de-DE" dirty="0"/>
-              <a:t>erlaubt </a:t>
-            </a:r>
-            <a:r>
-              <a:rPr lang="de-DE" dirty="0" err="1"/>
-              <a:t>buttons</a:t>
-            </a:r>
-            <a:r>
-              <a:rPr lang="de-DE" dirty="0"/>
-              <a:t> -&gt; </a:t>
-            </a:r>
-            <a:r>
-              <a:rPr lang="de-DE" dirty="0" err="1"/>
-              <a:t>command</a:t>
+              <a:t>open </a:t>
+            </a:r>
+            <a:r>
+              <a:rPr lang="de-DE" dirty="0" err="1"/>
+              <a:t>shell</a:t>
             </a:r>
             <a:r>
               <a:rPr lang="de-DE" dirty="0"/>
@@ -972,82 +880,181 @@
             </a:r>
             <a:r>
               <a:rPr lang="de-DE" dirty="0" err="1"/>
-              <a:t>shortcut</a:t>
-            </a:r>
-            <a:r>
-              <a:rPr lang="de-DE" dirty="0"/>
-              <a:t> -&gt; </a:t>
-            </a:r>
-            <a:r>
-              <a:rPr lang="de-DE" dirty="0" err="1"/>
-              <a:t>command</a:t>
-            </a:r>
-            <a:r>
-              <a:rPr lang="de-DE" dirty="0"/>
-              <a:t> sichtbar</a:t>
-            </a:r>
-          </a:p>
-          <a:p>
-            <a:pPr marL="628650" lvl="1" indent="-171450">
+              <a:t>project</a:t>
+            </a:r>
+            <a:endParaRPr lang="de-DE" dirty="0"/>
+          </a:p>
+          <a:p>
+            <a:pPr marL="171450" indent="-171450">
               <a:buFontTx/>
               <a:buChar char="-"/>
             </a:pPr>
             <a:endParaRPr lang="de-DE" dirty="0"/>
           </a:p>
           <a:p>
-            <a:pPr marL="628650" lvl="1" indent="-171450">
+            <a:pPr marL="171450" indent="-171450">
               <a:buFontTx/>
               <a:buChar char="-"/>
             </a:pPr>
             <a:r>
-              <a:rPr lang="de-DE" dirty="0"/>
-              <a:t>2 fragen offen:</a:t>
-            </a:r>
-          </a:p>
-          <a:p>
-            <a:pPr marL="1085850" lvl="2" indent="-171450">
+              <a:rPr lang="de-DE" dirty="0" err="1"/>
+              <a:t>add</a:t>
+            </a:r>
+            <a:r>
+              <a:rPr lang="de-DE" dirty="0"/>
+              <a:t> esp32 (</a:t>
+            </a:r>
+            <a:r>
+              <a:rPr lang="de-DE" dirty="0" err="1"/>
+              <a:t>hello</a:t>
+            </a:r>
+            <a:r>
+              <a:rPr lang="de-DE" dirty="0"/>
+              <a:t> </a:t>
+            </a:r>
+            <a:r>
+              <a:rPr lang="de-DE" dirty="0" err="1"/>
+              <a:t>world</a:t>
+            </a:r>
+            <a:r>
+              <a:rPr lang="de-DE" dirty="0"/>
+              <a:t>)</a:t>
+            </a:r>
+          </a:p>
+          <a:p>
+            <a:pPr marL="171450" indent="-171450">
               <a:buFontTx/>
               <a:buChar char="-"/>
             </a:pPr>
             <a:r>
-              <a:rPr lang="de-DE" dirty="0"/>
-              <a:t>Kommunikation Shell – </a:t>
-            </a:r>
-            <a:r>
-              <a:rPr lang="de-DE" dirty="0" err="1"/>
-              <a:t>WebExtension</a:t>
-            </a:r>
-            <a:endParaRPr lang="de-DE" dirty="0"/>
-          </a:p>
-          <a:p>
-            <a:pPr marL="1085850" lvl="2" indent="-171450">
+              <a:rPr lang="de-DE" dirty="0" err="1"/>
+              <a:t>flash</a:t>
+            </a:r>
+            <a:r>
+              <a:rPr lang="de-DE" dirty="0"/>
+              <a:t> esp32</a:t>
+            </a:r>
+          </a:p>
+          <a:p>
+            <a:pPr marL="171450" indent="-171450">
               <a:buFontTx/>
               <a:buChar char="-"/>
             </a:pPr>
             <a:r>
-              <a:rPr lang="de-DE" dirty="0"/>
-              <a:t>Stub</a:t>
-            </a:r>
-          </a:p>
-          <a:p>
-            <a:pPr marL="628650" lvl="1" indent="-171450">
+              <a:rPr lang="de-DE" dirty="0" err="1"/>
+              <a:t>term</a:t>
+            </a:r>
+            <a:r>
+              <a:rPr lang="de-DE" dirty="0"/>
+              <a:t> (offen)</a:t>
+            </a:r>
+          </a:p>
+          <a:p>
+            <a:pPr marL="171450" indent="-171450">
               <a:buFontTx/>
               <a:buChar char="-"/>
             </a:pPr>
             <a:endParaRPr lang="de-DE" dirty="0"/>
           </a:p>
           <a:p>
-            <a:pPr marL="628650" lvl="1" indent="-171450">
+            <a:pPr marL="171450" indent="-171450">
+              <a:buFontTx/>
+              <a:buChar char="-"/>
+            </a:pPr>
+            <a:r>
+              <a:rPr lang="de-DE" dirty="0" err="1"/>
+              <a:t>add</a:t>
+            </a:r>
+            <a:r>
+              <a:rPr lang="de-DE" dirty="0"/>
+              <a:t> </a:t>
+            </a:r>
+            <a:r>
+              <a:rPr lang="de-DE" dirty="0" err="1"/>
+              <a:t>adafruit</a:t>
+            </a:r>
+            <a:r>
+              <a:rPr lang="de-DE" dirty="0"/>
+              <a:t> (</a:t>
+            </a:r>
+            <a:r>
+              <a:rPr lang="de-DE" dirty="0" err="1"/>
+              <a:t>shell</a:t>
+            </a:r>
+            <a:r>
+              <a:rPr lang="de-DE" dirty="0"/>
+              <a:t>)</a:t>
+            </a:r>
+          </a:p>
+          <a:p>
+            <a:pPr marL="171450" indent="-171450">
+              <a:buFontTx/>
+              <a:buChar char="-"/>
+            </a:pPr>
+            <a:r>
+              <a:rPr lang="de-DE" dirty="0" err="1"/>
+              <a:t>flash</a:t>
+            </a:r>
+            <a:endParaRPr lang="de-DE" dirty="0"/>
+          </a:p>
+          <a:p>
+            <a:pPr marL="171450" indent="-171450">
+              <a:buFontTx/>
+              <a:buChar char="-"/>
+            </a:pPr>
+            <a:r>
+              <a:rPr lang="de-DE" dirty="0" err="1"/>
+              <a:t>term</a:t>
+            </a:r>
+            <a:endParaRPr lang="de-DE" dirty="0"/>
+          </a:p>
+          <a:p>
+            <a:pPr marL="171450" indent="-171450">
               <a:buFontTx/>
               <a:buChar char="-"/>
             </a:pPr>
             <a:endParaRPr lang="de-DE" dirty="0"/>
           </a:p>
           <a:p>
-            <a:pPr marL="628650" lvl="1" indent="-171450">
+            <a:pPr marL="171450" indent="-171450">
               <a:buFontTx/>
               <a:buChar char="-"/>
             </a:pPr>
+            <a:r>
+              <a:rPr lang="de-DE" dirty="0"/>
+              <a:t>cd </a:t>
+            </a:r>
+            <a:r>
+              <a:rPr lang="de-DE" dirty="0" err="1"/>
+              <a:t>timer</a:t>
+            </a:r>
+            <a:endParaRPr lang="de-DE" dirty="0"/>
+          </a:p>
+          <a:p>
+            <a:pPr marL="171450" indent="-171450">
+              <a:buFontTx/>
+              <a:buChar char="-"/>
+            </a:pPr>
+            <a:r>
+              <a:rPr lang="de-DE" dirty="0" err="1"/>
+              <a:t>make</a:t>
+            </a:r>
+            <a:r>
+              <a:rPr lang="de-DE" dirty="0"/>
+              <a:t> </a:t>
+            </a:r>
+            <a:r>
+              <a:rPr lang="de-DE" dirty="0" err="1"/>
+              <a:t>by</a:t>
+            </a:r>
+            <a:r>
+              <a:rPr lang="de-DE" dirty="0"/>
+              <a:t> </a:t>
+            </a:r>
+            <a:r>
+              <a:rPr lang="de-DE" dirty="0" err="1"/>
+              <a:t>keyup</a:t>
+            </a:r>
             <a:endParaRPr lang="de-DE" dirty="0"/>
           </a:p>
         </p:txBody>
@@ -1097,7 +1104,7 @@
     </p:spTree>
     <p:extLst>
       <p:ext uri="{BB962C8B-B14F-4D97-AF65-F5344CB8AC3E}">
-        <p14:creationId xmlns:p14="http://schemas.microsoft.com/office/powerpoint/2010/main" val="4034740071"/>
+        <p14:creationId xmlns:p14="http://schemas.microsoft.com/office/powerpoint/2010/main" val="2010879930"/>
       </p:ext>
     </p:extLst>
   </p:cSld>
@@ -1151,153 +1158,6 @@
           <a:bodyPr/>
           <a:lstStyle/>
           <a:p>
-            <a:pPr marL="171450" indent="-171450">
-              <a:buFontTx/>
-              <a:buChar char="-"/>
-            </a:pPr>
-            <a:r>
-              <a:rPr lang="de-DE" dirty="0"/>
-              <a:t>Mischung: Human + </a:t>
-            </a:r>
-            <a:r>
-              <a:rPr lang="de-DE" dirty="0" err="1"/>
-              <a:t>compakt</a:t>
-            </a:r>
-            <a:endParaRPr lang="de-DE" dirty="0"/>
-          </a:p>
-          <a:p>
-            <a:pPr marL="171450" indent="-171450">
-              <a:buFontTx/>
-              <a:buChar char="-"/>
-            </a:pPr>
-            <a:r>
-              <a:rPr lang="de-DE" dirty="0"/>
-              <a:t>mehrere </a:t>
-            </a:r>
-            <a:r>
-              <a:rPr lang="de-DE" dirty="0" err="1"/>
-              <a:t>geräte</a:t>
-            </a:r>
-            <a:r>
-              <a:rPr lang="de-DE" dirty="0"/>
-              <a:t>, mehrere </a:t>
-            </a:r>
-            <a:r>
-              <a:rPr lang="de-DE" dirty="0" err="1"/>
-              <a:t>shells</a:t>
-            </a:r>
-            <a:r>
-              <a:rPr lang="de-DE" dirty="0"/>
-              <a:t> -&gt; parallel</a:t>
-            </a:r>
-          </a:p>
-          <a:p>
-            <a:pPr marL="171450" indent="-171450">
-              <a:buFontTx/>
-              <a:buChar char="-"/>
-            </a:pPr>
-            <a:endParaRPr lang="de-DE" dirty="0"/>
-          </a:p>
-          <a:p>
-            <a:pPr marL="171450" indent="-171450">
-              <a:buFontTx/>
-              <a:buChar char="-"/>
-            </a:pPr>
-            <a:r>
-              <a:rPr lang="de-DE" dirty="0" err="1"/>
-              <a:t>stateful</a:t>
-            </a:r>
-            <a:r>
-              <a:rPr lang="de-DE" dirty="0"/>
-              <a:t> -&gt; WS + registrieren </a:t>
-            </a:r>
-            <a:r>
-              <a:rPr lang="de-DE" dirty="0" err="1"/>
-              <a:t>Addressen</a:t>
-            </a:r>
-            <a:endParaRPr lang="de-DE" dirty="0"/>
-          </a:p>
-          <a:p>
-            <a:pPr marL="171450" indent="-171450">
-              <a:buFontTx/>
-              <a:buChar char="-"/>
-            </a:pPr>
-            <a:endParaRPr lang="de-DE" dirty="0"/>
-          </a:p>
-          <a:p>
-            <a:pPr marL="171450" indent="-171450">
-              <a:buFontTx/>
-              <a:buChar char="-"/>
-            </a:pPr>
-            <a:r>
-              <a:rPr lang="de-DE" dirty="0"/>
-              <a:t>Struktur:</a:t>
-            </a:r>
-          </a:p>
-          <a:p>
-            <a:pPr marL="628650" lvl="1" indent="-171450">
-              <a:buFontTx/>
-              <a:buChar char="-"/>
-            </a:pPr>
-            <a:r>
-              <a:rPr lang="de-DE" dirty="0"/>
-              <a:t>typ</a:t>
-            </a:r>
-          </a:p>
-          <a:p>
-            <a:pPr marL="628650" lvl="1" indent="-171450">
-              <a:buFontTx/>
-              <a:buChar char="-"/>
-            </a:pPr>
-            <a:r>
-              <a:rPr lang="de-DE" dirty="0" err="1"/>
-              <a:t>sender</a:t>
-            </a:r>
-            <a:endParaRPr lang="de-DE" dirty="0"/>
-          </a:p>
-          <a:p>
-            <a:pPr marL="628650" lvl="1" indent="-171450">
-              <a:buFontTx/>
-              <a:buChar char="-"/>
-            </a:pPr>
-            <a:r>
-              <a:rPr lang="de-DE" dirty="0" err="1"/>
-              <a:t>empfänger</a:t>
-            </a:r>
-            <a:endParaRPr lang="de-DE" dirty="0"/>
-          </a:p>
-          <a:p>
-            <a:pPr marL="628650" lvl="1" indent="-171450">
-              <a:buFontTx/>
-              <a:buChar char="-"/>
-            </a:pPr>
-            <a:r>
-              <a:rPr lang="de-DE" dirty="0" err="1"/>
-              <a:t>payload</a:t>
-            </a:r>
-            <a:r>
-              <a:rPr lang="de-DE" dirty="0"/>
-              <a:t> </a:t>
-            </a:r>
-            <a:r>
-              <a:rPr lang="de-DE" dirty="0" err="1"/>
-              <a:t>felder</a:t>
-            </a:r>
-            <a:endParaRPr lang="de-DE" dirty="0"/>
-          </a:p>
-          <a:p>
-            <a:pPr marL="1085850" lvl="2" indent="-171450">
-              <a:buFontTx/>
-              <a:buChar char="-"/>
-            </a:pPr>
-            <a:r>
-              <a:rPr lang="de-DE" dirty="0"/>
-              <a:t>hier </a:t>
-            </a:r>
-            <a:r>
-              <a:rPr lang="de-DE" dirty="0" err="1"/>
-              <a:t>Flashcommand</a:t>
-            </a:r>
             <a:endParaRPr lang="de-DE" dirty="0"/>
           </a:p>
         </p:txBody>
@@ -1338,7 +1198,7 @@
           <a:p>
             <a:fld id="{97EEB764-55E2-4077-8C7A-EB9EFE7145E2}" type="slidenum">
               <a:rPr lang="en-US" smtClean="0"/>
-              <a:t>15</a:t>
+              <a:t>17</a:t>
             </a:fld>
             <a:endParaRPr lang="en-US"/>
           </a:p>
@@ -1347,7 +1207,7 @@
     </p:spTree>
     <p:extLst>
       <p:ext uri="{BB962C8B-B14F-4D97-AF65-F5344CB8AC3E}">
-        <p14:creationId xmlns:p14="http://schemas.microsoft.com/office/powerpoint/2010/main" val="4283148127"/>
+        <p14:creationId xmlns:p14="http://schemas.microsoft.com/office/powerpoint/2010/main" val="3259599336"/>
       </p:ext>
     </p:extLst>
   </p:cSld>
@@ -1401,117 +1261,6 @@
           <a:bodyPr/>
           <a:lstStyle/>
           <a:p>
-            <a:pPr marL="171450" indent="-171450">
-              <a:buFontTx/>
-              <a:buChar char="-"/>
-            </a:pPr>
-            <a:r>
-              <a:rPr lang="de-DE" dirty="0" err="1"/>
-              <a:t>parsing</a:t>
-            </a:r>
-            <a:r>
-              <a:rPr lang="de-DE" dirty="0"/>
-              <a:t> </a:t>
-            </a:r>
-            <a:r>
-              <a:rPr lang="de-DE" dirty="0" err="1"/>
-              <a:t>problem</a:t>
-            </a:r>
-            <a:endParaRPr lang="de-DE" dirty="0"/>
-          </a:p>
-          <a:p>
-            <a:pPr marL="171450" indent="-171450">
-              <a:buFontTx/>
-              <a:buChar char="-"/>
-            </a:pPr>
-            <a:endParaRPr lang="de-DE" dirty="0"/>
-          </a:p>
-          <a:p>
-            <a:pPr marL="171450" indent="-171450">
-              <a:buFontTx/>
-              <a:buChar char="-"/>
-            </a:pPr>
-            <a:r>
-              <a:rPr lang="de-DE" dirty="0" err="1"/>
-              <a:t>patch</a:t>
-            </a:r>
-            <a:r>
-              <a:rPr lang="de-DE" dirty="0"/>
-              <a:t> </a:t>
-            </a:r>
-            <a:r>
-              <a:rPr lang="de-DE" dirty="0" err="1"/>
-              <a:t>riot</a:t>
-            </a:r>
-            <a:endParaRPr lang="de-DE" dirty="0"/>
-          </a:p>
-          <a:p>
-            <a:pPr marL="171450" indent="-171450">
-              <a:buFontTx/>
-              <a:buChar char="-"/>
-            </a:pPr>
-            <a:r>
-              <a:rPr lang="de-DE" dirty="0" err="1"/>
-              <a:t>call</a:t>
-            </a:r>
-            <a:r>
-              <a:rPr lang="de-DE" dirty="0"/>
-              <a:t> </a:t>
-            </a:r>
-            <a:r>
-              <a:rPr lang="de-DE" dirty="0" err="1"/>
-              <a:t>stub</a:t>
-            </a:r>
-            <a:endParaRPr lang="de-DE" dirty="0"/>
-          </a:p>
-          <a:p>
-            <a:pPr marL="171450" indent="-171450">
-              <a:buFontTx/>
-              <a:buChar char="-"/>
-            </a:pPr>
-            <a:endParaRPr lang="de-DE" dirty="0"/>
-          </a:p>
-          <a:p>
-            <a:pPr marL="171450" indent="-171450">
-              <a:buFontTx/>
-              <a:buChar char="-"/>
-            </a:pPr>
-            <a:r>
-              <a:rPr lang="de-DE" dirty="0" err="1"/>
-              <a:t>commands</a:t>
-            </a:r>
-            <a:r>
-              <a:rPr lang="de-DE" dirty="0"/>
-              <a:t> zum Client</a:t>
-            </a:r>
-          </a:p>
-          <a:p>
-            <a:pPr marL="171450" indent="-171450">
-              <a:buFontTx/>
-              <a:buChar char="-"/>
-            </a:pPr>
-            <a:r>
-              <a:rPr lang="de-DE" dirty="0" err="1"/>
-              <a:t>output</a:t>
-            </a:r>
-            <a:r>
-              <a:rPr lang="de-DE" dirty="0"/>
-              <a:t> anzeigen</a:t>
-            </a:r>
-          </a:p>
-          <a:p>
-            <a:pPr marL="171450" indent="-171450">
-              <a:buFontTx/>
-              <a:buChar char="-"/>
-            </a:pPr>
-            <a:r>
-              <a:rPr lang="de-DE" dirty="0"/>
-              <a:t>input an </a:t>
-            </a:r>
-            <a:r>
-              <a:rPr lang="de-DE" dirty="0" err="1"/>
-              <a:t>CLient</a:t>
-            </a:r>
             <a:endParaRPr lang="de-DE" dirty="0"/>
           </a:p>
         </p:txBody>
@@ -1552,7 +1301,7 @@
           <a:p>
             <a:fld id="{97EEB764-55E2-4077-8C7A-EB9EFE7145E2}" type="slidenum">
               <a:rPr lang="en-US" smtClean="0"/>
-              <a:t>16</a:t>
+              <a:t>18</a:t>
             </a:fld>
             <a:endParaRPr lang="en-US"/>
           </a:p>
@@ -1561,7 +1310,7 @@
     </p:spTree>
     <p:extLst>
       <p:ext uri="{BB962C8B-B14F-4D97-AF65-F5344CB8AC3E}">
-        <p14:creationId xmlns:p14="http://schemas.microsoft.com/office/powerpoint/2010/main" val="293639556"/>
+        <p14:creationId xmlns:p14="http://schemas.microsoft.com/office/powerpoint/2010/main" val="3344899725"/>
       </p:ext>
     </p:extLst>
   </p:cSld>
@@ -1572,139 +1321,6 @@
 </file>
 
 <file path=ppt/notesSlides/notesSlide13.xml><?xml version="1.0" encoding="utf-8"?>
-<p:notes xmlns:a="http://schemas.openxmlformats.org/drawingml/2006/main" xmlns:r="http://schemas.openxmlformats.org/officeDocument/2006/relationships" xmlns:p="http://schemas.openxmlformats.org/presentationml/2006/main">
-  <p:cSld>
-    <p:spTree>
-      <p:nvGrpSpPr>
-        <p:cNvPr id="1" name="">
-          <a:extLst>
-            <a:ext uri="{FF2B5EF4-FFF2-40B4-BE49-F238E27FC236}">
-              <a16:creationId xmlns:a16="http://schemas.microsoft.com/office/drawing/2014/main" id="{596C238F-824A-54DD-6279-D43B9BDA34BC}"/>
-            </a:ext>
-          </a:extLst>
-        </p:cNvPr>
-        <p:cNvGrpSpPr/>
-        <p:nvPr/>
-      </p:nvGrpSpPr>
-      <p:grpSpPr>
-        <a:xfrm>
-          <a:off x="0" y="0"/>
-          <a:ext cx="0" cy="0"/>
-          <a:chOff x="0" y="0"/>
-          <a:chExt cx="0" cy="0"/>
-        </a:xfrm>
-      </p:grpSpPr>
-      <p:sp>
-        <p:nvSpPr>
-          <p:cNvPr id="2" name="Slide Image Placeholder 1">
-            <a:extLst>
-              <a:ext uri="{FF2B5EF4-FFF2-40B4-BE49-F238E27FC236}">
-                <a16:creationId xmlns:a16="http://schemas.microsoft.com/office/drawing/2014/main" id="{33067954-3F76-1016-2376-9984ECE8A060}"/>
-              </a:ext>
-            </a:extLst>
-          </p:cNvPr>
-          <p:cNvSpPr>
-            <a:spLocks noGrp="1" noRot="1" noChangeAspect="1"/>
-          </p:cNvSpPr>
-          <p:nvPr>
-            <p:ph type="sldImg"/>
-          </p:nvPr>
-        </p:nvSpPr>
-        <p:spPr/>
-      </p:sp>
-      <p:sp>
-        <p:nvSpPr>
-          <p:cNvPr id="3" name="Notes Placeholder 2">
-            <a:extLst>
-              <a:ext uri="{FF2B5EF4-FFF2-40B4-BE49-F238E27FC236}">
-                <a16:creationId xmlns:a16="http://schemas.microsoft.com/office/drawing/2014/main" id="{8CC15027-6A11-6B07-C150-C632DFDF02B3}"/>
-              </a:ext>
-            </a:extLst>
-          </p:cNvPr>
-          <p:cNvSpPr>
-            <a:spLocks noGrp="1"/>
-          </p:cNvSpPr>
-          <p:nvPr>
-            <p:ph type="body" idx="1"/>
-          </p:nvPr>
-        </p:nvSpPr>
-        <p:spPr/>
-        <p:txBody>
-          <a:bodyPr/>
-          <a:lstStyle/>
-          <a:p>
-            <a:endParaRPr lang="de-DE" dirty="0"/>
-          </a:p>
-        </p:txBody>
-      </p:sp>
-      <p:sp>
-        <p:nvSpPr>
-          <p:cNvPr id="4" name="Footer Placeholder 3">
-            <a:extLst>
-              <a:ext uri="{FF2B5EF4-FFF2-40B4-BE49-F238E27FC236}">
-                <a16:creationId xmlns:a16="http://schemas.microsoft.com/office/drawing/2014/main" id="{A2CD8FF5-9B38-0883-D8F4-8F87F8CD7B39}"/>
-              </a:ext>
-            </a:extLst>
-          </p:cNvPr>
-          <p:cNvSpPr>
-            <a:spLocks noGrp="1"/>
-          </p:cNvSpPr>
-          <p:nvPr>
-            <p:ph type="ftr" sz="quarter" idx="4"/>
-          </p:nvPr>
-        </p:nvSpPr>
-        <p:spPr/>
-        <p:txBody>
-          <a:bodyPr/>
-          <a:lstStyle/>
-          <a:p>
-            <a:endParaRPr lang="en-US"/>
-          </a:p>
-        </p:txBody>
-      </p:sp>
-      <p:sp>
-        <p:nvSpPr>
-          <p:cNvPr id="5" name="Slide Number Placeholder 4">
-            <a:extLst>
-              <a:ext uri="{FF2B5EF4-FFF2-40B4-BE49-F238E27FC236}">
-                <a16:creationId xmlns:a16="http://schemas.microsoft.com/office/drawing/2014/main" id="{D774687B-6D75-FE70-75E5-117EB8C3C65A}"/>
-              </a:ext>
-            </a:extLst>
-          </p:cNvPr>
-          <p:cNvSpPr>
-            <a:spLocks noGrp="1"/>
-          </p:cNvSpPr>
-          <p:nvPr>
-            <p:ph type="sldNum" sz="quarter" idx="5"/>
-          </p:nvPr>
-        </p:nvSpPr>
-        <p:spPr/>
-        <p:txBody>
-          <a:bodyPr/>
-          <a:lstStyle/>
-          <a:p>
-            <a:fld id="{97EEB764-55E2-4077-8C7A-EB9EFE7145E2}" type="slidenum">
-              <a:rPr lang="en-US" smtClean="0"/>
-              <a:t>19</a:t>
-            </a:fld>
-            <a:endParaRPr lang="en-US"/>
-          </a:p>
-        </p:txBody>
-      </p:sp>
-    </p:spTree>
-    <p:extLst>
-      <p:ext uri="{BB962C8B-B14F-4D97-AF65-F5344CB8AC3E}">
-        <p14:creationId xmlns:p14="http://schemas.microsoft.com/office/powerpoint/2010/main" val="433357005"/>
-      </p:ext>
-    </p:extLst>
-  </p:cSld>
-  <p:clrMapOvr>
-    <a:masterClrMapping/>
-  </p:clrMapOvr>
-</p:notes>
-</file>
-
-<file path=ppt/notesSlides/notesSlide14.xml><?xml version="1.0" encoding="utf-8"?>
 <p:notes xmlns:a="http://schemas.openxmlformats.org/drawingml/2006/main" xmlns:r="http://schemas.openxmlformats.org/officeDocument/2006/relationships" xmlns:p="http://schemas.openxmlformats.org/presentationml/2006/main">
   <p:cSld>
     <p:spTree>
@@ -1750,78 +1366,6 @@
           <a:p>
             <a:endParaRPr lang="de-DE" dirty="0"/>
           </a:p>
-          <a:p>
-            <a:pPr marL="171450" indent="-171450">
-              <a:buFontTx/>
-              <a:buChar char="-"/>
-            </a:pPr>
-            <a:r>
-              <a:rPr lang="de-DE" dirty="0"/>
-              <a:t>Gerätezugriff durch Web APIs ist erschwert</a:t>
-            </a:r>
-          </a:p>
-          <a:p>
-            <a:pPr marL="171450" indent="-171450">
-              <a:buFontTx/>
-              <a:buChar char="-"/>
-            </a:pPr>
-            <a:r>
-              <a:rPr lang="de-DE" dirty="0" err="1"/>
-              <a:t>VSCode</a:t>
-            </a:r>
-            <a:r>
-              <a:rPr lang="de-DE" dirty="0"/>
-              <a:t> Web </a:t>
-            </a:r>
-            <a:r>
-              <a:rPr lang="de-DE" dirty="0" err="1"/>
-              <a:t>Extensions</a:t>
-            </a:r>
-            <a:r>
-              <a:rPr lang="de-DE" dirty="0"/>
-              <a:t> an vielen Punkten (aus Sicherheitsgründen) beschränkt</a:t>
-            </a:r>
-          </a:p>
-          <a:p>
-            <a:pPr marL="171450" indent="-171450">
-              <a:buFontTx/>
-              <a:buChar char="-"/>
-            </a:pPr>
-            <a:r>
-              <a:rPr lang="de-DE" dirty="0"/>
-              <a:t>Neue Geräte müssen manuell eingebaut werden -&gt; </a:t>
-            </a:r>
-            <a:r>
-              <a:rPr lang="de-DE" dirty="0" err="1"/>
-              <a:t>flasher</a:t>
-            </a:r>
-            <a:r>
-              <a:rPr lang="de-DE" dirty="0"/>
-              <a:t> + </a:t>
-            </a:r>
-            <a:r>
-              <a:rPr lang="de-DE" dirty="0" err="1"/>
-              <a:t>make</a:t>
-            </a:r>
-            <a:endParaRPr lang="de-DE" dirty="0"/>
-          </a:p>
-          <a:p>
-            <a:pPr marL="171450" indent="-171450">
-              <a:buFontTx/>
-              <a:buChar char="-"/>
-            </a:pPr>
-            <a:r>
-              <a:rPr lang="de-DE" dirty="0"/>
-              <a:t>Treiber</a:t>
-            </a:r>
-          </a:p>
-          <a:p>
-            <a:pPr marL="171450" indent="-171450">
-              <a:buFontTx/>
-              <a:buChar char="-"/>
-            </a:pPr>
-            <a:endParaRPr lang="de-DE" dirty="0"/>
-          </a:p>
         </p:txBody>
       </p:sp>
       <p:sp>
@@ -1860,741 +1404,7 @@
           <a:p>
             <a:fld id="{97EEB764-55E2-4077-8C7A-EB9EFE7145E2}" type="slidenum">
               <a:rPr lang="en-US" smtClean="0"/>
-              <a:t>20</a:t>
-            </a:fld>
-            <a:endParaRPr lang="en-US"/>
-          </a:p>
-        </p:txBody>
-      </p:sp>
-    </p:spTree>
-    <p:extLst>
-      <p:ext uri="{BB962C8B-B14F-4D97-AF65-F5344CB8AC3E}">
-        <p14:creationId xmlns:p14="http://schemas.microsoft.com/office/powerpoint/2010/main" val="103726413"/>
-      </p:ext>
-    </p:extLst>
-  </p:cSld>
-  <p:clrMapOvr>
-    <a:masterClrMapping/>
-  </p:clrMapOvr>
-</p:notes>
-</file>
-
-<file path=ppt/notesSlides/notesSlide15.xml><?xml version="1.0" encoding="utf-8"?>
-<p:notes xmlns:a="http://schemas.openxmlformats.org/drawingml/2006/main" xmlns:r="http://schemas.openxmlformats.org/officeDocument/2006/relationships" xmlns:p="http://schemas.openxmlformats.org/presentationml/2006/main">
-  <p:cSld>
-    <p:spTree>
-      <p:nvGrpSpPr>
-        <p:cNvPr id="1" name=""/>
-        <p:cNvGrpSpPr/>
-        <p:nvPr/>
-      </p:nvGrpSpPr>
-      <p:grpSpPr>
-        <a:xfrm>
-          <a:off x="0" y="0"/>
-          <a:ext cx="0" cy="0"/>
-          <a:chOff x="0" y="0"/>
-          <a:chExt cx="0" cy="0"/>
-        </a:xfrm>
-      </p:grpSpPr>
-      <p:sp>
-        <p:nvSpPr>
-          <p:cNvPr id="2" name="Slide Image Placeholder 1"/>
-          <p:cNvSpPr>
-            <a:spLocks noGrp="1" noRot="1" noChangeAspect="1"/>
-          </p:cNvSpPr>
-          <p:nvPr>
-            <p:ph type="sldImg"/>
-          </p:nvPr>
-        </p:nvSpPr>
-        <p:spPr/>
-      </p:sp>
-      <p:sp>
-        <p:nvSpPr>
-          <p:cNvPr id="3" name="Notes Placeholder 2"/>
-          <p:cNvSpPr>
-            <a:spLocks noGrp="1"/>
-          </p:cNvSpPr>
-          <p:nvPr>
-            <p:ph type="body" idx="1"/>
-          </p:nvPr>
-        </p:nvSpPr>
-        <p:spPr/>
-        <p:txBody>
-          <a:bodyPr/>
-          <a:lstStyle/>
-          <a:p>
-            <a:endParaRPr lang="de-DE" dirty="0"/>
-          </a:p>
-        </p:txBody>
-      </p:sp>
-      <p:sp>
-        <p:nvSpPr>
-          <p:cNvPr id="4" name="Footer Placeholder 3"/>
-          <p:cNvSpPr>
-            <a:spLocks noGrp="1"/>
-          </p:cNvSpPr>
-          <p:nvPr>
-            <p:ph type="ftr" sz="quarter" idx="4"/>
-          </p:nvPr>
-        </p:nvSpPr>
-        <p:spPr/>
-        <p:txBody>
-          <a:bodyPr/>
-          <a:lstStyle/>
-          <a:p>
-            <a:endParaRPr lang="en-US"/>
-          </a:p>
-        </p:txBody>
-      </p:sp>
-      <p:sp>
-        <p:nvSpPr>
-          <p:cNvPr id="5" name="Slide Number Placeholder 4"/>
-          <p:cNvSpPr>
-            <a:spLocks noGrp="1"/>
-          </p:cNvSpPr>
-          <p:nvPr>
-            <p:ph type="sldNum" sz="quarter" idx="5"/>
-          </p:nvPr>
-        </p:nvSpPr>
-        <p:spPr/>
-        <p:txBody>
-          <a:bodyPr/>
-          <a:lstStyle/>
-          <a:p>
-            <a:fld id="{97EEB764-55E2-4077-8C7A-EB9EFE7145E2}" type="slidenum">
-              <a:rPr lang="en-US" smtClean="0"/>
-              <a:t>21</a:t>
-            </a:fld>
-            <a:endParaRPr lang="en-US"/>
-          </a:p>
-        </p:txBody>
-      </p:sp>
-    </p:spTree>
-    <p:extLst>
-      <p:ext uri="{BB962C8B-B14F-4D97-AF65-F5344CB8AC3E}">
-        <p14:creationId xmlns:p14="http://schemas.microsoft.com/office/powerpoint/2010/main" val="2201932495"/>
-      </p:ext>
-    </p:extLst>
-  </p:cSld>
-  <p:clrMapOvr>
-    <a:masterClrMapping/>
-  </p:clrMapOvr>
-</p:notes>
-</file>
-
-<file path=ppt/notesSlides/notesSlide16.xml><?xml version="1.0" encoding="utf-8"?>
-<p:notes xmlns:a="http://schemas.openxmlformats.org/drawingml/2006/main" xmlns:r="http://schemas.openxmlformats.org/officeDocument/2006/relationships" xmlns:p="http://schemas.openxmlformats.org/presentationml/2006/main">
-  <p:cSld>
-    <p:spTree>
-      <p:nvGrpSpPr>
-        <p:cNvPr id="1" name=""/>
-        <p:cNvGrpSpPr/>
-        <p:nvPr/>
-      </p:nvGrpSpPr>
-      <p:grpSpPr>
-        <a:xfrm>
-          <a:off x="0" y="0"/>
-          <a:ext cx="0" cy="0"/>
-          <a:chOff x="0" y="0"/>
-          <a:chExt cx="0" cy="0"/>
-        </a:xfrm>
-      </p:grpSpPr>
-      <p:sp>
-        <p:nvSpPr>
-          <p:cNvPr id="2" name="Slide Image Placeholder 1"/>
-          <p:cNvSpPr>
-            <a:spLocks noGrp="1" noRot="1" noChangeAspect="1"/>
-          </p:cNvSpPr>
-          <p:nvPr>
-            <p:ph type="sldImg"/>
-          </p:nvPr>
-        </p:nvSpPr>
-        <p:spPr/>
-      </p:sp>
-      <p:sp>
-        <p:nvSpPr>
-          <p:cNvPr id="3" name="Notes Placeholder 2"/>
-          <p:cNvSpPr>
-            <a:spLocks noGrp="1"/>
-          </p:cNvSpPr>
-          <p:nvPr>
-            <p:ph type="body" idx="1"/>
-          </p:nvPr>
-        </p:nvSpPr>
-        <p:spPr/>
-        <p:txBody>
-          <a:bodyPr/>
-          <a:lstStyle/>
-          <a:p>
-            <a:pPr marL="171450" indent="-171450">
-              <a:buFontTx/>
-              <a:buChar char="-"/>
-            </a:pPr>
-            <a:r>
-              <a:rPr lang="de-DE" dirty="0" err="1"/>
-              <a:t>default</a:t>
-            </a:r>
-            <a:r>
-              <a:rPr lang="de-DE" dirty="0"/>
-              <a:t> </a:t>
-            </a:r>
-            <a:r>
-              <a:rPr lang="de-DE" dirty="0" err="1"/>
-              <a:t>workspace</a:t>
-            </a:r>
-            <a:endParaRPr lang="de-DE" dirty="0"/>
-          </a:p>
-          <a:p>
-            <a:pPr marL="171450" indent="-171450">
-              <a:buFontTx/>
-              <a:buChar char="-"/>
-            </a:pPr>
-            <a:endParaRPr lang="de-DE" dirty="0"/>
-          </a:p>
-          <a:p>
-            <a:pPr marL="171450" indent="-171450">
-              <a:buFontTx/>
-              <a:buChar char="-"/>
-            </a:pPr>
-            <a:r>
-              <a:rPr lang="de-DE" dirty="0"/>
-              <a:t>open </a:t>
-            </a:r>
-            <a:r>
-              <a:rPr lang="de-DE" dirty="0" err="1"/>
-              <a:t>shell</a:t>
-            </a:r>
-            <a:r>
-              <a:rPr lang="de-DE" dirty="0"/>
-              <a:t> </a:t>
-            </a:r>
-            <a:r>
-              <a:rPr lang="de-DE" dirty="0" err="1"/>
-              <a:t>project</a:t>
-            </a:r>
-            <a:endParaRPr lang="de-DE" dirty="0"/>
-          </a:p>
-          <a:p>
-            <a:pPr marL="171450" indent="-171450">
-              <a:buFontTx/>
-              <a:buChar char="-"/>
-            </a:pPr>
-            <a:endParaRPr lang="de-DE" dirty="0"/>
-          </a:p>
-          <a:p>
-            <a:pPr marL="171450" indent="-171450">
-              <a:buFontTx/>
-              <a:buChar char="-"/>
-            </a:pPr>
-            <a:r>
-              <a:rPr lang="de-DE" dirty="0" err="1"/>
-              <a:t>add</a:t>
-            </a:r>
-            <a:r>
-              <a:rPr lang="de-DE" dirty="0"/>
-              <a:t> esp32 (</a:t>
-            </a:r>
-            <a:r>
-              <a:rPr lang="de-DE" dirty="0" err="1"/>
-              <a:t>hello</a:t>
-            </a:r>
-            <a:r>
-              <a:rPr lang="de-DE" dirty="0"/>
-              <a:t> </a:t>
-            </a:r>
-            <a:r>
-              <a:rPr lang="de-DE" dirty="0" err="1"/>
-              <a:t>world</a:t>
-            </a:r>
-            <a:r>
-              <a:rPr lang="de-DE" dirty="0"/>
-              <a:t>)</a:t>
-            </a:r>
-          </a:p>
-          <a:p>
-            <a:pPr marL="171450" indent="-171450">
-              <a:buFontTx/>
-              <a:buChar char="-"/>
-            </a:pPr>
-            <a:r>
-              <a:rPr lang="de-DE" dirty="0" err="1"/>
-              <a:t>flash</a:t>
-            </a:r>
-            <a:r>
-              <a:rPr lang="de-DE" dirty="0"/>
-              <a:t> esp32</a:t>
-            </a:r>
-          </a:p>
-          <a:p>
-            <a:pPr marL="171450" indent="-171450">
-              <a:buFontTx/>
-              <a:buChar char="-"/>
-            </a:pPr>
-            <a:r>
-              <a:rPr lang="de-DE" dirty="0" err="1"/>
-              <a:t>term</a:t>
-            </a:r>
-            <a:r>
-              <a:rPr lang="de-DE" dirty="0"/>
-              <a:t> (offen)</a:t>
-            </a:r>
-          </a:p>
-          <a:p>
-            <a:pPr marL="171450" indent="-171450">
-              <a:buFontTx/>
-              <a:buChar char="-"/>
-            </a:pPr>
-            <a:endParaRPr lang="de-DE" dirty="0"/>
-          </a:p>
-          <a:p>
-            <a:pPr marL="171450" indent="-171450">
-              <a:buFontTx/>
-              <a:buChar char="-"/>
-            </a:pPr>
-            <a:r>
-              <a:rPr lang="de-DE" dirty="0" err="1"/>
-              <a:t>add</a:t>
-            </a:r>
-            <a:r>
-              <a:rPr lang="de-DE" dirty="0"/>
-              <a:t> </a:t>
-            </a:r>
-            <a:r>
-              <a:rPr lang="de-DE" dirty="0" err="1"/>
-              <a:t>adafruit</a:t>
-            </a:r>
-            <a:r>
-              <a:rPr lang="de-DE" dirty="0"/>
-              <a:t> (</a:t>
-            </a:r>
-            <a:r>
-              <a:rPr lang="de-DE" dirty="0" err="1"/>
-              <a:t>shell</a:t>
-            </a:r>
-            <a:r>
-              <a:rPr lang="de-DE" dirty="0"/>
-              <a:t>)</a:t>
-            </a:r>
-          </a:p>
-          <a:p>
-            <a:pPr marL="171450" indent="-171450">
-              <a:buFontTx/>
-              <a:buChar char="-"/>
-            </a:pPr>
-            <a:r>
-              <a:rPr lang="de-DE" dirty="0" err="1"/>
-              <a:t>flash</a:t>
-            </a:r>
-            <a:endParaRPr lang="de-DE" dirty="0"/>
-          </a:p>
-          <a:p>
-            <a:pPr marL="171450" indent="-171450">
-              <a:buFontTx/>
-              <a:buChar char="-"/>
-            </a:pPr>
-            <a:r>
-              <a:rPr lang="de-DE" dirty="0" err="1"/>
-              <a:t>term</a:t>
-            </a:r>
-            <a:endParaRPr lang="de-DE" dirty="0"/>
-          </a:p>
-          <a:p>
-            <a:pPr marL="171450" indent="-171450">
-              <a:buFontTx/>
-              <a:buChar char="-"/>
-            </a:pPr>
-            <a:endParaRPr lang="de-DE" dirty="0"/>
-          </a:p>
-          <a:p>
-            <a:pPr marL="171450" indent="-171450">
-              <a:buFontTx/>
-              <a:buChar char="-"/>
-            </a:pPr>
-            <a:r>
-              <a:rPr lang="de-DE" dirty="0"/>
-              <a:t>cd </a:t>
-            </a:r>
-            <a:r>
-              <a:rPr lang="de-DE" dirty="0" err="1"/>
-              <a:t>timer</a:t>
-            </a:r>
-            <a:endParaRPr lang="de-DE" dirty="0"/>
-          </a:p>
-          <a:p>
-            <a:pPr marL="171450" indent="-171450">
-              <a:buFontTx/>
-              <a:buChar char="-"/>
-            </a:pPr>
-            <a:r>
-              <a:rPr lang="de-DE" dirty="0" err="1"/>
-              <a:t>make</a:t>
-            </a:r>
-            <a:r>
-              <a:rPr lang="de-DE" dirty="0"/>
-              <a:t> </a:t>
-            </a:r>
-            <a:r>
-              <a:rPr lang="de-DE" dirty="0" err="1"/>
-              <a:t>by</a:t>
-            </a:r>
-            <a:r>
-              <a:rPr lang="de-DE" dirty="0"/>
-              <a:t> </a:t>
-            </a:r>
-            <a:r>
-              <a:rPr lang="de-DE" dirty="0" err="1"/>
-              <a:t>keyup</a:t>
-            </a:r>
-            <a:endParaRPr lang="de-DE" dirty="0"/>
-          </a:p>
-        </p:txBody>
-      </p:sp>
-      <p:sp>
-        <p:nvSpPr>
-          <p:cNvPr id="4" name="Footer Placeholder 3"/>
-          <p:cNvSpPr>
-            <a:spLocks noGrp="1"/>
-          </p:cNvSpPr>
-          <p:nvPr>
-            <p:ph type="ftr" sz="quarter" idx="4"/>
-          </p:nvPr>
-        </p:nvSpPr>
-        <p:spPr/>
-        <p:txBody>
-          <a:bodyPr/>
-          <a:lstStyle/>
-          <a:p>
-            <a:endParaRPr lang="en-US"/>
-          </a:p>
-        </p:txBody>
-      </p:sp>
-      <p:sp>
-        <p:nvSpPr>
-          <p:cNvPr id="5" name="Slide Number Placeholder 4"/>
-          <p:cNvSpPr>
-            <a:spLocks noGrp="1"/>
-          </p:cNvSpPr>
-          <p:nvPr>
-            <p:ph type="sldNum" sz="quarter" idx="5"/>
-          </p:nvPr>
-        </p:nvSpPr>
-        <p:spPr/>
-        <p:txBody>
-          <a:bodyPr/>
-          <a:lstStyle/>
-          <a:p>
-            <a:fld id="{97EEB764-55E2-4077-8C7A-EB9EFE7145E2}" type="slidenum">
-              <a:rPr lang="en-US" smtClean="0"/>
-              <a:t>23</a:t>
-            </a:fld>
-            <a:endParaRPr lang="en-US"/>
-          </a:p>
-        </p:txBody>
-      </p:sp>
-    </p:spTree>
-    <p:extLst>
-      <p:ext uri="{BB962C8B-B14F-4D97-AF65-F5344CB8AC3E}">
-        <p14:creationId xmlns:p14="http://schemas.microsoft.com/office/powerpoint/2010/main" val="2010879930"/>
-      </p:ext>
-    </p:extLst>
-  </p:cSld>
-  <p:clrMapOvr>
-    <a:masterClrMapping/>
-  </p:clrMapOvr>
-</p:notes>
-</file>
-
-<file path=ppt/notesSlides/notesSlide17.xml><?xml version="1.0" encoding="utf-8"?>
-<p:notes xmlns:a="http://schemas.openxmlformats.org/drawingml/2006/main" xmlns:r="http://schemas.openxmlformats.org/officeDocument/2006/relationships" xmlns:p="http://schemas.openxmlformats.org/presentationml/2006/main">
-  <p:cSld>
-    <p:spTree>
-      <p:nvGrpSpPr>
-        <p:cNvPr id="1" name=""/>
-        <p:cNvGrpSpPr/>
-        <p:nvPr/>
-      </p:nvGrpSpPr>
-      <p:grpSpPr>
-        <a:xfrm>
-          <a:off x="0" y="0"/>
-          <a:ext cx="0" cy="0"/>
-          <a:chOff x="0" y="0"/>
-          <a:chExt cx="0" cy="0"/>
-        </a:xfrm>
-      </p:grpSpPr>
-      <p:sp>
-        <p:nvSpPr>
-          <p:cNvPr id="2" name="Slide Image Placeholder 1"/>
-          <p:cNvSpPr>
-            <a:spLocks noGrp="1" noRot="1" noChangeAspect="1"/>
-          </p:cNvSpPr>
-          <p:nvPr>
-            <p:ph type="sldImg"/>
-          </p:nvPr>
-        </p:nvSpPr>
-        <p:spPr/>
-      </p:sp>
-      <p:sp>
-        <p:nvSpPr>
-          <p:cNvPr id="3" name="Notes Placeholder 2"/>
-          <p:cNvSpPr>
-            <a:spLocks noGrp="1"/>
-          </p:cNvSpPr>
-          <p:nvPr>
-            <p:ph type="body" idx="1"/>
-          </p:nvPr>
-        </p:nvSpPr>
-        <p:spPr/>
-        <p:txBody>
-          <a:bodyPr/>
-          <a:lstStyle/>
-          <a:p>
-            <a:endParaRPr lang="de-DE" dirty="0"/>
-          </a:p>
-        </p:txBody>
-      </p:sp>
-      <p:sp>
-        <p:nvSpPr>
-          <p:cNvPr id="4" name="Footer Placeholder 3"/>
-          <p:cNvSpPr>
-            <a:spLocks noGrp="1"/>
-          </p:cNvSpPr>
-          <p:nvPr>
-            <p:ph type="ftr" sz="quarter" idx="4"/>
-          </p:nvPr>
-        </p:nvSpPr>
-        <p:spPr/>
-        <p:txBody>
-          <a:bodyPr/>
-          <a:lstStyle/>
-          <a:p>
-            <a:endParaRPr lang="en-US"/>
-          </a:p>
-        </p:txBody>
-      </p:sp>
-      <p:sp>
-        <p:nvSpPr>
-          <p:cNvPr id="5" name="Slide Number Placeholder 4"/>
-          <p:cNvSpPr>
-            <a:spLocks noGrp="1"/>
-          </p:cNvSpPr>
-          <p:nvPr>
-            <p:ph type="sldNum" sz="quarter" idx="5"/>
-          </p:nvPr>
-        </p:nvSpPr>
-        <p:spPr/>
-        <p:txBody>
-          <a:bodyPr/>
-          <a:lstStyle/>
-          <a:p>
-            <a:fld id="{97EEB764-55E2-4077-8C7A-EB9EFE7145E2}" type="slidenum">
-              <a:rPr lang="en-US" smtClean="0"/>
-              <a:t>25</a:t>
-            </a:fld>
-            <a:endParaRPr lang="en-US"/>
-          </a:p>
-        </p:txBody>
-      </p:sp>
-    </p:spTree>
-    <p:extLst>
-      <p:ext uri="{BB962C8B-B14F-4D97-AF65-F5344CB8AC3E}">
-        <p14:creationId xmlns:p14="http://schemas.microsoft.com/office/powerpoint/2010/main" val="3259599336"/>
-      </p:ext>
-    </p:extLst>
-  </p:cSld>
-  <p:clrMapOvr>
-    <a:masterClrMapping/>
-  </p:clrMapOvr>
-</p:notes>
-</file>
-
-<file path=ppt/notesSlides/notesSlide18.xml><?xml version="1.0" encoding="utf-8"?>
-<p:notes xmlns:a="http://schemas.openxmlformats.org/drawingml/2006/main" xmlns:r="http://schemas.openxmlformats.org/officeDocument/2006/relationships" xmlns:p="http://schemas.openxmlformats.org/presentationml/2006/main">
-  <p:cSld>
-    <p:spTree>
-      <p:nvGrpSpPr>
-        <p:cNvPr id="1" name=""/>
-        <p:cNvGrpSpPr/>
-        <p:nvPr/>
-      </p:nvGrpSpPr>
-      <p:grpSpPr>
-        <a:xfrm>
-          <a:off x="0" y="0"/>
-          <a:ext cx="0" cy="0"/>
-          <a:chOff x="0" y="0"/>
-          <a:chExt cx="0" cy="0"/>
-        </a:xfrm>
-      </p:grpSpPr>
-      <p:sp>
-        <p:nvSpPr>
-          <p:cNvPr id="2" name="Slide Image Placeholder 1"/>
-          <p:cNvSpPr>
-            <a:spLocks noGrp="1" noRot="1" noChangeAspect="1"/>
-          </p:cNvSpPr>
-          <p:nvPr>
-            <p:ph type="sldImg"/>
-          </p:nvPr>
-        </p:nvSpPr>
-        <p:spPr/>
-      </p:sp>
-      <p:sp>
-        <p:nvSpPr>
-          <p:cNvPr id="3" name="Notes Placeholder 2"/>
-          <p:cNvSpPr>
-            <a:spLocks noGrp="1"/>
-          </p:cNvSpPr>
-          <p:nvPr>
-            <p:ph type="body" idx="1"/>
-          </p:nvPr>
-        </p:nvSpPr>
-        <p:spPr/>
-        <p:txBody>
-          <a:bodyPr/>
-          <a:lstStyle/>
-          <a:p>
-            <a:endParaRPr lang="de-DE" dirty="0"/>
-          </a:p>
-        </p:txBody>
-      </p:sp>
-      <p:sp>
-        <p:nvSpPr>
-          <p:cNvPr id="4" name="Footer Placeholder 3"/>
-          <p:cNvSpPr>
-            <a:spLocks noGrp="1"/>
-          </p:cNvSpPr>
-          <p:nvPr>
-            <p:ph type="ftr" sz="quarter" idx="4"/>
-          </p:nvPr>
-        </p:nvSpPr>
-        <p:spPr/>
-        <p:txBody>
-          <a:bodyPr/>
-          <a:lstStyle/>
-          <a:p>
-            <a:endParaRPr lang="en-US"/>
-          </a:p>
-        </p:txBody>
-      </p:sp>
-      <p:sp>
-        <p:nvSpPr>
-          <p:cNvPr id="5" name="Slide Number Placeholder 4"/>
-          <p:cNvSpPr>
-            <a:spLocks noGrp="1"/>
-          </p:cNvSpPr>
-          <p:nvPr>
-            <p:ph type="sldNum" sz="quarter" idx="5"/>
-          </p:nvPr>
-        </p:nvSpPr>
-        <p:spPr/>
-        <p:txBody>
-          <a:bodyPr/>
-          <a:lstStyle/>
-          <a:p>
-            <a:fld id="{97EEB764-55E2-4077-8C7A-EB9EFE7145E2}" type="slidenum">
-              <a:rPr lang="en-US" smtClean="0"/>
-              <a:t>26</a:t>
-            </a:fld>
-            <a:endParaRPr lang="en-US"/>
-          </a:p>
-        </p:txBody>
-      </p:sp>
-    </p:spTree>
-    <p:extLst>
-      <p:ext uri="{BB962C8B-B14F-4D97-AF65-F5344CB8AC3E}">
-        <p14:creationId xmlns:p14="http://schemas.microsoft.com/office/powerpoint/2010/main" val="3344899725"/>
-      </p:ext>
-    </p:extLst>
-  </p:cSld>
-  <p:clrMapOvr>
-    <a:masterClrMapping/>
-  </p:clrMapOvr>
-</p:notes>
-</file>
-
-<file path=ppt/notesSlides/notesSlide19.xml><?xml version="1.0" encoding="utf-8"?>
-<p:notes xmlns:a="http://schemas.openxmlformats.org/drawingml/2006/main" xmlns:r="http://schemas.openxmlformats.org/officeDocument/2006/relationships" xmlns:p="http://schemas.openxmlformats.org/presentationml/2006/main">
-  <p:cSld>
-    <p:spTree>
-      <p:nvGrpSpPr>
-        <p:cNvPr id="1" name=""/>
-        <p:cNvGrpSpPr/>
-        <p:nvPr/>
-      </p:nvGrpSpPr>
-      <p:grpSpPr>
-        <a:xfrm>
-          <a:off x="0" y="0"/>
-          <a:ext cx="0" cy="0"/>
-          <a:chOff x="0" y="0"/>
-          <a:chExt cx="0" cy="0"/>
-        </a:xfrm>
-      </p:grpSpPr>
-      <p:sp>
-        <p:nvSpPr>
-          <p:cNvPr id="2" name="Slide Image Placeholder 1"/>
-          <p:cNvSpPr>
-            <a:spLocks noGrp="1" noRot="1" noChangeAspect="1"/>
-          </p:cNvSpPr>
-          <p:nvPr>
-            <p:ph type="sldImg"/>
-          </p:nvPr>
-        </p:nvSpPr>
-        <p:spPr/>
-      </p:sp>
-      <p:sp>
-        <p:nvSpPr>
-          <p:cNvPr id="3" name="Notes Placeholder 2"/>
-          <p:cNvSpPr>
-            <a:spLocks noGrp="1"/>
-          </p:cNvSpPr>
-          <p:nvPr>
-            <p:ph type="body" idx="1"/>
-          </p:nvPr>
-        </p:nvSpPr>
-        <p:spPr/>
-        <p:txBody>
-          <a:bodyPr/>
-          <a:lstStyle/>
-          <a:p>
-            <a:endParaRPr lang="de-DE" dirty="0"/>
-          </a:p>
-        </p:txBody>
-      </p:sp>
-      <p:sp>
-        <p:nvSpPr>
-          <p:cNvPr id="4" name="Footer Placeholder 3"/>
-          <p:cNvSpPr>
-            <a:spLocks noGrp="1"/>
-          </p:cNvSpPr>
-          <p:nvPr>
-            <p:ph type="ftr" sz="quarter" idx="4"/>
-          </p:nvPr>
-        </p:nvSpPr>
-        <p:spPr/>
-        <p:txBody>
-          <a:bodyPr/>
-          <a:lstStyle/>
-          <a:p>
-            <a:endParaRPr lang="en-US"/>
-          </a:p>
-        </p:txBody>
-      </p:sp>
-      <p:sp>
-        <p:nvSpPr>
-          <p:cNvPr id="5" name="Slide Number Placeholder 4"/>
-          <p:cNvSpPr>
-            <a:spLocks noGrp="1"/>
-          </p:cNvSpPr>
-          <p:nvPr>
-            <p:ph type="sldNum" sz="quarter" idx="5"/>
-          </p:nvPr>
-        </p:nvSpPr>
-        <p:spPr/>
-        <p:txBody>
-          <a:bodyPr/>
-          <a:lstStyle/>
-          <a:p>
-            <a:fld id="{97EEB764-55E2-4077-8C7A-EB9EFE7145E2}" type="slidenum">
-              <a:rPr lang="en-US" smtClean="0"/>
-              <a:t>27</a:t>
+              <a:t>19</a:t>
             </a:fld>
             <a:endParaRPr lang="en-US"/>
           </a:p>
@@ -2659,13 +1469,27 @@
           <a:p>
             <a:r>
               <a:rPr lang="de-DE" dirty="0"/>
-              <a:t>Stellt euch vor</a:t>
-            </a:r>
-          </a:p>
-          <a:p>
+              <a:t>Wie Titel: Mikrocontroller über Browser </a:t>
+            </a:r>
+            <a:r>
+              <a:rPr lang="de-DE" dirty="0" err="1"/>
+              <a:t>flashen</a:t>
+            </a:r>
             <a:endParaRPr lang="de-DE" dirty="0"/>
           </a:p>
           <a:p>
+            <a:endParaRPr lang="de-DE" dirty="0"/>
+          </a:p>
+          <a:p>
+            <a:r>
+              <a:rPr lang="de-DE" dirty="0"/>
+              <a:t>Idee:</a:t>
+            </a:r>
+          </a:p>
+          <a:p>
+            <a:endParaRPr lang="de-DE" dirty="0"/>
+          </a:p>
+          <a:p>
             <a:r>
               <a:rPr lang="de-DE" dirty="0" err="1"/>
               <a:t>website</a:t>
@@ -2681,6 +1505,15 @@
           <a:p>
             <a:r>
               <a:rPr lang="de-DE" dirty="0"/>
+              <a:t>Entwicklungsumgebung bekommen</a:t>
+            </a:r>
+          </a:p>
+          <a:p>
+            <a:endParaRPr lang="de-DE" dirty="0"/>
+          </a:p>
+          <a:p>
+            <a:r>
+              <a:rPr lang="de-DE" dirty="0"/>
               <a:t>RIOT code schreiben </a:t>
             </a:r>
           </a:p>
@@ -2690,7 +1523,7 @@
           <a:p>
             <a:r>
               <a:rPr lang="de-DE" dirty="0"/>
-              <a:t>dann direkt einfach </a:t>
+              <a:t>dann direkt einfach remote </a:t>
             </a:r>
             <a:r>
               <a:rPr lang="de-DE" dirty="0" err="1"/>
@@ -2702,6 +1535,14 @@
             </a:r>
             <a:r>
               <a:rPr lang="de-DE" dirty="0" err="1"/>
+              <a:t>local</a:t>
+            </a:r>
+            <a:r>
+              <a:rPr lang="de-DE" dirty="0"/>
+              <a:t> </a:t>
+            </a:r>
+            <a:r>
+              <a:rPr lang="de-DE" dirty="0" err="1"/>
               <a:t>flashen</a:t>
             </a:r>
             <a:endParaRPr lang="de-DE" dirty="0"/>
@@ -2718,15 +1559,34 @@
               <a:rPr lang="de-DE" dirty="0" err="1"/>
               <a:t>setup</a:t>
             </a:r>
+            <a:r>
+              <a:rPr lang="de-DE" dirty="0"/>
+              <a:t> von RIOT </a:t>
+            </a:r>
+            <a:r>
+              <a:rPr lang="de-DE" dirty="0" err="1"/>
+              <a:t>Toolchain</a:t>
+            </a:r>
+            <a:r>
+              <a:rPr lang="de-DE" dirty="0"/>
+              <a:t> oder IDE</a:t>
+            </a:r>
+          </a:p>
+          <a:p>
             <a:endParaRPr lang="de-DE" dirty="0"/>
           </a:p>
           <a:p>
-            <a:endParaRPr lang="de-DE" dirty="0"/>
-          </a:p>
-          <a:p>
             <a:r>
               <a:rPr lang="de-DE" dirty="0" err="1"/>
               <a:t>platformunabhängig</a:t>
+            </a:r>
+            <a:r>
+              <a:rPr lang="de-DE" dirty="0"/>
+              <a:t>, braucht nur </a:t>
+            </a:r>
+            <a:r>
+              <a:rPr lang="de-DE" dirty="0" err="1"/>
+              <a:t>browser</a:t>
             </a:r>
             <a:endParaRPr lang="de-DE" dirty="0"/>
           </a:p>
@@ -2768,7 +1628,7 @@
           <a:p>
             <a:fld id="{97EEB764-55E2-4077-8C7A-EB9EFE7145E2}" type="slidenum">
               <a:rPr lang="en-US" smtClean="0"/>
-              <a:t>3</a:t>
+              <a:t>2</a:t>
             </a:fld>
             <a:endParaRPr lang="en-US"/>
           </a:p>
@@ -2831,7 +1691,152 @@
           <a:bodyPr/>
           <a:lstStyle/>
           <a:p>
+            <a:r>
+              <a:rPr lang="de-DE" dirty="0"/>
+              <a:t>Ziele die wir im Rahmen unseres Projektes gesetzt haben</a:t>
+            </a:r>
+          </a:p>
+          <a:p>
             <a:endParaRPr lang="de-DE" dirty="0"/>
+          </a:p>
+          <a:p>
+            <a:pPr marL="171450" indent="-171450">
+              <a:buFontTx/>
+              <a:buChar char="-"/>
+            </a:pPr>
+            <a:r>
+              <a:rPr lang="de-DE" dirty="0" err="1"/>
+              <a:t>mirkocontroller</a:t>
+            </a:r>
+            <a:r>
+              <a:rPr lang="de-DE" dirty="0"/>
+              <a:t> von einem Browser </a:t>
+            </a:r>
+            <a:r>
+              <a:rPr lang="de-DE" dirty="0" err="1"/>
+              <a:t>flashen</a:t>
+            </a:r>
+            <a:endParaRPr lang="de-DE" dirty="0"/>
+          </a:p>
+          <a:p>
+            <a:pPr marL="171450" indent="-171450">
+              <a:buFontTx/>
+              <a:buChar char="-"/>
+            </a:pPr>
+            <a:endParaRPr lang="de-DE" dirty="0"/>
+          </a:p>
+          <a:p>
+            <a:pPr marL="171450" indent="-171450">
+              <a:buFontTx/>
+              <a:buChar char="-"/>
+            </a:pPr>
+            <a:r>
+              <a:rPr lang="de-DE" dirty="0"/>
+              <a:t>web </a:t>
+            </a:r>
+            <a:r>
+              <a:rPr lang="de-DE" dirty="0" err="1"/>
+              <a:t>ide</a:t>
+            </a:r>
+            <a:r>
+              <a:rPr lang="de-DE" dirty="0"/>
+              <a:t> bereitstellen die fertiges </a:t>
+            </a:r>
+            <a:r>
+              <a:rPr lang="de-DE" dirty="0" err="1"/>
+              <a:t>dev</a:t>
+            </a:r>
+            <a:r>
+              <a:rPr lang="de-DE" dirty="0"/>
+              <a:t> </a:t>
+            </a:r>
+            <a:r>
+              <a:rPr lang="de-DE" dirty="0" err="1"/>
+              <a:t>env</a:t>
+            </a:r>
+            <a:r>
+              <a:rPr lang="de-DE" dirty="0"/>
+              <a:t> im backend hat</a:t>
+            </a:r>
+          </a:p>
+          <a:p>
+            <a:pPr marL="171450" indent="-171450">
+              <a:buFontTx/>
+              <a:buChar char="-"/>
+            </a:pPr>
+            <a:endParaRPr lang="de-DE" dirty="0"/>
+          </a:p>
+          <a:p>
+            <a:pPr marL="171450" indent="-171450">
+              <a:buFontTx/>
+              <a:buChar char="-"/>
+            </a:pPr>
+            <a:r>
+              <a:rPr lang="de-DE" dirty="0"/>
+              <a:t>Benutzung von RIOT für Anfänger vereinfachen (UI </a:t>
+            </a:r>
+            <a:r>
+              <a:rPr lang="de-DE" dirty="0" err="1"/>
+              <a:t>buttons</a:t>
+            </a:r>
+            <a:r>
+              <a:rPr lang="de-DE" dirty="0"/>
+              <a:t>)</a:t>
+            </a:r>
+          </a:p>
+          <a:p>
+            <a:pPr marL="171450" indent="-171450">
+              <a:buFontTx/>
+              <a:buChar char="-"/>
+            </a:pPr>
+            <a:endParaRPr lang="de-DE" dirty="0"/>
+          </a:p>
+          <a:p>
+            <a:pPr marL="171450" indent="-171450">
+              <a:buFontTx/>
+              <a:buChar char="-"/>
+            </a:pPr>
+            <a:r>
+              <a:rPr lang="de-DE" dirty="0"/>
+              <a:t>möglichst nah an RIOT bleiben</a:t>
+            </a:r>
+          </a:p>
+          <a:p>
+            <a:pPr marL="171450" indent="-171450">
+              <a:buFontTx/>
+              <a:buChar char="-"/>
+            </a:pPr>
+            <a:endParaRPr lang="de-DE" dirty="0"/>
+          </a:p>
+          <a:p>
+            <a:pPr marL="171450" indent="-171450">
+              <a:buFontTx/>
+              <a:buChar char="-"/>
+            </a:pPr>
+            <a:r>
+              <a:rPr lang="de-DE" dirty="0"/>
+              <a:t>einfaches und flexibles Hosting</a:t>
+            </a:r>
+          </a:p>
+          <a:p>
+            <a:pPr marL="628650" lvl="1" indent="-171450">
+              <a:buFontTx/>
+              <a:buChar char="-"/>
+            </a:pPr>
+            <a:r>
+              <a:rPr lang="de-DE" dirty="0"/>
+              <a:t>lokal</a:t>
+            </a:r>
+          </a:p>
+          <a:p>
+            <a:pPr marL="628650" lvl="1" indent="-171450">
+              <a:buFontTx/>
+              <a:buChar char="-"/>
+            </a:pPr>
+            <a:r>
+              <a:rPr lang="de-DE" dirty="0"/>
+              <a:t>oder zentral</a:t>
+            </a:r>
           </a:p>
         </p:txBody>
       </p:sp>
@@ -2871,7 +1876,7 @@
           <a:p>
             <a:fld id="{97EEB764-55E2-4077-8C7A-EB9EFE7145E2}" type="slidenum">
               <a:rPr lang="en-US" smtClean="0"/>
-              <a:t>4</a:t>
+              <a:t>3</a:t>
             </a:fld>
             <a:endParaRPr lang="en-US"/>
           </a:p>
@@ -2880,7 +1885,7 @@
     </p:spTree>
     <p:extLst>
       <p:ext uri="{BB962C8B-B14F-4D97-AF65-F5344CB8AC3E}">
-        <p14:creationId xmlns:p14="http://schemas.microsoft.com/office/powerpoint/2010/main" val="1457005428"/>
+        <p14:creationId xmlns:p14="http://schemas.microsoft.com/office/powerpoint/2010/main" val="1919197482"/>
       </p:ext>
     </p:extLst>
   </p:cSld>
@@ -2934,32 +1939,151 @@
           <a:bodyPr/>
           <a:lstStyle/>
           <a:p>
-            <a:r>
-              <a:rPr lang="de-DE" dirty="0"/>
-              <a:t>Ziele im Rahmen unseres Projektes</a:t>
-            </a:r>
-          </a:p>
-          <a:p>
-            <a:endParaRPr lang="de-DE" dirty="0"/>
-          </a:p>
-          <a:p>
             <a:pPr marL="171450" indent="-171450">
               <a:buFontTx/>
               <a:buChar char="-"/>
             </a:pPr>
             <a:r>
-              <a:rPr lang="de-DE" dirty="0" err="1"/>
-              <a:t>geräte</a:t>
-            </a:r>
-            <a:r>
-              <a:rPr lang="de-DE" dirty="0"/>
-              <a:t> von einem Browser </a:t>
-            </a:r>
-            <a:r>
-              <a:rPr lang="de-DE" dirty="0" err="1"/>
-              <a:t>flashen</a:t>
-            </a:r>
-            <a:endParaRPr lang="de-DE" dirty="0"/>
+              <a:rPr lang="de-DE" dirty="0"/>
+              <a:t>Browser lässt keine direkte </a:t>
+            </a:r>
+            <a:r>
+              <a:rPr lang="de-DE" dirty="0" err="1"/>
+              <a:t>kommunikation</a:t>
+            </a:r>
+            <a:r>
+              <a:rPr lang="de-DE" dirty="0"/>
+              <a:t> mit </a:t>
+            </a:r>
+            <a:r>
+              <a:rPr lang="de-DE" dirty="0" err="1"/>
+              <a:t>geräten</a:t>
+            </a:r>
+            <a:r>
+              <a:rPr lang="de-DE" dirty="0"/>
+              <a:t> zu</a:t>
+            </a:r>
+          </a:p>
+          <a:p>
+            <a:pPr marL="171450" marR="0" lvl="0" indent="-171450" algn="l" defTabSz="914400" rtl="0" eaLnBrk="1" fontAlgn="auto" latinLnBrk="0" hangingPunct="1">
+              <a:lnSpc>
+                <a:spcPct val="100000"/>
+              </a:lnSpc>
+              <a:spcBef>
+                <a:spcPts val="0"/>
+              </a:spcBef>
+              <a:spcAft>
+                <a:spcPts val="0"/>
+              </a:spcAft>
+              <a:buClrTx/>
+              <a:buSzTx/>
+              <a:buFontTx/>
+              <a:buChar char="-"/>
+              <a:tabLst/>
+              <a:defRPr/>
+            </a:pPr>
+            <a:r>
+              <a:rPr lang="de-DE" dirty="0"/>
+              <a:t>web zugriff auf HW </a:t>
+            </a:r>
+            <a:r>
+              <a:rPr lang="de-DE" dirty="0" err="1"/>
+              <a:t>devices</a:t>
+            </a:r>
+            <a:r>
+              <a:rPr lang="de-DE" dirty="0"/>
+              <a:t> ein großes Sicherheitsrisiko</a:t>
+            </a:r>
+          </a:p>
+          <a:p>
+            <a:pPr marL="171450" indent="-171450">
+              <a:buFontTx/>
+              <a:buChar char="-"/>
+            </a:pPr>
+            <a:r>
+              <a:rPr lang="de-DE" dirty="0"/>
+              <a:t>deswegen APIs</a:t>
+            </a:r>
+          </a:p>
+          <a:p>
+            <a:pPr marL="171450" indent="-171450">
+              <a:buFontTx/>
+              <a:buChar char="-"/>
+            </a:pPr>
+            <a:r>
+              <a:rPr lang="de-DE" dirty="0"/>
+              <a:t>eingeschränkter zugriff auf Geräte</a:t>
+            </a:r>
+          </a:p>
+          <a:p>
+            <a:pPr marL="171450" indent="-171450">
+              <a:buFontTx/>
+              <a:buChar char="-"/>
+            </a:pPr>
+            <a:r>
+              <a:rPr lang="de-DE" dirty="0"/>
+              <a:t>weshalb man jedes Gerät einzeln zulassen muss</a:t>
+            </a:r>
+          </a:p>
+          <a:p>
+            <a:pPr marL="171450" indent="-171450">
+              <a:buFontTx/>
+              <a:buChar char="-"/>
+            </a:pPr>
+            <a:r>
+              <a:rPr lang="de-DE" dirty="0"/>
+              <a:t>nur von </a:t>
+            </a:r>
+            <a:r>
+              <a:rPr lang="de-DE" dirty="0" err="1"/>
+              <a:t>chromium</a:t>
+            </a:r>
+            <a:r>
+              <a:rPr lang="de-DE" dirty="0"/>
+              <a:t> unterstützt, </a:t>
+            </a:r>
+            <a:r>
+              <a:rPr lang="de-DE" dirty="0" err="1"/>
+              <a:t>firefox</a:t>
+            </a:r>
+            <a:r>
+              <a:rPr lang="de-DE" dirty="0"/>
+              <a:t>/</a:t>
+            </a:r>
+            <a:r>
+              <a:rPr lang="de-DE" dirty="0" err="1"/>
+              <a:t>safari</a:t>
+            </a:r>
+            <a:r>
+              <a:rPr lang="de-DE" dirty="0"/>
+              <a:t> fallen raus</a:t>
+            </a:r>
+          </a:p>
+          <a:p>
+            <a:pPr marL="171450" indent="-171450">
+              <a:buFontTx/>
+              <a:buChar char="-"/>
+            </a:pPr>
+            <a:r>
+              <a:rPr lang="de-DE" dirty="0"/>
+              <a:t>wir brauchten für unsere </a:t>
+            </a:r>
+            <a:r>
+              <a:rPr lang="de-DE" dirty="0" err="1"/>
+              <a:t>unterstüzten</a:t>
+            </a:r>
+            <a:r>
+              <a:rPr lang="de-DE" dirty="0"/>
+              <a:t> </a:t>
+            </a:r>
+            <a:r>
+              <a:rPr lang="de-DE" dirty="0" err="1"/>
+              <a:t>boards</a:t>
+            </a:r>
+            <a:r>
+              <a:rPr lang="de-DE" dirty="0"/>
+              <a:t> nur seriell, kann aber die anderen auch noch nutzen</a:t>
+            </a:r>
           </a:p>
           <a:p>
             <a:pPr marL="171450" indent="-171450">
@@ -2975,36 +2099,58 @@
             </a:pPr>
             <a:r>
               <a:rPr lang="de-DE" dirty="0"/>
-              <a:t>fertiges </a:t>
-            </a:r>
-            <a:r>
-              <a:rPr lang="de-DE" dirty="0" err="1"/>
-              <a:t>dev</a:t>
-            </a:r>
-            <a:r>
-              <a:rPr lang="de-DE" dirty="0"/>
-              <a:t> </a:t>
-            </a:r>
-            <a:r>
-              <a:rPr lang="de-DE" dirty="0" err="1"/>
-              <a:t>env</a:t>
-            </a:r>
-            <a:r>
-              <a:rPr lang="de-DE" dirty="0"/>
-              <a:t> mit </a:t>
-            </a:r>
-            <a:r>
-              <a:rPr lang="de-DE" dirty="0" err="1"/>
-              <a:t>editor</a:t>
-            </a:r>
-            <a:endParaRPr lang="de-DE" dirty="0"/>
+              <a:t>auch wenn man zugriff auf ein gerät hat reicht das nicht</a:t>
+            </a:r>
           </a:p>
           <a:p>
             <a:pPr marL="171450" indent="-171450">
               <a:buFontTx/>
               <a:buChar char="-"/>
             </a:pPr>
-            <a:endParaRPr lang="de-DE" dirty="0"/>
+            <a:r>
+              <a:rPr lang="de-DE" dirty="0"/>
+              <a:t>benötigt </a:t>
+            </a:r>
+            <a:r>
+              <a:rPr lang="de-DE" dirty="0" err="1"/>
+              <a:t>immernoch</a:t>
+            </a:r>
+            <a:r>
+              <a:rPr lang="de-DE" dirty="0"/>
+              <a:t> einen </a:t>
+            </a:r>
+            <a:r>
+              <a:rPr lang="de-DE" dirty="0" err="1"/>
+              <a:t>javascript</a:t>
+            </a:r>
+            <a:r>
+              <a:rPr lang="de-DE" dirty="0"/>
+              <a:t> </a:t>
+            </a:r>
+            <a:r>
+              <a:rPr lang="de-DE" dirty="0" err="1"/>
+              <a:t>flasher</a:t>
+            </a:r>
+            <a:r>
+              <a:rPr lang="de-DE" dirty="0"/>
+              <a:t>, der </a:t>
+            </a:r>
+            <a:r>
+              <a:rPr lang="de-DE" dirty="0" err="1"/>
+              <a:t>compilierte</a:t>
+            </a:r>
+            <a:r>
+              <a:rPr lang="de-DE" dirty="0"/>
+              <a:t> </a:t>
+            </a:r>
+            <a:r>
+              <a:rPr lang="de-DE" dirty="0" err="1"/>
+              <a:t>binaries</a:t>
+            </a:r>
+            <a:r>
+              <a:rPr lang="de-DE" dirty="0"/>
+              <a:t> auf den µC überträgt</a:t>
+            </a:r>
           </a:p>
           <a:p>
             <a:pPr marL="171450" indent="-171450">
@@ -3012,19 +2158,46 @@
               <a:buChar char="-"/>
             </a:pPr>
             <a:r>
-              <a:rPr lang="de-DE" dirty="0" err="1"/>
-              <a:t>shortcuts</a:t>
-            </a:r>
-            <a:r>
-              <a:rPr lang="de-DE" dirty="0"/>
-              <a:t> für Anfänger</a:t>
-            </a:r>
+              <a:rPr lang="de-DE" dirty="0"/>
+              <a:t>hängt vom </a:t>
+            </a:r>
+            <a:r>
+              <a:rPr lang="de-DE" dirty="0" err="1"/>
+              <a:t>device</a:t>
+            </a:r>
+            <a:r>
+              <a:rPr lang="de-DE" dirty="0"/>
+              <a:t> ab -&gt; mehrere </a:t>
+            </a:r>
+            <a:r>
+              <a:rPr lang="de-DE" dirty="0" err="1"/>
+              <a:t>flasher</a:t>
+            </a:r>
+            <a:endParaRPr lang="de-DE" dirty="0"/>
           </a:p>
           <a:p>
             <a:pPr marL="171450" indent="-171450">
               <a:buFontTx/>
               <a:buChar char="-"/>
             </a:pPr>
+            <a:r>
+              <a:rPr lang="de-DE" dirty="0"/>
+              <a:t>eigene </a:t>
+            </a:r>
+            <a:r>
+              <a:rPr lang="de-DE" dirty="0" err="1"/>
+              <a:t>flasher</a:t>
+            </a:r>
+            <a:r>
+              <a:rPr lang="de-DE" dirty="0"/>
+              <a:t> zu schreiben ist nicht praktikabel</a:t>
+            </a:r>
+          </a:p>
+          <a:p>
+            <a:pPr marL="0" indent="0">
+              <a:buFontTx/>
+              <a:buNone/>
+            </a:pPr>
             <a:endParaRPr lang="de-DE" dirty="0"/>
           </a:p>
           <a:p>
@@ -3034,40 +2207,40 @@
             </a:pPr>
             <a:r>
               <a:rPr lang="de-DE" dirty="0"/>
-              <a:t>möglichst nah an RIOT bleiben</a:t>
-            </a:r>
-          </a:p>
-          <a:p>
-            <a:pPr marL="171450" indent="-171450">
-              <a:buFontTx/>
-              <a:buChar char="-"/>
-            </a:pPr>
-            <a:endParaRPr lang="de-DE" dirty="0"/>
-          </a:p>
-          <a:p>
-            <a:pPr marL="171450" indent="-171450">
-              <a:buFontTx/>
-              <a:buChar char="-"/>
-            </a:pPr>
-            <a:r>
-              <a:rPr lang="de-DE" dirty="0"/>
-              <a:t>einfache lokale Benutzung </a:t>
-            </a:r>
-          </a:p>
-          <a:p>
-            <a:pPr marL="171450" indent="-171450">
-              <a:buFontTx/>
-              <a:buChar char="-"/>
-            </a:pPr>
-            <a:r>
-              <a:rPr lang="de-DE" dirty="0"/>
-              <a:t>oder auch zentrales </a:t>
-            </a:r>
-            <a:r>
-              <a:rPr lang="de-DE" dirty="0" err="1"/>
-              <a:t>hosting</a:t>
-            </a:r>
-            <a:endParaRPr lang="de-DE" dirty="0"/>
+              <a:t>können </a:t>
+            </a:r>
+            <a:r>
+              <a:rPr lang="de-DE" dirty="0" err="1"/>
+              <a:t>immernoch</a:t>
+            </a:r>
+            <a:r>
+              <a:rPr lang="de-DE" dirty="0"/>
+              <a:t> keinen eigenen Code schreiben, </a:t>
+            </a:r>
+            <a:r>
+              <a:rPr lang="de-DE" dirty="0" err="1"/>
+              <a:t>könn</a:t>
+            </a:r>
+            <a:r>
+              <a:rPr lang="de-DE" dirty="0"/>
+              <a:t> wir nicht </a:t>
+            </a:r>
+            <a:r>
+              <a:rPr lang="de-DE" dirty="0" err="1"/>
+              <a:t>iwie</a:t>
+            </a:r>
+            <a:r>
+              <a:rPr lang="de-DE" dirty="0"/>
+              <a:t> einen Editor hosten in dem wir auch </a:t>
+            </a:r>
+            <a:r>
+              <a:rPr lang="de-DE" dirty="0" err="1"/>
+              <a:t>flashen</a:t>
+            </a:r>
+            <a:r>
+              <a:rPr lang="de-DE" dirty="0"/>
+              <a:t> können</a:t>
+            </a:r>
           </a:p>
         </p:txBody>
       </p:sp>
@@ -3107,7 +2280,7 @@
           <a:p>
             <a:fld id="{97EEB764-55E2-4077-8C7A-EB9EFE7145E2}" type="slidenum">
               <a:rPr lang="en-US" smtClean="0"/>
-              <a:t>5</a:t>
+              <a:t>4</a:t>
             </a:fld>
             <a:endParaRPr lang="en-US"/>
           </a:p>
@@ -3116,7 +2289,7 @@
     </p:spTree>
     <p:extLst>
       <p:ext uri="{BB962C8B-B14F-4D97-AF65-F5344CB8AC3E}">
-        <p14:creationId xmlns:p14="http://schemas.microsoft.com/office/powerpoint/2010/main" val="1919197482"/>
+        <p14:creationId xmlns:p14="http://schemas.microsoft.com/office/powerpoint/2010/main" val="2489729305"/>
       </p:ext>
     </p:extLst>
   </p:cSld>
@@ -3131,7 +2304,13 @@
   <p:cSld>
     <p:spTree>
       <p:nvGrpSpPr>
-        <p:cNvPr id="1" name=""/>
+        <p:cNvPr id="1" name="">
+          <a:extLst>
+            <a:ext uri="{FF2B5EF4-FFF2-40B4-BE49-F238E27FC236}">
+              <a16:creationId xmlns:a16="http://schemas.microsoft.com/office/drawing/2014/main" id="{CCA59D0E-05E5-F02E-779D-C74E115956AF}"/>
+            </a:ext>
+          </a:extLst>
+        </p:cNvPr>
         <p:cNvGrpSpPr/>
         <p:nvPr/>
       </p:nvGrpSpPr>
@@ -3145,7 +2324,13 @@
       </p:grpSpPr>
       <p:sp>
         <p:nvSpPr>
-          <p:cNvPr id="2" name="Slide Image Placeholder 1"/>
+          <p:cNvPr id="2" name="Slide Image Placeholder 1">
+            <a:extLst>
+              <a:ext uri="{FF2B5EF4-FFF2-40B4-BE49-F238E27FC236}">
+                <a16:creationId xmlns:a16="http://schemas.microsoft.com/office/drawing/2014/main" id="{25545A38-2962-C6F8-3CB4-CD6EAAAF739C}"/>
+              </a:ext>
+            </a:extLst>
+          </p:cNvPr>
           <p:cNvSpPr>
             <a:spLocks noGrp="1" noRot="1" noChangeAspect="1"/>
           </p:cNvSpPr>
@@ -3157,7 +2342,13 @@
       </p:sp>
       <p:sp>
         <p:nvSpPr>
-          <p:cNvPr id="3" name="Notes Placeholder 2"/>
+          <p:cNvPr id="3" name="Notes Placeholder 2">
+            <a:extLst>
+              <a:ext uri="{FF2B5EF4-FFF2-40B4-BE49-F238E27FC236}">
+                <a16:creationId xmlns:a16="http://schemas.microsoft.com/office/drawing/2014/main" id="{5074630E-94A1-BC8D-F805-523264EF8C88}"/>
+              </a:ext>
+            </a:extLst>
+          </p:cNvPr>
           <p:cNvSpPr>
             <a:spLocks noGrp="1"/>
           </p:cNvSpPr>
@@ -3175,28 +2366,8 @@
               <a:buChar char="-"/>
             </a:pPr>
             <a:r>
-              <a:rPr lang="de-DE" dirty="0" err="1"/>
-              <a:t>WebSite</a:t>
-            </a:r>
-            <a:r>
-              <a:rPr lang="de-DE" dirty="0"/>
-              <a:t> lässt keine direkte </a:t>
-            </a:r>
-            <a:r>
-              <a:rPr lang="de-DE" dirty="0" err="1"/>
-              <a:t>kommunikation</a:t>
-            </a:r>
-            <a:r>
-              <a:rPr lang="de-DE" dirty="0"/>
-              <a:t> mit </a:t>
-            </a:r>
-            <a:r>
-              <a:rPr lang="de-DE" dirty="0" err="1"/>
-              <a:t>geräten</a:t>
-            </a:r>
-            <a:r>
-              <a:rPr lang="de-DE" dirty="0"/>
-              <a:t> zu</a:t>
+              <a:rPr lang="de-DE" dirty="0"/>
+              <a:t>viele web IDEs angeschaut</a:t>
             </a:r>
           </a:p>
           <a:p>
@@ -3206,8 +2377,21 @@
             </a:pPr>
             <a:r>
               <a:rPr lang="de-DE" dirty="0"/>
-              <a:t>deswegen APIs</a:t>
-            </a:r>
+              <a:t>basiert auf </a:t>
+            </a:r>
+            <a:r>
+              <a:rPr lang="de-DE" dirty="0" err="1"/>
+              <a:t>Vscode</a:t>
+            </a:r>
+            <a:r>
+              <a:rPr lang="de-DE" dirty="0"/>
+              <a:t>, einige </a:t>
+            </a:r>
+            <a:r>
+              <a:rPr lang="de-DE" dirty="0" err="1"/>
+              <a:t>erweiterungen</a:t>
+            </a:r>
+            <a:endParaRPr lang="de-DE" dirty="0"/>
           </a:p>
           <a:p>
             <a:pPr marL="171450" indent="-171450">
@@ -3215,16 +2399,12 @@
               <a:buChar char="-"/>
             </a:pPr>
             <a:r>
-              <a:rPr lang="de-DE" dirty="0"/>
-              <a:t>so kann man zB auf USB Serielle oder HID </a:t>
-            </a:r>
-            <a:r>
-              <a:rPr lang="de-DE" dirty="0" err="1"/>
-              <a:t>geräte</a:t>
-            </a:r>
-            <a:r>
-              <a:rPr lang="de-DE" dirty="0"/>
-              <a:t> zugreifen</a:t>
+              <a:rPr lang="de-DE" dirty="0" err="1"/>
+              <a:t>VSCode</a:t>
+            </a:r>
+            <a:r>
+              <a:rPr lang="de-DE" dirty="0"/>
+              <a:t> für viele vertraut</a:t>
             </a:r>
           </a:p>
           <a:p>
@@ -3234,8 +2414,13 @@
             </a:pPr>
             <a:r>
               <a:rPr lang="de-DE" dirty="0"/>
-              <a:t>diese APIs werden allerdings nicht von allen Browsern gleich unterstützt</a:t>
-            </a:r>
+              <a:t>unterstütz </a:t>
+            </a:r>
+            <a:r>
+              <a:rPr lang="de-DE" dirty="0" err="1"/>
+              <a:t>Extensions</a:t>
+            </a:r>
+            <a:endParaRPr lang="de-DE" dirty="0"/>
           </a:p>
           <a:p>
             <a:pPr marL="171450" indent="-171450">
@@ -3243,72 +2428,20 @@
               <a:buChar char="-"/>
             </a:pPr>
             <a:r>
-              <a:rPr lang="de-DE" dirty="0"/>
-              <a:t>so wird </a:t>
-            </a:r>
-            <a:r>
-              <a:rPr lang="de-DE" dirty="0" err="1"/>
-              <a:t>WebSerial</a:t>
-            </a:r>
-            <a:r>
-              <a:rPr lang="de-DE" dirty="0"/>
-              <a:t> (was wir zum </a:t>
-            </a:r>
-            <a:r>
-              <a:rPr lang="de-DE" dirty="0" err="1"/>
-              <a:t>flahsen</a:t>
-            </a:r>
-            <a:r>
-              <a:rPr lang="de-DE" dirty="0"/>
-              <a:t> brauchen) nur auf </a:t>
-            </a:r>
-            <a:r>
-              <a:rPr lang="de-DE" dirty="0" err="1"/>
-              <a:t>chromium</a:t>
-            </a:r>
-            <a:r>
-              <a:rPr lang="de-DE" dirty="0"/>
-              <a:t> basierten </a:t>
-            </a:r>
-            <a:r>
-              <a:rPr lang="de-DE" dirty="0" err="1"/>
-              <a:t>browsern</a:t>
-            </a:r>
-            <a:r>
-              <a:rPr lang="de-DE" dirty="0"/>
-              <a:t> unterstützt</a:t>
-            </a:r>
-          </a:p>
-          <a:p>
-            <a:pPr marL="171450" indent="-171450">
-              <a:buFontTx/>
-              <a:buChar char="-"/>
-            </a:pPr>
-            <a:r>
-              <a:rPr lang="de-DE" dirty="0" err="1"/>
-              <a:t>darüberhinaus</a:t>
-            </a:r>
-            <a:r>
-              <a:rPr lang="de-DE" dirty="0"/>
-              <a:t> ist web zugriff auf HW </a:t>
-            </a:r>
-            <a:r>
-              <a:rPr lang="de-DE" dirty="0" err="1"/>
-              <a:t>devices</a:t>
-            </a:r>
-            <a:r>
-              <a:rPr lang="de-DE" dirty="0"/>
-              <a:t> ein großes Sicherheitsrisiko</a:t>
-            </a:r>
-          </a:p>
-          <a:p>
-            <a:pPr marL="171450" indent="-171450">
-              <a:buFontTx/>
-              <a:buChar char="-"/>
-            </a:pPr>
-            <a:r>
-              <a:rPr lang="de-DE" dirty="0"/>
-              <a:t>weshalb man jedes Gerät einzeln zulassen muss</a:t>
+              <a:rPr lang="de-DE" dirty="0" err="1"/>
+              <a:t>coder</a:t>
+            </a:r>
+            <a:r>
+              <a:rPr lang="de-DE" dirty="0"/>
+              <a:t>/code-server kann einfach </a:t>
+            </a:r>
+            <a:r>
+              <a:rPr lang="de-DE" dirty="0" err="1"/>
+              <a:t>gehosted</a:t>
+            </a:r>
+            <a:r>
+              <a:rPr lang="de-DE" dirty="0"/>
+              <a:t> werden um eine Web IDE bereit zustellen</a:t>
             </a:r>
           </a:p>
           <a:p>
@@ -3325,8 +2458,29 @@
             </a:pPr>
             <a:r>
               <a:rPr lang="de-DE" dirty="0"/>
-              <a:t>nun wenn man mit einem µC seriell kommunizieren kann,</a:t>
-            </a:r>
+              <a:t>IDEE: </a:t>
+            </a:r>
+            <a:r>
+              <a:rPr lang="de-DE" dirty="0" err="1"/>
+              <a:t>vscode</a:t>
+            </a:r>
+            <a:r>
+              <a:rPr lang="de-DE" dirty="0"/>
+              <a:t> </a:t>
+            </a:r>
+            <a:r>
+              <a:rPr lang="de-DE" dirty="0" err="1"/>
+              <a:t>extension</a:t>
+            </a:r>
+            <a:r>
+              <a:rPr lang="de-DE" dirty="0"/>
+              <a:t> zum </a:t>
+            </a:r>
+            <a:r>
+              <a:rPr lang="de-DE" dirty="0" err="1"/>
+              <a:t>flashen</a:t>
+            </a:r>
+            <a:endParaRPr lang="de-DE" dirty="0"/>
           </a:p>
           <a:p>
             <a:pPr marL="171450" indent="-171450">
@@ -3335,55 +2489,15 @@
             </a:pPr>
             <a:r>
               <a:rPr lang="de-DE" dirty="0"/>
-              <a:t>benötigt man </a:t>
-            </a:r>
-            <a:r>
-              <a:rPr lang="de-DE" dirty="0" err="1"/>
-              <a:t>immernoch</a:t>
-            </a:r>
-            <a:r>
-              <a:rPr lang="de-DE" dirty="0"/>
-              <a:t> einen </a:t>
-            </a:r>
-            <a:r>
-              <a:rPr lang="de-DE" dirty="0" err="1"/>
-              <a:t>flasher</a:t>
-            </a:r>
-            <a:r>
-              <a:rPr lang="de-DE" dirty="0"/>
-              <a:t> der </a:t>
-            </a:r>
-            <a:r>
-              <a:rPr lang="de-DE" dirty="0" err="1"/>
-              <a:t>impl</a:t>
-            </a:r>
-            <a:r>
-              <a:rPr lang="de-DE" dirty="0"/>
-              <a:t> in </a:t>
-            </a:r>
-            <a:r>
-              <a:rPr lang="de-DE" dirty="0" err="1"/>
-              <a:t>js</a:t>
-            </a:r>
-            <a:r>
-              <a:rPr lang="de-DE" dirty="0"/>
-              <a:t>, die </a:t>
-            </a:r>
-            <a:r>
-              <a:rPr lang="de-DE" dirty="0" err="1"/>
-              <a:t>compileten</a:t>
-            </a:r>
-            <a:r>
-              <a:rPr lang="de-DE" dirty="0"/>
-              <a:t> </a:t>
-            </a:r>
-            <a:r>
-              <a:rPr lang="de-DE" dirty="0" err="1"/>
-              <a:t>binaries</a:t>
-            </a:r>
-            <a:r>
-              <a:rPr lang="de-DE" dirty="0"/>
-              <a:t> auf den µC überträgt</a:t>
+              <a:t>wird mit </a:t>
+            </a:r>
+            <a:r>
+              <a:rPr lang="de-DE" dirty="0" err="1"/>
+              <a:t>website</a:t>
+            </a:r>
+            <a:r>
+              <a:rPr lang="de-DE" dirty="0"/>
+              <a:t> mitgeliefert</a:t>
             </a:r>
           </a:p>
           <a:p>
@@ -3392,39 +2506,20 @@
               <a:buChar char="-"/>
             </a:pPr>
             <a:r>
-              <a:rPr lang="de-DE" dirty="0"/>
-              <a:t>hängt vom </a:t>
-            </a:r>
-            <a:r>
-              <a:rPr lang="de-DE" dirty="0" err="1"/>
-              <a:t>device</a:t>
-            </a:r>
-            <a:r>
-              <a:rPr lang="de-DE" dirty="0"/>
-              <a:t> ab -&gt; mehrere </a:t>
-            </a:r>
-            <a:r>
-              <a:rPr lang="de-DE" dirty="0" err="1"/>
-              <a:t>flasher</a:t>
-            </a:r>
-            <a:endParaRPr lang="de-DE" dirty="0"/>
-          </a:p>
-          <a:p>
-            <a:pPr marL="171450" indent="-171450">
-              <a:buFontTx/>
-              <a:buChar char="-"/>
-            </a:pPr>
-            <a:r>
-              <a:rPr lang="de-DE" dirty="0"/>
-              <a:t>eigene </a:t>
-            </a:r>
-            <a:r>
-              <a:rPr lang="de-DE" dirty="0" err="1"/>
-              <a:t>flasher</a:t>
-            </a:r>
-            <a:r>
-              <a:rPr lang="de-DE" dirty="0"/>
-              <a:t> zu schreiben ist nicht praktikabel</a:t>
+              <a:rPr lang="de-DE" dirty="0" err="1"/>
+              <a:t>geräteverwaltung</a:t>
+            </a:r>
+            <a:r>
+              <a:rPr lang="de-DE" dirty="0"/>
+              <a:t> und </a:t>
+            </a:r>
+            <a:r>
+              <a:rPr lang="de-DE" dirty="0" err="1"/>
+              <a:t>flashen</a:t>
+            </a:r>
+            <a:r>
+              <a:rPr lang="de-DE" dirty="0"/>
+              <a:t> integriert</a:t>
             </a:r>
           </a:p>
           <a:p>
@@ -3440,127 +2535,45 @@
               <a:buChar char="-"/>
             </a:pPr>
             <a:r>
-              <a:rPr lang="de-DE" dirty="0" err="1"/>
-              <a:t>flashing</a:t>
+              <a:rPr lang="de-DE" dirty="0"/>
+              <a:t>in Kontrast zu anderen </a:t>
+            </a:r>
+            <a:r>
+              <a:rPr lang="de-DE" dirty="0" err="1"/>
+              <a:t>Flasher</a:t>
+            </a:r>
+            <a:r>
+              <a:rPr lang="de-DE" dirty="0"/>
+              <a:t> Websites -&gt; seinen code direkt </a:t>
+            </a:r>
+            <a:r>
+              <a:rPr lang="de-DE" dirty="0" err="1"/>
+              <a:t>builden</a:t>
+            </a:r>
+            <a:r>
+              <a:rPr lang="de-DE" dirty="0"/>
+              <a:t> und </a:t>
+            </a:r>
+            <a:r>
+              <a:rPr lang="de-DE" dirty="0" err="1"/>
+              <a:t>flashen</a:t>
             </a:r>
             <a:r>
               <a:rPr lang="de-DE" dirty="0"/>
               <a:t> </a:t>
             </a:r>
-            <a:r>
-              <a:rPr lang="de-DE" dirty="0" err="1"/>
-              <a:t>websiten</a:t>
-            </a:r>
-            <a:r>
-              <a:rPr lang="de-DE" dirty="0"/>
-              <a:t> existieren, ABER:</a:t>
-            </a:r>
-          </a:p>
-          <a:p>
-            <a:pPr marL="171450" indent="-171450">
-              <a:buFontTx/>
-              <a:buChar char="-"/>
-            </a:pPr>
-            <a:r>
-              <a:rPr lang="de-DE" dirty="0"/>
-              <a:t>für spezifische </a:t>
-            </a:r>
-            <a:r>
-              <a:rPr lang="de-DE" dirty="0" err="1"/>
-              <a:t>devices</a:t>
-            </a:r>
-            <a:endParaRPr lang="de-DE" dirty="0"/>
-          </a:p>
-          <a:p>
-            <a:pPr marL="171450" indent="-171450">
-              <a:buFontTx/>
-              <a:buChar char="-"/>
-            </a:pPr>
-            <a:r>
-              <a:rPr lang="de-DE" dirty="0"/>
-              <a:t>muss seine eigenen </a:t>
-            </a:r>
-            <a:r>
-              <a:rPr lang="de-DE" dirty="0" err="1"/>
-              <a:t>binaries</a:t>
-            </a:r>
-            <a:r>
-              <a:rPr lang="de-DE" dirty="0"/>
-              <a:t> hochladen</a:t>
-            </a:r>
-          </a:p>
-          <a:p>
-            <a:pPr marL="171450" indent="-171450">
-              <a:buFontTx/>
-              <a:buChar char="-"/>
-            </a:pPr>
-            <a:r>
-              <a:rPr lang="de-DE" dirty="0"/>
-              <a:t>nicht für alle </a:t>
-            </a:r>
-            <a:r>
-              <a:rPr lang="de-DE" dirty="0" err="1"/>
-              <a:t>geräte</a:t>
-            </a:r>
-            <a:r>
-              <a:rPr lang="de-DE" dirty="0"/>
-              <a:t> und wenn verteilt</a:t>
-            </a:r>
-          </a:p>
-          <a:p>
-            <a:pPr marL="171450" indent="-171450">
-              <a:buFontTx/>
-              <a:buChar char="-"/>
-            </a:pPr>
-            <a:endParaRPr lang="de-DE" dirty="0"/>
-          </a:p>
-          <a:p>
-            <a:pPr marL="171450" indent="-171450">
-              <a:buFontTx/>
-              <a:buChar char="-"/>
-            </a:pPr>
-            <a:r>
-              <a:rPr lang="de-DE" dirty="0"/>
-              <a:t>können </a:t>
-            </a:r>
-            <a:r>
-              <a:rPr lang="de-DE" dirty="0" err="1"/>
-              <a:t>immernoch</a:t>
-            </a:r>
-            <a:r>
-              <a:rPr lang="de-DE" dirty="0"/>
-              <a:t> keinen eigenen Code schreiben, </a:t>
-            </a:r>
-            <a:r>
-              <a:rPr lang="de-DE" dirty="0" err="1"/>
-              <a:t>könn</a:t>
-            </a:r>
-            <a:r>
-              <a:rPr lang="de-DE" dirty="0"/>
-              <a:t> wir nicht </a:t>
-            </a:r>
-            <a:r>
-              <a:rPr lang="de-DE" dirty="0" err="1"/>
-              <a:t>iwie</a:t>
-            </a:r>
-            <a:r>
-              <a:rPr lang="de-DE" dirty="0"/>
-              <a:t> einen Editor hosten in dem wir auch </a:t>
-            </a:r>
-            <a:r>
-              <a:rPr lang="de-DE" dirty="0" err="1"/>
-              <a:t>flashen</a:t>
-            </a:r>
-            <a:r>
-              <a:rPr lang="de-DE" dirty="0"/>
-              <a:t> können</a:t>
-            </a:r>
-          </a:p>
-        </p:txBody>
-      </p:sp>
-      <p:sp>
-        <p:nvSpPr>
-          <p:cNvPr id="4" name="Footer Placeholder 3"/>
+          </a:p>
+        </p:txBody>
+      </p:sp>
+      <p:sp>
+        <p:nvSpPr>
+          <p:cNvPr id="4" name="Footer Placeholder 3">
+            <a:extLst>
+              <a:ext uri="{FF2B5EF4-FFF2-40B4-BE49-F238E27FC236}">
+                <a16:creationId xmlns:a16="http://schemas.microsoft.com/office/drawing/2014/main" id="{2B8D8344-AA30-ABA3-A9B9-B40D427EE69F}"/>
+              </a:ext>
+            </a:extLst>
+          </p:cNvPr>
           <p:cNvSpPr>
             <a:spLocks noGrp="1"/>
           </p:cNvSpPr>
@@ -3579,7 +2592,13 @@
       </p:sp>
       <p:sp>
         <p:nvSpPr>
-          <p:cNvPr id="5" name="Slide Number Placeholder 4"/>
+          <p:cNvPr id="5" name="Slide Number Placeholder 4">
+            <a:extLst>
+              <a:ext uri="{FF2B5EF4-FFF2-40B4-BE49-F238E27FC236}">
+                <a16:creationId xmlns:a16="http://schemas.microsoft.com/office/drawing/2014/main" id="{2C380744-32DE-C7ED-5F85-E1FF5C54BB51}"/>
+              </a:ext>
+            </a:extLst>
+          </p:cNvPr>
           <p:cNvSpPr>
             <a:spLocks noGrp="1"/>
           </p:cNvSpPr>
@@ -3594,7 +2613,7 @@
           <a:p>
             <a:fld id="{97EEB764-55E2-4077-8C7A-EB9EFE7145E2}" type="slidenum">
               <a:rPr lang="en-US" smtClean="0"/>
-              <a:t>7</a:t>
+              <a:t>5</a:t>
             </a:fld>
             <a:endParaRPr lang="en-US"/>
           </a:p>
@@ -3603,7 +2622,7 @@
     </p:spTree>
     <p:extLst>
       <p:ext uri="{BB962C8B-B14F-4D97-AF65-F5344CB8AC3E}">
-        <p14:creationId xmlns:p14="http://schemas.microsoft.com/office/powerpoint/2010/main" val="2489729305"/>
+        <p14:creationId xmlns:p14="http://schemas.microsoft.com/office/powerpoint/2010/main" val="3783422821"/>
       </p:ext>
     </p:extLst>
   </p:cSld>
@@ -3657,7 +2676,63 @@
           <a:bodyPr/>
           <a:lstStyle/>
           <a:p>
+            <a:pPr marL="171450" indent="-171450">
+              <a:buFontTx/>
+              <a:buChar char="-"/>
+            </a:pPr>
+            <a:r>
+              <a:rPr lang="de-DE" dirty="0" err="1"/>
+              <a:t>editor</a:t>
+            </a:r>
             <a:endParaRPr lang="de-DE" dirty="0"/>
+          </a:p>
+          <a:p>
+            <a:pPr marL="171450" indent="-171450">
+              <a:buFontTx/>
+              <a:buChar char="-"/>
+            </a:pPr>
+            <a:r>
+              <a:rPr lang="de-DE" dirty="0" err="1"/>
+              <a:t>dev</a:t>
+            </a:r>
+            <a:r>
+              <a:rPr lang="de-DE" dirty="0"/>
+              <a:t> </a:t>
+            </a:r>
+            <a:r>
+              <a:rPr lang="de-DE" dirty="0" err="1"/>
+              <a:t>env</a:t>
+            </a:r>
+            <a:endParaRPr lang="de-DE" dirty="0"/>
+          </a:p>
+          <a:p>
+            <a:pPr marL="171450" indent="-171450">
+              <a:buFontTx/>
+              <a:buChar char="-"/>
+            </a:pPr>
+            <a:r>
+              <a:rPr lang="de-DE" dirty="0" err="1"/>
+              <a:t>device</a:t>
+            </a:r>
+            <a:r>
+              <a:rPr lang="de-DE" dirty="0"/>
+              <a:t> </a:t>
+            </a:r>
+            <a:r>
+              <a:rPr lang="de-DE" dirty="0" err="1"/>
+              <a:t>list</a:t>
+            </a:r>
+            <a:endParaRPr lang="de-DE" dirty="0"/>
+          </a:p>
+          <a:p>
+            <a:pPr marL="171450" indent="-171450">
+              <a:buFontTx/>
+              <a:buChar char="-"/>
+            </a:pPr>
+            <a:r>
+              <a:rPr lang="de-DE" dirty="0"/>
+              <a:t>RIOT native</a:t>
+            </a:r>
           </a:p>
         </p:txBody>
       </p:sp>
@@ -3697,7 +2772,7 @@
           <a:p>
             <a:fld id="{97EEB764-55E2-4077-8C7A-EB9EFE7145E2}" type="slidenum">
               <a:rPr lang="en-US" smtClean="0"/>
-              <a:t>8</a:t>
+              <a:t>7</a:t>
             </a:fld>
             <a:endParaRPr lang="en-US"/>
           </a:p>
@@ -3706,7 +2781,7 @@
     </p:spTree>
     <p:extLst>
       <p:ext uri="{BB962C8B-B14F-4D97-AF65-F5344CB8AC3E}">
-        <p14:creationId xmlns:p14="http://schemas.microsoft.com/office/powerpoint/2010/main" val="1022627258"/>
+        <p14:creationId xmlns:p14="http://schemas.microsoft.com/office/powerpoint/2010/main" val="2574818881"/>
       </p:ext>
     </p:extLst>
   </p:cSld>
@@ -3721,13 +2796,7 @@
   <p:cSld>
     <p:spTree>
       <p:nvGrpSpPr>
-        <p:cNvPr id="1" name="">
-          <a:extLst>
-            <a:ext uri="{FF2B5EF4-FFF2-40B4-BE49-F238E27FC236}">
-              <a16:creationId xmlns:a16="http://schemas.microsoft.com/office/drawing/2014/main" id="{CCA59D0E-05E5-F02E-779D-C74E115956AF}"/>
-            </a:ext>
-          </a:extLst>
-        </p:cNvPr>
+        <p:cNvPr id="1" name=""/>
         <p:cNvGrpSpPr/>
         <p:nvPr/>
       </p:nvGrpSpPr>
@@ -3741,13 +2810,7 @@
       </p:grpSpPr>
       <p:sp>
         <p:nvSpPr>
-          <p:cNvPr id="2" name="Slide Image Placeholder 1">
-            <a:extLst>
-              <a:ext uri="{FF2B5EF4-FFF2-40B4-BE49-F238E27FC236}">
-                <a16:creationId xmlns:a16="http://schemas.microsoft.com/office/drawing/2014/main" id="{25545A38-2962-C6F8-3CB4-CD6EAAAF739C}"/>
-              </a:ext>
-            </a:extLst>
-          </p:cNvPr>
+          <p:cNvPr id="2" name="Slide Image Placeholder 1"/>
           <p:cNvSpPr>
             <a:spLocks noGrp="1" noRot="1" noChangeAspect="1"/>
           </p:cNvSpPr>
@@ -3759,13 +2822,7 @@
       </p:sp>
       <p:sp>
         <p:nvSpPr>
-          <p:cNvPr id="3" name="Notes Placeholder 2">
-            <a:extLst>
-              <a:ext uri="{FF2B5EF4-FFF2-40B4-BE49-F238E27FC236}">
-                <a16:creationId xmlns:a16="http://schemas.microsoft.com/office/drawing/2014/main" id="{5074630E-94A1-BC8D-F805-523264EF8C88}"/>
-              </a:ext>
-            </a:extLst>
-          </p:cNvPr>
+          <p:cNvPr id="3" name="Notes Placeholder 2"/>
           <p:cNvSpPr>
             <a:spLocks noGrp="1"/>
           </p:cNvSpPr>
@@ -3783,200 +2840,163 @@
               <a:buChar char="-"/>
             </a:pPr>
             <a:r>
-              <a:rPr lang="de-DE" dirty="0" err="1"/>
-              <a:t>ham</a:t>
-            </a:r>
-            <a:r>
-              <a:rPr lang="de-DE" dirty="0"/>
-              <a:t> uns web IDEs </a:t>
-            </a:r>
-            <a:r>
-              <a:rPr lang="de-DE" dirty="0" err="1"/>
-              <a:t>angeguggt</a:t>
-            </a:r>
-            <a:endParaRPr lang="de-DE" dirty="0"/>
-          </a:p>
-          <a:p>
-            <a:pPr marL="171450" indent="-171450">
+              <a:rPr lang="de-DE" dirty="0"/>
+              <a:t>frontend:</a:t>
+            </a:r>
+          </a:p>
+          <a:p>
+            <a:pPr marL="628650" lvl="1" indent="-171450">
               <a:buFontTx/>
               <a:buChar char="-"/>
             </a:pPr>
             <a:r>
-              <a:rPr lang="de-DE" dirty="0"/>
-              <a:t>viele haben Monaco als Frontend, bekannt von </a:t>
-            </a:r>
-            <a:r>
-              <a:rPr lang="de-DE" dirty="0" err="1"/>
-              <a:t>VSCode</a:t>
-            </a:r>
-            <a:endParaRPr lang="de-DE" dirty="0"/>
-          </a:p>
-          <a:p>
-            <a:pPr marL="171450" indent="-171450">
+              <a:rPr lang="de-DE" dirty="0" err="1"/>
+              <a:t>Vsccode</a:t>
+            </a:r>
+            <a:r>
+              <a:rPr lang="de-DE" dirty="0"/>
+              <a:t> ext</a:t>
+            </a:r>
+          </a:p>
+          <a:p>
+            <a:pPr marL="628650" lvl="1" indent="-171450">
               <a:buFontTx/>
               <a:buChar char="-"/>
             </a:pPr>
             <a:r>
               <a:rPr lang="de-DE" dirty="0" err="1"/>
-              <a:t>VSCode</a:t>
-            </a:r>
-            <a:r>
-              <a:rPr lang="de-DE" dirty="0"/>
-              <a:t> für viele vertraut</a:t>
-            </a:r>
-          </a:p>
-          <a:p>
-            <a:pPr marL="171450" indent="-171450">
-              <a:buFontTx/>
-              <a:buChar char="-"/>
-            </a:pPr>
-            <a:r>
-              <a:rPr lang="de-DE" dirty="0"/>
-              <a:t>unterstütz </a:t>
-            </a:r>
-            <a:r>
-              <a:rPr lang="de-DE" dirty="0" err="1"/>
-              <a:t>Extensions</a:t>
+              <a:t>Commadlines</a:t>
             </a:r>
             <a:endParaRPr lang="de-DE" dirty="0"/>
           </a:p>
           <a:p>
-            <a:pPr marL="171450" indent="-171450">
-              <a:buFontTx/>
-              <a:buChar char="-"/>
-            </a:pPr>
-            <a:r>
-              <a:rPr lang="de-DE" dirty="0" err="1"/>
-              <a:t>coder</a:t>
-            </a:r>
-            <a:r>
-              <a:rPr lang="de-DE" dirty="0"/>
-              <a:t>/code-server kann einfach </a:t>
-            </a:r>
-            <a:r>
-              <a:rPr lang="de-DE" dirty="0" err="1"/>
-              <a:t>gehosted</a:t>
-            </a:r>
-            <a:r>
-              <a:rPr lang="de-DE" dirty="0"/>
-              <a:t> werden um eine Web IDE bereit zustellen</a:t>
-            </a:r>
-          </a:p>
-          <a:p>
-            <a:pPr marL="171450" indent="-171450">
+            <a:pPr marL="171450" lvl="0" indent="-171450">
               <a:buFontTx/>
               <a:buChar char="-"/>
             </a:pPr>
             <a:endParaRPr lang="de-DE" dirty="0"/>
           </a:p>
           <a:p>
-            <a:pPr marL="171450" indent="-171450">
+            <a:pPr marL="171450" lvl="0" indent="-171450">
               <a:buFontTx/>
               <a:buChar char="-"/>
             </a:pPr>
             <a:r>
               <a:rPr lang="de-DE" dirty="0"/>
-              <a:t>IDEE: </a:t>
-            </a:r>
-            <a:r>
-              <a:rPr lang="de-DE" dirty="0" err="1"/>
-              <a:t>vscode</a:t>
-            </a:r>
-            <a:r>
-              <a:rPr lang="de-DE" dirty="0"/>
-              <a:t> </a:t>
-            </a:r>
-            <a:r>
-              <a:rPr lang="de-DE" dirty="0" err="1"/>
-              <a:t>extension</a:t>
-            </a:r>
-            <a:r>
-              <a:rPr lang="de-DE" dirty="0"/>
-              <a:t> zum </a:t>
-            </a:r>
-            <a:r>
-              <a:rPr lang="de-DE" dirty="0" err="1"/>
-              <a:t>flashen</a:t>
-            </a:r>
-            <a:endParaRPr lang="de-DE" dirty="0"/>
-          </a:p>
-          <a:p>
-            <a:pPr marL="171450" indent="-171450">
+              <a:t>backend:</a:t>
+            </a:r>
+          </a:p>
+          <a:p>
+            <a:pPr marL="628650" lvl="1" indent="-171450">
               <a:buFontTx/>
               <a:buChar char="-"/>
             </a:pPr>
             <a:r>
-              <a:rPr lang="de-DE" dirty="0" err="1"/>
-              <a:t>auto</a:t>
-            </a:r>
-            <a:r>
-              <a:rPr lang="de-DE" dirty="0"/>
-              <a:t> deploy</a:t>
-            </a:r>
-          </a:p>
-          <a:p>
-            <a:pPr marL="171450" indent="-171450">
+              <a:rPr lang="de-DE" dirty="0"/>
+              <a:t>code-server</a:t>
+            </a:r>
+          </a:p>
+          <a:p>
+            <a:pPr marL="628650" lvl="1" indent="-171450">
               <a:buFontTx/>
               <a:buChar char="-"/>
             </a:pPr>
             <a:r>
               <a:rPr lang="de-DE" dirty="0" err="1"/>
-              <a:t>geräteverwaltung</a:t>
-            </a:r>
-            <a:endParaRPr lang="de-DE" dirty="0"/>
-          </a:p>
-          <a:p>
-            <a:pPr marL="171450" indent="-171450">
+              <a:t>nutzer</a:t>
+            </a:r>
+            <a:r>
+              <a:rPr lang="de-DE" dirty="0"/>
+              <a:t> input in cli</a:t>
+            </a:r>
+          </a:p>
+          <a:p>
+            <a:pPr marL="628650" lvl="1" indent="-171450">
+              <a:buFontTx/>
+              <a:buChar char="-"/>
+            </a:pPr>
+            <a:r>
+              <a:rPr lang="de-DE" dirty="0"/>
+              <a:t>viele CLIs – eine </a:t>
+            </a:r>
+            <a:r>
+              <a:rPr lang="de-DE" dirty="0" err="1"/>
+              <a:t>extension</a:t>
+            </a:r>
+            <a:r>
+              <a:rPr lang="de-DE" dirty="0"/>
+              <a:t> -&gt; </a:t>
+            </a:r>
+            <a:r>
+              <a:rPr lang="de-DE" dirty="0" err="1"/>
+              <a:t>relay</a:t>
+            </a:r>
+            <a:r>
+              <a:rPr lang="de-DE" dirty="0"/>
+              <a:t> (EINE CONNECTION, zentraler host)</a:t>
+            </a:r>
+          </a:p>
+          <a:p>
+            <a:pPr marL="628650" lvl="1" indent="-171450">
+              <a:buFontTx/>
+              <a:buChar char="-"/>
+            </a:pPr>
+            <a:r>
+              <a:rPr lang="de-DE" dirty="0"/>
+              <a:t>erlaubt </a:t>
+            </a:r>
+            <a:r>
+              <a:rPr lang="de-DE" dirty="0" err="1"/>
+              <a:t>buttons</a:t>
+            </a:r>
+            <a:r>
+              <a:rPr lang="de-DE" dirty="0"/>
+              <a:t> -&gt; </a:t>
+            </a:r>
+            <a:r>
+              <a:rPr lang="de-DE" dirty="0" err="1"/>
+              <a:t>command</a:t>
+            </a:r>
+            <a:r>
+              <a:rPr lang="de-DE" dirty="0"/>
+              <a:t> </a:t>
+            </a:r>
+            <a:r>
+              <a:rPr lang="de-DE" dirty="0" err="1"/>
+              <a:t>shortcut</a:t>
+            </a:r>
+            <a:r>
+              <a:rPr lang="de-DE" dirty="0"/>
+              <a:t> -&gt; </a:t>
+            </a:r>
+            <a:r>
+              <a:rPr lang="de-DE" dirty="0" err="1"/>
+              <a:t>command</a:t>
+            </a:r>
+            <a:r>
+              <a:rPr lang="de-DE" dirty="0"/>
+              <a:t> sichtbar</a:t>
+            </a:r>
+          </a:p>
+          <a:p>
+            <a:pPr marL="628650" lvl="1" indent="-171450">
               <a:buFontTx/>
               <a:buChar char="-"/>
             </a:pPr>
             <a:endParaRPr lang="de-DE" dirty="0"/>
           </a:p>
           <a:p>
-            <a:pPr marL="171450" indent="-171450">
+            <a:pPr marL="628650" lvl="1" indent="-171450">
               <a:buFontTx/>
               <a:buChar char="-"/>
             </a:pPr>
-            <a:r>
-              <a:rPr lang="de-DE" dirty="0"/>
-              <a:t>in Kontrast zu anderen </a:t>
-            </a:r>
-            <a:r>
-              <a:rPr lang="de-DE" dirty="0" err="1"/>
-              <a:t>Flasher</a:t>
-            </a:r>
-            <a:r>
-              <a:rPr lang="de-DE" dirty="0"/>
-              <a:t> Websites -&gt; seinen code direkt </a:t>
-            </a:r>
-            <a:r>
-              <a:rPr lang="de-DE" dirty="0" err="1"/>
-              <a:t>builden</a:t>
-            </a:r>
-            <a:r>
-              <a:rPr lang="de-DE" dirty="0"/>
-              <a:t> und </a:t>
-            </a:r>
-            <a:r>
-              <a:rPr lang="de-DE" dirty="0" err="1"/>
-              <a:t>flashen</a:t>
-            </a:r>
-            <a:r>
-              <a:rPr lang="de-DE" dirty="0"/>
-              <a:t> </a:t>
-            </a:r>
-          </a:p>
-        </p:txBody>
-      </p:sp>
-      <p:sp>
-        <p:nvSpPr>
-          <p:cNvPr id="4" name="Footer Placeholder 3">
-            <a:extLst>
-              <a:ext uri="{FF2B5EF4-FFF2-40B4-BE49-F238E27FC236}">
-                <a16:creationId xmlns:a16="http://schemas.microsoft.com/office/drawing/2014/main" id="{2B8D8344-AA30-ABA3-A9B9-B40D427EE69F}"/>
-              </a:ext>
-            </a:extLst>
-          </p:cNvPr>
+            <a:endParaRPr lang="de-DE" dirty="0"/>
+          </a:p>
+        </p:txBody>
+      </p:sp>
+      <p:sp>
+        <p:nvSpPr>
+          <p:cNvPr id="4" name="Footer Placeholder 3"/>
           <p:cNvSpPr>
             <a:spLocks noGrp="1"/>
           </p:cNvSpPr>
@@ -3995,13 +3015,7 @@
       </p:sp>
       <p:sp>
         <p:nvSpPr>
-          <p:cNvPr id="5" name="Slide Number Placeholder 4">
-            <a:extLst>
-              <a:ext uri="{FF2B5EF4-FFF2-40B4-BE49-F238E27FC236}">
-                <a16:creationId xmlns:a16="http://schemas.microsoft.com/office/drawing/2014/main" id="{2C380744-32DE-C7ED-5F85-E1FF5C54BB51}"/>
-              </a:ext>
-            </a:extLst>
-          </p:cNvPr>
+          <p:cNvPr id="5" name="Slide Number Placeholder 4"/>
           <p:cNvSpPr>
             <a:spLocks noGrp="1"/>
           </p:cNvSpPr>
@@ -4025,7 +3039,7 @@
     </p:spTree>
     <p:extLst>
       <p:ext uri="{BB962C8B-B14F-4D97-AF65-F5344CB8AC3E}">
-        <p14:creationId xmlns:p14="http://schemas.microsoft.com/office/powerpoint/2010/main" val="3783422821"/>
+        <p14:creationId xmlns:p14="http://schemas.microsoft.com/office/powerpoint/2010/main" val="4034740071"/>
       </p:ext>
     </p:extLst>
   </p:cSld>
@@ -4079,12 +3093,173 @@
           <a:bodyPr/>
           <a:lstStyle/>
           <a:p>
-            <a:pPr marL="0" indent="0">
+            <a:pPr marL="171450" indent="-171450">
               <a:buFontTx/>
-              <a:buNone/>
+              <a:buChar char="-"/>
+            </a:pPr>
+            <a:r>
+              <a:rPr lang="de-DE" dirty="0" err="1"/>
+              <a:t>Requirements</a:t>
+            </a:r>
+            <a:endParaRPr lang="de-DE" dirty="0"/>
+          </a:p>
+          <a:p>
+            <a:pPr marL="171450" indent="-171450">
+              <a:buFontTx/>
+              <a:buChar char="-"/>
             </a:pPr>
             <a:endParaRPr lang="de-DE" dirty="0"/>
           </a:p>
+          <a:p>
+            <a:pPr marL="171450" indent="-171450">
+              <a:buFontTx/>
+              <a:buChar char="-"/>
+            </a:pPr>
+            <a:r>
+              <a:rPr lang="de-DE" dirty="0"/>
+              <a:t>Mischung: Human + </a:t>
+            </a:r>
+            <a:r>
+              <a:rPr lang="de-DE" dirty="0" err="1"/>
+              <a:t>compakt</a:t>
+            </a:r>
+            <a:endParaRPr lang="de-DE" dirty="0"/>
+          </a:p>
+          <a:p>
+            <a:pPr marL="171450" indent="-171450">
+              <a:buFontTx/>
+              <a:buChar char="-"/>
+            </a:pPr>
+            <a:r>
+              <a:rPr lang="de-DE" dirty="0"/>
+              <a:t>mehrere </a:t>
+            </a:r>
+            <a:r>
+              <a:rPr lang="de-DE" dirty="0" err="1"/>
+              <a:t>geräte</a:t>
+            </a:r>
+            <a:r>
+              <a:rPr lang="de-DE" dirty="0"/>
+              <a:t>, mehrere </a:t>
+            </a:r>
+            <a:r>
+              <a:rPr lang="de-DE" dirty="0" err="1"/>
+              <a:t>shells</a:t>
+            </a:r>
+            <a:r>
+              <a:rPr lang="de-DE" dirty="0"/>
+              <a:t> -&gt; parallel</a:t>
+            </a:r>
+          </a:p>
+          <a:p>
+            <a:pPr marL="171450" indent="-171450">
+              <a:buFontTx/>
+              <a:buChar char="-"/>
+            </a:pPr>
+            <a:endParaRPr lang="de-DE" dirty="0"/>
+          </a:p>
+          <a:p>
+            <a:pPr marL="171450" indent="-171450">
+              <a:buFontTx/>
+              <a:buChar char="-"/>
+            </a:pPr>
+            <a:r>
+              <a:rPr lang="de-DE" dirty="0" err="1"/>
+              <a:t>stateful</a:t>
+            </a:r>
+            <a:r>
+              <a:rPr lang="de-DE" dirty="0"/>
+              <a:t> -&gt; WS + registrieren </a:t>
+            </a:r>
+            <a:r>
+              <a:rPr lang="de-DE" dirty="0" err="1"/>
+              <a:t>Addressen</a:t>
+            </a:r>
+            <a:endParaRPr lang="de-DE" dirty="0"/>
+          </a:p>
+          <a:p>
+            <a:pPr marL="171450" indent="-171450">
+              <a:buFontTx/>
+              <a:buChar char="-"/>
+            </a:pPr>
+            <a:endParaRPr lang="de-DE" dirty="0"/>
+          </a:p>
+          <a:p>
+            <a:pPr marL="171450" indent="-171450">
+              <a:buFontTx/>
+              <a:buChar char="-"/>
+            </a:pPr>
+            <a:r>
+              <a:rPr lang="de-DE" dirty="0"/>
+              <a:t>Struktur:</a:t>
+            </a:r>
+          </a:p>
+          <a:p>
+            <a:pPr marL="628650" lvl="1" indent="-171450">
+              <a:buFontTx/>
+              <a:buChar char="-"/>
+            </a:pPr>
+            <a:r>
+              <a:rPr lang="de-DE" dirty="0"/>
+              <a:t>typ</a:t>
+            </a:r>
+          </a:p>
+          <a:p>
+            <a:pPr marL="628650" lvl="1" indent="-171450">
+              <a:buFontTx/>
+              <a:buChar char="-"/>
+            </a:pPr>
+            <a:r>
+              <a:rPr lang="de-DE" dirty="0" err="1"/>
+              <a:t>sender</a:t>
+            </a:r>
+            <a:endParaRPr lang="de-DE" dirty="0"/>
+          </a:p>
+          <a:p>
+            <a:pPr marL="628650" lvl="1" indent="-171450">
+              <a:buFontTx/>
+              <a:buChar char="-"/>
+            </a:pPr>
+            <a:r>
+              <a:rPr lang="de-DE" dirty="0" err="1"/>
+              <a:t>empfänger</a:t>
+            </a:r>
+            <a:endParaRPr lang="de-DE" dirty="0"/>
+          </a:p>
+          <a:p>
+            <a:pPr marL="628650" lvl="1" indent="-171450">
+              <a:buFontTx/>
+              <a:buChar char="-"/>
+            </a:pPr>
+            <a:r>
+              <a:rPr lang="de-DE" dirty="0" err="1"/>
+              <a:t>payload</a:t>
+            </a:r>
+            <a:r>
+              <a:rPr lang="de-DE" dirty="0"/>
+              <a:t> </a:t>
+            </a:r>
+            <a:r>
+              <a:rPr lang="de-DE" dirty="0" err="1"/>
+              <a:t>felder</a:t>
+            </a:r>
+            <a:endParaRPr lang="de-DE" dirty="0"/>
+          </a:p>
+          <a:p>
+            <a:pPr marL="1085850" lvl="2" indent="-171450">
+              <a:buFontTx/>
+              <a:buChar char="-"/>
+            </a:pPr>
+            <a:r>
+              <a:rPr lang="de-DE" dirty="0"/>
+              <a:t>hier </a:t>
+            </a:r>
+            <a:r>
+              <a:rPr lang="de-DE" dirty="0" err="1"/>
+              <a:t>Flashcommand</a:t>
+            </a:r>
+            <a:endParaRPr lang="de-DE" dirty="0"/>
+          </a:p>
         </p:txBody>
       </p:sp>
       <p:sp>
@@ -4123,7 +3298,7 @@
           <a:p>
             <a:fld id="{97EEB764-55E2-4077-8C7A-EB9EFE7145E2}" type="slidenum">
               <a:rPr lang="en-US" smtClean="0"/>
-              <a:t>11</a:t>
+              <a:t>10</a:t>
             </a:fld>
             <a:endParaRPr lang="en-US"/>
           </a:p>
@@ -4132,7 +3307,7 @@
     </p:spTree>
     <p:extLst>
       <p:ext uri="{BB962C8B-B14F-4D97-AF65-F5344CB8AC3E}">
-        <p14:creationId xmlns:p14="http://schemas.microsoft.com/office/powerpoint/2010/main" val="1087687395"/>
+        <p14:creationId xmlns:p14="http://schemas.microsoft.com/office/powerpoint/2010/main" val="4283148127"/>
       </p:ext>
     </p:extLst>
   </p:cSld>
@@ -4188,6 +3363,78 @@
           <a:p>
             <a:endParaRPr lang="de-DE" dirty="0"/>
           </a:p>
+          <a:p>
+            <a:pPr marL="171450" indent="-171450">
+              <a:buFontTx/>
+              <a:buChar char="-"/>
+            </a:pPr>
+            <a:r>
+              <a:rPr lang="de-DE" dirty="0"/>
+              <a:t>Gerätezugriff durch Web APIs ist erschwert</a:t>
+            </a:r>
+          </a:p>
+          <a:p>
+            <a:pPr marL="171450" indent="-171450">
+              <a:buFontTx/>
+              <a:buChar char="-"/>
+            </a:pPr>
+            <a:r>
+              <a:rPr lang="de-DE" dirty="0" err="1"/>
+              <a:t>VSCode</a:t>
+            </a:r>
+            <a:r>
+              <a:rPr lang="de-DE" dirty="0"/>
+              <a:t> Web </a:t>
+            </a:r>
+            <a:r>
+              <a:rPr lang="de-DE" dirty="0" err="1"/>
+              <a:t>Extensions</a:t>
+            </a:r>
+            <a:r>
+              <a:rPr lang="de-DE" dirty="0"/>
+              <a:t> an vielen Punkten (aus Sicherheitsgründen) beschränkt</a:t>
+            </a:r>
+          </a:p>
+          <a:p>
+            <a:pPr marL="171450" indent="-171450">
+              <a:buFontTx/>
+              <a:buChar char="-"/>
+            </a:pPr>
+            <a:r>
+              <a:rPr lang="de-DE" dirty="0"/>
+              <a:t>Neue Geräte müssen manuell eingebaut werden -&gt; </a:t>
+            </a:r>
+            <a:r>
+              <a:rPr lang="de-DE" dirty="0" err="1"/>
+              <a:t>flasher</a:t>
+            </a:r>
+            <a:r>
+              <a:rPr lang="de-DE" dirty="0"/>
+              <a:t> + </a:t>
+            </a:r>
+            <a:r>
+              <a:rPr lang="de-DE" dirty="0" err="1"/>
+              <a:t>make</a:t>
+            </a:r>
+            <a:endParaRPr lang="de-DE" dirty="0"/>
+          </a:p>
+          <a:p>
+            <a:pPr marL="171450" indent="-171450">
+              <a:buFontTx/>
+              <a:buChar char="-"/>
+            </a:pPr>
+            <a:r>
+              <a:rPr lang="de-DE" dirty="0"/>
+              <a:t>Treiber</a:t>
+            </a:r>
+          </a:p>
+          <a:p>
+            <a:pPr marL="171450" indent="-171450">
+              <a:buFontTx/>
+              <a:buChar char="-"/>
+            </a:pPr>
+            <a:endParaRPr lang="de-DE" dirty="0"/>
+          </a:p>
         </p:txBody>
       </p:sp>
       <p:sp>
@@ -4235,7 +3482,7 @@
     </p:spTree>
     <p:extLst>
       <p:ext uri="{BB962C8B-B14F-4D97-AF65-F5344CB8AC3E}">
-        <p14:creationId xmlns:p14="http://schemas.microsoft.com/office/powerpoint/2010/main" val="2574818881"/>
+        <p14:creationId xmlns:p14="http://schemas.microsoft.com/office/powerpoint/2010/main" val="103726413"/>
       </p:ext>
     </p:extLst>
   </p:cSld>
@@ -16148,7 +15395,29 @@
                 <a:ea typeface="+mn-ea"/>
                 <a:cs typeface="+mn-cs"/>
               </a:rPr>
-              <a:t> a Browser • Fabio </a:t>
+              <a:t> a </a:t>
+            </a:r>
+            <a:r>
+              <a:rPr lang="de-DE" sz="1200" kern="1200" dirty="0" err="1">
+                <a:solidFill>
+                  <a:srgbClr val="00008C"/>
+                </a:solidFill>
+                <a:latin typeface="+mn-lt"/>
+                <a:ea typeface="+mn-ea"/>
+                <a:cs typeface="+mn-cs"/>
+              </a:rPr>
+              <a:t>browser</a:t>
+            </a:r>
+            <a:r>
+              <a:rPr lang="de-DE" sz="1200" kern="1200" dirty="0">
+                <a:solidFill>
+                  <a:srgbClr val="00008C"/>
+                </a:solidFill>
+                <a:latin typeface="+mn-lt"/>
+                <a:ea typeface="+mn-ea"/>
+                <a:cs typeface="+mn-cs"/>
+              </a:rPr>
+              <a:t> • Fabio </a:t>
             </a:r>
             <a:r>
               <a:rPr lang="de-DE" sz="1200" kern="1200" dirty="0" err="1">
@@ -17433,8 +16702,13 @@
             </a:r>
             <a:r>
               <a:rPr lang="de-DE" dirty="0"/>
-              <a:t> a Browser</a:t>
-            </a:r>
+              <a:t> a </a:t>
+            </a:r>
+            <a:r>
+              <a:rPr lang="de-DE" dirty="0" err="1"/>
+              <a:t>browser</a:t>
+            </a:r>
+            <a:endParaRPr lang="de-DE" dirty="0"/>
           </a:p>
         </p:txBody>
       </p:sp>
@@ -17531,730 +16805,6 @@
 </file>
 
 <file path=ppt/slides/slide10.xml><?xml version="1.0" encoding="utf-8"?>
-<p:sld xmlns:a="http://schemas.openxmlformats.org/drawingml/2006/main" xmlns:r="http://schemas.openxmlformats.org/officeDocument/2006/relationships" xmlns:p="http://schemas.openxmlformats.org/presentationml/2006/main">
-  <p:cSld>
-    <p:spTree>
-      <p:nvGrpSpPr>
-        <p:cNvPr id="1" name="">
-          <a:extLst>
-            <a:ext uri="{FF2B5EF4-FFF2-40B4-BE49-F238E27FC236}">
-              <a16:creationId xmlns:a16="http://schemas.microsoft.com/office/drawing/2014/main" id="{02DC0723-B94C-6FF0-D1EC-680ED384287B}"/>
-            </a:ext>
-          </a:extLst>
-        </p:cNvPr>
-        <p:cNvGrpSpPr/>
-        <p:nvPr/>
-      </p:nvGrpSpPr>
-      <p:grpSpPr>
-        <a:xfrm>
-          <a:off x="0" y="0"/>
-          <a:ext cx="0" cy="0"/>
-          <a:chOff x="0" y="0"/>
-          <a:chExt cx="0" cy="0"/>
-        </a:xfrm>
-      </p:grpSpPr>
-      <p:sp>
-        <p:nvSpPr>
-          <p:cNvPr id="2" name="Title 1">
-            <a:extLst>
-              <a:ext uri="{FF2B5EF4-FFF2-40B4-BE49-F238E27FC236}">
-                <a16:creationId xmlns:a16="http://schemas.microsoft.com/office/drawing/2014/main" id="{5C67F865-E5C7-CCF0-EBC6-ED2821EA6D09}"/>
-              </a:ext>
-            </a:extLst>
-          </p:cNvPr>
-          <p:cNvSpPr>
-            <a:spLocks noGrp="1"/>
-          </p:cNvSpPr>
-          <p:nvPr>
-            <p:ph type="title"/>
-          </p:nvPr>
-        </p:nvSpPr>
-        <p:spPr/>
-        <p:txBody>
-          <a:bodyPr/>
-          <a:lstStyle/>
-          <a:p>
-            <a:r>
-              <a:rPr lang="de-DE" dirty="0"/>
-              <a:t>Backend</a:t>
-            </a:r>
-          </a:p>
-        </p:txBody>
-      </p:sp>
-      <p:sp>
-        <p:nvSpPr>
-          <p:cNvPr id="3" name="Text Placeholder 2">
-            <a:extLst>
-              <a:ext uri="{FF2B5EF4-FFF2-40B4-BE49-F238E27FC236}">
-                <a16:creationId xmlns:a16="http://schemas.microsoft.com/office/drawing/2014/main" id="{C04085B9-1FC8-A1D9-2028-802E0DB2C7FC}"/>
-              </a:ext>
-            </a:extLst>
-          </p:cNvPr>
-          <p:cNvSpPr>
-            <a:spLocks noGrp="1"/>
-          </p:cNvSpPr>
-          <p:nvPr>
-            <p:ph type="body" sz="quarter" idx="10"/>
-          </p:nvPr>
-        </p:nvSpPr>
-        <p:spPr/>
-        <p:txBody>
-          <a:bodyPr/>
-          <a:lstStyle/>
-          <a:p>
-            <a:endParaRPr lang="de-DE"/>
-          </a:p>
-        </p:txBody>
-      </p:sp>
-    </p:spTree>
-    <p:extLst>
-      <p:ext uri="{BB962C8B-B14F-4D97-AF65-F5344CB8AC3E}">
-        <p14:creationId xmlns:p14="http://schemas.microsoft.com/office/powerpoint/2010/main" val="128564279"/>
-      </p:ext>
-    </p:extLst>
-  </p:cSld>
-  <p:clrMapOvr>
-    <a:masterClrMapping/>
-  </p:clrMapOvr>
-</p:sld>
-</file>
-
-<file path=ppt/slides/slide11.xml><?xml version="1.0" encoding="utf-8"?>
-<p:sld xmlns:a="http://schemas.openxmlformats.org/drawingml/2006/main" xmlns:r="http://schemas.openxmlformats.org/officeDocument/2006/relationships" xmlns:p="http://schemas.openxmlformats.org/presentationml/2006/main">
-  <p:cSld>
-    <p:spTree>
-      <p:nvGrpSpPr>
-        <p:cNvPr id="1" name="">
-          <a:extLst>
-            <a:ext uri="{FF2B5EF4-FFF2-40B4-BE49-F238E27FC236}">
-              <a16:creationId xmlns:a16="http://schemas.microsoft.com/office/drawing/2014/main" id="{58FBE7ED-F68D-B480-5C5D-34BD7F0E6786}"/>
-            </a:ext>
-          </a:extLst>
-        </p:cNvPr>
-        <p:cNvGrpSpPr/>
-        <p:nvPr/>
-      </p:nvGrpSpPr>
-      <p:grpSpPr>
-        <a:xfrm>
-          <a:off x="0" y="0"/>
-          <a:ext cx="0" cy="0"/>
-          <a:chOff x="0" y="0"/>
-          <a:chExt cx="0" cy="0"/>
-        </a:xfrm>
-      </p:grpSpPr>
-      <p:sp>
-        <p:nvSpPr>
-          <p:cNvPr id="6" name="Titel 5">
-            <a:extLst>
-              <a:ext uri="{FF2B5EF4-FFF2-40B4-BE49-F238E27FC236}">
-                <a16:creationId xmlns:a16="http://schemas.microsoft.com/office/drawing/2014/main" id="{5DD65EBB-357E-C690-09FC-4EBF4E134662}"/>
-              </a:ext>
-            </a:extLst>
-          </p:cNvPr>
-          <p:cNvSpPr>
-            <a:spLocks noGrp="1"/>
-          </p:cNvSpPr>
-          <p:nvPr>
-            <p:ph type="title"/>
-          </p:nvPr>
-        </p:nvSpPr>
-        <p:spPr/>
-        <p:txBody>
-          <a:bodyPr/>
-          <a:lstStyle/>
-          <a:p>
-            <a:r>
-              <a:rPr lang="de-DE" dirty="0"/>
-              <a:t>Goals </a:t>
-            </a:r>
-            <a:r>
-              <a:rPr lang="de-DE" dirty="0" err="1"/>
-              <a:t>Reminder</a:t>
-            </a:r>
-            <a:endParaRPr lang="de-DE" dirty="0"/>
-          </a:p>
-        </p:txBody>
-      </p:sp>
-      <p:sp>
-        <p:nvSpPr>
-          <p:cNvPr id="7" name="Inhaltsplatzhalter 6">
-            <a:extLst>
-              <a:ext uri="{FF2B5EF4-FFF2-40B4-BE49-F238E27FC236}">
-                <a16:creationId xmlns:a16="http://schemas.microsoft.com/office/drawing/2014/main" id="{E651C2A1-7C5A-D2D9-C8FB-F34574E0A6D0}"/>
-              </a:ext>
-            </a:extLst>
-          </p:cNvPr>
-          <p:cNvSpPr>
-            <a:spLocks noGrp="1"/>
-          </p:cNvSpPr>
-          <p:nvPr>
-            <p:ph idx="1"/>
-          </p:nvPr>
-        </p:nvSpPr>
-        <p:spPr/>
-        <p:txBody>
-          <a:bodyPr/>
-          <a:lstStyle/>
-          <a:p>
-            <a:pPr marL="342900" indent="-342900">
-              <a:buFont typeface="Arial" panose="020B0604020202020204" pitchFamily="34" charset="0"/>
-              <a:buChar char="•"/>
-            </a:pPr>
-            <a:r>
-              <a:rPr lang="de-DE" dirty="0" err="1"/>
-              <a:t>provide</a:t>
-            </a:r>
-            <a:r>
-              <a:rPr lang="de-DE" dirty="0"/>
-              <a:t> a code </a:t>
-            </a:r>
-            <a:r>
-              <a:rPr lang="de-DE" dirty="0" err="1"/>
-              <a:t>editor</a:t>
-            </a:r>
-            <a:r>
-              <a:rPr lang="de-DE" dirty="0"/>
-              <a:t> </a:t>
-            </a:r>
-            <a:r>
-              <a:rPr lang="de-DE" dirty="0" err="1"/>
-              <a:t>as</a:t>
-            </a:r>
-            <a:r>
-              <a:rPr lang="de-DE" dirty="0"/>
-              <a:t> a </a:t>
-            </a:r>
-            <a:r>
-              <a:rPr lang="de-DE" dirty="0" err="1"/>
-              <a:t>website</a:t>
-            </a:r>
-            <a:endParaRPr lang="de-DE" dirty="0"/>
-          </a:p>
-          <a:p>
-            <a:pPr marL="342900" indent="-342900">
-              <a:buFont typeface="Arial" panose="020B0604020202020204" pitchFamily="34" charset="0"/>
-              <a:buChar char="•"/>
-            </a:pPr>
-            <a:r>
-              <a:rPr lang="de-DE" dirty="0" err="1"/>
-              <a:t>ready</a:t>
-            </a:r>
-            <a:r>
-              <a:rPr lang="de-DE" dirty="0"/>
-              <a:t>-to-</a:t>
-            </a:r>
-            <a:r>
-              <a:rPr lang="de-DE" dirty="0" err="1"/>
-              <a:t>use</a:t>
-            </a:r>
-            <a:r>
-              <a:rPr lang="de-DE" dirty="0"/>
-              <a:t> </a:t>
-            </a:r>
-            <a:r>
-              <a:rPr lang="de-DE" dirty="0" err="1"/>
-              <a:t>development</a:t>
-            </a:r>
-            <a:r>
-              <a:rPr lang="de-DE" dirty="0"/>
-              <a:t> </a:t>
-            </a:r>
-            <a:r>
-              <a:rPr lang="de-DE" dirty="0" err="1"/>
-              <a:t>environment</a:t>
-            </a:r>
-            <a:endParaRPr lang="de-DE" dirty="0"/>
-          </a:p>
-          <a:p>
-            <a:pPr marL="342900" indent="-342900">
-              <a:buFont typeface="Arial" panose="020B0604020202020204" pitchFamily="34" charset="0"/>
-              <a:buChar char="•"/>
-            </a:pPr>
-            <a:r>
-              <a:rPr lang="de-DE" dirty="0" err="1"/>
-              <a:t>keep</a:t>
-            </a:r>
-            <a:r>
-              <a:rPr lang="de-DE" dirty="0"/>
-              <a:t> to a RIOT native </a:t>
-            </a:r>
-            <a:r>
-              <a:rPr lang="de-DE" dirty="0" err="1"/>
-              <a:t>user</a:t>
-            </a:r>
-            <a:r>
-              <a:rPr lang="de-DE" dirty="0"/>
-              <a:t> </a:t>
-            </a:r>
-            <a:r>
-              <a:rPr lang="de-DE" dirty="0" err="1"/>
-              <a:t>experience</a:t>
-            </a:r>
-            <a:endParaRPr lang="de-DE" dirty="0"/>
-          </a:p>
-          <a:p>
-            <a:pPr marL="342900" indent="-342900">
-              <a:buFont typeface="Arial" panose="020B0604020202020204" pitchFamily="34" charset="0"/>
-              <a:buChar char="•"/>
-            </a:pPr>
-            <a:r>
-              <a:rPr lang="de-DE" dirty="0" err="1"/>
-              <a:t>ease-of-deployment</a:t>
-            </a:r>
-            <a:endParaRPr lang="de-DE" dirty="0"/>
-          </a:p>
-          <a:p>
-            <a:pPr marL="342900" indent="-342900">
-              <a:buFont typeface="Arial" panose="020B0604020202020204" pitchFamily="34" charset="0"/>
-              <a:buChar char="•"/>
-            </a:pPr>
-            <a:r>
-              <a:rPr lang="de-DE" dirty="0" err="1">
-                <a:solidFill>
-                  <a:schemeClr val="bg1">
-                    <a:lumMod val="75000"/>
-                  </a:schemeClr>
-                </a:solidFill>
-              </a:rPr>
-              <a:t>flash</a:t>
-            </a:r>
-            <a:r>
-              <a:rPr lang="de-DE" dirty="0">
-                <a:solidFill>
-                  <a:schemeClr val="bg1">
-                    <a:lumMod val="75000"/>
-                  </a:schemeClr>
-                </a:solidFill>
-              </a:rPr>
-              <a:t> RIOT </a:t>
-            </a:r>
-            <a:r>
-              <a:rPr lang="de-DE" dirty="0" err="1">
-                <a:solidFill>
-                  <a:schemeClr val="bg1">
-                    <a:lumMod val="75000"/>
-                  </a:schemeClr>
-                </a:solidFill>
-              </a:rPr>
-              <a:t>boards</a:t>
-            </a:r>
-            <a:r>
-              <a:rPr lang="de-DE" dirty="0">
-                <a:solidFill>
-                  <a:schemeClr val="bg1">
-                    <a:lumMod val="75000"/>
-                  </a:schemeClr>
-                </a:solidFill>
-              </a:rPr>
-              <a:t> </a:t>
-            </a:r>
-            <a:r>
-              <a:rPr lang="de-DE" dirty="0" err="1">
-                <a:solidFill>
-                  <a:schemeClr val="bg1">
-                    <a:lumMod val="75000"/>
-                  </a:schemeClr>
-                </a:solidFill>
-              </a:rPr>
-              <a:t>from</a:t>
-            </a:r>
-            <a:r>
-              <a:rPr lang="de-DE" dirty="0">
-                <a:solidFill>
-                  <a:schemeClr val="bg1">
-                    <a:lumMod val="75000"/>
-                  </a:schemeClr>
-                </a:solidFill>
-              </a:rPr>
-              <a:t> a </a:t>
-            </a:r>
-            <a:r>
-              <a:rPr lang="de-DE" dirty="0" err="1">
-                <a:solidFill>
-                  <a:schemeClr val="bg1">
-                    <a:lumMod val="75000"/>
-                  </a:schemeClr>
-                </a:solidFill>
-              </a:rPr>
-              <a:t>browser</a:t>
-            </a:r>
-            <a:endParaRPr lang="de-DE" dirty="0"/>
-          </a:p>
-          <a:p>
-            <a:pPr marL="342900" indent="-342900">
-              <a:buFont typeface="Arial" panose="020B0604020202020204" pitchFamily="34" charset="0"/>
-              <a:buChar char="•"/>
-            </a:pPr>
-            <a:r>
-              <a:rPr lang="de-DE" dirty="0" err="1">
-                <a:solidFill>
-                  <a:schemeClr val="bg1">
-                    <a:lumMod val="75000"/>
-                  </a:schemeClr>
-                </a:solidFill>
-              </a:rPr>
-              <a:t>ease-of-use</a:t>
-            </a:r>
-            <a:r>
-              <a:rPr lang="de-DE" dirty="0">
-                <a:solidFill>
-                  <a:schemeClr val="bg1">
-                    <a:lumMod val="75000"/>
-                  </a:schemeClr>
-                </a:solidFill>
-              </a:rPr>
-              <a:t> </a:t>
-            </a:r>
-            <a:r>
-              <a:rPr lang="de-DE" dirty="0" err="1">
-                <a:solidFill>
-                  <a:schemeClr val="bg1">
-                    <a:lumMod val="75000"/>
-                  </a:schemeClr>
-                </a:solidFill>
-              </a:rPr>
-              <a:t>for</a:t>
-            </a:r>
-            <a:r>
-              <a:rPr lang="de-DE" dirty="0">
-                <a:solidFill>
-                  <a:schemeClr val="bg1">
-                    <a:lumMod val="75000"/>
-                  </a:schemeClr>
-                </a:solidFill>
-              </a:rPr>
-              <a:t> </a:t>
-            </a:r>
-            <a:r>
-              <a:rPr lang="de-DE" dirty="0" err="1">
-                <a:solidFill>
-                  <a:schemeClr val="bg1">
-                    <a:lumMod val="75000"/>
-                  </a:schemeClr>
-                </a:solidFill>
-              </a:rPr>
-              <a:t>newcomers</a:t>
-            </a:r>
-            <a:endParaRPr lang="de-DE" dirty="0">
-              <a:solidFill>
-                <a:schemeClr val="bg1">
-                  <a:lumMod val="75000"/>
-                </a:schemeClr>
-              </a:solidFill>
-            </a:endParaRPr>
-          </a:p>
-        </p:txBody>
-      </p:sp>
-    </p:spTree>
-    <p:extLst>
-      <p:ext uri="{BB962C8B-B14F-4D97-AF65-F5344CB8AC3E}">
-        <p14:creationId xmlns:p14="http://schemas.microsoft.com/office/powerpoint/2010/main" val="1388781836"/>
-      </p:ext>
-    </p:extLst>
-  </p:cSld>
-  <p:clrMapOvr>
-    <a:masterClrMapping/>
-  </p:clrMapOvr>
-</p:sld>
-</file>
-
-<file path=ppt/slides/slide12.xml><?xml version="1.0" encoding="utf-8"?>
-<p:sld xmlns:a="http://schemas.openxmlformats.org/drawingml/2006/main" xmlns:r="http://schemas.openxmlformats.org/officeDocument/2006/relationships" xmlns:p="http://schemas.openxmlformats.org/presentationml/2006/main">
-  <p:cSld>
-    <p:bg>
-      <p:bgPr>
-        <a:solidFill>
-          <a:srgbClr val="1E1E1E"/>
-        </a:solidFill>
-        <a:effectLst/>
-      </p:bgPr>
-    </p:bg>
-    <p:spTree>
-      <p:nvGrpSpPr>
-        <p:cNvPr id="1" name=""/>
-        <p:cNvGrpSpPr/>
-        <p:nvPr/>
-      </p:nvGrpSpPr>
-      <p:grpSpPr>
-        <a:xfrm>
-          <a:off x="0" y="0"/>
-          <a:ext cx="0" cy="0"/>
-          <a:chOff x="0" y="0"/>
-          <a:chExt cx="0" cy="0"/>
-        </a:xfrm>
-      </p:grpSpPr>
-      <p:sp>
-        <p:nvSpPr>
-          <p:cNvPr id="5" name="Text Placeholder 4">
-            <a:extLst>
-              <a:ext uri="{FF2B5EF4-FFF2-40B4-BE49-F238E27FC236}">
-                <a16:creationId xmlns:a16="http://schemas.microsoft.com/office/drawing/2014/main" id="{E7BA7F4C-F7C8-AA09-51B9-5D54DCB9ADBE}"/>
-              </a:ext>
-            </a:extLst>
-          </p:cNvPr>
-          <p:cNvSpPr>
-            <a:spLocks noGrp="1"/>
-          </p:cNvSpPr>
-          <p:nvPr>
-            <p:ph type="body" sz="quarter" idx="12"/>
-          </p:nvPr>
-        </p:nvSpPr>
-        <p:spPr/>
-        <p:txBody>
-          <a:bodyPr/>
-          <a:lstStyle/>
-          <a:p>
-            <a:endParaRPr lang="de-DE"/>
-          </a:p>
-        </p:txBody>
-      </p:sp>
-      <p:pic>
-        <p:nvPicPr>
-          <p:cNvPr id="15" name="Picture Placeholder 14">
-            <a:extLst>
-              <a:ext uri="{FF2B5EF4-FFF2-40B4-BE49-F238E27FC236}">
-                <a16:creationId xmlns:a16="http://schemas.microsoft.com/office/drawing/2014/main" id="{ECBE123B-3CCE-E13C-BB83-E41E63771D97}"/>
-              </a:ext>
-            </a:extLst>
-          </p:cNvPr>
-          <p:cNvPicPr>
-            <a:picLocks noGrp="1" noChangeAspect="1"/>
-          </p:cNvPicPr>
-          <p:nvPr>
-            <p:ph type="pic" sz="quarter" idx="10"/>
-          </p:nvPr>
-        </p:nvPicPr>
-        <p:blipFill>
-          <a:blip r:embed="rId3">
-            <a:extLst>
-              <a:ext uri="{28A0092B-C50C-407E-A947-70E740481C1C}">
-                <a14:useLocalDpi xmlns:a14="http://schemas.microsoft.com/office/drawing/2010/main" val="0"/>
-              </a:ext>
-            </a:extLst>
-          </a:blip>
-          <a:srcRect/>
-          <a:stretch>
-            <a:fillRect/>
-          </a:stretch>
-        </p:blipFill>
-        <p:spPr>
-          <a:prstGeom prst="rect">
-            <a:avLst/>
-          </a:prstGeom>
-          <a:solidFill>
-            <a:prstClr val="white">
-              <a:lumMod val="95000"/>
-            </a:prstClr>
-          </a:solidFill>
-        </p:spPr>
-      </p:pic>
-    </p:spTree>
-    <p:extLst>
-      <p:ext uri="{BB962C8B-B14F-4D97-AF65-F5344CB8AC3E}">
-        <p14:creationId xmlns:p14="http://schemas.microsoft.com/office/powerpoint/2010/main" val="2237056189"/>
-      </p:ext>
-    </p:extLst>
-  </p:cSld>
-  <p:clrMapOvr>
-    <a:masterClrMapping/>
-  </p:clrMapOvr>
-</p:sld>
-</file>
-
-<file path=ppt/slides/slide13.xml><?xml version="1.0" encoding="utf-8"?>
-<p:sld xmlns:a="http://schemas.openxmlformats.org/drawingml/2006/main" xmlns:r="http://schemas.openxmlformats.org/officeDocument/2006/relationships" xmlns:p="http://schemas.openxmlformats.org/presentationml/2006/main">
-  <p:cSld>
-    <p:spTree>
-      <p:nvGrpSpPr>
-        <p:cNvPr id="1" name="">
-          <a:extLst>
-            <a:ext uri="{FF2B5EF4-FFF2-40B4-BE49-F238E27FC236}">
-              <a16:creationId xmlns:a16="http://schemas.microsoft.com/office/drawing/2014/main" id="{0C9C90E2-488C-BA8F-94CC-2952B2C8879E}"/>
-            </a:ext>
-          </a:extLst>
-        </p:cNvPr>
-        <p:cNvGrpSpPr/>
-        <p:nvPr/>
-      </p:nvGrpSpPr>
-      <p:grpSpPr>
-        <a:xfrm>
-          <a:off x="0" y="0"/>
-          <a:ext cx="0" cy="0"/>
-          <a:chOff x="0" y="0"/>
-          <a:chExt cx="0" cy="0"/>
-        </a:xfrm>
-      </p:grpSpPr>
-      <p:sp>
-        <p:nvSpPr>
-          <p:cNvPr id="2" name="Title 1">
-            <a:extLst>
-              <a:ext uri="{FF2B5EF4-FFF2-40B4-BE49-F238E27FC236}">
-                <a16:creationId xmlns:a16="http://schemas.microsoft.com/office/drawing/2014/main" id="{9BD7C843-0D8B-61F7-B028-BC4D64B1C1CA}"/>
-              </a:ext>
-            </a:extLst>
-          </p:cNvPr>
-          <p:cNvSpPr>
-            <a:spLocks noGrp="1"/>
-          </p:cNvSpPr>
-          <p:nvPr>
-            <p:ph type="title"/>
-          </p:nvPr>
-        </p:nvSpPr>
-        <p:spPr/>
-        <p:txBody>
-          <a:bodyPr/>
-          <a:lstStyle/>
-          <a:p>
-            <a:r>
-              <a:rPr lang="de-DE" dirty="0"/>
-              <a:t>Architecture</a:t>
-            </a:r>
-          </a:p>
-        </p:txBody>
-      </p:sp>
-      <p:sp>
-        <p:nvSpPr>
-          <p:cNvPr id="3" name="Text Placeholder 2">
-            <a:extLst>
-              <a:ext uri="{FF2B5EF4-FFF2-40B4-BE49-F238E27FC236}">
-                <a16:creationId xmlns:a16="http://schemas.microsoft.com/office/drawing/2014/main" id="{E3EA062A-C806-F1F4-5C98-E366AA036A94}"/>
-              </a:ext>
-            </a:extLst>
-          </p:cNvPr>
-          <p:cNvSpPr>
-            <a:spLocks noGrp="1"/>
-          </p:cNvSpPr>
-          <p:nvPr>
-            <p:ph type="body" sz="quarter" idx="10"/>
-          </p:nvPr>
-        </p:nvSpPr>
-        <p:spPr/>
-        <p:txBody>
-          <a:bodyPr/>
-          <a:lstStyle/>
-          <a:p>
-            <a:endParaRPr lang="de-DE"/>
-          </a:p>
-        </p:txBody>
-      </p:sp>
-    </p:spTree>
-    <p:extLst>
-      <p:ext uri="{BB962C8B-B14F-4D97-AF65-F5344CB8AC3E}">
-        <p14:creationId xmlns:p14="http://schemas.microsoft.com/office/powerpoint/2010/main" val="2130650057"/>
-      </p:ext>
-    </p:extLst>
-  </p:cSld>
-  <p:clrMapOvr>
-    <a:masterClrMapping/>
-  </p:clrMapOvr>
-</p:sld>
-</file>
-
-<file path=ppt/slides/slide14.xml><?xml version="1.0" encoding="utf-8"?>
-<p:sld xmlns:a="http://schemas.openxmlformats.org/drawingml/2006/main" xmlns:r="http://schemas.openxmlformats.org/officeDocument/2006/relationships" xmlns:p="http://schemas.openxmlformats.org/presentationml/2006/main">
-  <p:cSld>
-    <p:spTree>
-      <p:nvGrpSpPr>
-        <p:cNvPr id="1" name="">
-          <a:extLst>
-            <a:ext uri="{FF2B5EF4-FFF2-40B4-BE49-F238E27FC236}">
-              <a16:creationId xmlns:a16="http://schemas.microsoft.com/office/drawing/2014/main" id="{EE59038B-C91D-D4AF-DD0F-B3F7C00F44EE}"/>
-            </a:ext>
-          </a:extLst>
-        </p:cNvPr>
-        <p:cNvGrpSpPr/>
-        <p:nvPr/>
-      </p:nvGrpSpPr>
-      <p:grpSpPr>
-        <a:xfrm>
-          <a:off x="0" y="0"/>
-          <a:ext cx="0" cy="0"/>
-          <a:chOff x="0" y="0"/>
-          <a:chExt cx="0" cy="0"/>
-        </a:xfrm>
-      </p:grpSpPr>
-      <p:pic>
-        <p:nvPicPr>
-          <p:cNvPr id="5" name="Picture Placeholder 4">
-            <a:extLst>
-              <a:ext uri="{FF2B5EF4-FFF2-40B4-BE49-F238E27FC236}">
-                <a16:creationId xmlns:a16="http://schemas.microsoft.com/office/drawing/2014/main" id="{6FCC718B-6284-F37C-466B-8AC7F1B1C934}"/>
-              </a:ext>
-            </a:extLst>
-          </p:cNvPr>
-          <p:cNvPicPr>
-            <a:picLocks noGrp="1" noChangeAspect="1"/>
-          </p:cNvPicPr>
-          <p:nvPr>
-            <p:ph type="pic" sz="quarter" idx="10"/>
-          </p:nvPr>
-        </p:nvPicPr>
-        <p:blipFill rotWithShape="1">
-          <a:blip r:embed="rId3">
-            <a:extLst>
-              <a:ext uri="{28A0092B-C50C-407E-A947-70E740481C1C}">
-                <a14:useLocalDpi xmlns:a14="http://schemas.microsoft.com/office/drawing/2010/main" val="0"/>
-              </a:ext>
-            </a:extLst>
-          </a:blip>
-          <a:srcRect t="-17368" b="-17368"/>
-          <a:stretch>
-            <a:fillRect/>
-          </a:stretch>
-        </p:blipFill>
-        <p:spPr>
-          <a:prstGeom prst="rect">
-            <a:avLst/>
-          </a:prstGeom>
-          <a:solidFill>
-            <a:prstClr val="white">
-              <a:lumMod val="95000"/>
-            </a:prstClr>
-          </a:solidFill>
-        </p:spPr>
-      </p:pic>
-      <p:sp>
-        <p:nvSpPr>
-          <p:cNvPr id="3" name="Text Placeholder 2">
-            <a:extLst>
-              <a:ext uri="{FF2B5EF4-FFF2-40B4-BE49-F238E27FC236}">
-                <a16:creationId xmlns:a16="http://schemas.microsoft.com/office/drawing/2014/main" id="{C0D10C92-0301-EC89-9896-48567ACC9C9C}"/>
-              </a:ext>
-            </a:extLst>
-          </p:cNvPr>
-          <p:cNvSpPr>
-            <a:spLocks noGrp="1"/>
-          </p:cNvSpPr>
-          <p:nvPr>
-            <p:ph type="body" sz="quarter" idx="12"/>
-          </p:nvPr>
-        </p:nvSpPr>
-        <p:spPr/>
-        <p:txBody>
-          <a:bodyPr/>
-          <a:lstStyle/>
-          <a:p>
-            <a:r>
-              <a:rPr lang="de-DE" dirty="0"/>
-              <a:t>RIOT Web Editor Architecture</a:t>
-            </a:r>
-          </a:p>
-        </p:txBody>
-      </p:sp>
-    </p:spTree>
-    <p:extLst>
-      <p:ext uri="{BB962C8B-B14F-4D97-AF65-F5344CB8AC3E}">
-        <p14:creationId xmlns:p14="http://schemas.microsoft.com/office/powerpoint/2010/main" val="579415759"/>
-      </p:ext>
-    </p:extLst>
-  </p:cSld>
-  <p:clrMapOvr>
-    <a:masterClrMapping/>
-  </p:clrMapOvr>
-</p:sld>
-</file>
-
-<file path=ppt/slides/slide15.xml><?xml version="1.0" encoding="utf-8"?>
 <p:sld xmlns:a="http://schemas.openxmlformats.org/drawingml/2006/main" xmlns:r="http://schemas.openxmlformats.org/officeDocument/2006/relationships" xmlns:p="http://schemas.openxmlformats.org/presentationml/2006/main">
   <p:cSld>
     <p:spTree>
@@ -18332,7 +16882,7 @@
             </a:pPr>
             <a:r>
               <a:rPr lang="de-DE" dirty="0" err="1"/>
-              <a:t>Requirements</a:t>
+              <a:t>requirements</a:t>
             </a:r>
             <a:r>
               <a:rPr lang="de-DE" dirty="0"/>
@@ -18342,8 +16892,12 @@
           <a:p>
             <a:pPr marL="576263" lvl="2" indent="-342900"/>
             <a:r>
-              <a:rPr lang="de-DE" dirty="0"/>
-              <a:t>Buttons </a:t>
+              <a:rPr lang="de-DE" dirty="0" err="1"/>
+              <a:t>buttons</a:t>
+            </a:r>
+            <a:r>
+              <a:rPr lang="de-DE" dirty="0"/>
+              <a:t> </a:t>
             </a:r>
             <a:r>
               <a:rPr lang="de-DE" dirty="0" err="1"/>
@@ -18359,14 +16913,30 @@
             </a:r>
             <a:r>
               <a:rPr lang="de-DE" dirty="0"/>
-              <a:t> (Client -&gt; Shell)</a:t>
+              <a:t> (</a:t>
+            </a:r>
+            <a:r>
+              <a:rPr lang="de-DE" dirty="0" err="1"/>
+              <a:t>client</a:t>
+            </a:r>
+            <a:r>
+              <a:rPr lang="de-DE" dirty="0"/>
+              <a:t> -&gt; </a:t>
+            </a:r>
+            <a:r>
+              <a:rPr lang="de-DE" dirty="0" err="1"/>
+              <a:t>shell</a:t>
+            </a:r>
+            <a:r>
+              <a:rPr lang="de-DE" dirty="0"/>
+              <a:t>)</a:t>
             </a:r>
           </a:p>
           <a:p>
             <a:pPr marL="576263" lvl="2" indent="-342900"/>
             <a:r>
               <a:rPr lang="de-DE" dirty="0" err="1"/>
-              <a:t>Commands</a:t>
+              <a:t>commands</a:t>
             </a:r>
             <a:r>
               <a:rPr lang="de-DE" dirty="0"/>
@@ -18386,14 +16956,19 @@
             </a:r>
             <a:r>
               <a:rPr lang="de-DE" dirty="0"/>
-              <a:t> to Client</a:t>
-            </a:r>
+              <a:t> to </a:t>
+            </a:r>
+            <a:r>
+              <a:rPr lang="de-DE" dirty="0" err="1"/>
+              <a:t>client</a:t>
+            </a:r>
+            <a:endParaRPr lang="de-DE" dirty="0"/>
           </a:p>
           <a:p>
             <a:pPr marL="576263" lvl="2" indent="-342900"/>
             <a:r>
               <a:rPr lang="de-DE" dirty="0"/>
-              <a:t>Log </a:t>
+              <a:t>log </a:t>
             </a:r>
             <a:r>
               <a:rPr lang="de-DE" dirty="0" err="1"/>
@@ -18401,7 +16976,15 @@
             </a:r>
             <a:r>
               <a:rPr lang="de-DE" dirty="0"/>
-              <a:t> and User Input </a:t>
+              <a:t> and </a:t>
+            </a:r>
+            <a:r>
+              <a:rPr lang="de-DE" dirty="0" err="1"/>
+              <a:t>user</a:t>
+            </a:r>
+            <a:r>
+              <a:rPr lang="de-DE" dirty="0"/>
+              <a:t> input </a:t>
             </a:r>
             <a:r>
               <a:rPr lang="de-DE" dirty="0" err="1"/>
@@ -18532,18 +17115,12 @@
 </p:sld>
 </file>
 
-<file path=ppt/slides/slide16.xml><?xml version="1.0" encoding="utf-8"?>
+<file path=ppt/slides/slide11.xml><?xml version="1.0" encoding="utf-8"?>
 <p:sld xmlns:a="http://schemas.openxmlformats.org/drawingml/2006/main" xmlns:r="http://schemas.openxmlformats.org/officeDocument/2006/relationships" xmlns:p="http://schemas.openxmlformats.org/presentationml/2006/main">
   <p:cSld>
     <p:spTree>
       <p:nvGrpSpPr>
-        <p:cNvPr id="1" name="">
-          <a:extLst>
-            <a:ext uri="{FF2B5EF4-FFF2-40B4-BE49-F238E27FC236}">
-              <a16:creationId xmlns:a16="http://schemas.microsoft.com/office/drawing/2014/main" id="{29C24CC4-519F-806F-4E45-2A20BDB50C28}"/>
-            </a:ext>
-          </a:extLst>
-        </p:cNvPr>
+        <p:cNvPr id="1" name=""/>
         <p:cNvGrpSpPr/>
         <p:nvPr/>
       </p:nvGrpSpPr>
@@ -18557,10 +17134,10 @@
       </p:grpSpPr>
       <p:sp>
         <p:nvSpPr>
-          <p:cNvPr id="6" name="Titel 5">
-            <a:extLst>
-              <a:ext uri="{FF2B5EF4-FFF2-40B4-BE49-F238E27FC236}">
-                <a16:creationId xmlns:a16="http://schemas.microsoft.com/office/drawing/2014/main" id="{BF8424A1-DFE3-687F-387D-3632E640AC44}"/>
+          <p:cNvPr id="2" name="Title 1">
+            <a:extLst>
+              <a:ext uri="{FF2B5EF4-FFF2-40B4-BE49-F238E27FC236}">
+                <a16:creationId xmlns:a16="http://schemas.microsoft.com/office/drawing/2014/main" id="{CD45FB2F-2174-63F0-C58F-3333705E752C}"/>
               </a:ext>
             </a:extLst>
           </p:cNvPr>
@@ -18577,18 +17154,35 @@
           <a:lstStyle/>
           <a:p>
             <a:r>
-              <a:rPr lang="de-DE" dirty="0"/>
-              <a:t>Stub</a:t>
-            </a:r>
-          </a:p>
-        </p:txBody>
-      </p:sp>
-      <p:sp>
-        <p:nvSpPr>
-          <p:cNvPr id="7" name="Inhaltsplatzhalter 6">
-            <a:extLst>
-              <a:ext uri="{FF2B5EF4-FFF2-40B4-BE49-F238E27FC236}">
-                <a16:creationId xmlns:a16="http://schemas.microsoft.com/office/drawing/2014/main" id="{1DC0C020-AC2E-DAA1-5CEA-B68A6D055D19}"/>
+              <a:rPr lang="de-DE" dirty="0" err="1"/>
+              <a:t>Deployment</a:t>
+            </a:r>
+            <a:r>
+              <a:rPr lang="de-DE" dirty="0"/>
+              <a:t> </a:t>
+            </a:r>
+            <a:r>
+              <a:rPr lang="de-DE" dirty="0" err="1"/>
+              <a:t>with</a:t>
+            </a:r>
+            <a:r>
+              <a:rPr lang="de-DE" dirty="0"/>
+              <a:t> </a:t>
+            </a:r>
+            <a:r>
+              <a:rPr lang="de-DE" dirty="0" err="1"/>
+              <a:t>docker</a:t>
+            </a:r>
+            <a:endParaRPr lang="de-DE" dirty="0"/>
+          </a:p>
+        </p:txBody>
+      </p:sp>
+      <p:sp>
+        <p:nvSpPr>
+          <p:cNvPr id="3" name="Content Placeholder 2">
+            <a:extLst>
+              <a:ext uri="{FF2B5EF4-FFF2-40B4-BE49-F238E27FC236}">
+                <a16:creationId xmlns:a16="http://schemas.microsoft.com/office/drawing/2014/main" id="{A618E1DF-3350-29EF-2A8D-13423E0278AB}"/>
               </a:ext>
             </a:extLst>
           </p:cNvPr>
@@ -18610,16 +17204,385 @@
             </a:pPr>
             <a:r>
               <a:rPr lang="de-DE" dirty="0" err="1"/>
-              <a:t>Why</a:t>
-            </a:r>
-            <a:r>
-              <a:rPr lang="de-DE" dirty="0"/>
-              <a:t>?</a:t>
+              <a:t>package</a:t>
+            </a:r>
+            <a:r>
+              <a:rPr lang="de-DE" dirty="0"/>
+              <a:t> </a:t>
+            </a:r>
+            <a:r>
+              <a:rPr lang="de-DE" dirty="0" err="1"/>
+              <a:t>into</a:t>
+            </a:r>
+            <a:r>
+              <a:rPr lang="de-DE" dirty="0"/>
+              <a:t> a </a:t>
+            </a:r>
+            <a:r>
+              <a:rPr lang="de-DE" dirty="0" err="1"/>
+              <a:t>docker</a:t>
+            </a:r>
+            <a:r>
+              <a:rPr lang="de-DE" dirty="0"/>
+              <a:t> </a:t>
+            </a:r>
+            <a:r>
+              <a:rPr lang="de-DE" dirty="0" err="1"/>
+              <a:t>image</a:t>
+            </a:r>
+            <a:r>
+              <a:rPr lang="de-DE" dirty="0"/>
+              <a:t>, </a:t>
+            </a:r>
+            <a:r>
+              <a:rPr lang="de-DE" dirty="0" err="1"/>
+              <a:t>containing</a:t>
+            </a:r>
+            <a:r>
+              <a:rPr lang="de-DE" dirty="0"/>
+              <a:t>:</a:t>
             </a:r>
           </a:p>
           <a:p>
             <a:pPr marL="576263" lvl="2" indent="-342900"/>
             <a:r>
+              <a:rPr lang="de-DE" dirty="0"/>
+              <a:t>code-server (</a:t>
+            </a:r>
+            <a:r>
+              <a:rPr lang="de-DE" dirty="0" err="1"/>
+              <a:t>autostart</a:t>
+            </a:r>
+            <a:r>
+              <a:rPr lang="de-DE" dirty="0"/>
+              <a:t>)</a:t>
+            </a:r>
+          </a:p>
+          <a:p>
+            <a:pPr marL="576263" lvl="2" indent="-342900"/>
+            <a:r>
+              <a:rPr lang="de-DE" dirty="0" err="1"/>
+              <a:t>riot</a:t>
+            </a:r>
+            <a:r>
+              <a:rPr lang="de-DE" dirty="0"/>
+              <a:t>-web-tools:</a:t>
+            </a:r>
+          </a:p>
+          <a:p>
+            <a:pPr marL="800100" lvl="3" indent="-342900"/>
+            <a:r>
+              <a:rPr lang="de-DE" dirty="0" err="1"/>
+              <a:t>relay</a:t>
+            </a:r>
+            <a:r>
+              <a:rPr lang="de-DE" dirty="0"/>
+              <a:t> (</a:t>
+            </a:r>
+            <a:r>
+              <a:rPr lang="de-DE" dirty="0" err="1"/>
+              <a:t>autostart</a:t>
+            </a:r>
+            <a:r>
+              <a:rPr lang="de-DE" dirty="0"/>
+              <a:t>)</a:t>
+            </a:r>
+          </a:p>
+          <a:p>
+            <a:pPr marL="800100" lvl="3" indent="-342900"/>
+            <a:r>
+              <a:rPr lang="de-DE" dirty="0" err="1"/>
+              <a:t>shell</a:t>
+            </a:r>
+            <a:r>
+              <a:rPr lang="de-DE" dirty="0"/>
+              <a:t> (</a:t>
+            </a:r>
+            <a:r>
+              <a:rPr lang="de-DE" dirty="0" err="1"/>
+              <a:t>default</a:t>
+            </a:r>
+            <a:r>
+              <a:rPr lang="de-DE" dirty="0"/>
+              <a:t> </a:t>
+            </a:r>
+            <a:r>
+              <a:rPr lang="de-DE" dirty="0" err="1"/>
+              <a:t>shell</a:t>
+            </a:r>
+            <a:r>
+              <a:rPr lang="de-DE" dirty="0"/>
+              <a:t> </a:t>
+            </a:r>
+            <a:r>
+              <a:rPr lang="de-DE" dirty="0" err="1"/>
+              <a:t>for</a:t>
+            </a:r>
+            <a:r>
+              <a:rPr lang="de-DE" dirty="0"/>
+              <a:t> code-server)</a:t>
+            </a:r>
+          </a:p>
+          <a:p>
+            <a:pPr marL="800100" lvl="3" indent="-342900"/>
+            <a:r>
+              <a:rPr lang="de-DE" dirty="0" err="1"/>
+              <a:t>stub</a:t>
+            </a:r>
+            <a:endParaRPr lang="de-DE" dirty="0"/>
+          </a:p>
+          <a:p>
+            <a:pPr marL="576263" lvl="2" indent="-342900"/>
+            <a:r>
+              <a:rPr lang="de-DE" dirty="0"/>
+              <a:t>RIOT and </a:t>
+            </a:r>
+            <a:r>
+              <a:rPr lang="de-DE" dirty="0" err="1"/>
+              <a:t>its</a:t>
+            </a:r>
+            <a:r>
+              <a:rPr lang="de-DE" dirty="0"/>
+              <a:t> </a:t>
+            </a:r>
+            <a:r>
+              <a:rPr lang="de-DE" dirty="0" err="1"/>
+              <a:t>dependencies</a:t>
+            </a:r>
+            <a:endParaRPr lang="de-DE" dirty="0"/>
+          </a:p>
+          <a:p>
+            <a:pPr marL="576263" lvl="2" indent="-342900"/>
+            <a:r>
+              <a:rPr lang="de-DE" dirty="0" err="1"/>
+              <a:t>user</a:t>
+            </a:r>
+            <a:r>
+              <a:rPr lang="de-DE" dirty="0"/>
+              <a:t> </a:t>
+            </a:r>
+            <a:r>
+              <a:rPr lang="de-DE" dirty="0" err="1"/>
+              <a:t>environment</a:t>
+            </a:r>
+            <a:r>
+              <a:rPr lang="de-DE" dirty="0"/>
+              <a:t> /</a:t>
+            </a:r>
+            <a:r>
+              <a:rPr lang="de-DE" dirty="0" err="1"/>
+              <a:t>home</a:t>
+            </a:r>
+            <a:r>
+              <a:rPr lang="de-DE" dirty="0"/>
+              <a:t>/</a:t>
+            </a:r>
+            <a:r>
+              <a:rPr lang="de-DE" dirty="0" err="1"/>
+              <a:t>coder</a:t>
+            </a:r>
+            <a:endParaRPr lang="de-DE" dirty="0"/>
+          </a:p>
+          <a:p>
+            <a:pPr marL="576263" lvl="2" indent="-342900"/>
+            <a:endParaRPr lang="de-DE" dirty="0"/>
+          </a:p>
+        </p:txBody>
+      </p:sp>
+    </p:spTree>
+    <p:extLst>
+      <p:ext uri="{BB962C8B-B14F-4D97-AF65-F5344CB8AC3E}">
+        <p14:creationId xmlns:p14="http://schemas.microsoft.com/office/powerpoint/2010/main" val="741403339"/>
+      </p:ext>
+    </p:extLst>
+  </p:cSld>
+  <p:clrMapOvr>
+    <a:masterClrMapping/>
+  </p:clrMapOvr>
+</p:sld>
+</file>
+
+<file path=ppt/slides/slide12.xml><?xml version="1.0" encoding="utf-8"?>
+<p:sld xmlns:a="http://schemas.openxmlformats.org/drawingml/2006/main" xmlns:r="http://schemas.openxmlformats.org/officeDocument/2006/relationships" xmlns:p="http://schemas.openxmlformats.org/presentationml/2006/main">
+  <p:cSld>
+    <p:spTree>
+      <p:nvGrpSpPr>
+        <p:cNvPr id="1" name=""/>
+        <p:cNvGrpSpPr/>
+        <p:nvPr/>
+      </p:nvGrpSpPr>
+      <p:grpSpPr>
+        <a:xfrm>
+          <a:off x="0" y="0"/>
+          <a:ext cx="0" cy="0"/>
+          <a:chOff x="0" y="0"/>
+          <a:chExt cx="0" cy="0"/>
+        </a:xfrm>
+      </p:grpSpPr>
+      <p:sp>
+        <p:nvSpPr>
+          <p:cNvPr id="4" name="Title 3">
+            <a:extLst>
+              <a:ext uri="{FF2B5EF4-FFF2-40B4-BE49-F238E27FC236}">
+                <a16:creationId xmlns:a16="http://schemas.microsoft.com/office/drawing/2014/main" id="{22D7CE72-3797-ACC9-5BAD-04412603E9D3}"/>
+              </a:ext>
+            </a:extLst>
+          </p:cNvPr>
+          <p:cNvSpPr>
+            <a:spLocks noGrp="1"/>
+          </p:cNvSpPr>
+          <p:nvPr>
+            <p:ph type="title"/>
+          </p:nvPr>
+        </p:nvSpPr>
+        <p:spPr/>
+        <p:txBody>
+          <a:bodyPr/>
+          <a:lstStyle/>
+          <a:p>
+            <a:r>
+              <a:rPr lang="de-DE" dirty="0" err="1"/>
+              <a:t>Limitations</a:t>
+            </a:r>
+            <a:endParaRPr lang="de-DE" dirty="0"/>
+          </a:p>
+        </p:txBody>
+      </p:sp>
+      <p:sp>
+        <p:nvSpPr>
+          <p:cNvPr id="5" name="Content Placeholder 4">
+            <a:extLst>
+              <a:ext uri="{FF2B5EF4-FFF2-40B4-BE49-F238E27FC236}">
+                <a16:creationId xmlns:a16="http://schemas.microsoft.com/office/drawing/2014/main" id="{41E0F06F-E56A-DD06-AEFA-40963E674A72}"/>
+              </a:ext>
+            </a:extLst>
+          </p:cNvPr>
+          <p:cNvSpPr>
+            <a:spLocks noGrp="1"/>
+          </p:cNvSpPr>
+          <p:nvPr>
+            <p:ph idx="1"/>
+          </p:nvPr>
+        </p:nvSpPr>
+        <p:spPr/>
+        <p:txBody>
+          <a:bodyPr/>
+          <a:lstStyle/>
+          <a:p>
+            <a:pPr marL="342900" indent="-342900">
+              <a:buFont typeface="Arial" panose="020B0604020202020204" pitchFamily="34" charset="0"/>
+              <a:buChar char="•"/>
+            </a:pPr>
+            <a:r>
+              <a:rPr lang="de-DE" dirty="0"/>
+              <a:t>web APIs </a:t>
+            </a:r>
+            <a:r>
+              <a:rPr lang="de-DE" dirty="0" err="1"/>
+              <a:t>are</a:t>
+            </a:r>
+            <a:r>
+              <a:rPr lang="de-DE" dirty="0"/>
+              <a:t> </a:t>
+            </a:r>
+            <a:r>
+              <a:rPr lang="de-DE" dirty="0" err="1"/>
+              <a:t>very</a:t>
+            </a:r>
+            <a:r>
+              <a:rPr lang="de-DE" dirty="0"/>
+              <a:t> </a:t>
+            </a:r>
+            <a:r>
+              <a:rPr lang="de-DE" dirty="0" err="1"/>
+              <a:t>constricted</a:t>
+            </a:r>
+            <a:endParaRPr lang="de-DE" dirty="0"/>
+          </a:p>
+          <a:p>
+            <a:pPr marL="342900" indent="-342900">
+              <a:buFont typeface="Arial" panose="020B0604020202020204" pitchFamily="34" charset="0"/>
+              <a:buChar char="•"/>
+            </a:pPr>
+            <a:r>
+              <a:rPr lang="de-DE" dirty="0" err="1"/>
+              <a:t>confined</a:t>
+            </a:r>
+            <a:r>
+              <a:rPr lang="de-DE" dirty="0"/>
+              <a:t> </a:t>
+            </a:r>
+            <a:r>
+              <a:rPr lang="de-DE" dirty="0" err="1"/>
+              <a:t>VSCode</a:t>
+            </a:r>
+            <a:r>
+              <a:rPr lang="de-DE" dirty="0"/>
+              <a:t> web </a:t>
+            </a:r>
+            <a:r>
+              <a:rPr lang="de-DE" dirty="0" err="1"/>
+              <a:t>extension</a:t>
+            </a:r>
+            <a:r>
+              <a:rPr lang="de-DE" dirty="0"/>
+              <a:t> </a:t>
+            </a:r>
+            <a:r>
+              <a:rPr lang="de-DE" dirty="0" err="1"/>
+              <a:t>context</a:t>
+            </a:r>
+            <a:r>
+              <a:rPr lang="de-DE" dirty="0"/>
+              <a:t> </a:t>
+            </a:r>
+          </a:p>
+          <a:p>
+            <a:pPr marL="342900" indent="-342900">
+              <a:buFont typeface="Arial" panose="020B0604020202020204" pitchFamily="34" charset="0"/>
+              <a:buChar char="•"/>
+            </a:pPr>
+            <a:r>
+              <a:rPr lang="de-DE" dirty="0" err="1"/>
+              <a:t>device</a:t>
+            </a:r>
+            <a:r>
+              <a:rPr lang="de-DE" dirty="0"/>
+              <a:t> support </a:t>
+            </a:r>
+            <a:r>
+              <a:rPr lang="de-DE" dirty="0" err="1"/>
+              <a:t>has</a:t>
+            </a:r>
+            <a:r>
+              <a:rPr lang="de-DE" dirty="0"/>
+              <a:t> to </a:t>
+            </a:r>
+            <a:r>
+              <a:rPr lang="de-DE" dirty="0" err="1"/>
+              <a:t>be</a:t>
+            </a:r>
+            <a:r>
+              <a:rPr lang="de-DE" dirty="0"/>
+              <a:t> </a:t>
+            </a:r>
+            <a:r>
+              <a:rPr lang="de-DE" dirty="0" err="1"/>
+              <a:t>added</a:t>
+            </a:r>
+            <a:r>
+              <a:rPr lang="de-DE" dirty="0"/>
+              <a:t> </a:t>
+            </a:r>
+            <a:r>
+              <a:rPr lang="de-DE" dirty="0" err="1"/>
+              <a:t>manually</a:t>
+            </a:r>
+            <a:r>
+              <a:rPr lang="de-DE" dirty="0"/>
+              <a:t> (flasher.js + </a:t>
+            </a:r>
+            <a:r>
               <a:rPr lang="de-DE" dirty="0" err="1"/>
               <a:t>make</a:t>
             </a:r>
@@ -18629,51 +17592,308 @@
             </a:r>
             <a:r>
               <a:rPr lang="de-DE" dirty="0" err="1"/>
+              <a:t>patch</a:t>
+            </a:r>
+            <a:r>
+              <a:rPr lang="de-DE" dirty="0"/>
+              <a:t>)</a:t>
+            </a:r>
+          </a:p>
+          <a:p>
+            <a:pPr marL="342900" indent="-342900">
+              <a:buFont typeface="Arial" panose="020B0604020202020204" pitchFamily="34" charset="0"/>
+              <a:buChar char="•"/>
+            </a:pPr>
+            <a:r>
+              <a:rPr lang="de-DE" dirty="0" err="1"/>
+              <a:t>some</a:t>
+            </a:r>
+            <a:r>
+              <a:rPr lang="de-DE" dirty="0"/>
+              <a:t> </a:t>
+            </a:r>
+            <a:r>
+              <a:rPr lang="de-DE" dirty="0" err="1"/>
+              <a:t>devices</a:t>
+            </a:r>
+            <a:r>
+              <a:rPr lang="de-DE" dirty="0"/>
+              <a:t> still </a:t>
+            </a:r>
+            <a:r>
+              <a:rPr lang="de-DE" dirty="0" err="1"/>
+              <a:t>require</a:t>
+            </a:r>
+            <a:r>
+              <a:rPr lang="de-DE" dirty="0"/>
+              <a:t> a </a:t>
+            </a:r>
+            <a:r>
+              <a:rPr lang="de-DE" dirty="0" err="1"/>
+              <a:t>driver</a:t>
+            </a:r>
+            <a:r>
+              <a:rPr lang="de-DE" dirty="0"/>
+              <a:t> to </a:t>
+            </a:r>
+            <a:r>
+              <a:rPr lang="de-DE" dirty="0" err="1"/>
+              <a:t>be</a:t>
+            </a:r>
+            <a:r>
+              <a:rPr lang="de-DE" dirty="0"/>
+              <a:t> </a:t>
+            </a:r>
+            <a:r>
+              <a:rPr lang="de-DE" dirty="0" err="1"/>
+              <a:t>recognized</a:t>
+            </a:r>
+            <a:r>
+              <a:rPr lang="de-DE" dirty="0"/>
+              <a:t> </a:t>
+            </a:r>
+            <a:r>
+              <a:rPr lang="de-DE" dirty="0" err="1"/>
+              <a:t>by</a:t>
+            </a:r>
+            <a:r>
+              <a:rPr lang="de-DE" dirty="0"/>
+              <a:t> </a:t>
+            </a:r>
+            <a:r>
+              <a:rPr lang="de-DE" dirty="0" err="1"/>
+              <a:t>your</a:t>
+            </a:r>
+            <a:r>
+              <a:rPr lang="de-DE" dirty="0"/>
+              <a:t> </a:t>
+            </a:r>
+            <a:r>
+              <a:rPr lang="de-DE" dirty="0" err="1"/>
+              <a:t>os</a:t>
+            </a:r>
+            <a:endParaRPr lang="de-DE" dirty="0"/>
+          </a:p>
+          <a:p>
+            <a:pPr marL="342900" indent="-342900">
+              <a:buFont typeface="Arial" panose="020B0604020202020204" pitchFamily="34" charset="0"/>
+              <a:buChar char="•"/>
+            </a:pPr>
+            <a:r>
+              <a:rPr lang="de-DE" dirty="0"/>
+              <a:t>1 </a:t>
+            </a:r>
+            <a:r>
+              <a:rPr lang="de-DE" dirty="0" err="1"/>
+              <a:t>container</a:t>
+            </a:r>
+            <a:r>
+              <a:rPr lang="de-DE" dirty="0"/>
+              <a:t> – 1 </a:t>
+            </a:r>
+            <a:r>
+              <a:rPr lang="de-DE" dirty="0" err="1"/>
+              <a:t>user</a:t>
+            </a:r>
+            <a:endParaRPr lang="de-DE" dirty="0"/>
+          </a:p>
+          <a:p>
+            <a:pPr marL="576263" lvl="2" indent="-342900"/>
+            <a:r>
+              <a:rPr lang="de-DE" dirty="0"/>
+              <a:t>will </a:t>
+            </a:r>
+            <a:r>
+              <a:rPr lang="de-DE" dirty="0" err="1"/>
+              <a:t>require</a:t>
+            </a:r>
+            <a:r>
+              <a:rPr lang="de-DE" dirty="0"/>
+              <a:t> a </a:t>
+            </a:r>
+            <a:r>
+              <a:rPr lang="de-DE" dirty="0" err="1"/>
+              <a:t>solution</a:t>
+            </a:r>
+            <a:r>
+              <a:rPr lang="de-DE" dirty="0"/>
+              <a:t> </a:t>
+            </a:r>
+            <a:r>
+              <a:rPr lang="de-DE" dirty="0" err="1"/>
+              <a:t>that</a:t>
+            </a:r>
+            <a:r>
+              <a:rPr lang="de-DE" dirty="0"/>
+              <a:t> </a:t>
+            </a:r>
+            <a:r>
+              <a:rPr lang="de-DE" dirty="0" err="1"/>
+              <a:t>any</a:t>
+            </a:r>
+            <a:r>
+              <a:rPr lang="de-DE" dirty="0"/>
+              <a:t> </a:t>
+            </a:r>
+            <a:r>
+              <a:rPr lang="de-DE" dirty="0" err="1"/>
+              <a:t>user</a:t>
+            </a:r>
+            <a:r>
+              <a:rPr lang="de-DE" dirty="0"/>
+              <a:t> </a:t>
+            </a:r>
+            <a:r>
+              <a:rPr lang="de-DE" dirty="0" err="1"/>
+              <a:t>can</a:t>
+            </a:r>
+            <a:r>
+              <a:rPr lang="de-DE" dirty="0"/>
+              <a:t> </a:t>
+            </a:r>
+            <a:r>
+              <a:rPr lang="de-DE" dirty="0" err="1"/>
+              <a:t>spinup</a:t>
+            </a:r>
+            <a:r>
+              <a:rPr lang="de-DE" dirty="0"/>
+              <a:t> </a:t>
+            </a:r>
+            <a:r>
+              <a:rPr lang="de-DE" dirty="0" err="1"/>
+              <a:t>their</a:t>
+            </a:r>
+            <a:r>
+              <a:rPr lang="de-DE" dirty="0"/>
+              <a:t> </a:t>
+            </a:r>
+            <a:r>
+              <a:rPr lang="de-DE" dirty="0" err="1"/>
+              <a:t>container</a:t>
+            </a:r>
+            <a:endParaRPr lang="de-DE" dirty="0"/>
+          </a:p>
+          <a:p>
+            <a:pPr marL="342900" indent="-342900">
+              <a:buFont typeface="Arial" panose="020B0604020202020204" pitchFamily="34" charset="0"/>
+              <a:buChar char="•"/>
+            </a:pPr>
+            <a:endParaRPr lang="de-DE" dirty="0"/>
+          </a:p>
+        </p:txBody>
+      </p:sp>
+    </p:spTree>
+    <p:extLst>
+      <p:ext uri="{BB962C8B-B14F-4D97-AF65-F5344CB8AC3E}">
+        <p14:creationId xmlns:p14="http://schemas.microsoft.com/office/powerpoint/2010/main" val="1883924250"/>
+      </p:ext>
+    </p:extLst>
+  </p:cSld>
+  <p:clrMapOvr>
+    <a:masterClrMapping/>
+  </p:clrMapOvr>
+</p:sld>
+</file>
+
+<file path=ppt/slides/slide13.xml><?xml version="1.0" encoding="utf-8"?>
+<p:sld xmlns:a="http://schemas.openxmlformats.org/drawingml/2006/main" xmlns:r="http://schemas.openxmlformats.org/officeDocument/2006/relationships" xmlns:p="http://schemas.openxmlformats.org/presentationml/2006/main">
+  <p:cSld>
+    <p:spTree>
+      <p:nvGrpSpPr>
+        <p:cNvPr id="1" name=""/>
+        <p:cNvGrpSpPr/>
+        <p:nvPr/>
+      </p:nvGrpSpPr>
+      <p:grpSpPr>
+        <a:xfrm>
+          <a:off x="0" y="0"/>
+          <a:ext cx="0" cy="0"/>
+          <a:chOff x="0" y="0"/>
+          <a:chExt cx="0" cy="0"/>
+        </a:xfrm>
+      </p:grpSpPr>
+      <p:sp>
+        <p:nvSpPr>
+          <p:cNvPr id="4" name="Title 3">
+            <a:extLst>
+              <a:ext uri="{FF2B5EF4-FFF2-40B4-BE49-F238E27FC236}">
+                <a16:creationId xmlns:a16="http://schemas.microsoft.com/office/drawing/2014/main" id="{2E5687C6-B809-8B7A-9B61-AC4753C91414}"/>
+              </a:ext>
+            </a:extLst>
+          </p:cNvPr>
+          <p:cNvSpPr>
+            <a:spLocks noGrp="1"/>
+          </p:cNvSpPr>
+          <p:nvPr>
+            <p:ph type="title"/>
+          </p:nvPr>
+        </p:nvSpPr>
+        <p:spPr/>
+        <p:txBody>
+          <a:bodyPr/>
+          <a:lstStyle/>
+          <a:p>
+            <a:r>
+              <a:rPr lang="de-DE" dirty="0"/>
+              <a:t>Features / Support</a:t>
+            </a:r>
+          </a:p>
+        </p:txBody>
+      </p:sp>
+      <p:sp>
+        <p:nvSpPr>
+          <p:cNvPr id="5" name="Content Placeholder 4">
+            <a:extLst>
+              <a:ext uri="{FF2B5EF4-FFF2-40B4-BE49-F238E27FC236}">
+                <a16:creationId xmlns:a16="http://schemas.microsoft.com/office/drawing/2014/main" id="{4BE06B6A-4CEB-8480-893A-23E5FB9B4D9F}"/>
+              </a:ext>
+            </a:extLst>
+          </p:cNvPr>
+          <p:cNvSpPr>
+            <a:spLocks noGrp="1"/>
+          </p:cNvSpPr>
+          <p:nvPr>
+            <p:ph idx="1"/>
+          </p:nvPr>
+        </p:nvSpPr>
+        <p:spPr/>
+        <p:txBody>
+          <a:bodyPr/>
+          <a:lstStyle/>
+          <a:p>
+            <a:pPr marL="342900" indent="-342900">
+              <a:buFont typeface="Arial" panose="020B0604020202020204" pitchFamily="34" charset="0"/>
+              <a:buChar char="•"/>
+            </a:pPr>
+            <a:r>
+              <a:rPr lang="de-DE" dirty="0" err="1"/>
               <a:t>flash</a:t>
             </a:r>
             <a:r>
               <a:rPr lang="de-DE" dirty="0"/>
-              <a:t> -&gt; </a:t>
-            </a:r>
-            <a:r>
-              <a:rPr lang="de-DE" dirty="0" err="1"/>
-              <a:t>parsable</a:t>
-            </a:r>
-            <a:endParaRPr lang="de-DE" dirty="0"/>
+              <a:t> and </a:t>
+            </a:r>
+            <a:r>
+              <a:rPr lang="de-DE" dirty="0" err="1"/>
+              <a:t>term</a:t>
+            </a:r>
+            <a:r>
+              <a:rPr lang="de-DE" dirty="0"/>
+              <a:t> via:</a:t>
+            </a:r>
           </a:p>
           <a:p>
             <a:pPr marL="576263" lvl="2" indent="-342900"/>
             <a:r>
               <a:rPr lang="de-DE" dirty="0"/>
-              <a:t>./my_flash_script.sh -&gt; </a:t>
-            </a:r>
-            <a:r>
-              <a:rPr lang="de-DE" dirty="0" err="1"/>
-              <a:t>more</a:t>
-            </a:r>
-            <a:r>
-              <a:rPr lang="de-DE" dirty="0"/>
-              <a:t> </a:t>
-            </a:r>
-            <a:r>
-              <a:rPr lang="de-DE" dirty="0" err="1"/>
-              <a:t>difficult</a:t>
-            </a:r>
-            <a:endParaRPr lang="de-DE" dirty="0"/>
+              <a:t>UI</a:t>
+            </a:r>
           </a:p>
           <a:p>
             <a:pPr marL="576263" lvl="2" indent="-342900"/>
             <a:r>
               <a:rPr lang="de-DE" dirty="0"/>
-              <a:t>./</a:t>
-            </a:r>
-            <a:r>
-              <a:rPr lang="de-DE" dirty="0" err="1"/>
-              <a:t>my_flash_tool.bin</a:t>
-            </a:r>
-            <a:r>
-              <a:rPr lang="de-DE" dirty="0"/>
-              <a:t> -&gt; impossible</a:t>
+              <a:t>CLI</a:t>
             </a:r>
           </a:p>
           <a:p>
@@ -18682,270 +17902,72 @@
               <a:buChar char="•"/>
             </a:pPr>
             <a:r>
-              <a:rPr lang="de-DE" dirty="0"/>
-              <a:t>Solution:</a:t>
+              <a:rPr lang="de-DE" dirty="0" err="1"/>
+              <a:t>coherent</a:t>
+            </a:r>
+            <a:r>
+              <a:rPr lang="de-DE" dirty="0"/>
+              <a:t> UI / CLI </a:t>
+            </a:r>
+            <a:r>
+              <a:rPr lang="de-DE" dirty="0" err="1"/>
+              <a:t>experience</a:t>
+            </a:r>
+            <a:endParaRPr lang="de-DE" dirty="0"/>
+          </a:p>
+          <a:p>
+            <a:pPr marL="342900" lvl="1" indent="-342900">
+              <a:buFont typeface="Arial" panose="020B0604020202020204" pitchFamily="34" charset="0"/>
+              <a:buChar char="•"/>
+            </a:pPr>
+            <a:r>
+              <a:rPr lang="de-DE" dirty="0"/>
+              <a:t>multiple </a:t>
+            </a:r>
+            <a:r>
+              <a:rPr lang="de-DE" dirty="0" err="1"/>
+              <a:t>devices</a:t>
+            </a:r>
+            <a:r>
+              <a:rPr lang="de-DE" dirty="0"/>
+              <a:t> and </a:t>
+            </a:r>
+            <a:r>
+              <a:rPr lang="de-DE" dirty="0" err="1"/>
+              <a:t>projects</a:t>
+            </a:r>
+            <a:endParaRPr lang="de-DE" dirty="0"/>
+          </a:p>
+          <a:p>
+            <a:pPr marL="342900" lvl="1" indent="-342900">
+              <a:buFont typeface="Arial" panose="020B0604020202020204" pitchFamily="34" charset="0"/>
+              <a:buChar char="•"/>
+            </a:pPr>
+            <a:r>
+              <a:rPr lang="de-DE" dirty="0" err="1"/>
+              <a:t>boards</a:t>
+            </a:r>
+            <a:r>
+              <a:rPr lang="de-DE" dirty="0"/>
+              <a:t>:</a:t>
             </a:r>
           </a:p>
           <a:p>
             <a:pPr marL="576263" lvl="2" indent="-342900"/>
             <a:r>
-              <a:rPr lang="de-DE" dirty="0" err="1"/>
-              <a:t>patch</a:t>
-            </a:r>
-            <a:r>
-              <a:rPr lang="de-DE" dirty="0"/>
-              <a:t> </a:t>
-            </a:r>
-            <a:r>
-              <a:rPr lang="de-DE" dirty="0" err="1"/>
-              <a:t>riot</a:t>
-            </a:r>
-            <a:r>
-              <a:rPr lang="de-DE" dirty="0"/>
-              <a:t> </a:t>
-            </a:r>
-            <a:r>
-              <a:rPr lang="de-DE" dirty="0" err="1"/>
-              <a:t>slightly</a:t>
-            </a:r>
-            <a:r>
-              <a:rPr lang="de-DE" dirty="0"/>
-              <a:t> -&gt; </a:t>
-            </a:r>
-            <a:r>
-              <a:rPr lang="de-DE" dirty="0" err="1"/>
-              <a:t>adjust</a:t>
-            </a:r>
-            <a:r>
-              <a:rPr lang="de-DE" dirty="0"/>
-              <a:t> </a:t>
-            </a:r>
-            <a:r>
-              <a:rPr lang="de-DE" dirty="0" err="1"/>
-              <a:t>make</a:t>
-            </a:r>
-            <a:r>
-              <a:rPr lang="de-DE" dirty="0"/>
-              <a:t> </a:t>
-            </a:r>
-            <a:r>
-              <a:rPr lang="de-DE" dirty="0" err="1"/>
-              <a:t>targets</a:t>
-            </a:r>
-            <a:r>
-              <a:rPr lang="de-DE" dirty="0"/>
-              <a:t> to </a:t>
-            </a:r>
-            <a:r>
-              <a:rPr lang="de-DE" dirty="0" err="1"/>
-              <a:t>call</a:t>
-            </a:r>
-            <a:r>
-              <a:rPr lang="de-DE" dirty="0"/>
-              <a:t> a </a:t>
-            </a:r>
-            <a:r>
-              <a:rPr lang="de-DE" dirty="0" err="1"/>
-              <a:t>stub</a:t>
-            </a:r>
-            <a:r>
-              <a:rPr lang="de-DE" dirty="0"/>
-              <a:t> </a:t>
-            </a:r>
-            <a:r>
-              <a:rPr lang="de-DE" dirty="0" err="1"/>
-              <a:t>instead</a:t>
-            </a:r>
-            <a:endParaRPr lang="de-DE" dirty="0"/>
+              <a:rPr lang="de-DE" dirty="0"/>
+              <a:t>adafruit-nrf52840 (RIOT kit)</a:t>
+            </a:r>
           </a:p>
           <a:p>
             <a:pPr marL="576263" lvl="2" indent="-342900"/>
             <a:r>
               <a:rPr lang="de-DE" dirty="0" err="1"/>
-              <a:t>stub</a:t>
-            </a:r>
-            <a:r>
-              <a:rPr lang="de-DE" dirty="0"/>
-              <a:t> </a:t>
-            </a:r>
-            <a:r>
-              <a:rPr lang="de-DE" dirty="0" err="1"/>
-              <a:t>is</a:t>
-            </a:r>
-            <a:r>
-              <a:rPr lang="de-DE" dirty="0"/>
-              <a:t> </a:t>
-            </a:r>
-            <a:r>
-              <a:rPr lang="de-DE" dirty="0" err="1"/>
-              <a:t>called</a:t>
-            </a:r>
-            <a:r>
-              <a:rPr lang="de-DE" dirty="0"/>
-              <a:t> </a:t>
-            </a:r>
-            <a:r>
-              <a:rPr lang="de-DE" dirty="0" err="1"/>
-              <a:t>as</a:t>
-            </a:r>
-            <a:r>
-              <a:rPr lang="de-DE" dirty="0"/>
-              <a:t> </a:t>
-            </a:r>
-            <a:r>
-              <a:rPr lang="de-DE" dirty="0" err="1"/>
-              <a:t>flasher</a:t>
-            </a:r>
-            <a:r>
-              <a:rPr lang="de-DE" dirty="0"/>
-              <a:t> </a:t>
-            </a:r>
-            <a:r>
-              <a:rPr lang="de-DE" dirty="0" err="1"/>
-              <a:t>or</a:t>
-            </a:r>
-            <a:r>
-              <a:rPr lang="de-DE" dirty="0"/>
-              <a:t> </a:t>
-            </a:r>
-            <a:r>
-              <a:rPr lang="de-DE" dirty="0" err="1"/>
-              <a:t>serial</a:t>
-            </a:r>
-            <a:r>
-              <a:rPr lang="de-DE" dirty="0"/>
-              <a:t> </a:t>
-            </a:r>
-            <a:r>
-              <a:rPr lang="de-DE" dirty="0" err="1"/>
-              <a:t>tool</a:t>
-            </a:r>
-            <a:r>
-              <a:rPr lang="de-DE" dirty="0"/>
-              <a:t> </a:t>
-            </a:r>
-            <a:r>
-              <a:rPr lang="de-DE" dirty="0" err="1"/>
-              <a:t>with</a:t>
-            </a:r>
-            <a:r>
-              <a:rPr lang="de-DE" dirty="0"/>
-              <a:t> </a:t>
-            </a:r>
-            <a:r>
-              <a:rPr lang="de-DE" dirty="0" err="1"/>
-              <a:t>their</a:t>
-            </a:r>
-            <a:r>
-              <a:rPr lang="de-DE" dirty="0"/>
-              <a:t> </a:t>
-            </a:r>
-            <a:r>
-              <a:rPr lang="de-DE" dirty="0" err="1"/>
-              <a:t>respective</a:t>
-            </a:r>
-            <a:r>
-              <a:rPr lang="de-DE" dirty="0"/>
-              <a:t> </a:t>
-            </a:r>
-            <a:r>
-              <a:rPr lang="de-DE" dirty="0" err="1"/>
-              <a:t>args</a:t>
-            </a:r>
-            <a:endParaRPr lang="de-DE" dirty="0"/>
-          </a:p>
-          <a:p>
-            <a:pPr marL="576263" lvl="2" indent="-342900"/>
-            <a:r>
-              <a:rPr lang="de-DE" dirty="0" err="1"/>
-              <a:t>stub</a:t>
-            </a:r>
-            <a:r>
-              <a:rPr lang="de-DE" dirty="0"/>
-              <a:t> </a:t>
-            </a:r>
-            <a:r>
-              <a:rPr lang="de-DE" dirty="0" err="1"/>
-              <a:t>communicates</a:t>
-            </a:r>
-            <a:r>
-              <a:rPr lang="de-DE" dirty="0"/>
-              <a:t> </a:t>
-            </a:r>
-            <a:r>
-              <a:rPr lang="de-DE" dirty="0" err="1"/>
-              <a:t>with</a:t>
-            </a:r>
-            <a:r>
-              <a:rPr lang="de-DE" dirty="0"/>
-              <a:t> </a:t>
-            </a:r>
-            <a:r>
-              <a:rPr lang="de-DE" dirty="0" err="1"/>
-              <a:t>the</a:t>
-            </a:r>
-            <a:r>
-              <a:rPr lang="de-DE" dirty="0"/>
-              <a:t> </a:t>
-            </a:r>
-            <a:r>
-              <a:rPr lang="de-DE" dirty="0" err="1"/>
-              <a:t>client</a:t>
-            </a:r>
-            <a:r>
-              <a:rPr lang="de-DE" dirty="0"/>
-              <a:t>:</a:t>
-            </a:r>
-          </a:p>
-          <a:p>
-            <a:pPr marL="800100" lvl="3" indent="-342900"/>
-            <a:r>
-              <a:rPr lang="de-DE" dirty="0" err="1"/>
-              <a:t>invokes</a:t>
-            </a:r>
-            <a:r>
-              <a:rPr lang="de-DE" dirty="0"/>
-              <a:t> </a:t>
-            </a:r>
-            <a:r>
-              <a:rPr lang="de-DE" dirty="0" err="1"/>
-              <a:t>commands</a:t>
-            </a:r>
-            <a:endParaRPr lang="de-DE" dirty="0"/>
-          </a:p>
-          <a:p>
-            <a:pPr marL="800100" lvl="3" indent="-342900"/>
-            <a:r>
-              <a:rPr lang="de-DE" dirty="0" err="1"/>
-              <a:t>displays</a:t>
-            </a:r>
-            <a:r>
-              <a:rPr lang="de-DE" dirty="0"/>
-              <a:t> </a:t>
-            </a:r>
-            <a:r>
-              <a:rPr lang="de-DE" dirty="0" err="1"/>
-              <a:t>output</a:t>
-            </a:r>
-            <a:endParaRPr lang="de-DE" dirty="0"/>
-          </a:p>
-          <a:p>
-            <a:pPr marL="800100" lvl="3" indent="-342900"/>
-            <a:r>
-              <a:rPr lang="de-DE" dirty="0" err="1"/>
-              <a:t>relays</a:t>
-            </a:r>
-            <a:r>
-              <a:rPr lang="de-DE" dirty="0"/>
-              <a:t> </a:t>
-            </a:r>
-            <a:r>
-              <a:rPr lang="de-DE" dirty="0" err="1"/>
-              <a:t>user</a:t>
-            </a:r>
-            <a:r>
-              <a:rPr lang="de-DE" dirty="0"/>
-              <a:t> input</a:t>
+              <a:t>esp</a:t>
+            </a:r>
+            <a:r>
+              <a:rPr lang="de-DE" dirty="0"/>
+              <a:t> (all)</a:t>
             </a:r>
           </a:p>
         </p:txBody>
@@ -18953,7 +17975,622 @@
     </p:spTree>
     <p:extLst>
       <p:ext uri="{BB962C8B-B14F-4D97-AF65-F5344CB8AC3E}">
-        <p14:creationId xmlns:p14="http://schemas.microsoft.com/office/powerpoint/2010/main" val="145542316"/>
+        <p14:creationId xmlns:p14="http://schemas.microsoft.com/office/powerpoint/2010/main" val="4015091510"/>
+      </p:ext>
+    </p:extLst>
+  </p:cSld>
+  <p:clrMapOvr>
+    <a:masterClrMapping/>
+  </p:clrMapOvr>
+</p:sld>
+</file>
+
+<file path=ppt/slides/slide14.xml><?xml version="1.0" encoding="utf-8"?>
+<p:sld xmlns:a="http://schemas.openxmlformats.org/drawingml/2006/main" xmlns:r="http://schemas.openxmlformats.org/officeDocument/2006/relationships" xmlns:p="http://schemas.openxmlformats.org/presentationml/2006/main">
+  <p:cSld>
+    <p:spTree>
+      <p:nvGrpSpPr>
+        <p:cNvPr id="1" name=""/>
+        <p:cNvGrpSpPr/>
+        <p:nvPr/>
+      </p:nvGrpSpPr>
+      <p:grpSpPr>
+        <a:xfrm>
+          <a:off x="0" y="0"/>
+          <a:ext cx="0" cy="0"/>
+          <a:chOff x="0" y="0"/>
+          <a:chExt cx="0" cy="0"/>
+        </a:xfrm>
+      </p:grpSpPr>
+      <p:sp>
+        <p:nvSpPr>
+          <p:cNvPr id="4" name="Title 3">
+            <a:extLst>
+              <a:ext uri="{FF2B5EF4-FFF2-40B4-BE49-F238E27FC236}">
+                <a16:creationId xmlns:a16="http://schemas.microsoft.com/office/drawing/2014/main" id="{274D4D3B-073D-1EBF-720B-3E19ACC6FC0B}"/>
+              </a:ext>
+            </a:extLst>
+          </p:cNvPr>
+          <p:cNvSpPr>
+            <a:spLocks noGrp="1"/>
+          </p:cNvSpPr>
+          <p:nvPr>
+            <p:ph type="title"/>
+          </p:nvPr>
+        </p:nvSpPr>
+        <p:spPr/>
+        <p:txBody>
+          <a:bodyPr/>
+          <a:lstStyle/>
+          <a:p>
+            <a:r>
+              <a:rPr lang="de-DE" dirty="0"/>
+              <a:t>Demo</a:t>
+            </a:r>
+          </a:p>
+        </p:txBody>
+      </p:sp>
+      <p:sp>
+        <p:nvSpPr>
+          <p:cNvPr id="5" name="Text Placeholder 4">
+            <a:extLst>
+              <a:ext uri="{FF2B5EF4-FFF2-40B4-BE49-F238E27FC236}">
+                <a16:creationId xmlns:a16="http://schemas.microsoft.com/office/drawing/2014/main" id="{E2CE912E-1494-0E7F-BF9A-7E15C243C047}"/>
+              </a:ext>
+            </a:extLst>
+          </p:cNvPr>
+          <p:cNvSpPr>
+            <a:spLocks noGrp="1"/>
+          </p:cNvSpPr>
+          <p:nvPr>
+            <p:ph type="body" sz="quarter" idx="10"/>
+          </p:nvPr>
+        </p:nvSpPr>
+        <p:spPr/>
+        <p:txBody>
+          <a:bodyPr/>
+          <a:lstStyle/>
+          <a:p>
+            <a:endParaRPr lang="de-DE"/>
+          </a:p>
+        </p:txBody>
+      </p:sp>
+    </p:spTree>
+    <p:extLst>
+      <p:ext uri="{BB962C8B-B14F-4D97-AF65-F5344CB8AC3E}">
+        <p14:creationId xmlns:p14="http://schemas.microsoft.com/office/powerpoint/2010/main" val="2299765845"/>
+      </p:ext>
+    </p:extLst>
+  </p:cSld>
+  <p:clrMapOvr>
+    <a:masterClrMapping/>
+  </p:clrMapOvr>
+</p:sld>
+</file>
+
+<file path=ppt/slides/slide15.xml><?xml version="1.0" encoding="utf-8"?>
+<p:sld xmlns:a="http://schemas.openxmlformats.org/drawingml/2006/main" xmlns:r="http://schemas.openxmlformats.org/officeDocument/2006/relationships" xmlns:p="http://schemas.openxmlformats.org/presentationml/2006/main">
+  <p:cSld>
+    <p:spTree>
+      <p:nvGrpSpPr>
+        <p:cNvPr id="1" name=""/>
+        <p:cNvGrpSpPr/>
+        <p:nvPr/>
+      </p:nvGrpSpPr>
+      <p:grpSpPr>
+        <a:xfrm>
+          <a:off x="0" y="0"/>
+          <a:ext cx="0" cy="0"/>
+          <a:chOff x="0" y="0"/>
+          <a:chExt cx="0" cy="0"/>
+        </a:xfrm>
+      </p:grpSpPr>
+      <p:sp>
+        <p:nvSpPr>
+          <p:cNvPr id="4" name="Title 3">
+            <a:extLst>
+              <a:ext uri="{FF2B5EF4-FFF2-40B4-BE49-F238E27FC236}">
+                <a16:creationId xmlns:a16="http://schemas.microsoft.com/office/drawing/2014/main" id="{9A6B971D-CC07-16FE-2A20-571BD369767F}"/>
+              </a:ext>
+            </a:extLst>
+          </p:cNvPr>
+          <p:cNvSpPr>
+            <a:spLocks noGrp="1"/>
+          </p:cNvSpPr>
+          <p:nvPr>
+            <p:ph type="title"/>
+          </p:nvPr>
+        </p:nvSpPr>
+        <p:spPr/>
+        <p:txBody>
+          <a:bodyPr/>
+          <a:lstStyle/>
+          <a:p>
+            <a:r>
+              <a:rPr lang="de-DE" dirty="0"/>
+              <a:t>Future Work / Final </a:t>
+            </a:r>
+            <a:r>
+              <a:rPr lang="de-DE" dirty="0" err="1"/>
+              <a:t>Deployment</a:t>
+            </a:r>
+            <a:endParaRPr lang="de-DE" dirty="0"/>
+          </a:p>
+        </p:txBody>
+      </p:sp>
+      <p:sp>
+        <p:nvSpPr>
+          <p:cNvPr id="5" name="Content Placeholder 4">
+            <a:extLst>
+              <a:ext uri="{FF2B5EF4-FFF2-40B4-BE49-F238E27FC236}">
+                <a16:creationId xmlns:a16="http://schemas.microsoft.com/office/drawing/2014/main" id="{6A36BC87-2004-A110-D896-7BC92E3A45A7}"/>
+              </a:ext>
+            </a:extLst>
+          </p:cNvPr>
+          <p:cNvSpPr>
+            <a:spLocks noGrp="1"/>
+          </p:cNvSpPr>
+          <p:nvPr>
+            <p:ph idx="1"/>
+          </p:nvPr>
+        </p:nvSpPr>
+        <p:spPr/>
+        <p:txBody>
+          <a:bodyPr/>
+          <a:lstStyle/>
+          <a:p>
+            <a:r>
+              <a:rPr lang="de-DE" dirty="0" err="1"/>
+              <a:t>we</a:t>
+            </a:r>
+            <a:r>
+              <a:rPr lang="de-DE" dirty="0"/>
+              <a:t> </a:t>
+            </a:r>
+            <a:r>
+              <a:rPr lang="de-DE" dirty="0" err="1"/>
+              <a:t>provide</a:t>
+            </a:r>
+            <a:r>
+              <a:rPr lang="de-DE" dirty="0"/>
+              <a:t>:</a:t>
+            </a:r>
+          </a:p>
+          <a:p>
+            <a:pPr marL="342900" indent="-342900">
+              <a:buFont typeface="Arial" panose="020B0604020202020204" pitchFamily="34" charset="0"/>
+              <a:buChar char="•"/>
+            </a:pPr>
+            <a:r>
+              <a:rPr lang="de-DE" dirty="0" err="1"/>
+              <a:t>docker</a:t>
+            </a:r>
+            <a:r>
+              <a:rPr lang="de-DE" dirty="0"/>
+              <a:t> </a:t>
+            </a:r>
+            <a:r>
+              <a:rPr lang="de-DE" dirty="0" err="1"/>
+              <a:t>container</a:t>
+            </a:r>
+            <a:r>
+              <a:rPr lang="de-DE" dirty="0"/>
+              <a:t> </a:t>
+            </a:r>
+            <a:r>
+              <a:rPr lang="de-DE" dirty="0" err="1"/>
+              <a:t>with</a:t>
+            </a:r>
+            <a:r>
+              <a:rPr lang="de-DE" dirty="0"/>
+              <a:t> </a:t>
+            </a:r>
+            <a:r>
+              <a:rPr lang="de-DE" dirty="0" err="1"/>
+              <a:t>editor</a:t>
+            </a:r>
+            <a:r>
+              <a:rPr lang="de-DE" dirty="0"/>
+              <a:t>, </a:t>
+            </a:r>
+            <a:r>
+              <a:rPr lang="de-DE" dirty="0" err="1"/>
+              <a:t>flasher</a:t>
+            </a:r>
+            <a:r>
+              <a:rPr lang="de-DE" dirty="0"/>
+              <a:t>, </a:t>
+            </a:r>
+            <a:r>
+              <a:rPr lang="de-DE" dirty="0" err="1"/>
+              <a:t>toolchain</a:t>
+            </a:r>
+            <a:endParaRPr lang="de-DE" dirty="0"/>
+          </a:p>
+          <a:p>
+            <a:r>
+              <a:rPr lang="de-DE" dirty="0" err="1"/>
+              <a:t>what‘s</a:t>
+            </a:r>
+            <a:r>
+              <a:rPr lang="de-DE" dirty="0"/>
+              <a:t> </a:t>
+            </a:r>
+            <a:r>
+              <a:rPr lang="de-DE" dirty="0" err="1"/>
+              <a:t>missing</a:t>
+            </a:r>
+            <a:r>
+              <a:rPr lang="de-DE" dirty="0"/>
+              <a:t>:</a:t>
+            </a:r>
+          </a:p>
+          <a:p>
+            <a:pPr marL="342900" indent="-342900">
+              <a:buFont typeface="Arial" panose="020B0604020202020204" pitchFamily="34" charset="0"/>
+              <a:buChar char="•"/>
+            </a:pPr>
+            <a:r>
+              <a:rPr lang="de-DE" dirty="0" err="1"/>
+              <a:t>container</a:t>
+            </a:r>
+            <a:r>
+              <a:rPr lang="de-DE" dirty="0"/>
+              <a:t> </a:t>
+            </a:r>
+            <a:r>
+              <a:rPr lang="de-DE" dirty="0" err="1"/>
+              <a:t>managment</a:t>
+            </a:r>
+            <a:r>
+              <a:rPr lang="de-DE" dirty="0"/>
+              <a:t> (UI </a:t>
+            </a:r>
+            <a:r>
+              <a:rPr lang="de-DE" dirty="0" err="1"/>
+              <a:t>for</a:t>
+            </a:r>
+            <a:r>
+              <a:rPr lang="de-DE" dirty="0"/>
+              <a:t> </a:t>
+            </a:r>
+            <a:r>
+              <a:rPr lang="de-DE" dirty="0" err="1"/>
+              <a:t>container</a:t>
+            </a:r>
+            <a:r>
+              <a:rPr lang="de-DE" dirty="0"/>
+              <a:t> </a:t>
+            </a:r>
+            <a:r>
+              <a:rPr lang="de-DE" dirty="0" err="1"/>
+              <a:t>request</a:t>
+            </a:r>
+            <a:r>
+              <a:rPr lang="de-DE" dirty="0"/>
+              <a:t>) -&gt; </a:t>
+            </a:r>
+            <a:r>
+              <a:rPr lang="de-DE" dirty="0" err="1"/>
+              <a:t>custom</a:t>
+            </a:r>
+            <a:r>
+              <a:rPr lang="de-DE" dirty="0"/>
+              <a:t> </a:t>
+            </a:r>
+            <a:r>
+              <a:rPr lang="de-DE" dirty="0" err="1"/>
+              <a:t>website</a:t>
+            </a:r>
+            <a:r>
+              <a:rPr lang="de-DE" dirty="0"/>
+              <a:t>, ZIH?</a:t>
+            </a:r>
+          </a:p>
+          <a:p>
+            <a:pPr marL="342900" indent="-342900">
+              <a:buFont typeface="Arial" panose="020B0604020202020204" pitchFamily="34" charset="0"/>
+              <a:buChar char="•"/>
+            </a:pPr>
+            <a:r>
+              <a:rPr lang="de-DE" dirty="0"/>
+              <a:t>reverse </a:t>
+            </a:r>
+            <a:r>
+              <a:rPr lang="de-DE" dirty="0" err="1"/>
+              <a:t>proxy</a:t>
+            </a:r>
+            <a:r>
+              <a:rPr lang="de-DE" dirty="0"/>
+              <a:t> (SSL </a:t>
+            </a:r>
+            <a:r>
+              <a:rPr lang="de-DE" dirty="0" err="1"/>
+              <a:t>termination</a:t>
+            </a:r>
+            <a:r>
+              <a:rPr lang="de-DE" dirty="0"/>
+              <a:t> + </a:t>
+            </a:r>
+            <a:r>
+              <a:rPr lang="de-DE" dirty="0" err="1"/>
+              <a:t>container</a:t>
+            </a:r>
+            <a:r>
+              <a:rPr lang="de-DE" dirty="0"/>
+              <a:t> </a:t>
+            </a:r>
+            <a:r>
+              <a:rPr lang="de-DE" dirty="0" err="1"/>
+              <a:t>discovery</a:t>
+            </a:r>
+            <a:r>
+              <a:rPr lang="de-DE" dirty="0"/>
+              <a:t>) -&gt; </a:t>
+            </a:r>
+            <a:r>
+              <a:rPr lang="de-DE" dirty="0" err="1"/>
+              <a:t>traefik</a:t>
+            </a:r>
+            <a:endParaRPr lang="de-DE" dirty="0"/>
+          </a:p>
+          <a:p>
+            <a:r>
+              <a:rPr lang="de-DE" dirty="0"/>
+              <a:t>optional </a:t>
+            </a:r>
+            <a:r>
+              <a:rPr lang="de-DE" dirty="0" err="1"/>
+              <a:t>improvements</a:t>
+            </a:r>
+            <a:r>
+              <a:rPr lang="de-DE" dirty="0"/>
+              <a:t>:</a:t>
+            </a:r>
+          </a:p>
+          <a:p>
+            <a:pPr marL="342900" indent="-342900">
+              <a:buFont typeface="Arial" panose="020B0604020202020204" pitchFamily="34" charset="0"/>
+              <a:buChar char="•"/>
+            </a:pPr>
+            <a:r>
+              <a:rPr lang="de-DE" dirty="0"/>
+              <a:t>update RIOTs native </a:t>
+            </a:r>
+            <a:r>
+              <a:rPr lang="de-DE" dirty="0" err="1"/>
+              <a:t>dockerbuild</a:t>
+            </a:r>
+            <a:r>
+              <a:rPr lang="de-DE" dirty="0"/>
+              <a:t> </a:t>
+            </a:r>
+            <a:r>
+              <a:rPr lang="de-DE" dirty="0" err="1"/>
+              <a:t>img</a:t>
+            </a:r>
+            <a:r>
+              <a:rPr lang="de-DE" dirty="0"/>
+              <a:t>, </a:t>
+            </a:r>
+            <a:r>
+              <a:rPr lang="de-DE" dirty="0" err="1"/>
+              <a:t>then</a:t>
+            </a:r>
+            <a:r>
+              <a:rPr lang="de-DE" dirty="0"/>
+              <a:t> </a:t>
+            </a:r>
+            <a:r>
+              <a:rPr lang="de-DE" dirty="0" err="1"/>
+              <a:t>use</a:t>
+            </a:r>
+            <a:r>
+              <a:rPr lang="de-DE" dirty="0"/>
+              <a:t> </a:t>
+            </a:r>
+            <a:r>
+              <a:rPr lang="de-DE" dirty="0" err="1"/>
+              <a:t>as</a:t>
+            </a:r>
+            <a:r>
+              <a:rPr lang="de-DE" dirty="0"/>
+              <a:t> a </a:t>
+            </a:r>
+            <a:r>
+              <a:rPr lang="de-DE" dirty="0" err="1"/>
+              <a:t>base</a:t>
+            </a:r>
+            <a:r>
+              <a:rPr lang="de-DE" dirty="0"/>
+              <a:t> </a:t>
+            </a:r>
+            <a:r>
+              <a:rPr lang="de-DE" dirty="0" err="1"/>
+              <a:t>for</a:t>
+            </a:r>
+            <a:r>
+              <a:rPr lang="de-DE" dirty="0"/>
+              <a:t> web </a:t>
+            </a:r>
+            <a:r>
+              <a:rPr lang="de-DE" dirty="0" err="1"/>
+              <a:t>editor</a:t>
+            </a:r>
+            <a:r>
+              <a:rPr lang="de-DE" dirty="0"/>
+              <a:t> </a:t>
+            </a:r>
+            <a:r>
+              <a:rPr lang="de-DE" dirty="0" err="1"/>
+              <a:t>img</a:t>
+            </a:r>
+            <a:endParaRPr lang="de-DE" dirty="0"/>
+          </a:p>
+        </p:txBody>
+      </p:sp>
+    </p:spTree>
+    <p:extLst>
+      <p:ext uri="{BB962C8B-B14F-4D97-AF65-F5344CB8AC3E}">
+        <p14:creationId xmlns:p14="http://schemas.microsoft.com/office/powerpoint/2010/main" val="1771938218"/>
+      </p:ext>
+    </p:extLst>
+  </p:cSld>
+  <p:clrMapOvr>
+    <a:masterClrMapping/>
+  </p:clrMapOvr>
+</p:sld>
+</file>
+
+<file path=ppt/slides/slide16.xml><?xml version="1.0" encoding="utf-8"?>
+<p:sld xmlns:a="http://schemas.openxmlformats.org/drawingml/2006/main" xmlns:r="http://schemas.openxmlformats.org/officeDocument/2006/relationships" xmlns:p="http://schemas.openxmlformats.org/presentationml/2006/main">
+  <p:cSld>
+    <p:spTree>
+      <p:nvGrpSpPr>
+        <p:cNvPr id="1" name=""/>
+        <p:cNvGrpSpPr/>
+        <p:nvPr/>
+      </p:nvGrpSpPr>
+      <p:grpSpPr>
+        <a:xfrm>
+          <a:off x="0" y="0"/>
+          <a:ext cx="0" cy="0"/>
+          <a:chOff x="0" y="0"/>
+          <a:chExt cx="0" cy="0"/>
+        </a:xfrm>
+      </p:grpSpPr>
+      <p:sp>
+        <p:nvSpPr>
+          <p:cNvPr id="7" name="Title 6">
+            <a:extLst>
+              <a:ext uri="{FF2B5EF4-FFF2-40B4-BE49-F238E27FC236}">
+                <a16:creationId xmlns:a16="http://schemas.microsoft.com/office/drawing/2014/main" id="{7367F1D1-9BDF-981A-6F45-995A8672C8E8}"/>
+              </a:ext>
+            </a:extLst>
+          </p:cNvPr>
+          <p:cNvSpPr>
+            <a:spLocks noGrp="1"/>
+          </p:cNvSpPr>
+          <p:nvPr>
+            <p:ph type="title"/>
+          </p:nvPr>
+        </p:nvSpPr>
+        <p:spPr/>
+        <p:txBody>
+          <a:bodyPr/>
+          <a:lstStyle/>
+          <a:p>
+            <a:r>
+              <a:rPr lang="de-DE" dirty="0" err="1"/>
+              <a:t>Thanks</a:t>
+            </a:r>
+            <a:r>
+              <a:rPr lang="de-DE" dirty="0"/>
+              <a:t> </a:t>
+            </a:r>
+            <a:r>
+              <a:rPr lang="de-DE" dirty="0" err="1"/>
+              <a:t>for</a:t>
+            </a:r>
+            <a:r>
+              <a:rPr lang="de-DE" dirty="0"/>
+              <a:t> </a:t>
+            </a:r>
+            <a:r>
+              <a:rPr lang="de-DE" dirty="0" err="1"/>
+              <a:t>your</a:t>
+            </a:r>
+            <a:r>
+              <a:rPr lang="de-DE" dirty="0"/>
+              <a:t> </a:t>
+            </a:r>
+            <a:r>
+              <a:rPr lang="de-DE" dirty="0" err="1"/>
+              <a:t>attention</a:t>
+            </a:r>
+            <a:endParaRPr lang="de-DE" dirty="0"/>
+          </a:p>
+        </p:txBody>
+      </p:sp>
+      <p:sp>
+        <p:nvSpPr>
+          <p:cNvPr id="8" name="Content Placeholder 7">
+            <a:extLst>
+              <a:ext uri="{FF2B5EF4-FFF2-40B4-BE49-F238E27FC236}">
+                <a16:creationId xmlns:a16="http://schemas.microsoft.com/office/drawing/2014/main" id="{B8D9D380-B62B-0405-3046-7AF0DB6B6F72}"/>
+              </a:ext>
+            </a:extLst>
+          </p:cNvPr>
+          <p:cNvSpPr>
+            <a:spLocks noGrp="1"/>
+          </p:cNvSpPr>
+          <p:nvPr>
+            <p:ph idx="1"/>
+          </p:nvPr>
+        </p:nvSpPr>
+        <p:spPr/>
+        <p:txBody>
+          <a:bodyPr/>
+          <a:lstStyle/>
+          <a:p>
+            <a:r>
+              <a:rPr lang="de-DE" dirty="0"/>
+              <a:t>RIOT-Web-Editor:</a:t>
+            </a:r>
+          </a:p>
+          <a:p>
+            <a:pPr marL="342900" indent="-342900">
+              <a:buFont typeface="Arial" panose="020B0604020202020204" pitchFamily="34" charset="0"/>
+              <a:buChar char="•"/>
+            </a:pPr>
+            <a:r>
+              <a:rPr lang="de-DE" dirty="0">
+                <a:hlinkClick r:id="rId2"/>
+              </a:rPr>
+              <a:t>https://github.com/cheater78/RIOT-WebEditor</a:t>
+            </a:r>
+            <a:endParaRPr lang="de-DE" dirty="0"/>
+          </a:p>
+          <a:p>
+            <a:r>
+              <a:rPr lang="de-DE" dirty="0"/>
+              <a:t>RIOT-VS-Code-Extension (</a:t>
+            </a:r>
+            <a:r>
+              <a:rPr lang="de-DE" dirty="0" err="1"/>
+              <a:t>submodule</a:t>
+            </a:r>
+            <a:r>
+              <a:rPr lang="de-DE" dirty="0"/>
+              <a:t>)</a:t>
+            </a:r>
+          </a:p>
+          <a:p>
+            <a:pPr marL="342900" indent="-342900">
+              <a:buFont typeface="Arial" panose="020B0604020202020204" pitchFamily="34" charset="0"/>
+              <a:buChar char="•"/>
+            </a:pPr>
+            <a:r>
+              <a:rPr lang="de-DE" dirty="0">
+                <a:hlinkClick r:id="rId3"/>
+              </a:rPr>
+              <a:t>https://github.com/Barkolores/RIOT-VS-Code-Extension</a:t>
+            </a:r>
+            <a:endParaRPr lang="de-DE" dirty="0"/>
+          </a:p>
+          <a:p>
+            <a:pPr marL="342900" indent="-342900">
+              <a:buFont typeface="Arial" panose="020B0604020202020204" pitchFamily="34" charset="0"/>
+              <a:buChar char="•"/>
+            </a:pPr>
+            <a:endParaRPr lang="de-DE" dirty="0"/>
+          </a:p>
+        </p:txBody>
+      </p:sp>
+    </p:spTree>
+    <p:extLst>
+      <p:ext uri="{BB962C8B-B14F-4D97-AF65-F5344CB8AC3E}">
+        <p14:creationId xmlns:p14="http://schemas.microsoft.com/office/powerpoint/2010/main" val="835040847"/>
       </p:ext>
     </p:extLst>
   </p:cSld>
@@ -18985,1369 +18622,6 @@
           <p:cNvPr id="4" name="Title 3">
             <a:extLst>
               <a:ext uri="{FF2B5EF4-FFF2-40B4-BE49-F238E27FC236}">
-                <a16:creationId xmlns:a16="http://schemas.microsoft.com/office/drawing/2014/main" id="{EA73E7B0-DC1D-6D0F-536A-E36E9840D6A4}"/>
-              </a:ext>
-            </a:extLst>
-          </p:cNvPr>
-          <p:cNvSpPr>
-            <a:spLocks noGrp="1"/>
-          </p:cNvSpPr>
-          <p:nvPr>
-            <p:ph type="title"/>
-          </p:nvPr>
-        </p:nvSpPr>
-        <p:spPr/>
-        <p:txBody>
-          <a:bodyPr/>
-          <a:lstStyle/>
-          <a:p>
-            <a:r>
-              <a:rPr lang="de-DE" dirty="0" err="1"/>
-              <a:t>Packaging</a:t>
-            </a:r>
-            <a:r>
-              <a:rPr lang="de-DE" dirty="0"/>
-              <a:t> and </a:t>
-            </a:r>
-            <a:r>
-              <a:rPr lang="de-DE" dirty="0" err="1"/>
-              <a:t>Deployment</a:t>
-            </a:r>
-            <a:endParaRPr lang="de-DE" dirty="0"/>
-          </a:p>
-        </p:txBody>
-      </p:sp>
-      <p:sp>
-        <p:nvSpPr>
-          <p:cNvPr id="5" name="Text Placeholder 4">
-            <a:extLst>
-              <a:ext uri="{FF2B5EF4-FFF2-40B4-BE49-F238E27FC236}">
-                <a16:creationId xmlns:a16="http://schemas.microsoft.com/office/drawing/2014/main" id="{83FDC90E-3D1D-D7FF-6DBA-B11082863BD1}"/>
-              </a:ext>
-            </a:extLst>
-          </p:cNvPr>
-          <p:cNvSpPr>
-            <a:spLocks noGrp="1"/>
-          </p:cNvSpPr>
-          <p:nvPr>
-            <p:ph type="body" sz="quarter" idx="10"/>
-          </p:nvPr>
-        </p:nvSpPr>
-        <p:spPr/>
-        <p:txBody>
-          <a:bodyPr/>
-          <a:lstStyle/>
-          <a:p>
-            <a:endParaRPr lang="de-DE"/>
-          </a:p>
-        </p:txBody>
-      </p:sp>
-    </p:spTree>
-    <p:extLst>
-      <p:ext uri="{BB962C8B-B14F-4D97-AF65-F5344CB8AC3E}">
-        <p14:creationId xmlns:p14="http://schemas.microsoft.com/office/powerpoint/2010/main" val="2006983984"/>
-      </p:ext>
-    </p:extLst>
-  </p:cSld>
-  <p:clrMapOvr>
-    <a:masterClrMapping/>
-  </p:clrMapOvr>
-</p:sld>
-</file>
-
-<file path=ppt/slides/slide18.xml><?xml version="1.0" encoding="utf-8"?>
-<p:sld xmlns:a="http://schemas.openxmlformats.org/drawingml/2006/main" xmlns:r="http://schemas.openxmlformats.org/officeDocument/2006/relationships" xmlns:p="http://schemas.openxmlformats.org/presentationml/2006/main">
-  <p:cSld>
-    <p:spTree>
-      <p:nvGrpSpPr>
-        <p:cNvPr id="1" name=""/>
-        <p:cNvGrpSpPr/>
-        <p:nvPr/>
-      </p:nvGrpSpPr>
-      <p:grpSpPr>
-        <a:xfrm>
-          <a:off x="0" y="0"/>
-          <a:ext cx="0" cy="0"/>
-          <a:chOff x="0" y="0"/>
-          <a:chExt cx="0" cy="0"/>
-        </a:xfrm>
-      </p:grpSpPr>
-      <p:sp>
-        <p:nvSpPr>
-          <p:cNvPr id="2" name="Title 1">
-            <a:extLst>
-              <a:ext uri="{FF2B5EF4-FFF2-40B4-BE49-F238E27FC236}">
-                <a16:creationId xmlns:a16="http://schemas.microsoft.com/office/drawing/2014/main" id="{CD45FB2F-2174-63F0-C58F-3333705E752C}"/>
-              </a:ext>
-            </a:extLst>
-          </p:cNvPr>
-          <p:cNvSpPr>
-            <a:spLocks noGrp="1"/>
-          </p:cNvSpPr>
-          <p:nvPr>
-            <p:ph type="title"/>
-          </p:nvPr>
-        </p:nvSpPr>
-        <p:spPr/>
-        <p:txBody>
-          <a:bodyPr/>
-          <a:lstStyle/>
-          <a:p>
-            <a:r>
-              <a:rPr lang="de-DE" dirty="0"/>
-              <a:t>Docker</a:t>
-            </a:r>
-          </a:p>
-        </p:txBody>
-      </p:sp>
-      <p:sp>
-        <p:nvSpPr>
-          <p:cNvPr id="3" name="Content Placeholder 2">
-            <a:extLst>
-              <a:ext uri="{FF2B5EF4-FFF2-40B4-BE49-F238E27FC236}">
-                <a16:creationId xmlns:a16="http://schemas.microsoft.com/office/drawing/2014/main" id="{A618E1DF-3350-29EF-2A8D-13423E0278AB}"/>
-              </a:ext>
-            </a:extLst>
-          </p:cNvPr>
-          <p:cNvSpPr>
-            <a:spLocks noGrp="1"/>
-          </p:cNvSpPr>
-          <p:nvPr>
-            <p:ph idx="1"/>
-          </p:nvPr>
-        </p:nvSpPr>
-        <p:spPr/>
-        <p:txBody>
-          <a:bodyPr/>
-          <a:lstStyle/>
-          <a:p>
-            <a:pPr marL="342900" indent="-342900">
-              <a:buFont typeface="Arial" panose="020B0604020202020204" pitchFamily="34" charset="0"/>
-              <a:buChar char="•"/>
-            </a:pPr>
-            <a:r>
-              <a:rPr lang="de-DE" dirty="0" err="1"/>
-              <a:t>package</a:t>
-            </a:r>
-            <a:r>
-              <a:rPr lang="de-DE" dirty="0"/>
-              <a:t> </a:t>
-            </a:r>
-            <a:r>
-              <a:rPr lang="de-DE" dirty="0" err="1"/>
-              <a:t>into</a:t>
-            </a:r>
-            <a:r>
-              <a:rPr lang="de-DE" dirty="0"/>
-              <a:t> a </a:t>
-            </a:r>
-            <a:r>
-              <a:rPr lang="de-DE" dirty="0" err="1"/>
-              <a:t>docker</a:t>
-            </a:r>
-            <a:r>
-              <a:rPr lang="de-DE" dirty="0"/>
-              <a:t> </a:t>
-            </a:r>
-            <a:r>
-              <a:rPr lang="de-DE" dirty="0" err="1"/>
-              <a:t>image</a:t>
-            </a:r>
-            <a:r>
-              <a:rPr lang="de-DE" dirty="0"/>
-              <a:t>, </a:t>
-            </a:r>
-            <a:r>
-              <a:rPr lang="de-DE" dirty="0" err="1"/>
-              <a:t>containing</a:t>
-            </a:r>
-            <a:r>
-              <a:rPr lang="de-DE" dirty="0"/>
-              <a:t>:</a:t>
-            </a:r>
-          </a:p>
-          <a:p>
-            <a:pPr marL="576263" lvl="2" indent="-342900"/>
-            <a:r>
-              <a:rPr lang="de-DE" dirty="0"/>
-              <a:t>code-server (</a:t>
-            </a:r>
-            <a:r>
-              <a:rPr lang="de-DE" dirty="0" err="1"/>
-              <a:t>autostart</a:t>
-            </a:r>
-            <a:r>
-              <a:rPr lang="de-DE" dirty="0"/>
-              <a:t>)</a:t>
-            </a:r>
-          </a:p>
-          <a:p>
-            <a:pPr marL="576263" lvl="2" indent="-342900"/>
-            <a:r>
-              <a:rPr lang="de-DE" dirty="0" err="1"/>
-              <a:t>riot</a:t>
-            </a:r>
-            <a:r>
-              <a:rPr lang="de-DE" dirty="0"/>
-              <a:t>-web-tools:</a:t>
-            </a:r>
-          </a:p>
-          <a:p>
-            <a:pPr marL="800100" lvl="3" indent="-342900"/>
-            <a:r>
-              <a:rPr lang="de-DE" dirty="0" err="1"/>
-              <a:t>relay</a:t>
-            </a:r>
-            <a:r>
-              <a:rPr lang="de-DE" dirty="0"/>
-              <a:t> (</a:t>
-            </a:r>
-            <a:r>
-              <a:rPr lang="de-DE" dirty="0" err="1"/>
-              <a:t>autostart</a:t>
-            </a:r>
-            <a:r>
-              <a:rPr lang="de-DE" dirty="0"/>
-              <a:t>)</a:t>
-            </a:r>
-          </a:p>
-          <a:p>
-            <a:pPr marL="800100" lvl="3" indent="-342900"/>
-            <a:r>
-              <a:rPr lang="de-DE" dirty="0" err="1"/>
-              <a:t>shell</a:t>
-            </a:r>
-            <a:r>
-              <a:rPr lang="de-DE" dirty="0"/>
-              <a:t> (</a:t>
-            </a:r>
-            <a:r>
-              <a:rPr lang="de-DE" dirty="0" err="1"/>
-              <a:t>default</a:t>
-            </a:r>
-            <a:r>
-              <a:rPr lang="de-DE" dirty="0"/>
-              <a:t> </a:t>
-            </a:r>
-            <a:r>
-              <a:rPr lang="de-DE" dirty="0" err="1"/>
-              <a:t>shell</a:t>
-            </a:r>
-            <a:r>
-              <a:rPr lang="de-DE" dirty="0"/>
-              <a:t> </a:t>
-            </a:r>
-            <a:r>
-              <a:rPr lang="de-DE" dirty="0" err="1"/>
-              <a:t>for</a:t>
-            </a:r>
-            <a:r>
-              <a:rPr lang="de-DE" dirty="0"/>
-              <a:t> code-server)</a:t>
-            </a:r>
-          </a:p>
-          <a:p>
-            <a:pPr marL="800100" lvl="3" indent="-342900"/>
-            <a:r>
-              <a:rPr lang="de-DE" dirty="0" err="1"/>
-              <a:t>stub</a:t>
-            </a:r>
-            <a:endParaRPr lang="de-DE" dirty="0"/>
-          </a:p>
-          <a:p>
-            <a:pPr marL="576263" lvl="2" indent="-342900"/>
-            <a:r>
-              <a:rPr lang="de-DE" dirty="0"/>
-              <a:t>RIOT and </a:t>
-            </a:r>
-            <a:r>
-              <a:rPr lang="de-DE" dirty="0" err="1"/>
-              <a:t>its</a:t>
-            </a:r>
-            <a:r>
-              <a:rPr lang="de-DE" dirty="0"/>
-              <a:t> </a:t>
-            </a:r>
-            <a:r>
-              <a:rPr lang="de-DE" dirty="0" err="1"/>
-              <a:t>dependencies</a:t>
-            </a:r>
-            <a:endParaRPr lang="de-DE" dirty="0"/>
-          </a:p>
-          <a:p>
-            <a:pPr marL="576263" lvl="2" indent="-342900"/>
-            <a:r>
-              <a:rPr lang="de-DE" dirty="0" err="1"/>
-              <a:t>user</a:t>
-            </a:r>
-            <a:r>
-              <a:rPr lang="de-DE" dirty="0"/>
-              <a:t> </a:t>
-            </a:r>
-            <a:r>
-              <a:rPr lang="de-DE" dirty="0" err="1"/>
-              <a:t>environment</a:t>
-            </a:r>
-            <a:r>
-              <a:rPr lang="de-DE" dirty="0"/>
-              <a:t> /</a:t>
-            </a:r>
-            <a:r>
-              <a:rPr lang="de-DE" dirty="0" err="1"/>
-              <a:t>home</a:t>
-            </a:r>
-            <a:r>
-              <a:rPr lang="de-DE" dirty="0"/>
-              <a:t>/</a:t>
-            </a:r>
-            <a:r>
-              <a:rPr lang="de-DE" dirty="0" err="1"/>
-              <a:t>coder</a:t>
-            </a:r>
-            <a:endParaRPr lang="de-DE" dirty="0"/>
-          </a:p>
-          <a:p>
-            <a:pPr marL="576263" lvl="2" indent="-342900"/>
-            <a:endParaRPr lang="de-DE" dirty="0"/>
-          </a:p>
-        </p:txBody>
-      </p:sp>
-    </p:spTree>
-    <p:extLst>
-      <p:ext uri="{BB962C8B-B14F-4D97-AF65-F5344CB8AC3E}">
-        <p14:creationId xmlns:p14="http://schemas.microsoft.com/office/powerpoint/2010/main" val="741403339"/>
-      </p:ext>
-    </p:extLst>
-  </p:cSld>
-  <p:clrMapOvr>
-    <a:masterClrMapping/>
-  </p:clrMapOvr>
-</p:sld>
-</file>
-
-<file path=ppt/slides/slide19.xml><?xml version="1.0" encoding="utf-8"?>
-<p:sld xmlns:a="http://schemas.openxmlformats.org/drawingml/2006/main" xmlns:r="http://schemas.openxmlformats.org/officeDocument/2006/relationships" xmlns:p="http://schemas.openxmlformats.org/presentationml/2006/main">
-  <p:cSld>
-    <p:spTree>
-      <p:nvGrpSpPr>
-        <p:cNvPr id="1" name="">
-          <a:extLst>
-            <a:ext uri="{FF2B5EF4-FFF2-40B4-BE49-F238E27FC236}">
-              <a16:creationId xmlns:a16="http://schemas.microsoft.com/office/drawing/2014/main" id="{5C054FEF-1E7E-C3FA-D7C9-1428D3895F53}"/>
-            </a:ext>
-          </a:extLst>
-        </p:cNvPr>
-        <p:cNvGrpSpPr/>
-        <p:nvPr/>
-      </p:nvGrpSpPr>
-      <p:grpSpPr>
-        <a:xfrm>
-          <a:off x="0" y="0"/>
-          <a:ext cx="0" cy="0"/>
-          <a:chOff x="0" y="0"/>
-          <a:chExt cx="0" cy="0"/>
-        </a:xfrm>
-      </p:grpSpPr>
-      <p:sp>
-        <p:nvSpPr>
-          <p:cNvPr id="2" name="Title 1">
-            <a:extLst>
-              <a:ext uri="{FF2B5EF4-FFF2-40B4-BE49-F238E27FC236}">
-                <a16:creationId xmlns:a16="http://schemas.microsoft.com/office/drawing/2014/main" id="{A85A75C6-8F9A-CE8D-D1B2-6AA0D1B18311}"/>
-              </a:ext>
-            </a:extLst>
-          </p:cNvPr>
-          <p:cNvSpPr>
-            <a:spLocks noGrp="1"/>
-          </p:cNvSpPr>
-          <p:nvPr>
-            <p:ph type="title"/>
-          </p:nvPr>
-        </p:nvSpPr>
-        <p:spPr/>
-        <p:txBody>
-          <a:bodyPr/>
-          <a:lstStyle/>
-          <a:p>
-            <a:r>
-              <a:rPr lang="de-DE" dirty="0"/>
-              <a:t>Limitation</a:t>
-            </a:r>
-          </a:p>
-        </p:txBody>
-      </p:sp>
-      <p:sp>
-        <p:nvSpPr>
-          <p:cNvPr id="3" name="Text Placeholder 2">
-            <a:extLst>
-              <a:ext uri="{FF2B5EF4-FFF2-40B4-BE49-F238E27FC236}">
-                <a16:creationId xmlns:a16="http://schemas.microsoft.com/office/drawing/2014/main" id="{D3E00221-4F0B-4F06-251C-93FEFFC1E862}"/>
-              </a:ext>
-            </a:extLst>
-          </p:cNvPr>
-          <p:cNvSpPr>
-            <a:spLocks noGrp="1"/>
-          </p:cNvSpPr>
-          <p:nvPr>
-            <p:ph type="body" sz="quarter" idx="10"/>
-          </p:nvPr>
-        </p:nvSpPr>
-        <p:spPr/>
-        <p:txBody>
-          <a:bodyPr/>
-          <a:lstStyle/>
-          <a:p>
-            <a:endParaRPr lang="de-DE"/>
-          </a:p>
-        </p:txBody>
-      </p:sp>
-    </p:spTree>
-    <p:extLst>
-      <p:ext uri="{BB962C8B-B14F-4D97-AF65-F5344CB8AC3E}">
-        <p14:creationId xmlns:p14="http://schemas.microsoft.com/office/powerpoint/2010/main" val="2997860574"/>
-      </p:ext>
-    </p:extLst>
-  </p:cSld>
-  <p:clrMapOvr>
-    <a:masterClrMapping/>
-  </p:clrMapOvr>
-</p:sld>
-</file>
-
-<file path=ppt/slides/slide2.xml><?xml version="1.0" encoding="utf-8"?>
-<p:sld xmlns:a="http://schemas.openxmlformats.org/drawingml/2006/main" xmlns:r="http://schemas.openxmlformats.org/officeDocument/2006/relationships" xmlns:p="http://schemas.openxmlformats.org/presentationml/2006/main">
-  <p:cSld>
-    <p:spTree>
-      <p:nvGrpSpPr>
-        <p:cNvPr id="1" name=""/>
-        <p:cNvGrpSpPr/>
-        <p:nvPr/>
-      </p:nvGrpSpPr>
-      <p:grpSpPr>
-        <a:xfrm>
-          <a:off x="0" y="0"/>
-          <a:ext cx="0" cy="0"/>
-          <a:chOff x="0" y="0"/>
-          <a:chExt cx="0" cy="0"/>
-        </a:xfrm>
-      </p:grpSpPr>
-      <p:sp>
-        <p:nvSpPr>
-          <p:cNvPr id="2" name="Title 1">
-            <a:extLst>
-              <a:ext uri="{FF2B5EF4-FFF2-40B4-BE49-F238E27FC236}">
-                <a16:creationId xmlns:a16="http://schemas.microsoft.com/office/drawing/2014/main" id="{3B67D86F-4602-F298-2755-821151000620}"/>
-              </a:ext>
-            </a:extLst>
-          </p:cNvPr>
-          <p:cNvSpPr>
-            <a:spLocks noGrp="1"/>
-          </p:cNvSpPr>
-          <p:nvPr>
-            <p:ph type="title"/>
-          </p:nvPr>
-        </p:nvSpPr>
-        <p:spPr/>
-        <p:txBody>
-          <a:bodyPr/>
-          <a:lstStyle/>
-          <a:p>
-            <a:r>
-              <a:rPr lang="de-DE" dirty="0"/>
-              <a:t>Vision</a:t>
-            </a:r>
-          </a:p>
-        </p:txBody>
-      </p:sp>
-      <p:sp>
-        <p:nvSpPr>
-          <p:cNvPr id="3" name="Text Placeholder 2">
-            <a:extLst>
-              <a:ext uri="{FF2B5EF4-FFF2-40B4-BE49-F238E27FC236}">
-                <a16:creationId xmlns:a16="http://schemas.microsoft.com/office/drawing/2014/main" id="{7021257A-F57C-5E85-BD80-66D8B756B9A4}"/>
-              </a:ext>
-            </a:extLst>
-          </p:cNvPr>
-          <p:cNvSpPr>
-            <a:spLocks noGrp="1"/>
-          </p:cNvSpPr>
-          <p:nvPr>
-            <p:ph type="body" sz="quarter" idx="10"/>
-          </p:nvPr>
-        </p:nvSpPr>
-        <p:spPr/>
-        <p:txBody>
-          <a:bodyPr/>
-          <a:lstStyle/>
-          <a:p>
-            <a:endParaRPr lang="de-DE"/>
-          </a:p>
-        </p:txBody>
-      </p:sp>
-    </p:spTree>
-    <p:extLst>
-      <p:ext uri="{BB962C8B-B14F-4D97-AF65-F5344CB8AC3E}">
-        <p14:creationId xmlns:p14="http://schemas.microsoft.com/office/powerpoint/2010/main" val="3032804714"/>
-      </p:ext>
-    </p:extLst>
-  </p:cSld>
-  <p:clrMapOvr>
-    <a:masterClrMapping/>
-  </p:clrMapOvr>
-</p:sld>
-</file>
-
-<file path=ppt/slides/slide20.xml><?xml version="1.0" encoding="utf-8"?>
-<p:sld xmlns:a="http://schemas.openxmlformats.org/drawingml/2006/main" xmlns:r="http://schemas.openxmlformats.org/officeDocument/2006/relationships" xmlns:p="http://schemas.openxmlformats.org/presentationml/2006/main">
-  <p:cSld>
-    <p:spTree>
-      <p:nvGrpSpPr>
-        <p:cNvPr id="1" name=""/>
-        <p:cNvGrpSpPr/>
-        <p:nvPr/>
-      </p:nvGrpSpPr>
-      <p:grpSpPr>
-        <a:xfrm>
-          <a:off x="0" y="0"/>
-          <a:ext cx="0" cy="0"/>
-          <a:chOff x="0" y="0"/>
-          <a:chExt cx="0" cy="0"/>
-        </a:xfrm>
-      </p:grpSpPr>
-      <p:sp>
-        <p:nvSpPr>
-          <p:cNvPr id="4" name="Title 3">
-            <a:extLst>
-              <a:ext uri="{FF2B5EF4-FFF2-40B4-BE49-F238E27FC236}">
-                <a16:creationId xmlns:a16="http://schemas.microsoft.com/office/drawing/2014/main" id="{22D7CE72-3797-ACC9-5BAD-04412603E9D3}"/>
-              </a:ext>
-            </a:extLst>
-          </p:cNvPr>
-          <p:cNvSpPr>
-            <a:spLocks noGrp="1"/>
-          </p:cNvSpPr>
-          <p:nvPr>
-            <p:ph type="title"/>
-          </p:nvPr>
-        </p:nvSpPr>
-        <p:spPr/>
-        <p:txBody>
-          <a:bodyPr/>
-          <a:lstStyle/>
-          <a:p>
-            <a:r>
-              <a:rPr lang="de-DE" dirty="0" err="1"/>
-              <a:t>Limitations</a:t>
-            </a:r>
-            <a:endParaRPr lang="de-DE" dirty="0"/>
-          </a:p>
-        </p:txBody>
-      </p:sp>
-      <p:sp>
-        <p:nvSpPr>
-          <p:cNvPr id="5" name="Content Placeholder 4">
-            <a:extLst>
-              <a:ext uri="{FF2B5EF4-FFF2-40B4-BE49-F238E27FC236}">
-                <a16:creationId xmlns:a16="http://schemas.microsoft.com/office/drawing/2014/main" id="{41E0F06F-E56A-DD06-AEFA-40963E674A72}"/>
-              </a:ext>
-            </a:extLst>
-          </p:cNvPr>
-          <p:cNvSpPr>
-            <a:spLocks noGrp="1"/>
-          </p:cNvSpPr>
-          <p:nvPr>
-            <p:ph idx="1"/>
-          </p:nvPr>
-        </p:nvSpPr>
-        <p:spPr/>
-        <p:txBody>
-          <a:bodyPr/>
-          <a:lstStyle/>
-          <a:p>
-            <a:pPr marL="342900" indent="-342900">
-              <a:buFont typeface="Arial" panose="020B0604020202020204" pitchFamily="34" charset="0"/>
-              <a:buChar char="•"/>
-            </a:pPr>
-            <a:r>
-              <a:rPr lang="de-DE" dirty="0"/>
-              <a:t>web APIs </a:t>
-            </a:r>
-            <a:r>
-              <a:rPr lang="de-DE" dirty="0" err="1"/>
-              <a:t>are</a:t>
-            </a:r>
-            <a:r>
-              <a:rPr lang="de-DE" dirty="0"/>
-              <a:t> </a:t>
-            </a:r>
-            <a:r>
-              <a:rPr lang="de-DE" dirty="0" err="1"/>
-              <a:t>very</a:t>
-            </a:r>
-            <a:r>
-              <a:rPr lang="de-DE" dirty="0"/>
-              <a:t> </a:t>
-            </a:r>
-            <a:r>
-              <a:rPr lang="de-DE" dirty="0" err="1"/>
-              <a:t>constricted</a:t>
-            </a:r>
-            <a:endParaRPr lang="de-DE" dirty="0"/>
-          </a:p>
-          <a:p>
-            <a:pPr marL="342900" indent="-342900">
-              <a:buFont typeface="Arial" panose="020B0604020202020204" pitchFamily="34" charset="0"/>
-              <a:buChar char="•"/>
-            </a:pPr>
-            <a:r>
-              <a:rPr lang="de-DE" dirty="0" err="1"/>
-              <a:t>confined</a:t>
-            </a:r>
-            <a:r>
-              <a:rPr lang="de-DE" dirty="0"/>
-              <a:t> </a:t>
-            </a:r>
-            <a:r>
-              <a:rPr lang="de-DE" dirty="0" err="1"/>
-              <a:t>VSCode</a:t>
-            </a:r>
-            <a:r>
-              <a:rPr lang="de-DE" dirty="0"/>
-              <a:t> web </a:t>
-            </a:r>
-            <a:r>
-              <a:rPr lang="de-DE" dirty="0" err="1"/>
-              <a:t>extension</a:t>
-            </a:r>
-            <a:r>
-              <a:rPr lang="de-DE" dirty="0"/>
-              <a:t> </a:t>
-            </a:r>
-            <a:r>
-              <a:rPr lang="de-DE" dirty="0" err="1"/>
-              <a:t>context</a:t>
-            </a:r>
-            <a:r>
-              <a:rPr lang="de-DE" dirty="0"/>
-              <a:t> </a:t>
-            </a:r>
-          </a:p>
-          <a:p>
-            <a:pPr marL="342900" indent="-342900">
-              <a:buFont typeface="Arial" panose="020B0604020202020204" pitchFamily="34" charset="0"/>
-              <a:buChar char="•"/>
-            </a:pPr>
-            <a:r>
-              <a:rPr lang="de-DE" dirty="0" err="1"/>
-              <a:t>device</a:t>
-            </a:r>
-            <a:r>
-              <a:rPr lang="de-DE" dirty="0"/>
-              <a:t> support </a:t>
-            </a:r>
-            <a:r>
-              <a:rPr lang="de-DE" dirty="0" err="1"/>
-              <a:t>has</a:t>
-            </a:r>
-            <a:r>
-              <a:rPr lang="de-DE" dirty="0"/>
-              <a:t> to </a:t>
-            </a:r>
-            <a:r>
-              <a:rPr lang="de-DE" dirty="0" err="1"/>
-              <a:t>be</a:t>
-            </a:r>
-            <a:r>
-              <a:rPr lang="de-DE" dirty="0"/>
-              <a:t> </a:t>
-            </a:r>
-            <a:r>
-              <a:rPr lang="de-DE" dirty="0" err="1"/>
-              <a:t>added</a:t>
-            </a:r>
-            <a:r>
-              <a:rPr lang="de-DE" dirty="0"/>
-              <a:t> </a:t>
-            </a:r>
-            <a:r>
-              <a:rPr lang="de-DE" dirty="0" err="1"/>
-              <a:t>manually</a:t>
-            </a:r>
-            <a:r>
-              <a:rPr lang="de-DE" dirty="0"/>
-              <a:t> (flasher.js + </a:t>
-            </a:r>
-            <a:r>
-              <a:rPr lang="de-DE" dirty="0" err="1"/>
-              <a:t>make</a:t>
-            </a:r>
-            <a:r>
-              <a:rPr lang="de-DE" dirty="0"/>
-              <a:t> </a:t>
-            </a:r>
-            <a:r>
-              <a:rPr lang="de-DE" dirty="0" err="1"/>
-              <a:t>patch</a:t>
-            </a:r>
-            <a:r>
-              <a:rPr lang="de-DE" dirty="0"/>
-              <a:t>)</a:t>
-            </a:r>
-          </a:p>
-          <a:p>
-            <a:pPr marL="342900" indent="-342900">
-              <a:buFont typeface="Arial" panose="020B0604020202020204" pitchFamily="34" charset="0"/>
-              <a:buChar char="•"/>
-            </a:pPr>
-            <a:r>
-              <a:rPr lang="de-DE" dirty="0" err="1"/>
-              <a:t>some</a:t>
-            </a:r>
-            <a:r>
-              <a:rPr lang="de-DE" dirty="0"/>
-              <a:t> </a:t>
-            </a:r>
-            <a:r>
-              <a:rPr lang="de-DE" dirty="0" err="1"/>
-              <a:t>devices</a:t>
-            </a:r>
-            <a:r>
-              <a:rPr lang="de-DE" dirty="0"/>
-              <a:t> still </a:t>
-            </a:r>
-            <a:r>
-              <a:rPr lang="de-DE" dirty="0" err="1"/>
-              <a:t>require</a:t>
-            </a:r>
-            <a:r>
-              <a:rPr lang="de-DE" dirty="0"/>
-              <a:t> a </a:t>
-            </a:r>
-            <a:r>
-              <a:rPr lang="de-DE" dirty="0" err="1"/>
-              <a:t>driver</a:t>
-            </a:r>
-            <a:r>
-              <a:rPr lang="de-DE" dirty="0"/>
-              <a:t> to </a:t>
-            </a:r>
-            <a:r>
-              <a:rPr lang="de-DE" dirty="0" err="1"/>
-              <a:t>be</a:t>
-            </a:r>
-            <a:r>
-              <a:rPr lang="de-DE" dirty="0"/>
-              <a:t> </a:t>
-            </a:r>
-            <a:r>
-              <a:rPr lang="de-DE" dirty="0" err="1"/>
-              <a:t>recognized</a:t>
-            </a:r>
-            <a:r>
-              <a:rPr lang="de-DE" dirty="0"/>
-              <a:t> </a:t>
-            </a:r>
-            <a:r>
-              <a:rPr lang="de-DE" dirty="0" err="1"/>
-              <a:t>by</a:t>
-            </a:r>
-            <a:r>
-              <a:rPr lang="de-DE" dirty="0"/>
-              <a:t> </a:t>
-            </a:r>
-            <a:r>
-              <a:rPr lang="de-DE" dirty="0" err="1"/>
-              <a:t>your</a:t>
-            </a:r>
-            <a:r>
-              <a:rPr lang="de-DE" dirty="0"/>
-              <a:t> </a:t>
-            </a:r>
-            <a:r>
-              <a:rPr lang="de-DE" dirty="0" err="1"/>
-              <a:t>os</a:t>
-            </a:r>
-            <a:endParaRPr lang="de-DE" dirty="0"/>
-          </a:p>
-          <a:p>
-            <a:pPr marL="342900" indent="-342900">
-              <a:buFont typeface="Arial" panose="020B0604020202020204" pitchFamily="34" charset="0"/>
-              <a:buChar char="•"/>
-            </a:pPr>
-            <a:r>
-              <a:rPr lang="de-DE" dirty="0"/>
-              <a:t>1 </a:t>
-            </a:r>
-            <a:r>
-              <a:rPr lang="de-DE" dirty="0" err="1"/>
-              <a:t>container</a:t>
-            </a:r>
-            <a:r>
-              <a:rPr lang="de-DE" dirty="0"/>
-              <a:t> – 1 </a:t>
-            </a:r>
-            <a:r>
-              <a:rPr lang="de-DE" dirty="0" err="1"/>
-              <a:t>user</a:t>
-            </a:r>
-            <a:endParaRPr lang="de-DE" dirty="0"/>
-          </a:p>
-          <a:p>
-            <a:pPr marL="342900" indent="-342900">
-              <a:buFont typeface="Arial" panose="020B0604020202020204" pitchFamily="34" charset="0"/>
-              <a:buChar char="•"/>
-            </a:pPr>
-            <a:endParaRPr lang="de-DE" dirty="0"/>
-          </a:p>
-        </p:txBody>
-      </p:sp>
-    </p:spTree>
-    <p:extLst>
-      <p:ext uri="{BB962C8B-B14F-4D97-AF65-F5344CB8AC3E}">
-        <p14:creationId xmlns:p14="http://schemas.microsoft.com/office/powerpoint/2010/main" val="1883924250"/>
-      </p:ext>
-    </p:extLst>
-  </p:cSld>
-  <p:clrMapOvr>
-    <a:masterClrMapping/>
-  </p:clrMapOvr>
-</p:sld>
-</file>
-
-<file path=ppt/slides/slide21.xml><?xml version="1.0" encoding="utf-8"?>
-<p:sld xmlns:a="http://schemas.openxmlformats.org/drawingml/2006/main" xmlns:r="http://schemas.openxmlformats.org/officeDocument/2006/relationships" xmlns:p="http://schemas.openxmlformats.org/presentationml/2006/main">
-  <p:cSld>
-    <p:spTree>
-      <p:nvGrpSpPr>
-        <p:cNvPr id="1" name="">
-          <a:extLst>
-            <a:ext uri="{FF2B5EF4-FFF2-40B4-BE49-F238E27FC236}">
-              <a16:creationId xmlns:a16="http://schemas.microsoft.com/office/drawing/2014/main" id="{A5108602-F26E-4402-81B5-C03EB3BB53CB}"/>
-            </a:ext>
-          </a:extLst>
-        </p:cNvPr>
-        <p:cNvGrpSpPr/>
-        <p:nvPr/>
-      </p:nvGrpSpPr>
-      <p:grpSpPr>
-        <a:xfrm>
-          <a:off x="0" y="0"/>
-          <a:ext cx="0" cy="0"/>
-          <a:chOff x="0" y="0"/>
-          <a:chExt cx="0" cy="0"/>
-        </a:xfrm>
-      </p:grpSpPr>
-      <p:sp>
-        <p:nvSpPr>
-          <p:cNvPr id="2" name="Title 1">
-            <a:extLst>
-              <a:ext uri="{FF2B5EF4-FFF2-40B4-BE49-F238E27FC236}">
-                <a16:creationId xmlns:a16="http://schemas.microsoft.com/office/drawing/2014/main" id="{4D27F8BC-C520-B535-B921-65DB20E30002}"/>
-              </a:ext>
-            </a:extLst>
-          </p:cNvPr>
-          <p:cNvSpPr>
-            <a:spLocks noGrp="1"/>
-          </p:cNvSpPr>
-          <p:nvPr>
-            <p:ph type="title"/>
-          </p:nvPr>
-        </p:nvSpPr>
-        <p:spPr/>
-        <p:txBody>
-          <a:bodyPr/>
-          <a:lstStyle/>
-          <a:p>
-            <a:r>
-              <a:rPr lang="de-DE" dirty="0"/>
-              <a:t>Features / Support</a:t>
-            </a:r>
-          </a:p>
-        </p:txBody>
-      </p:sp>
-      <p:sp>
-        <p:nvSpPr>
-          <p:cNvPr id="3" name="Text Placeholder 2">
-            <a:extLst>
-              <a:ext uri="{FF2B5EF4-FFF2-40B4-BE49-F238E27FC236}">
-                <a16:creationId xmlns:a16="http://schemas.microsoft.com/office/drawing/2014/main" id="{0D9ED7E7-1FDE-2597-B4A0-5DC92923DA5C}"/>
-              </a:ext>
-            </a:extLst>
-          </p:cNvPr>
-          <p:cNvSpPr>
-            <a:spLocks noGrp="1"/>
-          </p:cNvSpPr>
-          <p:nvPr>
-            <p:ph type="body" sz="quarter" idx="10"/>
-          </p:nvPr>
-        </p:nvSpPr>
-        <p:spPr/>
-        <p:txBody>
-          <a:bodyPr/>
-          <a:lstStyle/>
-          <a:p>
-            <a:endParaRPr lang="de-DE"/>
-          </a:p>
-        </p:txBody>
-      </p:sp>
-    </p:spTree>
-    <p:extLst>
-      <p:ext uri="{BB962C8B-B14F-4D97-AF65-F5344CB8AC3E}">
-        <p14:creationId xmlns:p14="http://schemas.microsoft.com/office/powerpoint/2010/main" val="2594913671"/>
-      </p:ext>
-    </p:extLst>
-  </p:cSld>
-  <p:clrMapOvr>
-    <a:masterClrMapping/>
-  </p:clrMapOvr>
-</p:sld>
-</file>
-
-<file path=ppt/slides/slide22.xml><?xml version="1.0" encoding="utf-8"?>
-<p:sld xmlns:a="http://schemas.openxmlformats.org/drawingml/2006/main" xmlns:r="http://schemas.openxmlformats.org/officeDocument/2006/relationships" xmlns:p="http://schemas.openxmlformats.org/presentationml/2006/main">
-  <p:cSld>
-    <p:spTree>
-      <p:nvGrpSpPr>
-        <p:cNvPr id="1" name=""/>
-        <p:cNvGrpSpPr/>
-        <p:nvPr/>
-      </p:nvGrpSpPr>
-      <p:grpSpPr>
-        <a:xfrm>
-          <a:off x="0" y="0"/>
-          <a:ext cx="0" cy="0"/>
-          <a:chOff x="0" y="0"/>
-          <a:chExt cx="0" cy="0"/>
-        </a:xfrm>
-      </p:grpSpPr>
-      <p:sp>
-        <p:nvSpPr>
-          <p:cNvPr id="4" name="Title 3">
-            <a:extLst>
-              <a:ext uri="{FF2B5EF4-FFF2-40B4-BE49-F238E27FC236}">
-                <a16:creationId xmlns:a16="http://schemas.microsoft.com/office/drawing/2014/main" id="{2E5687C6-B809-8B7A-9B61-AC4753C91414}"/>
-              </a:ext>
-            </a:extLst>
-          </p:cNvPr>
-          <p:cNvSpPr>
-            <a:spLocks noGrp="1"/>
-          </p:cNvSpPr>
-          <p:nvPr>
-            <p:ph type="title"/>
-          </p:nvPr>
-        </p:nvSpPr>
-        <p:spPr/>
-        <p:txBody>
-          <a:bodyPr/>
-          <a:lstStyle/>
-          <a:p>
-            <a:r>
-              <a:rPr lang="de-DE" dirty="0"/>
-              <a:t>Features / Support</a:t>
-            </a:r>
-          </a:p>
-        </p:txBody>
-      </p:sp>
-      <p:sp>
-        <p:nvSpPr>
-          <p:cNvPr id="5" name="Content Placeholder 4">
-            <a:extLst>
-              <a:ext uri="{FF2B5EF4-FFF2-40B4-BE49-F238E27FC236}">
-                <a16:creationId xmlns:a16="http://schemas.microsoft.com/office/drawing/2014/main" id="{4BE06B6A-4CEB-8480-893A-23E5FB9B4D9F}"/>
-              </a:ext>
-            </a:extLst>
-          </p:cNvPr>
-          <p:cNvSpPr>
-            <a:spLocks noGrp="1"/>
-          </p:cNvSpPr>
-          <p:nvPr>
-            <p:ph idx="1"/>
-          </p:nvPr>
-        </p:nvSpPr>
-        <p:spPr/>
-        <p:txBody>
-          <a:bodyPr/>
-          <a:lstStyle/>
-          <a:p>
-            <a:pPr marL="342900" indent="-342900">
-              <a:buFont typeface="Arial" panose="020B0604020202020204" pitchFamily="34" charset="0"/>
-              <a:buChar char="•"/>
-            </a:pPr>
-            <a:r>
-              <a:rPr lang="de-DE" dirty="0" err="1"/>
-              <a:t>flash</a:t>
-            </a:r>
-            <a:r>
-              <a:rPr lang="de-DE" dirty="0"/>
-              <a:t> and </a:t>
-            </a:r>
-            <a:r>
-              <a:rPr lang="de-DE" dirty="0" err="1"/>
-              <a:t>term</a:t>
-            </a:r>
-            <a:r>
-              <a:rPr lang="de-DE" dirty="0"/>
-              <a:t> via:</a:t>
-            </a:r>
-          </a:p>
-          <a:p>
-            <a:pPr marL="576263" lvl="2" indent="-342900"/>
-            <a:r>
-              <a:rPr lang="de-DE" dirty="0"/>
-              <a:t>UI</a:t>
-            </a:r>
-          </a:p>
-          <a:p>
-            <a:pPr marL="576263" lvl="2" indent="-342900"/>
-            <a:r>
-              <a:rPr lang="de-DE" dirty="0"/>
-              <a:t>CLI</a:t>
-            </a:r>
-          </a:p>
-          <a:p>
-            <a:pPr marL="342900" lvl="1" indent="-342900">
-              <a:buFont typeface="Arial" panose="020B0604020202020204" pitchFamily="34" charset="0"/>
-              <a:buChar char="•"/>
-            </a:pPr>
-            <a:r>
-              <a:rPr lang="de-DE" dirty="0" err="1"/>
-              <a:t>coherent</a:t>
-            </a:r>
-            <a:r>
-              <a:rPr lang="de-DE" dirty="0"/>
-              <a:t> UI / CLI </a:t>
-            </a:r>
-            <a:r>
-              <a:rPr lang="de-DE" dirty="0" err="1"/>
-              <a:t>experience</a:t>
-            </a:r>
-            <a:endParaRPr lang="de-DE" dirty="0"/>
-          </a:p>
-          <a:p>
-            <a:pPr marL="342900" lvl="1" indent="-342900">
-              <a:buFont typeface="Arial" panose="020B0604020202020204" pitchFamily="34" charset="0"/>
-              <a:buChar char="•"/>
-            </a:pPr>
-            <a:r>
-              <a:rPr lang="de-DE" dirty="0"/>
-              <a:t>multiple </a:t>
-            </a:r>
-            <a:r>
-              <a:rPr lang="de-DE" dirty="0" err="1"/>
-              <a:t>devices</a:t>
-            </a:r>
-            <a:r>
-              <a:rPr lang="de-DE" dirty="0"/>
-              <a:t> and </a:t>
-            </a:r>
-            <a:r>
-              <a:rPr lang="de-DE" dirty="0" err="1"/>
-              <a:t>projects</a:t>
-            </a:r>
-            <a:endParaRPr lang="de-DE" dirty="0"/>
-          </a:p>
-          <a:p>
-            <a:pPr marL="342900" lvl="1" indent="-342900">
-              <a:buFont typeface="Arial" panose="020B0604020202020204" pitchFamily="34" charset="0"/>
-              <a:buChar char="•"/>
-            </a:pPr>
-            <a:r>
-              <a:rPr lang="de-DE" dirty="0" err="1"/>
-              <a:t>boards</a:t>
-            </a:r>
-            <a:r>
-              <a:rPr lang="de-DE" dirty="0"/>
-              <a:t>:</a:t>
-            </a:r>
-          </a:p>
-          <a:p>
-            <a:pPr marL="576263" lvl="2" indent="-342900"/>
-            <a:r>
-              <a:rPr lang="de-DE" dirty="0"/>
-              <a:t>adafruit-nrf52840 (RIOT kit)</a:t>
-            </a:r>
-          </a:p>
-          <a:p>
-            <a:pPr marL="576263" lvl="2" indent="-342900"/>
-            <a:r>
-              <a:rPr lang="de-DE" dirty="0" err="1"/>
-              <a:t>esp</a:t>
-            </a:r>
-            <a:r>
-              <a:rPr lang="de-DE" dirty="0"/>
-              <a:t> (all)</a:t>
-            </a:r>
-          </a:p>
-        </p:txBody>
-      </p:sp>
-    </p:spTree>
-    <p:extLst>
-      <p:ext uri="{BB962C8B-B14F-4D97-AF65-F5344CB8AC3E}">
-        <p14:creationId xmlns:p14="http://schemas.microsoft.com/office/powerpoint/2010/main" val="4015091510"/>
-      </p:ext>
-    </p:extLst>
-  </p:cSld>
-  <p:clrMapOvr>
-    <a:masterClrMapping/>
-  </p:clrMapOvr>
-</p:sld>
-</file>
-
-<file path=ppt/slides/slide23.xml><?xml version="1.0" encoding="utf-8"?>
-<p:sld xmlns:a="http://schemas.openxmlformats.org/drawingml/2006/main" xmlns:r="http://schemas.openxmlformats.org/officeDocument/2006/relationships" xmlns:p="http://schemas.openxmlformats.org/presentationml/2006/main">
-  <p:cSld>
-    <p:spTree>
-      <p:nvGrpSpPr>
-        <p:cNvPr id="1" name=""/>
-        <p:cNvGrpSpPr/>
-        <p:nvPr/>
-      </p:nvGrpSpPr>
-      <p:grpSpPr>
-        <a:xfrm>
-          <a:off x="0" y="0"/>
-          <a:ext cx="0" cy="0"/>
-          <a:chOff x="0" y="0"/>
-          <a:chExt cx="0" cy="0"/>
-        </a:xfrm>
-      </p:grpSpPr>
-      <p:sp>
-        <p:nvSpPr>
-          <p:cNvPr id="4" name="Title 3">
-            <a:extLst>
-              <a:ext uri="{FF2B5EF4-FFF2-40B4-BE49-F238E27FC236}">
-                <a16:creationId xmlns:a16="http://schemas.microsoft.com/office/drawing/2014/main" id="{274D4D3B-073D-1EBF-720B-3E19ACC6FC0B}"/>
-              </a:ext>
-            </a:extLst>
-          </p:cNvPr>
-          <p:cNvSpPr>
-            <a:spLocks noGrp="1"/>
-          </p:cNvSpPr>
-          <p:nvPr>
-            <p:ph type="title"/>
-          </p:nvPr>
-        </p:nvSpPr>
-        <p:spPr/>
-        <p:txBody>
-          <a:bodyPr/>
-          <a:lstStyle/>
-          <a:p>
-            <a:r>
-              <a:rPr lang="de-DE" dirty="0"/>
-              <a:t>Demo</a:t>
-            </a:r>
-          </a:p>
-        </p:txBody>
-      </p:sp>
-      <p:sp>
-        <p:nvSpPr>
-          <p:cNvPr id="5" name="Text Placeholder 4">
-            <a:extLst>
-              <a:ext uri="{FF2B5EF4-FFF2-40B4-BE49-F238E27FC236}">
-                <a16:creationId xmlns:a16="http://schemas.microsoft.com/office/drawing/2014/main" id="{E2CE912E-1494-0E7F-BF9A-7E15C243C047}"/>
-              </a:ext>
-            </a:extLst>
-          </p:cNvPr>
-          <p:cNvSpPr>
-            <a:spLocks noGrp="1"/>
-          </p:cNvSpPr>
-          <p:nvPr>
-            <p:ph type="body" sz="quarter" idx="10"/>
-          </p:nvPr>
-        </p:nvSpPr>
-        <p:spPr/>
-        <p:txBody>
-          <a:bodyPr/>
-          <a:lstStyle/>
-          <a:p>
-            <a:endParaRPr lang="de-DE"/>
-          </a:p>
-        </p:txBody>
-      </p:sp>
-    </p:spTree>
-    <p:extLst>
-      <p:ext uri="{BB962C8B-B14F-4D97-AF65-F5344CB8AC3E}">
-        <p14:creationId xmlns:p14="http://schemas.microsoft.com/office/powerpoint/2010/main" val="2299765845"/>
-      </p:ext>
-    </p:extLst>
-  </p:cSld>
-  <p:clrMapOvr>
-    <a:masterClrMapping/>
-  </p:clrMapOvr>
-</p:sld>
-</file>
-
-<file path=ppt/slides/slide24.xml><?xml version="1.0" encoding="utf-8"?>
-<p:sld xmlns:a="http://schemas.openxmlformats.org/drawingml/2006/main" xmlns:r="http://schemas.openxmlformats.org/officeDocument/2006/relationships" xmlns:p="http://schemas.openxmlformats.org/presentationml/2006/main">
-  <p:cSld>
-    <p:spTree>
-      <p:nvGrpSpPr>
-        <p:cNvPr id="1" name=""/>
-        <p:cNvGrpSpPr/>
-        <p:nvPr/>
-      </p:nvGrpSpPr>
-      <p:grpSpPr>
-        <a:xfrm>
-          <a:off x="0" y="0"/>
-          <a:ext cx="0" cy="0"/>
-          <a:chOff x="0" y="0"/>
-          <a:chExt cx="0" cy="0"/>
-        </a:xfrm>
-      </p:grpSpPr>
-      <p:sp>
-        <p:nvSpPr>
-          <p:cNvPr id="7" name="Title 6">
-            <a:extLst>
-              <a:ext uri="{FF2B5EF4-FFF2-40B4-BE49-F238E27FC236}">
-                <a16:creationId xmlns:a16="http://schemas.microsoft.com/office/drawing/2014/main" id="{7367F1D1-9BDF-981A-6F45-995A8672C8E8}"/>
-              </a:ext>
-            </a:extLst>
-          </p:cNvPr>
-          <p:cNvSpPr>
-            <a:spLocks noGrp="1"/>
-          </p:cNvSpPr>
-          <p:nvPr>
-            <p:ph type="title"/>
-          </p:nvPr>
-        </p:nvSpPr>
-        <p:spPr/>
-        <p:txBody>
-          <a:bodyPr/>
-          <a:lstStyle/>
-          <a:p>
-            <a:r>
-              <a:rPr lang="de-DE" dirty="0" err="1"/>
-              <a:t>Thanks</a:t>
-            </a:r>
-            <a:r>
-              <a:rPr lang="de-DE" dirty="0"/>
-              <a:t> </a:t>
-            </a:r>
-            <a:r>
-              <a:rPr lang="de-DE" dirty="0" err="1"/>
-              <a:t>for</a:t>
-            </a:r>
-            <a:r>
-              <a:rPr lang="de-DE" dirty="0"/>
-              <a:t> </a:t>
-            </a:r>
-            <a:r>
-              <a:rPr lang="de-DE" dirty="0" err="1"/>
-              <a:t>your</a:t>
-            </a:r>
-            <a:r>
-              <a:rPr lang="de-DE" dirty="0"/>
-              <a:t> </a:t>
-            </a:r>
-            <a:r>
-              <a:rPr lang="de-DE" dirty="0" err="1"/>
-              <a:t>attention</a:t>
-            </a:r>
-            <a:endParaRPr lang="de-DE" dirty="0"/>
-          </a:p>
-        </p:txBody>
-      </p:sp>
-      <p:sp>
-        <p:nvSpPr>
-          <p:cNvPr id="8" name="Content Placeholder 7">
-            <a:extLst>
-              <a:ext uri="{FF2B5EF4-FFF2-40B4-BE49-F238E27FC236}">
-                <a16:creationId xmlns:a16="http://schemas.microsoft.com/office/drawing/2014/main" id="{B8D9D380-B62B-0405-3046-7AF0DB6B6F72}"/>
-              </a:ext>
-            </a:extLst>
-          </p:cNvPr>
-          <p:cNvSpPr>
-            <a:spLocks noGrp="1"/>
-          </p:cNvSpPr>
-          <p:nvPr>
-            <p:ph idx="1"/>
-          </p:nvPr>
-        </p:nvSpPr>
-        <p:spPr/>
-        <p:txBody>
-          <a:bodyPr/>
-          <a:lstStyle/>
-          <a:p>
-            <a:r>
-              <a:rPr lang="de-DE" dirty="0"/>
-              <a:t>RIOT-Web-Editor:</a:t>
-            </a:r>
-          </a:p>
-          <a:p>
-            <a:pPr marL="342900" indent="-342900">
-              <a:buFont typeface="Arial" panose="020B0604020202020204" pitchFamily="34" charset="0"/>
-              <a:buChar char="•"/>
-            </a:pPr>
-            <a:r>
-              <a:rPr lang="de-DE" dirty="0">
-                <a:hlinkClick r:id="rId2"/>
-              </a:rPr>
-              <a:t>https://github.com/cheater78/RIOT-WebEditor</a:t>
-            </a:r>
-            <a:endParaRPr lang="de-DE" dirty="0"/>
-          </a:p>
-          <a:p>
-            <a:r>
-              <a:rPr lang="de-DE" dirty="0"/>
-              <a:t>RIOT-VS-Code-Extension (Submodule)</a:t>
-            </a:r>
-          </a:p>
-          <a:p>
-            <a:pPr marL="342900" indent="-342900">
-              <a:buFont typeface="Arial" panose="020B0604020202020204" pitchFamily="34" charset="0"/>
-              <a:buChar char="•"/>
-            </a:pPr>
-            <a:r>
-              <a:rPr lang="de-DE" dirty="0">
-                <a:hlinkClick r:id="rId3"/>
-              </a:rPr>
-              <a:t>https://github.com/Barkolores/RIOT-VS-Code-Extension</a:t>
-            </a:r>
-            <a:endParaRPr lang="de-DE" dirty="0"/>
-          </a:p>
-          <a:p>
-            <a:pPr marL="342900" indent="-342900">
-              <a:buFont typeface="Arial" panose="020B0604020202020204" pitchFamily="34" charset="0"/>
-              <a:buChar char="•"/>
-            </a:pPr>
-            <a:endParaRPr lang="de-DE" dirty="0"/>
-          </a:p>
-        </p:txBody>
-      </p:sp>
-    </p:spTree>
-    <p:extLst>
-      <p:ext uri="{BB962C8B-B14F-4D97-AF65-F5344CB8AC3E}">
-        <p14:creationId xmlns:p14="http://schemas.microsoft.com/office/powerpoint/2010/main" val="835040847"/>
-      </p:ext>
-    </p:extLst>
-  </p:cSld>
-  <p:clrMapOvr>
-    <a:masterClrMapping/>
-  </p:clrMapOvr>
-</p:sld>
-</file>
-
-<file path=ppt/slides/slide25.xml><?xml version="1.0" encoding="utf-8"?>
-<p:sld xmlns:a="http://schemas.openxmlformats.org/drawingml/2006/main" xmlns:r="http://schemas.openxmlformats.org/officeDocument/2006/relationships" xmlns:p="http://schemas.openxmlformats.org/presentationml/2006/main">
-  <p:cSld>
-    <p:spTree>
-      <p:nvGrpSpPr>
-        <p:cNvPr id="1" name=""/>
-        <p:cNvGrpSpPr/>
-        <p:nvPr/>
-      </p:nvGrpSpPr>
-      <p:grpSpPr>
-        <a:xfrm>
-          <a:off x="0" y="0"/>
-          <a:ext cx="0" cy="0"/>
-          <a:chOff x="0" y="0"/>
-          <a:chExt cx="0" cy="0"/>
-        </a:xfrm>
-      </p:grpSpPr>
-      <p:sp>
-        <p:nvSpPr>
-          <p:cNvPr id="4" name="Title 3">
-            <a:extLst>
-              <a:ext uri="{FF2B5EF4-FFF2-40B4-BE49-F238E27FC236}">
                 <a16:creationId xmlns:a16="http://schemas.microsoft.com/office/drawing/2014/main" id="{AB3CB6F2-E922-90E8-E828-1985D09614AE}"/>
               </a:ext>
             </a:extLst>
@@ -20406,7 +18680,7 @@
 </p:sld>
 </file>
 
-<file path=ppt/slides/slide26.xml><?xml version="1.0" encoding="utf-8"?>
+<file path=ppt/slides/slide18.xml><?xml version="1.0" encoding="utf-8"?>
 <p:sld xmlns:a="http://schemas.openxmlformats.org/drawingml/2006/main" xmlns:r="http://schemas.openxmlformats.org/officeDocument/2006/relationships" xmlns:p="http://schemas.openxmlformats.org/presentationml/2006/main">
   <p:cSld>
     <p:spTree>
@@ -20508,7 +18782,7 @@
 </p:sld>
 </file>
 
-<file path=ppt/slides/slide27.xml><?xml version="1.0" encoding="utf-8"?>
+<file path=ppt/slides/slide19.xml><?xml version="1.0" encoding="utf-8"?>
 <p:sld xmlns:a="http://schemas.openxmlformats.org/drawingml/2006/main" xmlns:r="http://schemas.openxmlformats.org/officeDocument/2006/relationships" xmlns:p="http://schemas.openxmlformats.org/presentationml/2006/main">
   <p:cSld>
     <p:spTree>
@@ -20604,7 +18878,7 @@
 </p:sld>
 </file>
 
-<file path=ppt/slides/slide3.xml><?xml version="1.0" encoding="utf-8"?>
+<file path=ppt/slides/slide2.xml><?xml version="1.0" encoding="utf-8"?>
 <p:sld xmlns:a="http://schemas.openxmlformats.org/drawingml/2006/main" xmlns:r="http://schemas.openxmlformats.org/officeDocument/2006/relationships" xmlns:p="http://schemas.openxmlformats.org/presentationml/2006/main">
   <p:cSld>
     <p:spTree>
@@ -20650,7 +18924,7 @@
           <a:p>
             <a:r>
               <a:rPr lang="de-DE" dirty="0"/>
-              <a:t>Vision</a:t>
+              <a:t>Idea</a:t>
             </a:r>
           </a:p>
         </p:txBody>
@@ -20826,96 +19100,7 @@
 </p:sld>
 </file>
 
-<file path=ppt/slides/slide4.xml><?xml version="1.0" encoding="utf-8"?>
-<p:sld xmlns:a="http://schemas.openxmlformats.org/drawingml/2006/main" xmlns:r="http://schemas.openxmlformats.org/officeDocument/2006/relationships" xmlns:p="http://schemas.openxmlformats.org/presentationml/2006/main">
-  <p:cSld>
-    <p:spTree>
-      <p:nvGrpSpPr>
-        <p:cNvPr id="1" name="">
-          <a:extLst>
-            <a:ext uri="{FF2B5EF4-FFF2-40B4-BE49-F238E27FC236}">
-              <a16:creationId xmlns:a16="http://schemas.microsoft.com/office/drawing/2014/main" id="{C60192CB-C7EF-262A-5EF6-7E5CB243ADE8}"/>
-            </a:ext>
-          </a:extLst>
-        </p:cNvPr>
-        <p:cNvGrpSpPr/>
-        <p:nvPr/>
-      </p:nvGrpSpPr>
-      <p:grpSpPr>
-        <a:xfrm>
-          <a:off x="0" y="0"/>
-          <a:ext cx="0" cy="0"/>
-          <a:chOff x="0" y="0"/>
-          <a:chExt cx="0" cy="0"/>
-        </a:xfrm>
-      </p:grpSpPr>
-      <p:sp>
-        <p:nvSpPr>
-          <p:cNvPr id="2" name="Title 1">
-            <a:extLst>
-              <a:ext uri="{FF2B5EF4-FFF2-40B4-BE49-F238E27FC236}">
-                <a16:creationId xmlns:a16="http://schemas.microsoft.com/office/drawing/2014/main" id="{679917AE-918C-7373-C2B5-56040ED75DD8}"/>
-              </a:ext>
-            </a:extLst>
-          </p:cNvPr>
-          <p:cNvSpPr>
-            <a:spLocks noGrp="1"/>
-          </p:cNvSpPr>
-          <p:nvPr>
-            <p:ph type="title"/>
-          </p:nvPr>
-        </p:nvSpPr>
-        <p:spPr/>
-        <p:txBody>
-          <a:bodyPr/>
-          <a:lstStyle/>
-          <a:p>
-            <a:r>
-              <a:rPr lang="de-DE" dirty="0"/>
-              <a:t>Goals</a:t>
-            </a:r>
-          </a:p>
-        </p:txBody>
-      </p:sp>
-      <p:sp>
-        <p:nvSpPr>
-          <p:cNvPr id="3" name="Text Placeholder 2">
-            <a:extLst>
-              <a:ext uri="{FF2B5EF4-FFF2-40B4-BE49-F238E27FC236}">
-                <a16:creationId xmlns:a16="http://schemas.microsoft.com/office/drawing/2014/main" id="{EE3D0CA7-75EC-F8FE-ACEF-FA4993C42C9B}"/>
-              </a:ext>
-            </a:extLst>
-          </p:cNvPr>
-          <p:cNvSpPr>
-            <a:spLocks noGrp="1"/>
-          </p:cNvSpPr>
-          <p:nvPr>
-            <p:ph type="body" sz="quarter" idx="10"/>
-          </p:nvPr>
-        </p:nvSpPr>
-        <p:spPr/>
-        <p:txBody>
-          <a:bodyPr/>
-          <a:lstStyle/>
-          <a:p>
-            <a:endParaRPr lang="de-DE"/>
-          </a:p>
-        </p:txBody>
-      </p:sp>
-    </p:spTree>
-    <p:extLst>
-      <p:ext uri="{BB962C8B-B14F-4D97-AF65-F5344CB8AC3E}">
-        <p14:creationId xmlns:p14="http://schemas.microsoft.com/office/powerpoint/2010/main" val="826145010"/>
-      </p:ext>
-    </p:extLst>
-  </p:cSld>
-  <p:clrMapOvr>
-    <a:masterClrMapping/>
-  </p:clrMapOvr>
-</p:sld>
-</file>
-
-<file path=ppt/slides/slide5.xml><?xml version="1.0" encoding="utf-8"?>
+<file path=ppt/slides/slide3.xml><?xml version="1.0" encoding="utf-8"?>
 <p:sld xmlns:a="http://schemas.openxmlformats.org/drawingml/2006/main" xmlns:r="http://schemas.openxmlformats.org/officeDocument/2006/relationships" xmlns:p="http://schemas.openxmlformats.org/presentationml/2006/main">
   <p:cSld>
     <p:spTree>
@@ -21171,112 +19356,7 @@
 </p:sld>
 </file>
 
-<file path=ppt/slides/slide6.xml><?xml version="1.0" encoding="utf-8"?>
-<p:sld xmlns:a="http://schemas.openxmlformats.org/drawingml/2006/main" xmlns:r="http://schemas.openxmlformats.org/officeDocument/2006/relationships" xmlns:p="http://schemas.openxmlformats.org/presentationml/2006/main">
-  <p:cSld>
-    <p:spTree>
-      <p:nvGrpSpPr>
-        <p:cNvPr id="1" name="">
-          <a:extLst>
-            <a:ext uri="{FF2B5EF4-FFF2-40B4-BE49-F238E27FC236}">
-              <a16:creationId xmlns:a16="http://schemas.microsoft.com/office/drawing/2014/main" id="{FB283681-6F0B-EBC7-B9AE-9D191E9179C0}"/>
-            </a:ext>
-          </a:extLst>
-        </p:cNvPr>
-        <p:cNvGrpSpPr/>
-        <p:nvPr/>
-      </p:nvGrpSpPr>
-      <p:grpSpPr>
-        <a:xfrm>
-          <a:off x="0" y="0"/>
-          <a:ext cx="0" cy="0"/>
-          <a:chOff x="0" y="0"/>
-          <a:chExt cx="0" cy="0"/>
-        </a:xfrm>
-      </p:grpSpPr>
-      <p:sp>
-        <p:nvSpPr>
-          <p:cNvPr id="2" name="Title 1">
-            <a:extLst>
-              <a:ext uri="{FF2B5EF4-FFF2-40B4-BE49-F238E27FC236}">
-                <a16:creationId xmlns:a16="http://schemas.microsoft.com/office/drawing/2014/main" id="{847D31A7-3924-5349-BF57-AE869D2855DF}"/>
-              </a:ext>
-            </a:extLst>
-          </p:cNvPr>
-          <p:cNvSpPr>
-            <a:spLocks noGrp="1"/>
-          </p:cNvSpPr>
-          <p:nvPr>
-            <p:ph type="title"/>
-          </p:nvPr>
-        </p:nvSpPr>
-        <p:spPr/>
-        <p:txBody>
-          <a:bodyPr/>
-          <a:lstStyle/>
-          <a:p>
-            <a:r>
-              <a:rPr lang="de-DE" dirty="0"/>
-              <a:t>How to </a:t>
-            </a:r>
-            <a:r>
-              <a:rPr lang="de-DE" dirty="0" err="1"/>
-              <a:t>flash</a:t>
-            </a:r>
-            <a:r>
-              <a:rPr lang="de-DE" dirty="0"/>
-              <a:t> an MCU </a:t>
-            </a:r>
-            <a:r>
-              <a:rPr lang="de-DE" dirty="0" err="1"/>
-              <a:t>from</a:t>
-            </a:r>
-            <a:r>
-              <a:rPr lang="de-DE" dirty="0"/>
-              <a:t> a Browser?</a:t>
-            </a:r>
-          </a:p>
-        </p:txBody>
-      </p:sp>
-      <p:sp>
-        <p:nvSpPr>
-          <p:cNvPr id="3" name="Text Placeholder 2">
-            <a:extLst>
-              <a:ext uri="{FF2B5EF4-FFF2-40B4-BE49-F238E27FC236}">
-                <a16:creationId xmlns:a16="http://schemas.microsoft.com/office/drawing/2014/main" id="{FAC11549-D7DC-D1CD-8928-98B75863B9F7}"/>
-              </a:ext>
-            </a:extLst>
-          </p:cNvPr>
-          <p:cNvSpPr>
-            <a:spLocks noGrp="1"/>
-          </p:cNvSpPr>
-          <p:nvPr>
-            <p:ph type="body" sz="quarter" idx="10"/>
-          </p:nvPr>
-        </p:nvSpPr>
-        <p:spPr/>
-        <p:txBody>
-          <a:bodyPr/>
-          <a:lstStyle/>
-          <a:p>
-            <a:endParaRPr lang="de-DE"/>
-          </a:p>
-        </p:txBody>
-      </p:sp>
-    </p:spTree>
-    <p:extLst>
-      <p:ext uri="{BB962C8B-B14F-4D97-AF65-F5344CB8AC3E}">
-        <p14:creationId xmlns:p14="http://schemas.microsoft.com/office/powerpoint/2010/main" val="2108051298"/>
-      </p:ext>
-    </p:extLst>
-  </p:cSld>
-  <p:clrMapOvr>
-    <a:masterClrMapping/>
-  </p:clrMapOvr>
-</p:sld>
-</file>
-
-<file path=ppt/slides/slide7.xml><?xml version="1.0" encoding="utf-8"?>
+<file path=ppt/slides/slide4.xml><?xml version="1.0" encoding="utf-8"?>
 <p:sld xmlns:a="http://schemas.openxmlformats.org/drawingml/2006/main" xmlns:r="http://schemas.openxmlformats.org/officeDocument/2006/relationships" xmlns:p="http://schemas.openxmlformats.org/presentationml/2006/main">
   <p:cSld>
     <p:spTree>
@@ -21338,7 +19418,15 @@
             </a:r>
             <a:r>
               <a:rPr lang="de-DE" dirty="0"/>
-              <a:t> a Browser?</a:t>
+              <a:t> a </a:t>
+            </a:r>
+            <a:r>
+              <a:rPr lang="de-DE" dirty="0" err="1"/>
+              <a:t>browser</a:t>
+            </a:r>
+            <a:r>
+              <a:rPr lang="de-DE" dirty="0"/>
+              <a:t>?</a:t>
             </a:r>
           </a:p>
         </p:txBody>
@@ -21501,7 +19589,7 @@
             </a:pPr>
             <a:r>
               <a:rPr lang="de-DE" dirty="0" err="1"/>
-              <a:t>flashing</a:t>
+              <a:t>accessing</a:t>
             </a:r>
             <a:r>
               <a:rPr lang="de-DE" dirty="0"/>
@@ -21517,7 +19605,22 @@
             </a:r>
             <a:r>
               <a:rPr lang="de-DE" dirty="0" err="1"/>
-              <a:t>with</a:t>
+              <a:t>is</a:t>
+            </a:r>
+            <a:r>
+              <a:rPr lang="de-DE" dirty="0"/>
+              <a:t> possible, but...</a:t>
+            </a:r>
+          </a:p>
+          <a:p>
+            <a:pPr marL="576263" lvl="2" indent="-342900"/>
+            <a:r>
+              <a:rPr lang="de-DE" dirty="0"/>
+              <a:t>still </a:t>
+            </a:r>
+            <a:r>
+              <a:rPr lang="de-DE" dirty="0" err="1"/>
+              <a:t>requires</a:t>
             </a:r>
             <a:r>
               <a:rPr lang="de-DE" dirty="0"/>
@@ -21525,19 +19628,7 @@
             </a:r>
             <a:r>
               <a:rPr lang="de-DE" dirty="0" err="1"/>
-              <a:t>WebSerial</a:t>
-            </a:r>
-            <a:endParaRPr lang="de-DE" dirty="0"/>
-          </a:p>
-          <a:p>
-            <a:pPr marL="576263" lvl="2" indent="-342900"/>
-            <a:r>
-              <a:rPr lang="de-DE" dirty="0"/>
-              <a:t>still </a:t>
-            </a:r>
-            <a:r>
-              <a:rPr lang="de-DE" dirty="0" err="1"/>
-              <a:t>requires</a:t>
+              <a:t>flasher</a:t>
             </a:r>
             <a:r>
               <a:rPr lang="de-DE" dirty="0"/>
@@ -21545,14 +19636,6 @@
             </a:r>
             <a:r>
               <a:rPr lang="de-DE" dirty="0" err="1"/>
-              <a:t>flasher</a:t>
-            </a:r>
-            <a:r>
-              <a:rPr lang="de-DE" dirty="0"/>
-              <a:t> </a:t>
-            </a:r>
-            <a:r>
-              <a:rPr lang="de-DE" dirty="0" err="1"/>
               <a:t>logic</a:t>
             </a:r>
             <a:r>
@@ -21561,7 +19644,7 @@
             </a:r>
             <a:r>
               <a:rPr lang="de-DE" dirty="0" err="1"/>
-              <a:t>js</a:t>
+              <a:t>javascript</a:t>
             </a:r>
             <a:endParaRPr lang="de-DE" dirty="0"/>
           </a:p>
@@ -21634,124 +19717,7 @@
 </p:sld>
 </file>
 
-<file path=ppt/slides/slide8.xml><?xml version="1.0" encoding="utf-8"?>
-<p:sld xmlns:a="http://schemas.openxmlformats.org/drawingml/2006/main" xmlns:r="http://schemas.openxmlformats.org/officeDocument/2006/relationships" xmlns:p="http://schemas.openxmlformats.org/presentationml/2006/main">
-  <p:cSld>
-    <p:spTree>
-      <p:nvGrpSpPr>
-        <p:cNvPr id="1" name="">
-          <a:extLst>
-            <a:ext uri="{FF2B5EF4-FFF2-40B4-BE49-F238E27FC236}">
-              <a16:creationId xmlns:a16="http://schemas.microsoft.com/office/drawing/2014/main" id="{446FA887-101E-1903-8C8E-185075E8D6CD}"/>
-            </a:ext>
-          </a:extLst>
-        </p:cNvPr>
-        <p:cNvGrpSpPr/>
-        <p:nvPr/>
-      </p:nvGrpSpPr>
-      <p:grpSpPr>
-        <a:xfrm>
-          <a:off x="0" y="0"/>
-          <a:ext cx="0" cy="0"/>
-          <a:chOff x="0" y="0"/>
-          <a:chExt cx="0" cy="0"/>
-        </a:xfrm>
-      </p:grpSpPr>
-      <p:sp>
-        <p:nvSpPr>
-          <p:cNvPr id="2" name="Title 1">
-            <a:extLst>
-              <a:ext uri="{FF2B5EF4-FFF2-40B4-BE49-F238E27FC236}">
-                <a16:creationId xmlns:a16="http://schemas.microsoft.com/office/drawing/2014/main" id="{492C61BD-19AD-97E7-186C-553E1B401972}"/>
-              </a:ext>
-            </a:extLst>
-          </p:cNvPr>
-          <p:cNvSpPr>
-            <a:spLocks noGrp="1"/>
-          </p:cNvSpPr>
-          <p:nvPr>
-            <p:ph type="title"/>
-          </p:nvPr>
-        </p:nvSpPr>
-        <p:spPr/>
-        <p:txBody>
-          <a:bodyPr/>
-          <a:lstStyle/>
-          <a:p>
-            <a:r>
-              <a:rPr lang="de-DE" dirty="0" err="1"/>
-              <a:t>What</a:t>
-            </a:r>
-            <a:r>
-              <a:rPr lang="de-DE" dirty="0"/>
-              <a:t> </a:t>
-            </a:r>
-            <a:r>
-              <a:rPr lang="de-DE" dirty="0" err="1"/>
-              <a:t>about</a:t>
-            </a:r>
-            <a:r>
-              <a:rPr lang="de-DE" dirty="0"/>
-              <a:t> web </a:t>
-            </a:r>
-            <a:r>
-              <a:rPr lang="de-DE" dirty="0" err="1"/>
-              <a:t>hosted</a:t>
-            </a:r>
-            <a:r>
-              <a:rPr lang="de-DE" dirty="0"/>
-              <a:t> code </a:t>
-            </a:r>
-            <a:r>
-              <a:rPr lang="de-DE" dirty="0" err="1"/>
-              <a:t>editors</a:t>
-            </a:r>
-            <a:r>
-              <a:rPr lang="de-DE" dirty="0"/>
-              <a:t>?</a:t>
-            </a:r>
-          </a:p>
-        </p:txBody>
-      </p:sp>
-      <p:sp>
-        <p:nvSpPr>
-          <p:cNvPr id="3" name="Text Placeholder 2">
-            <a:extLst>
-              <a:ext uri="{FF2B5EF4-FFF2-40B4-BE49-F238E27FC236}">
-                <a16:creationId xmlns:a16="http://schemas.microsoft.com/office/drawing/2014/main" id="{2D96CF74-2B4C-E30F-2635-21CBA991959C}"/>
-              </a:ext>
-            </a:extLst>
-          </p:cNvPr>
-          <p:cNvSpPr>
-            <a:spLocks noGrp="1"/>
-          </p:cNvSpPr>
-          <p:nvPr>
-            <p:ph type="body" sz="quarter" idx="10"/>
-          </p:nvPr>
-        </p:nvSpPr>
-        <p:spPr/>
-        <p:txBody>
-          <a:bodyPr/>
-          <a:lstStyle/>
-          <a:p>
-            <a:endParaRPr lang="de-DE"/>
-          </a:p>
-        </p:txBody>
-      </p:sp>
-    </p:spTree>
-    <p:extLst>
-      <p:ext uri="{BB962C8B-B14F-4D97-AF65-F5344CB8AC3E}">
-        <p14:creationId xmlns:p14="http://schemas.microsoft.com/office/powerpoint/2010/main" val="3857740842"/>
-      </p:ext>
-    </p:extLst>
-  </p:cSld>
-  <p:clrMapOvr>
-    <a:masterClrMapping/>
-  </p:clrMapOvr>
-</p:sld>
-</file>
-
-<file path=ppt/slides/slide9.xml><?xml version="1.0" encoding="utf-8"?>
+<file path=ppt/slides/slide5.xml><?xml version="1.0" encoding="utf-8"?>
 <p:sld xmlns:a="http://schemas.openxmlformats.org/drawingml/2006/main" xmlns:r="http://schemas.openxmlformats.org/officeDocument/2006/relationships" xmlns:p="http://schemas.openxmlformats.org/presentationml/2006/main">
   <p:cSld>
     <p:spTree>
@@ -21867,25 +19833,26 @@
           <a:p>
             <a:pPr marL="576263" lvl="2" indent="-342900"/>
             <a:r>
-              <a:rPr lang="de-DE" dirty="0"/>
-              <a:t>Monaco style </a:t>
-            </a:r>
-            <a:r>
-              <a:rPr lang="de-DE" dirty="0" err="1"/>
-              <a:t>editor</a:t>
-            </a:r>
-            <a:r>
-              <a:rPr lang="de-DE" dirty="0"/>
-              <a:t> (</a:t>
+              <a:rPr lang="de-DE" dirty="0" err="1"/>
+              <a:t>extension</a:t>
+            </a:r>
+            <a:r>
+              <a:rPr lang="de-DE" dirty="0"/>
+              <a:t> </a:t>
+            </a:r>
+            <a:r>
+              <a:rPr lang="de-DE" dirty="0" err="1"/>
+              <a:t>of</a:t>
+            </a:r>
+            <a:r>
+              <a:rPr lang="de-DE" dirty="0"/>
+              <a:t> </a:t>
             </a:r>
             <a:r>
               <a:rPr lang="de-DE" dirty="0" err="1"/>
               <a:t>VSCode</a:t>
             </a:r>
-            <a:r>
-              <a:rPr lang="de-DE" dirty="0"/>
-              <a:t>)</a:t>
-            </a:r>
+            <a:endParaRPr lang="de-DE" dirty="0"/>
           </a:p>
           <a:p>
             <a:pPr marL="576263" lvl="2" indent="-342900"/>
@@ -22126,6 +20093,391 @@
     <p:extLst>
       <p:ext uri="{BB962C8B-B14F-4D97-AF65-F5344CB8AC3E}">
         <p14:creationId xmlns:p14="http://schemas.microsoft.com/office/powerpoint/2010/main" val="997667360"/>
+      </p:ext>
+    </p:extLst>
+  </p:cSld>
+  <p:clrMapOvr>
+    <a:masterClrMapping/>
+  </p:clrMapOvr>
+</p:sld>
+</file>
+
+<file path=ppt/slides/slide6.xml><?xml version="1.0" encoding="utf-8"?>
+<p:sld xmlns:a="http://schemas.openxmlformats.org/drawingml/2006/main" xmlns:r="http://schemas.openxmlformats.org/officeDocument/2006/relationships" xmlns:p="http://schemas.openxmlformats.org/presentationml/2006/main">
+  <p:cSld>
+    <p:spTree>
+      <p:nvGrpSpPr>
+        <p:cNvPr id="1" name="">
+          <a:extLst>
+            <a:ext uri="{FF2B5EF4-FFF2-40B4-BE49-F238E27FC236}">
+              <a16:creationId xmlns:a16="http://schemas.microsoft.com/office/drawing/2014/main" id="{02DC0723-B94C-6FF0-D1EC-680ED384287B}"/>
+            </a:ext>
+          </a:extLst>
+        </p:cNvPr>
+        <p:cNvGrpSpPr/>
+        <p:nvPr/>
+      </p:nvGrpSpPr>
+      <p:grpSpPr>
+        <a:xfrm>
+          <a:off x="0" y="0"/>
+          <a:ext cx="0" cy="0"/>
+          <a:chOff x="0" y="0"/>
+          <a:chExt cx="0" cy="0"/>
+        </a:xfrm>
+      </p:grpSpPr>
+      <p:sp>
+        <p:nvSpPr>
+          <p:cNvPr id="2" name="Title 1">
+            <a:extLst>
+              <a:ext uri="{FF2B5EF4-FFF2-40B4-BE49-F238E27FC236}">
+                <a16:creationId xmlns:a16="http://schemas.microsoft.com/office/drawing/2014/main" id="{5C67F865-E5C7-CCF0-EBC6-ED2821EA6D09}"/>
+              </a:ext>
+            </a:extLst>
+          </p:cNvPr>
+          <p:cNvSpPr>
+            <a:spLocks noGrp="1"/>
+          </p:cNvSpPr>
+          <p:nvPr>
+            <p:ph type="title"/>
+          </p:nvPr>
+        </p:nvSpPr>
+        <p:spPr/>
+        <p:txBody>
+          <a:bodyPr/>
+          <a:lstStyle/>
+          <a:p>
+            <a:r>
+              <a:rPr lang="de-DE" dirty="0"/>
+              <a:t>Backend</a:t>
+            </a:r>
+          </a:p>
+        </p:txBody>
+      </p:sp>
+      <p:sp>
+        <p:nvSpPr>
+          <p:cNvPr id="3" name="Text Placeholder 2">
+            <a:extLst>
+              <a:ext uri="{FF2B5EF4-FFF2-40B4-BE49-F238E27FC236}">
+                <a16:creationId xmlns:a16="http://schemas.microsoft.com/office/drawing/2014/main" id="{C04085B9-1FC8-A1D9-2028-802E0DB2C7FC}"/>
+              </a:ext>
+            </a:extLst>
+          </p:cNvPr>
+          <p:cNvSpPr>
+            <a:spLocks noGrp="1"/>
+          </p:cNvSpPr>
+          <p:nvPr>
+            <p:ph type="body" sz="quarter" idx="10"/>
+          </p:nvPr>
+        </p:nvSpPr>
+        <p:spPr/>
+        <p:txBody>
+          <a:bodyPr/>
+          <a:lstStyle/>
+          <a:p>
+            <a:endParaRPr lang="de-DE"/>
+          </a:p>
+        </p:txBody>
+      </p:sp>
+    </p:spTree>
+    <p:extLst>
+      <p:ext uri="{BB962C8B-B14F-4D97-AF65-F5344CB8AC3E}">
+        <p14:creationId xmlns:p14="http://schemas.microsoft.com/office/powerpoint/2010/main" val="128564279"/>
+      </p:ext>
+    </p:extLst>
+  </p:cSld>
+  <p:clrMapOvr>
+    <a:masterClrMapping/>
+  </p:clrMapOvr>
+</p:sld>
+</file>
+
+<file path=ppt/slides/slide7.xml><?xml version="1.0" encoding="utf-8"?>
+<p:sld xmlns:a="http://schemas.openxmlformats.org/drawingml/2006/main" xmlns:r="http://schemas.openxmlformats.org/officeDocument/2006/relationships" xmlns:p="http://schemas.openxmlformats.org/presentationml/2006/main">
+  <p:cSld>
+    <p:bg>
+      <p:bgPr>
+        <a:solidFill>
+          <a:srgbClr val="1E1E1E"/>
+        </a:solidFill>
+        <a:effectLst/>
+      </p:bgPr>
+    </p:bg>
+    <p:spTree>
+      <p:nvGrpSpPr>
+        <p:cNvPr id="1" name=""/>
+        <p:cNvGrpSpPr/>
+        <p:nvPr/>
+      </p:nvGrpSpPr>
+      <p:grpSpPr>
+        <a:xfrm>
+          <a:off x="0" y="0"/>
+          <a:ext cx="0" cy="0"/>
+          <a:chOff x="0" y="0"/>
+          <a:chExt cx="0" cy="0"/>
+        </a:xfrm>
+      </p:grpSpPr>
+      <p:sp>
+        <p:nvSpPr>
+          <p:cNvPr id="5" name="Text Placeholder 4">
+            <a:extLst>
+              <a:ext uri="{FF2B5EF4-FFF2-40B4-BE49-F238E27FC236}">
+                <a16:creationId xmlns:a16="http://schemas.microsoft.com/office/drawing/2014/main" id="{E7BA7F4C-F7C8-AA09-51B9-5D54DCB9ADBE}"/>
+              </a:ext>
+            </a:extLst>
+          </p:cNvPr>
+          <p:cNvSpPr>
+            <a:spLocks noGrp="1"/>
+          </p:cNvSpPr>
+          <p:nvPr>
+            <p:ph type="body" sz="quarter" idx="12"/>
+          </p:nvPr>
+        </p:nvSpPr>
+        <p:spPr/>
+        <p:txBody>
+          <a:bodyPr/>
+          <a:lstStyle/>
+          <a:p>
+            <a:endParaRPr lang="de-DE"/>
+          </a:p>
+        </p:txBody>
+      </p:sp>
+      <p:pic>
+        <p:nvPicPr>
+          <p:cNvPr id="15" name="Picture Placeholder 14">
+            <a:extLst>
+              <a:ext uri="{FF2B5EF4-FFF2-40B4-BE49-F238E27FC236}">
+                <a16:creationId xmlns:a16="http://schemas.microsoft.com/office/drawing/2014/main" id="{ECBE123B-3CCE-E13C-BB83-E41E63771D97}"/>
+              </a:ext>
+            </a:extLst>
+          </p:cNvPr>
+          <p:cNvPicPr>
+            <a:picLocks noGrp="1" noChangeAspect="1"/>
+          </p:cNvPicPr>
+          <p:nvPr>
+            <p:ph type="pic" sz="quarter" idx="10"/>
+          </p:nvPr>
+        </p:nvPicPr>
+        <p:blipFill>
+          <a:blip r:embed="rId3">
+            <a:extLst>
+              <a:ext uri="{28A0092B-C50C-407E-A947-70E740481C1C}">
+                <a14:useLocalDpi xmlns:a14="http://schemas.microsoft.com/office/drawing/2010/main" val="0"/>
+              </a:ext>
+            </a:extLst>
+          </a:blip>
+          <a:srcRect/>
+          <a:stretch>
+            <a:fillRect/>
+          </a:stretch>
+        </p:blipFill>
+        <p:spPr>
+          <a:prstGeom prst="rect">
+            <a:avLst/>
+          </a:prstGeom>
+          <a:solidFill>
+            <a:prstClr val="white">
+              <a:lumMod val="95000"/>
+            </a:prstClr>
+          </a:solidFill>
+        </p:spPr>
+      </p:pic>
+    </p:spTree>
+    <p:extLst>
+      <p:ext uri="{BB962C8B-B14F-4D97-AF65-F5344CB8AC3E}">
+        <p14:creationId xmlns:p14="http://schemas.microsoft.com/office/powerpoint/2010/main" val="2237056189"/>
+      </p:ext>
+    </p:extLst>
+  </p:cSld>
+  <p:clrMapOvr>
+    <a:masterClrMapping/>
+  </p:clrMapOvr>
+</p:sld>
+</file>
+
+<file path=ppt/slides/slide8.xml><?xml version="1.0" encoding="utf-8"?>
+<p:sld xmlns:a="http://schemas.openxmlformats.org/drawingml/2006/main" xmlns:r="http://schemas.openxmlformats.org/officeDocument/2006/relationships" xmlns:p="http://schemas.openxmlformats.org/presentationml/2006/main">
+  <p:cSld>
+    <p:spTree>
+      <p:nvGrpSpPr>
+        <p:cNvPr id="1" name="">
+          <a:extLst>
+            <a:ext uri="{FF2B5EF4-FFF2-40B4-BE49-F238E27FC236}">
+              <a16:creationId xmlns:a16="http://schemas.microsoft.com/office/drawing/2014/main" id="{0C9C90E2-488C-BA8F-94CC-2952B2C8879E}"/>
+            </a:ext>
+          </a:extLst>
+        </p:cNvPr>
+        <p:cNvGrpSpPr/>
+        <p:nvPr/>
+      </p:nvGrpSpPr>
+      <p:grpSpPr>
+        <a:xfrm>
+          <a:off x="0" y="0"/>
+          <a:ext cx="0" cy="0"/>
+          <a:chOff x="0" y="0"/>
+          <a:chExt cx="0" cy="0"/>
+        </a:xfrm>
+      </p:grpSpPr>
+      <p:sp>
+        <p:nvSpPr>
+          <p:cNvPr id="2" name="Title 1">
+            <a:extLst>
+              <a:ext uri="{FF2B5EF4-FFF2-40B4-BE49-F238E27FC236}">
+                <a16:creationId xmlns:a16="http://schemas.microsoft.com/office/drawing/2014/main" id="{9BD7C843-0D8B-61F7-B028-BC4D64B1C1CA}"/>
+              </a:ext>
+            </a:extLst>
+          </p:cNvPr>
+          <p:cNvSpPr>
+            <a:spLocks noGrp="1"/>
+          </p:cNvSpPr>
+          <p:nvPr>
+            <p:ph type="title"/>
+          </p:nvPr>
+        </p:nvSpPr>
+        <p:spPr/>
+        <p:txBody>
+          <a:bodyPr/>
+          <a:lstStyle/>
+          <a:p>
+            <a:r>
+              <a:rPr lang="de-DE" dirty="0"/>
+              <a:t>Architecture</a:t>
+            </a:r>
+          </a:p>
+        </p:txBody>
+      </p:sp>
+      <p:sp>
+        <p:nvSpPr>
+          <p:cNvPr id="3" name="Text Placeholder 2">
+            <a:extLst>
+              <a:ext uri="{FF2B5EF4-FFF2-40B4-BE49-F238E27FC236}">
+                <a16:creationId xmlns:a16="http://schemas.microsoft.com/office/drawing/2014/main" id="{E3EA062A-C806-F1F4-5C98-E366AA036A94}"/>
+              </a:ext>
+            </a:extLst>
+          </p:cNvPr>
+          <p:cNvSpPr>
+            <a:spLocks noGrp="1"/>
+          </p:cNvSpPr>
+          <p:nvPr>
+            <p:ph type="body" sz="quarter" idx="10"/>
+          </p:nvPr>
+        </p:nvSpPr>
+        <p:spPr/>
+        <p:txBody>
+          <a:bodyPr/>
+          <a:lstStyle/>
+          <a:p>
+            <a:endParaRPr lang="de-DE"/>
+          </a:p>
+        </p:txBody>
+      </p:sp>
+    </p:spTree>
+    <p:extLst>
+      <p:ext uri="{BB962C8B-B14F-4D97-AF65-F5344CB8AC3E}">
+        <p14:creationId xmlns:p14="http://schemas.microsoft.com/office/powerpoint/2010/main" val="2130650057"/>
+      </p:ext>
+    </p:extLst>
+  </p:cSld>
+  <p:clrMapOvr>
+    <a:masterClrMapping/>
+  </p:clrMapOvr>
+</p:sld>
+</file>
+
+<file path=ppt/slides/slide9.xml><?xml version="1.0" encoding="utf-8"?>
+<p:sld xmlns:a="http://schemas.openxmlformats.org/drawingml/2006/main" xmlns:r="http://schemas.openxmlformats.org/officeDocument/2006/relationships" xmlns:p="http://schemas.openxmlformats.org/presentationml/2006/main">
+  <p:cSld>
+    <p:spTree>
+      <p:nvGrpSpPr>
+        <p:cNvPr id="1" name="">
+          <a:extLst>
+            <a:ext uri="{FF2B5EF4-FFF2-40B4-BE49-F238E27FC236}">
+              <a16:creationId xmlns:a16="http://schemas.microsoft.com/office/drawing/2014/main" id="{EE59038B-C91D-D4AF-DD0F-B3F7C00F44EE}"/>
+            </a:ext>
+          </a:extLst>
+        </p:cNvPr>
+        <p:cNvGrpSpPr/>
+        <p:nvPr/>
+      </p:nvGrpSpPr>
+      <p:grpSpPr>
+        <a:xfrm>
+          <a:off x="0" y="0"/>
+          <a:ext cx="0" cy="0"/>
+          <a:chOff x="0" y="0"/>
+          <a:chExt cx="0" cy="0"/>
+        </a:xfrm>
+      </p:grpSpPr>
+      <p:sp>
+        <p:nvSpPr>
+          <p:cNvPr id="3" name="Text Placeholder 2">
+            <a:extLst>
+              <a:ext uri="{FF2B5EF4-FFF2-40B4-BE49-F238E27FC236}">
+                <a16:creationId xmlns:a16="http://schemas.microsoft.com/office/drawing/2014/main" id="{C0D10C92-0301-EC89-9896-48567ACC9C9C}"/>
+              </a:ext>
+            </a:extLst>
+          </p:cNvPr>
+          <p:cNvSpPr>
+            <a:spLocks noGrp="1"/>
+          </p:cNvSpPr>
+          <p:nvPr>
+            <p:ph type="body" sz="quarter" idx="12"/>
+          </p:nvPr>
+        </p:nvSpPr>
+        <p:spPr/>
+        <p:txBody>
+          <a:bodyPr/>
+          <a:lstStyle/>
+          <a:p>
+            <a:r>
+              <a:rPr lang="de-DE" dirty="0"/>
+              <a:t>RIOT Web Editor Architecture</a:t>
+            </a:r>
+          </a:p>
+        </p:txBody>
+      </p:sp>
+      <p:pic>
+        <p:nvPicPr>
+          <p:cNvPr id="7" name="Picture Placeholder 6">
+            <a:extLst>
+              <a:ext uri="{FF2B5EF4-FFF2-40B4-BE49-F238E27FC236}">
+                <a16:creationId xmlns:a16="http://schemas.microsoft.com/office/drawing/2014/main" id="{3B0E60B6-0DA2-C5ED-6856-03C63573C21A}"/>
+              </a:ext>
+            </a:extLst>
+          </p:cNvPr>
+          <p:cNvPicPr>
+            <a:picLocks noGrp="1" noChangeAspect="1"/>
+          </p:cNvPicPr>
+          <p:nvPr>
+            <p:ph type="pic" sz="quarter" idx="10"/>
+          </p:nvPr>
+        </p:nvPicPr>
+        <p:blipFill rotWithShape="1">
+          <a:blip r:embed="rId3">
+            <a:extLst>
+              <a:ext uri="{28A0092B-C50C-407E-A947-70E740481C1C}">
+                <a14:useLocalDpi xmlns:a14="http://schemas.microsoft.com/office/drawing/2010/main" val="0"/>
+              </a:ext>
+            </a:extLst>
+          </a:blip>
+          <a:srcRect t="-17085" b="-17085"/>
+          <a:stretch>
+            <a:fillRect/>
+          </a:stretch>
+        </p:blipFill>
+        <p:spPr>
+          <a:prstGeom prst="rect">
+            <a:avLst/>
+          </a:prstGeom>
+          <a:solidFill>
+            <a:prstClr val="white">
+              <a:lumMod val="95000"/>
+            </a:prstClr>
+          </a:solidFill>
+        </p:spPr>
+      </p:pic>
+    </p:spTree>
+    <p:extLst>
+      <p:ext uri="{BB962C8B-B14F-4D97-AF65-F5344CB8AC3E}">
+        <p14:creationId xmlns:p14="http://schemas.microsoft.com/office/powerpoint/2010/main" val="579415759"/>
       </p:ext>
     </p:extLst>
   </p:cSld>
